--- a/Smart_Weather_Station_Presentation.pptx
+++ b/Smart_Weather_Station_Presentation.pptx
@@ -15,7 +15,6 @@
     <p:sldId id="263" r:id="rId14"/>
     <p:sldId id="264" r:id="rId15"/>
     <p:sldId id="265" r:id="rId16"/>
-    <p:sldId id="266" r:id="rId17"/>
   </p:sldIdLst>
   <p:sldSz cx="12191695" cy="6858000" type="screen4x3"/>
   <p:notesSz cx="6858000" cy="9144000"/>
@@ -3100,69 +3099,20 @@
       <p:grpSpPr/>
       <p:sp>
         <p:nvSpPr>
-          <p:cNvPr id="2" name="TextBox 1"/>
-          <p:cNvSpPr txBox="1"/>
-          <p:nvPr/>
-        </p:nvSpPr>
-        <p:spPr>
-          <a:xfrm>
-            <a:off x="914400" y="731520"/>
-            <a:ext cx="10362895" cy="1371600"/>
-          </a:xfrm>
-          <a:prstGeom prst="rect">
-            <a:avLst/>
-          </a:prstGeom>
-          <a:noFill/>
-        </p:spPr>
-        <p:txBody>
-          <a:bodyPr wrap="square">
-            <a:spAutoFit/>
-          </a:bodyPr>
-          <a:lstStyle/>
-          <a:p>
-            <a:pPr algn="ctr">
-              <a:defRPr sz="2400" b="1">
-                <a:solidFill>
-                  <a:srgbClr val="102C57"/>
-                </a:solidFill>
-                <a:latin typeface="Arial"/>
-              </a:defRPr>
-            </a:pPr>
-            <a:r>
-              <a:t>Galgotias College of Engineering &amp; Technology, Greater Noida</a:t>
-            </a:r>
-          </a:p>
-          <a:p>
-            <a:pPr algn="ctr">
-              <a:defRPr sz="1500" b="1">
-                <a:solidFill>
-                  <a:srgbClr val="8C1D22"/>
-                </a:solidFill>
-                <a:latin typeface="Arial"/>
-              </a:defRPr>
-            </a:pPr>
-            <a:r>
-              <a:t>DEPARTMENT OF ELECTRONICS AND COMMUNICATION ENGINEERING</a:t>
-            </a:r>
-          </a:p>
-        </p:txBody>
-      </p:sp>
-      <p:sp>
-        <p:nvSpPr>
-          <p:cNvPr id="3" name="Rectangle 2"/>
+          <p:cNvPr id="2" name="Rectangle 1"/>
           <p:cNvSpPr/>
           <p:nvPr/>
         </p:nvSpPr>
         <p:spPr>
           <a:xfrm>
-            <a:off x="3200400" y="2011680"/>
-            <a:ext cx="5790895" cy="36576"/>
+            <a:off x="0" y="0"/>
+            <a:ext cx="12191695" cy="6858000"/>
           </a:xfrm>
           <a:prstGeom prst="rect">
             <a:avLst/>
           </a:prstGeom>
           <a:solidFill>
-            <a:srgbClr val="E87652"/>
+            <a:srgbClr val="0F172A"/>
           </a:solidFill>
           <a:ln>
             <a:noFill/>
@@ -3192,14 +3142,114 @@
       </p:sp>
       <p:sp>
         <p:nvSpPr>
-          <p:cNvPr id="4" name="TextBox 3"/>
+          <p:cNvPr id="3" name="Rounded Rectangle 2"/>
+          <p:cNvSpPr/>
+          <p:nvPr/>
+        </p:nvSpPr>
+        <p:spPr>
+          <a:xfrm>
+            <a:off x="1097280" y="731520"/>
+            <a:ext cx="9997135" cy="5394960"/>
+          </a:xfrm>
+          <a:prstGeom prst="roundRect">
+            <a:avLst/>
+          </a:prstGeom>
+          <a:solidFill>
+            <a:srgbClr val="18223A"/>
+          </a:solidFill>
+          <a:ln w="19050">
+            <a:solidFill>
+              <a:srgbClr val="2D3E62"/>
+            </a:solidFill>
+          </a:ln>
+        </p:spPr>
+        <p:style>
+          <a:lnRef idx="1">
+            <a:schemeClr val="accent1"/>
+          </a:lnRef>
+          <a:fillRef idx="3">
+            <a:schemeClr val="accent1"/>
+          </a:fillRef>
+          <a:effectRef idx="2">
+            <a:schemeClr val="accent1"/>
+          </a:effectRef>
+          <a:fontRef idx="minor">
+            <a:schemeClr val="lt1"/>
+          </a:fontRef>
+        </p:style>
+        <p:txBody>
+          <a:bodyPr rtlCol="0" anchor="ctr"/>
+          <a:lstStyle/>
+          <a:p>
+            <a:pPr algn="ctr"/>
+          </a:p>
+        </p:txBody>
+      </p:sp>
+      <p:sp>
+        <p:nvSpPr>
+          <p:cNvPr id="4" name="Rounded Rectangle 3"/>
+          <p:cNvSpPr/>
+          <p:nvPr/>
+        </p:nvSpPr>
+        <p:spPr>
+          <a:xfrm>
+            <a:off x="3931920" y="1188720"/>
+            <a:ext cx="4297680" cy="384048"/>
+          </a:xfrm>
+          <a:prstGeom prst="roundRect">
+            <a:avLst/>
+          </a:prstGeom>
+          <a:solidFill>
+            <a:srgbClr val="134E4A"/>
+          </a:solidFill>
+          <a:ln w="12700">
+            <a:solidFill>
+              <a:srgbClr val="14B8A6"/>
+            </a:solidFill>
+          </a:ln>
+        </p:spPr>
+        <p:style>
+          <a:lnRef idx="1">
+            <a:schemeClr val="accent1"/>
+          </a:lnRef>
+          <a:fillRef idx="3">
+            <a:schemeClr val="accent1"/>
+          </a:fillRef>
+          <a:effectRef idx="2">
+            <a:schemeClr val="accent1"/>
+          </a:effectRef>
+          <a:fontRef idx="minor">
+            <a:schemeClr val="lt1"/>
+          </a:fontRef>
+        </p:style>
+        <p:txBody>
+          <a:bodyPr rtlCol="0" anchor="ctr"/>
+          <a:lstStyle/>
+          <a:p>
+            <a:pPr algn="ctr">
+              <a:defRPr sz="1000" b="1">
+                <a:solidFill>
+                  <a:srgbClr val="14B8A6"/>
+                </a:solidFill>
+                <a:latin typeface="Segoe UI"/>
+              </a:defRPr>
+            </a:pPr>
+            <a:r>
+              <a:t>⚡ ESP32  •  DHT22  •  THINGSPEAK  •  VERCEL</a:t>
+            </a:r>
+          </a:p>
+        </p:txBody>
+      </p:sp>
+      <p:sp>
+        <p:nvSpPr>
+          <p:cNvPr id="5" name="TextBox 4"/>
           <p:cNvSpPr txBox="1"/>
           <p:nvPr/>
         </p:nvSpPr>
         <p:spPr>
           <a:xfrm>
-            <a:off x="1097280" y="2468880"/>
-            <a:ext cx="9997135" cy="1645920"/>
+            <a:off x="1645920" y="1783080"/>
+            <a:ext cx="8899855" cy="1371600"/>
           </a:xfrm>
           <a:prstGeom prst="rect">
             <a:avLst/>
@@ -3213,42 +3263,45 @@
           <a:lstStyle/>
           <a:p>
             <a:pPr algn="ctr">
-              <a:defRPr sz="3600" b="1">
-                <a:solidFill>
-                  <a:srgbClr val="102C57"/>
-                </a:solidFill>
-                <a:latin typeface="Arial"/>
-              </a:defRPr>
-            </a:pPr>
-            <a:r>
-              <a:t>SMART IOT WEATHER STATION</a:t>
+              <a:defRPr sz="4400" b="1">
+                <a:solidFill>
+                  <a:srgbClr val="F8FAFC"/>
+                </a:solidFill>
+                <a:latin typeface="Segoe UI"/>
+              </a:defRPr>
+            </a:pPr>
+            <a:r>
+              <a:t>Smart Weather Station</a:t>
             </a:r>
           </a:p>
           <a:p>
             <a:pPr algn="ctr">
+              <a:spcBef>
+                <a:spcPts val="800"/>
+              </a:spcBef>
               <a:defRPr sz="1800">
                 <a:solidFill>
-                  <a:srgbClr val="168B83"/>
-                </a:solidFill>
-                <a:latin typeface="Arial"/>
-              </a:defRPr>
-            </a:pPr>
-            <a:r>
-              <a:t>Real-Time Microclimate Monitoring with ESP32, DHT22, SSD1306 &amp; Cloud Analytics</a:t>
-            </a:r>
-          </a:p>
-        </p:txBody>
-      </p:sp>
-      <p:sp>
-        <p:nvSpPr>
-          <p:cNvPr id="5" name="TextBox 4"/>
+                  <a:srgbClr val="38BDF8"/>
+                </a:solidFill>
+                <a:latin typeface="Segoe UI"/>
+              </a:defRPr>
+            </a:pPr>
+            <a:r>
+              <a:t>Autonomous Microclimate Telemetry &amp; Real-Time Cloud Analytics</a:t>
+            </a:r>
+          </a:p>
+        </p:txBody>
+      </p:sp>
+      <p:sp>
+        <p:nvSpPr>
+          <p:cNvPr id="6" name="TextBox 5"/>
           <p:cNvSpPr txBox="1"/>
           <p:nvPr/>
         </p:nvSpPr>
         <p:spPr>
           <a:xfrm>
-            <a:off x="1371600" y="4572000"/>
-            <a:ext cx="4114800" cy="1645920"/>
+            <a:off x="1645920" y="3291840"/>
+            <a:ext cx="8899855" cy="548640"/>
           </a:xfrm>
           <a:prstGeom prst="rect">
             <a:avLst/>
@@ -3261,117 +3314,183 @@
           </a:bodyPr>
           <a:lstStyle/>
           <a:p>
+            <a:pPr algn="ctr">
+              <a:defRPr sz="1100" b="1">
+                <a:solidFill>
+                  <a:srgbClr val="94A3B8"/>
+                </a:solidFill>
+                <a:latin typeface="Segoe UI"/>
+              </a:defRPr>
+            </a:pPr>
+            <a:r>
+              <a:t>DEPARTMENT OF ELECTRONICS AND COMMUNICATION ENGINEERING</a:t>
+            </a:r>
+            <a:br/>
+            <a:r>
+              <a:t>Galgotias College of Engineering &amp; Technology, Greater Noida</a:t>
+            </a:r>
+          </a:p>
+        </p:txBody>
+      </p:sp>
+      <p:sp>
+        <p:nvSpPr>
+          <p:cNvPr id="7" name="Rounded Rectangle 6"/>
+          <p:cNvSpPr/>
+          <p:nvPr/>
+        </p:nvSpPr>
+        <p:spPr>
+          <a:xfrm>
+            <a:off x="1828800" y="4114800"/>
+            <a:ext cx="3931920" cy="1554480"/>
+          </a:xfrm>
+          <a:prstGeom prst="roundRect">
+            <a:avLst/>
+          </a:prstGeom>
+          <a:solidFill>
+            <a:srgbClr val="0F172A"/>
+          </a:solidFill>
+          <a:ln w="12700">
+            <a:solidFill>
+              <a:srgbClr val="2D3E62"/>
+            </a:solidFill>
+          </a:ln>
+        </p:spPr>
+        <p:style>
+          <a:lnRef idx="1">
+            <a:schemeClr val="accent1"/>
+          </a:lnRef>
+          <a:fillRef idx="3">
+            <a:schemeClr val="accent1"/>
+          </a:fillRef>
+          <a:effectRef idx="2">
+            <a:schemeClr val="accent1"/>
+          </a:effectRef>
+          <a:fontRef idx="minor">
+            <a:schemeClr val="lt1"/>
+          </a:fontRef>
+        </p:style>
+        <p:txBody>
+          <a:bodyPr rtlCol="0" anchor="ctr" tIns="182880" lIns="274320"/>
+          <a:lstStyle/>
+          <a:p>
+            <a:pPr algn="ctr">
+              <a:defRPr sz="1000" b="1">
+                <a:solidFill>
+                  <a:srgbClr val="F97316"/>
+                </a:solidFill>
+                <a:latin typeface="Segoe UI"/>
+              </a:defRPr>
+            </a:pPr>
+            <a:r>
+              <a:t>PROJECT MENTOR</a:t>
+            </a:r>
+          </a:p>
+          <a:p>
             <a:pPr>
-              <a:defRPr sz="1600" b="1">
-                <a:solidFill>
-                  <a:srgbClr val="8C1D22"/>
-                </a:solidFill>
-                <a:latin typeface="Arial"/>
-              </a:defRPr>
-            </a:pPr>
-            <a:r>
-              <a:t>MENTOR:</a:t>
+              <a:spcBef>
+                <a:spcPts val="400"/>
+              </a:spcBef>
+              <a:defRPr sz="1400" b="1">
+                <a:solidFill>
+                  <a:srgbClr val="F8FAFC"/>
+                </a:solidFill>
+                <a:latin typeface="Segoe UI"/>
+              </a:defRPr>
+            </a:pPr>
+            <a:r>
+              <a:t>[Faculty Mentor Name]</a:t>
             </a:r>
           </a:p>
           <a:p>
             <a:pPr>
-              <a:defRPr sz="1500">
-                <a:solidFill>
-                  <a:srgbClr val="172B2C"/>
-                </a:solidFill>
-                <a:latin typeface="Arial"/>
-              </a:defRPr>
-            </a:pPr>
-            <a:r>
-              <a:t>[Faculty Mentor Name]</a:t>
+              <a:defRPr sz="1100">
+                <a:solidFill>
+                  <a:srgbClr val="94A3B8"/>
+                </a:solidFill>
+                <a:latin typeface="Segoe UI"/>
+              </a:defRPr>
+            </a:pPr>
+            <a:r>
+              <a:t>Assistant Professor, Dept of ECE</a:t>
+            </a:r>
+          </a:p>
+        </p:txBody>
+      </p:sp>
+      <p:sp>
+        <p:nvSpPr>
+          <p:cNvPr id="8" name="Rounded Rectangle 7"/>
+          <p:cNvSpPr/>
+          <p:nvPr/>
+        </p:nvSpPr>
+        <p:spPr>
+          <a:xfrm>
+            <a:off x="6400800" y="4114800"/>
+            <a:ext cx="3931920" cy="1554480"/>
+          </a:xfrm>
+          <a:prstGeom prst="roundRect">
+            <a:avLst/>
+          </a:prstGeom>
+          <a:solidFill>
+            <a:srgbClr val="0F172A"/>
+          </a:solidFill>
+          <a:ln w="12700">
+            <a:solidFill>
+              <a:srgbClr val="2D3E62"/>
+            </a:solidFill>
+          </a:ln>
+        </p:spPr>
+        <p:style>
+          <a:lnRef idx="1">
+            <a:schemeClr val="accent1"/>
+          </a:lnRef>
+          <a:fillRef idx="3">
+            <a:schemeClr val="accent1"/>
+          </a:fillRef>
+          <a:effectRef idx="2">
+            <a:schemeClr val="accent1"/>
+          </a:effectRef>
+          <a:fontRef idx="minor">
+            <a:schemeClr val="lt1"/>
+          </a:fontRef>
+        </p:style>
+        <p:txBody>
+          <a:bodyPr rtlCol="0" anchor="ctr" tIns="182880" lIns="274320"/>
+          <a:lstStyle/>
+          <a:p>
+            <a:pPr algn="ctr">
+              <a:defRPr sz="1000" b="1">
+                <a:solidFill>
+                  <a:srgbClr val="14B8A6"/>
+                </a:solidFill>
+                <a:latin typeface="Segoe UI"/>
+              </a:defRPr>
+            </a:pPr>
+            <a:r>
+              <a:t>PRESENTED BY</a:t>
             </a:r>
           </a:p>
           <a:p>
             <a:pPr>
-              <a:defRPr sz="1300">
-                <a:solidFill>
-                  <a:srgbClr val="646E73"/>
-                </a:solidFill>
-                <a:latin typeface="Arial"/>
-              </a:defRPr>
-            </a:pPr>
-            <a:r>
-              <a:t>Department of ECE, GCET</a:t>
-            </a:r>
-          </a:p>
-        </p:txBody>
-      </p:sp>
-      <p:sp>
-        <p:nvSpPr>
-          <p:cNvPr id="6" name="TextBox 5"/>
-          <p:cNvSpPr txBox="1"/>
-          <p:nvPr/>
-        </p:nvSpPr>
-        <p:spPr>
-          <a:xfrm>
-            <a:off x="6675120" y="4572000"/>
-            <a:ext cx="4389120" cy="1645920"/>
-          </a:xfrm>
-          <a:prstGeom prst="rect">
-            <a:avLst/>
-          </a:prstGeom>
-          <a:noFill/>
-        </p:spPr>
-        <p:txBody>
-          <a:bodyPr wrap="none">
-            <a:spAutoFit/>
-          </a:bodyPr>
-          <a:lstStyle/>
-          <a:p>
-            <a:pPr>
-              <a:defRPr sz="1600" b="1">
-                <a:solidFill>
-                  <a:srgbClr val="102C57"/>
-                </a:solidFill>
-                <a:latin typeface="Arial"/>
-              </a:defRPr>
-            </a:pPr>
-            <a:r>
-              <a:t>PRESENTED BY:</a:t>
-            </a:r>
-          </a:p>
-          <a:p>
-            <a:pPr>
-              <a:defRPr sz="1400">
-                <a:solidFill>
-                  <a:srgbClr val="172B2C"/>
-                </a:solidFill>
-                <a:latin typeface="Arial"/>
-              </a:defRPr>
-            </a:pPr>
-            <a:r>
-              <a:t>1. Prasoon (Roll No: ________________)</a:t>
-            </a:r>
-          </a:p>
-          <a:p>
-            <a:pPr>
-              <a:defRPr sz="1400">
-                <a:solidFill>
-                  <a:srgbClr val="172B2C"/>
-                </a:solidFill>
-                <a:latin typeface="Arial"/>
-              </a:defRPr>
-            </a:pPr>
-            <a:r>
-              <a:t>2. Team Member 2 (Roll No: ________________)</a:t>
-            </a:r>
-          </a:p>
-          <a:p>
-            <a:pPr>
-              <a:defRPr sz="1400">
-                <a:solidFill>
-                  <a:srgbClr val="172B2C"/>
-                </a:solidFill>
-                <a:latin typeface="Arial"/>
-              </a:defRPr>
-            </a:pPr>
-            <a:r>
-              <a:t>3. Team Member 3 (Roll No: ________________)</a:t>
+              <a:spcBef>
+                <a:spcPts val="400"/>
+              </a:spcBef>
+              <a:defRPr sz="1100">
+                <a:solidFill>
+                  <a:srgbClr val="F8FAFC"/>
+                </a:solidFill>
+                <a:latin typeface="Segoe UI"/>
+              </a:defRPr>
+            </a:pPr>
+            <a:r>
+              <a:t>1. Prasoon (Roll No: _____________)</a:t>
+            </a:r>
+            <a:br/>
+            <a:r>
+              <a:t>2. Member 2 (Roll No: _____________)</a:t>
+            </a:r>
+            <a:br/>
+            <a:r>
+              <a:t>3. Member 3 (Roll No: _____________)</a:t>
             </a:r>
           </a:p>
         </p:txBody>
@@ -3403,13 +3522,13 @@
         <p:spPr>
           <a:xfrm>
             <a:off x="0" y="0"/>
-            <a:ext cx="12191695" cy="109728"/>
+            <a:ext cx="12191695" cy="6858000"/>
           </a:xfrm>
           <a:prstGeom prst="rect">
             <a:avLst/>
           </a:prstGeom>
           <a:solidFill>
-            <a:srgbClr val="102C57"/>
+            <a:srgbClr val="0F172A"/>
           </a:solidFill>
           <a:ln>
             <a:noFill/>
@@ -3439,108 +3558,25 @@
       </p:sp>
       <p:sp>
         <p:nvSpPr>
-          <p:cNvPr id="3" name="TextBox 2"/>
-          <p:cNvSpPr txBox="1"/>
-          <p:nvPr/>
-        </p:nvSpPr>
-        <p:spPr>
-          <a:xfrm>
-            <a:off x="731520" y="274320"/>
-            <a:ext cx="10728655" cy="822960"/>
-          </a:xfrm>
-          <a:prstGeom prst="rect">
-            <a:avLst/>
-          </a:prstGeom>
-          <a:noFill/>
-        </p:spPr>
-        <p:txBody>
-          <a:bodyPr wrap="square" lIns="0" tIns="0" rIns="0" bIns="0">
-            <a:spAutoFit/>
-          </a:bodyPr>
-          <a:lstStyle/>
-          <a:p>
-            <a:pPr>
-              <a:defRPr sz="1300" b="1">
-                <a:solidFill>
-                  <a:srgbClr val="102C57"/>
-                </a:solidFill>
-                <a:latin typeface="Arial"/>
-              </a:defRPr>
-            </a:pPr>
-            <a:r>
-              <a:t>Galgotias College of Engineering &amp; Technology, Greater Noida</a:t>
-            </a:r>
-          </a:p>
-          <a:p>
-            <a:pPr>
-              <a:defRPr sz="1100" b="1">
-                <a:solidFill>
-                  <a:srgbClr val="646E73"/>
-                </a:solidFill>
-                <a:latin typeface="Arial"/>
-              </a:defRPr>
-            </a:pPr>
-            <a:r>
-              <a:t>DEPARTMENT OF ELECTRONICS AND COMMUNICATION ENGINEERING</a:t>
-            </a:r>
-          </a:p>
-        </p:txBody>
-      </p:sp>
-      <p:sp>
-        <p:nvSpPr>
-          <p:cNvPr id="4" name="TextBox 3"/>
-          <p:cNvSpPr txBox="1"/>
-          <p:nvPr/>
-        </p:nvSpPr>
-        <p:spPr>
-          <a:xfrm>
-            <a:off x="731520" y="1097280"/>
-            <a:ext cx="10728655" cy="640080"/>
-          </a:xfrm>
-          <a:prstGeom prst="rect">
-            <a:avLst/>
-          </a:prstGeom>
-          <a:noFill/>
-        </p:spPr>
-        <p:txBody>
-          <a:bodyPr wrap="square" lIns="0" tIns="0" rIns="0" bIns="0">
-            <a:spAutoFit/>
-          </a:bodyPr>
-          <a:lstStyle/>
-          <a:p>
-            <a:pPr>
-              <a:defRPr sz="2600" b="1">
-                <a:solidFill>
-                  <a:srgbClr val="102C57"/>
-                </a:solidFill>
-                <a:latin typeface="Arial"/>
-              </a:defRPr>
-            </a:pPr>
-            <a:r>
-              <a:t>REFERENCES:-</a:t>
-            </a:r>
-          </a:p>
-        </p:txBody>
-      </p:sp>
-      <p:sp>
-        <p:nvSpPr>
-          <p:cNvPr id="5" name="Rectangle 4"/>
+          <p:cNvPr id="3" name="Rounded Rectangle 2"/>
           <p:cNvSpPr/>
           <p:nvPr/>
         </p:nvSpPr>
         <p:spPr>
           <a:xfrm>
-            <a:off x="731520" y="1783080"/>
-            <a:ext cx="2011680" cy="45720"/>
-          </a:xfrm>
-          <a:prstGeom prst="rect">
-            <a:avLst/>
-          </a:prstGeom>
-          <a:solidFill>
-            <a:srgbClr val="E87652"/>
-          </a:solidFill>
-          <a:ln>
-            <a:noFill/>
+            <a:off x="1828800" y="1097280"/>
+            <a:ext cx="8534095" cy="4663440"/>
+          </a:xfrm>
+          <a:prstGeom prst="roundRect">
+            <a:avLst/>
+          </a:prstGeom>
+          <a:solidFill>
+            <a:srgbClr val="18223A"/>
+          </a:solidFill>
+          <a:ln w="19050">
+            <a:solidFill>
+              <a:srgbClr val="2D3E62"/>
+            </a:solidFill>
           </a:ln>
         </p:spPr>
         <p:style>
@@ -3558,424 +3594,80 @@
           </a:fontRef>
         </p:style>
         <p:txBody>
-          <a:bodyPr rtlCol="0" anchor="ctr"/>
-          <a:lstStyle/>
-          <a:p>
-            <a:pPr algn="ctr"/>
-          </a:p>
-        </p:txBody>
-      </p:sp>
-      <p:graphicFrame>
-        <p:nvGraphicFramePr>
-          <p:cNvPr id="6" name="Table 5"/>
-          <p:cNvGraphicFramePr>
-            <a:graphicFrameLocks noGrp="1"/>
-          </p:cNvGraphicFramePr>
-          <p:nvPr/>
-        </p:nvGraphicFramePr>
-        <p:xfrm>
-          <a:off x="914400" y="2011680"/>
-          <a:ext cx="10362895" cy="4297680"/>
-        </p:xfrm>
-        <a:graphic>
-          <a:graphicData uri="http://schemas.openxmlformats.org/drawingml/2006/table">
-            <a:tbl>
-              <a:tblPr firstRow="1" bandRow="1">
-                <a:tableStyleId>{5C22544A-7EE6-4342-B048-85BDC9FD1C3A}</a:tableStyleId>
-              </a:tblPr>
-              <a:tblGrid>
-                <a:gridCol w="1097280"/>
-                <a:gridCol w="9265615"/>
-              </a:tblGrid>
-              <a:tr h="613954">
-                <a:tc>
-                  <a:txBody>
-                    <a:bodyPr/>
-                    <a:lstStyle/>
-                    <a:p>
-                      <a:pPr algn="ctr">
-                        <a:defRPr b="1">
-                          <a:solidFill>
-                            <a:srgbClr val="FFFFFF"/>
-                          </a:solidFill>
-                        </a:defRPr>
-                      </a:pPr>
-                      <a:r>
-                        <a:t>S. No.</a:t>
-                      </a:r>
-                    </a:p>
-                  </a:txBody>
-                  <a:tcPr>
-                    <a:solidFill>
-                      <a:srgbClr val="102C57"/>
-                    </a:solidFill>
-                  </a:tcPr>
-                </a:tc>
-                <a:tc>
-                  <a:txBody>
-                    <a:bodyPr/>
-                    <a:lstStyle/>
-                    <a:p>
-                      <a:pPr>
-                        <a:defRPr b="1">
-                          <a:solidFill>
-                            <a:srgbClr val="FFFFFF"/>
-                          </a:solidFill>
-                        </a:defRPr>
-                      </a:pPr>
-                      <a:r>
-                        <a:t>Research Paper / Technical Standard / Datasheet</a:t>
-                      </a:r>
-                    </a:p>
-                  </a:txBody>
-                  <a:tcPr>
-                    <a:solidFill>
-                      <a:srgbClr val="102C57"/>
-                    </a:solidFill>
-                  </a:tcPr>
-                </a:tc>
-              </a:tr>
-              <a:tr h="613954">
-                <a:tc>
-                  <a:txBody>
-                    <a:bodyPr/>
-                    <a:lstStyle/>
-                    <a:p>
-                      <a:pPr algn="ctr">
-                        <a:defRPr sz="1200">
-                          <a:solidFill>
-                            <a:srgbClr val="172B2C"/>
-                          </a:solidFill>
-                          <a:latin typeface="Arial"/>
-                        </a:defRPr>
-                      </a:pPr>
-                      <a:r>
-                        <a:t>1.</a:t>
-                      </a:r>
-                    </a:p>
-                  </a:txBody>
-                  <a:tcPr>
-                    <a:solidFill>
-                      <a:srgbClr val="F5F7F8"/>
-                    </a:solidFill>
-                  </a:tcPr>
-                </a:tc>
-                <a:tc>
-                  <a:txBody>
-                    <a:bodyPr/>
-                    <a:lstStyle/>
-                    <a:p>
-                      <a:pPr>
-                        <a:defRPr sz="1200">
-                          <a:solidFill>
-                            <a:srgbClr val="172B2C"/>
-                          </a:solidFill>
-                          <a:latin typeface="Arial"/>
-                        </a:defRPr>
-                      </a:pPr>
-                      <a:r>
-                        <a:t>Espressif Systems, "ESP32 Series Datasheet - 2.4 GHz Wi-Fi and Bluetooth combo chip," Espressif Inc., Version 3.9, 2023.</a:t>
-                      </a:r>
-                    </a:p>
-                  </a:txBody>
-                  <a:tcPr>
-                    <a:solidFill>
-                      <a:srgbClr val="F5F7F8"/>
-                    </a:solidFill>
-                  </a:tcPr>
-                </a:tc>
-              </a:tr>
-              <a:tr h="613954">
-                <a:tc>
-                  <a:txBody>
-                    <a:bodyPr/>
-                    <a:lstStyle/>
-                    <a:p>
-                      <a:pPr algn="ctr">
-                        <a:defRPr sz="1200">
-                          <a:solidFill>
-                            <a:srgbClr val="172B2C"/>
-                          </a:solidFill>
-                          <a:latin typeface="Arial"/>
-                        </a:defRPr>
-                      </a:pPr>
-                      <a:r>
-                        <a:t>2.</a:t>
-                      </a:r>
-                    </a:p>
-                  </a:txBody>
-                  <a:tcPr>
-                    <a:solidFill>
-                      <a:srgbClr val="FFFFFF"/>
-                    </a:solidFill>
-                  </a:tcPr>
-                </a:tc>
-                <a:tc>
-                  <a:txBody>
-                    <a:bodyPr/>
-                    <a:lstStyle/>
-                    <a:p>
-                      <a:pPr>
-                        <a:defRPr sz="1200">
-                          <a:solidFill>
-                            <a:srgbClr val="172B2C"/>
-                          </a:solidFill>
-                          <a:latin typeface="Arial"/>
-                        </a:defRPr>
-                      </a:pPr>
-                      <a:r>
-                        <a:t>Aosong Electronics Co., Ltd., "Digital-output relative humidity &amp; temperature sensor/module DHT22 (AM2302) Datasheet," Guangzhou, China.</a:t>
-                      </a:r>
-                    </a:p>
-                  </a:txBody>
-                  <a:tcPr>
-                    <a:solidFill>
-                      <a:srgbClr val="FFFFFF"/>
-                    </a:solidFill>
-                  </a:tcPr>
-                </a:tc>
-              </a:tr>
-              <a:tr h="613954">
-                <a:tc>
-                  <a:txBody>
-                    <a:bodyPr/>
-                    <a:lstStyle/>
-                    <a:p>
-                      <a:pPr algn="ctr">
-                        <a:defRPr sz="1200">
-                          <a:solidFill>
-                            <a:srgbClr val="172B2C"/>
-                          </a:solidFill>
-                          <a:latin typeface="Arial"/>
-                        </a:defRPr>
-                      </a:pPr>
-                      <a:r>
-                        <a:t>3.</a:t>
-                      </a:r>
-                    </a:p>
-                  </a:txBody>
-                  <a:tcPr>
-                    <a:solidFill>
-                      <a:srgbClr val="F5F7F8"/>
-                    </a:solidFill>
-                  </a:tcPr>
-                </a:tc>
-                <a:tc>
-                  <a:txBody>
-                    <a:bodyPr/>
-                    <a:lstStyle/>
-                    <a:p>
-                      <a:pPr>
-                        <a:defRPr sz="1200">
-                          <a:solidFill>
-                            <a:srgbClr val="172B2C"/>
-                          </a:solidFill>
-                          <a:latin typeface="Arial"/>
-                        </a:defRPr>
-                      </a:pPr>
-                      <a:r>
-                        <a:t>K. S. Rao, V. S. Murthy, and T. P. Rao, "IoT Based Real-Time Environmental and Weather Monitoring System using ESP32," IEEE International Conference on Smart Technologies, 2021.</a:t>
-                      </a:r>
-                    </a:p>
-                  </a:txBody>
-                  <a:tcPr>
-                    <a:solidFill>
-                      <a:srgbClr val="F5F7F8"/>
-                    </a:solidFill>
-                  </a:tcPr>
-                </a:tc>
-              </a:tr>
-              <a:tr h="613954">
-                <a:tc>
-                  <a:txBody>
-                    <a:bodyPr/>
-                    <a:lstStyle/>
-                    <a:p>
-                      <a:pPr algn="ctr">
-                        <a:defRPr sz="1200">
-                          <a:solidFill>
-                            <a:srgbClr val="172B2C"/>
-                          </a:solidFill>
-                          <a:latin typeface="Arial"/>
-                        </a:defRPr>
-                      </a:pPr>
-                      <a:r>
-                        <a:t>4.</a:t>
-                      </a:r>
-                    </a:p>
-                  </a:txBody>
-                  <a:tcPr>
-                    <a:solidFill>
-                      <a:srgbClr val="FFFFFF"/>
-                    </a:solidFill>
-                  </a:tcPr>
-                </a:tc>
-                <a:tc>
-                  <a:txBody>
-                    <a:bodyPr/>
-                    <a:lstStyle/>
-                    <a:p>
-                      <a:pPr>
-                        <a:defRPr sz="1200">
-                          <a:solidFill>
-                            <a:srgbClr val="172B2C"/>
-                          </a:solidFill>
-                          <a:latin typeface="Arial"/>
-                        </a:defRPr>
-                      </a:pPr>
-                      <a:r>
-                        <a:t>MathWorks, "ThingSpeak Documentation: IoT Analytics with MATLAB Support and RESTful Web Services API," MathWorks Inc., 2024.</a:t>
-                      </a:r>
-                    </a:p>
-                  </a:txBody>
-                  <a:tcPr>
-                    <a:solidFill>
-                      <a:srgbClr val="FFFFFF"/>
-                    </a:solidFill>
-                  </a:tcPr>
-                </a:tc>
-              </a:tr>
-              <a:tr h="613954">
-                <a:tc>
-                  <a:txBody>
-                    <a:bodyPr/>
-                    <a:lstStyle/>
-                    <a:p>
-                      <a:pPr algn="ctr">
-                        <a:defRPr sz="1200">
-                          <a:solidFill>
-                            <a:srgbClr val="172B2C"/>
-                          </a:solidFill>
-                          <a:latin typeface="Arial"/>
-                        </a:defRPr>
-                      </a:pPr>
-                      <a:r>
-                        <a:t>5.</a:t>
-                      </a:r>
-                    </a:p>
-                  </a:txBody>
-                  <a:tcPr>
-                    <a:solidFill>
-                      <a:srgbClr val="F5F7F8"/>
-                    </a:solidFill>
-                  </a:tcPr>
-                </a:tc>
-                <a:tc>
-                  <a:txBody>
-                    <a:bodyPr/>
-                    <a:lstStyle/>
-                    <a:p>
-                      <a:pPr>
-                        <a:defRPr sz="1200">
-                          <a:solidFill>
-                            <a:srgbClr val="172B2C"/>
-                          </a:solidFill>
-                          <a:latin typeface="Arial"/>
-                        </a:defRPr>
-                      </a:pPr>
-                      <a:r>
-                        <a:t>N. H. Motlagh, M. Mohammadrezaei, J. Hunt, and B. Zakeri, "Internet of Things (IoT) for Climate Change and Weather Monitoring: Recent Advances and Applications," IEEE Access, vol. 8, pp. 62890-62908, 2020.</a:t>
-                      </a:r>
-                    </a:p>
-                  </a:txBody>
-                  <a:tcPr>
-                    <a:solidFill>
-                      <a:srgbClr val="F5F7F8"/>
-                    </a:solidFill>
-                  </a:tcPr>
-                </a:tc>
-              </a:tr>
-              <a:tr h="613956">
-                <a:tc>
-                  <a:txBody>
-                    <a:bodyPr/>
-                    <a:lstStyle/>
-                    <a:p>
-                      <a:pPr algn="ctr">
-                        <a:defRPr sz="1200">
-                          <a:solidFill>
-                            <a:srgbClr val="172B2C"/>
-                          </a:solidFill>
-                          <a:latin typeface="Arial"/>
-                        </a:defRPr>
-                      </a:pPr>
-                      <a:r>
-                        <a:t>6.</a:t>
-                      </a:r>
-                    </a:p>
-                  </a:txBody>
-                  <a:tcPr>
-                    <a:solidFill>
-                      <a:srgbClr val="FFFFFF"/>
-                    </a:solidFill>
-                  </a:tcPr>
-                </a:tc>
-                <a:tc>
-                  <a:txBody>
-                    <a:bodyPr/>
-                    <a:lstStyle/>
-                    <a:p>
-                      <a:pPr>
-                        <a:defRPr sz="1200">
-                          <a:solidFill>
-                            <a:srgbClr val="172B2C"/>
-                          </a:solidFill>
-                          <a:latin typeface="Arial"/>
-                        </a:defRPr>
-                      </a:pPr>
-                      <a:r>
-                        <a:t>Solomon Systech, "SSD1306 128 x 64 Dot Matrix OLED/PLED Segment/Common Driver with Controller Datasheet," Rev 1.1, 2018.</a:t>
-                      </a:r>
-                    </a:p>
-                  </a:txBody>
-                  <a:tcPr>
-                    <a:solidFill>
-                      <a:srgbClr val="FFFFFF"/>
-                    </a:solidFill>
-                  </a:tcPr>
-                </a:tc>
-              </a:tr>
-            </a:tbl>
-          </a:graphicData>
-        </a:graphic>
-      </p:graphicFrame>
-    </p:spTree>
-  </p:cSld>
-  <p:clrMapOvr>
-    <a:masterClrMapping/>
-  </p:clrMapOvr>
-</p:sld>
-</file>
-
-<file path=ppt/slides/slide11.xml><?xml version="1.0" encoding="utf-8"?>
-<p:sld xmlns:a="http://schemas.openxmlformats.org/drawingml/2006/main" xmlns:p="http://schemas.openxmlformats.org/presentationml/2006/main" xmlns:r="http://schemas.openxmlformats.org/officeDocument/2006/relationships">
-  <p:cSld>
-    <p:spTree>
-      <p:nvGrpSpPr>
-        <p:cNvPr id="1" name=""/>
-        <p:cNvGrpSpPr/>
-        <p:nvPr/>
-      </p:nvGrpSpPr>
-      <p:grpSpPr/>
-      <p:sp>
-        <p:nvSpPr>
-          <p:cNvPr id="2" name="Rectangle 1"/>
+          <a:bodyPr rtlCol="0" anchor="ctr" wrap="square" tIns="731520"/>
+          <a:lstStyle/>
+          <a:p>
+            <a:pPr algn="ctr">
+              <a:defRPr sz="5000" b="1">
+                <a:solidFill>
+                  <a:srgbClr val="F8FAFC"/>
+                </a:solidFill>
+                <a:latin typeface="Segoe UI"/>
+              </a:defRPr>
+            </a:pPr>
+            <a:r>
+              <a:t>THANK YOU</a:t>
+            </a:r>
+          </a:p>
+          <a:p>
+            <a:pPr algn="ctr">
+              <a:spcBef>
+                <a:spcPts val="800"/>
+              </a:spcBef>
+              <a:defRPr sz="2000" b="1">
+                <a:solidFill>
+                  <a:srgbClr val="14B8A6"/>
+                </a:solidFill>
+                <a:latin typeface="Segoe UI"/>
+              </a:defRPr>
+            </a:pPr>
+            <a:r>
+              <a:t>Questions &amp; Technical Discussion</a:t>
+            </a:r>
+          </a:p>
+          <a:p>
+            <a:pPr algn="ctr">
+              <a:spcBef>
+                <a:spcPts val="2000"/>
+              </a:spcBef>
+              <a:defRPr sz="1200">
+                <a:solidFill>
+                  <a:srgbClr val="94A3B8"/>
+                </a:solidFill>
+                <a:latin typeface="Segoe UI"/>
+              </a:defRPr>
+            </a:pPr>
+            <a:r>
+              <a:t>Galgotias College of Engineering &amp; Technology, Greater Noida</a:t>
+            </a:r>
+            <a:br/>
+            <a:r>
+              <a:t>Department of Electronics and Communication Engineering</a:t>
+            </a:r>
+          </a:p>
+        </p:txBody>
+      </p:sp>
+      <p:sp>
+        <p:nvSpPr>
+          <p:cNvPr id="4" name="Rounded Rectangle 3"/>
           <p:cNvSpPr/>
           <p:nvPr/>
         </p:nvSpPr>
         <p:spPr>
           <a:xfrm>
-            <a:off x="0" y="0"/>
-            <a:ext cx="12191695" cy="109728"/>
-          </a:xfrm>
-          <a:prstGeom prst="rect">
-            <a:avLst/>
-          </a:prstGeom>
-          <a:solidFill>
-            <a:srgbClr val="102C57"/>
-          </a:solidFill>
-          <a:ln>
-            <a:noFill/>
+            <a:off x="2926080" y="4389120"/>
+            <a:ext cx="6339535" cy="640080"/>
+          </a:xfrm>
+          <a:prstGeom prst="roundRect">
+            <a:avLst/>
+          </a:prstGeom>
+          <a:solidFill>
+            <a:srgbClr val="0F172A"/>
+          </a:solidFill>
+          <a:ln w="12700">
+            <a:solidFill>
+              <a:srgbClr val="2D3E62"/>
+            </a:solidFill>
           </a:ln>
         </p:spPr>
         <p:style>
@@ -3993,81 +3685,19 @@
           </a:fontRef>
         </p:style>
         <p:txBody>
-          <a:bodyPr rtlCol="0" anchor="ctr"/>
-          <a:lstStyle/>
-          <a:p>
-            <a:pPr algn="ctr"/>
-          </a:p>
-        </p:txBody>
-      </p:sp>
-      <p:sp>
-        <p:nvSpPr>
-          <p:cNvPr id="3" name="TextBox 2"/>
-          <p:cNvSpPr txBox="1"/>
-          <p:nvPr/>
-        </p:nvSpPr>
-        <p:spPr>
-          <a:xfrm>
-            <a:off x="1828800" y="2011680"/>
-            <a:ext cx="8534095" cy="2743200"/>
-          </a:xfrm>
-          <a:prstGeom prst="rect">
-            <a:avLst/>
-          </a:prstGeom>
-          <a:noFill/>
-        </p:spPr>
-        <p:txBody>
-          <a:bodyPr wrap="square">
-            <a:spAutoFit/>
-          </a:bodyPr>
+          <a:bodyPr rtlCol="0" anchor="ctr" tIns="128016"/>
           <a:lstStyle/>
           <a:p>
             <a:pPr algn="ctr">
-              <a:defRPr sz="5400" b="1">
-                <a:solidFill>
-                  <a:srgbClr val="102C57"/>
-                </a:solidFill>
-                <a:latin typeface="Arial"/>
-              </a:defRPr>
-            </a:pPr>
-            <a:r>
-              <a:t>THANK YOU</a:t>
-            </a:r>
-          </a:p>
-          <a:p>
-            <a:pPr algn="ctr">
-              <a:spcBef>
-                <a:spcPts val="1200"/>
-              </a:spcBef>
-              <a:defRPr sz="2200">
-                <a:solidFill>
-                  <a:srgbClr val="E87652"/>
-                </a:solidFill>
-                <a:latin typeface="Arial"/>
-              </a:defRPr>
-            </a:pPr>
-            <a:r>
-              <a:t>Questions &amp; Answers</a:t>
-            </a:r>
-          </a:p>
-          <a:p>
-            <a:pPr algn="ctr">
-              <a:spcBef>
-                <a:spcPts val="2000"/>
-              </a:spcBef>
-              <a:defRPr sz="1400">
-                <a:solidFill>
-                  <a:srgbClr val="646E73"/>
-                </a:solidFill>
-                <a:latin typeface="Arial"/>
-              </a:defRPr>
-            </a:pPr>
-            <a:r>
-              <a:t>🌐 Live Dashboard: smart-weather-station.vercel.app</a:t>
-            </a:r>
-            <a:br/>
-            <a:r>
-              <a:t>📦 GitHub Repository: github.com/prasoon9999/smart-weather-station</a:t>
+              <a:defRPr sz="1100" b="1">
+                <a:solidFill>
+                  <a:srgbClr val="F97316"/>
+                </a:solidFill>
+                <a:latin typeface="Segoe UI"/>
+              </a:defRPr>
+            </a:pPr>
+            <a:r>
+              <a:t>🌐 smart-weather-station.vercel.app   |   📦 github.com/prasoon9999/smart-weather-station</a:t>
             </a:r>
           </a:p>
         </p:txBody>
@@ -4099,13 +3729,13 @@
         <p:spPr>
           <a:xfrm>
             <a:off x="0" y="0"/>
-            <a:ext cx="12191695" cy="109728"/>
+            <a:ext cx="12191695" cy="6858000"/>
           </a:xfrm>
           <a:prstGeom prst="rect">
             <a:avLst/>
           </a:prstGeom>
           <a:solidFill>
-            <a:srgbClr val="102C57"/>
+            <a:srgbClr val="0F172A"/>
           </a:solidFill>
           <a:ln>
             <a:noFill/>
@@ -4135,105 +3765,20 @@
       </p:sp>
       <p:sp>
         <p:nvSpPr>
-          <p:cNvPr id="3" name="TextBox 2"/>
-          <p:cNvSpPr txBox="1"/>
-          <p:nvPr/>
-        </p:nvSpPr>
-        <p:spPr>
-          <a:xfrm>
-            <a:off x="731520" y="274320"/>
-            <a:ext cx="10728655" cy="822960"/>
-          </a:xfrm>
-          <a:prstGeom prst="rect">
-            <a:avLst/>
-          </a:prstGeom>
-          <a:noFill/>
-        </p:spPr>
-        <p:txBody>
-          <a:bodyPr wrap="square" lIns="0" tIns="0" rIns="0" bIns="0">
-            <a:spAutoFit/>
-          </a:bodyPr>
-          <a:lstStyle/>
-          <a:p>
-            <a:pPr>
-              <a:defRPr sz="1300" b="1">
-                <a:solidFill>
-                  <a:srgbClr val="102C57"/>
-                </a:solidFill>
-                <a:latin typeface="Arial"/>
-              </a:defRPr>
-            </a:pPr>
-            <a:r>
-              <a:t>Galgotias College of Engineering &amp; Technology, Greater Noida</a:t>
-            </a:r>
-          </a:p>
-          <a:p>
-            <a:pPr>
-              <a:defRPr sz="1100" b="1">
-                <a:solidFill>
-                  <a:srgbClr val="646E73"/>
-                </a:solidFill>
-                <a:latin typeface="Arial"/>
-              </a:defRPr>
-            </a:pPr>
-            <a:r>
-              <a:t>DEPARTMENT OF ELECTRONICS AND COMMUNICATION ENGINEERING</a:t>
-            </a:r>
-          </a:p>
-        </p:txBody>
-      </p:sp>
-      <p:sp>
-        <p:nvSpPr>
-          <p:cNvPr id="4" name="TextBox 3"/>
-          <p:cNvSpPr txBox="1"/>
-          <p:nvPr/>
-        </p:nvSpPr>
-        <p:spPr>
-          <a:xfrm>
-            <a:off x="731520" y="1097280"/>
-            <a:ext cx="10728655" cy="640080"/>
-          </a:xfrm>
-          <a:prstGeom prst="rect">
-            <a:avLst/>
-          </a:prstGeom>
-          <a:noFill/>
-        </p:spPr>
-        <p:txBody>
-          <a:bodyPr wrap="square" lIns="0" tIns="0" rIns="0" bIns="0">
-            <a:spAutoFit/>
-          </a:bodyPr>
-          <a:lstStyle/>
-          <a:p>
-            <a:pPr>
-              <a:defRPr sz="2600" b="1">
-                <a:solidFill>
-                  <a:srgbClr val="102C57"/>
-                </a:solidFill>
-                <a:latin typeface="Arial"/>
-              </a:defRPr>
-            </a:pPr>
-            <a:r>
-              <a:t>CONTENTS</a:t>
-            </a:r>
-          </a:p>
-        </p:txBody>
-      </p:sp>
-      <p:sp>
-        <p:nvSpPr>
-          <p:cNvPr id="5" name="Rectangle 4"/>
+          <p:cNvPr id="3" name="Rectangle 2"/>
           <p:cNvSpPr/>
           <p:nvPr/>
         </p:nvSpPr>
         <p:spPr>
           <a:xfrm>
-            <a:off x="731520" y="1783080"/>
-            <a:ext cx="2011680" cy="45720"/>
+            <a:off x="0" y="0"/>
+            <a:ext cx="12191695" cy="73152"/>
           </a:xfrm>
           <a:prstGeom prst="rect">
             <a:avLst/>
           </a:prstGeom>
           <a:solidFill>
-            <a:srgbClr val="E87652"/>
+            <a:srgbClr val="14B8A6"/>
           </a:solidFill>
           <a:ln>
             <a:noFill/>
@@ -4263,24 +3808,24 @@
       </p:sp>
       <p:sp>
         <p:nvSpPr>
-          <p:cNvPr id="6" name="Rounded Rectangle 5"/>
+          <p:cNvPr id="4" name="Rounded Rectangle 3"/>
           <p:cNvSpPr/>
           <p:nvPr/>
         </p:nvSpPr>
         <p:spPr>
           <a:xfrm>
-            <a:off x="1097280" y="2103120"/>
-            <a:ext cx="4937760" cy="822960"/>
+            <a:off x="822960" y="320040"/>
+            <a:ext cx="6858000" cy="347472"/>
           </a:xfrm>
           <a:prstGeom prst="roundRect">
             <a:avLst/>
           </a:prstGeom>
           <a:solidFill>
-            <a:srgbClr val="F5F7F8"/>
+            <a:srgbClr val="18223A"/>
           </a:solidFill>
           <a:ln w="12700">
             <a:solidFill>
-              <a:srgbClr val="D2DCE1"/>
+              <a:srgbClr val="2D3E62"/>
             </a:solidFill>
           </a:ln>
         </p:spPr>
@@ -4299,43 +3844,43 @@
           </a:fontRef>
         </p:style>
         <p:txBody>
-          <a:bodyPr rtlCol="0" anchor="ctr" wrap="square" lIns="274320"/>
+          <a:bodyPr rtlCol="0" anchor="ctr" tIns="54864" lIns="182880"/>
           <a:lstStyle/>
           <a:p>
             <a:pPr algn="ctr">
-              <a:defRPr sz="1500" b="1">
-                <a:solidFill>
-                  <a:srgbClr val="102C57"/>
-                </a:solidFill>
-                <a:latin typeface="Arial"/>
-              </a:defRPr>
-            </a:pPr>
-            <a:r>
-              <a:t>❖  01.  Introduction</a:t>
-            </a:r>
-          </a:p>
-        </p:txBody>
-      </p:sp>
-      <p:sp>
-        <p:nvSpPr>
-          <p:cNvPr id="7" name="Rounded Rectangle 6"/>
+              <a:defRPr sz="850" b="1">
+                <a:solidFill>
+                  <a:srgbClr val="14B8A6"/>
+                </a:solidFill>
+                <a:latin typeface="Segoe UI"/>
+              </a:defRPr>
+            </a:pPr>
+            <a:r>
+              <a:t>GALGOTIAS COLLEGE OF ENGG. &amp; TECH.  •  ECE DEPARTMENT  •  OVERVIEW</a:t>
+            </a:r>
+          </a:p>
+        </p:txBody>
+      </p:sp>
+      <p:sp>
+        <p:nvSpPr>
+          <p:cNvPr id="5" name="Rounded Rectangle 4"/>
           <p:cNvSpPr/>
           <p:nvPr/>
         </p:nvSpPr>
         <p:spPr>
           <a:xfrm>
-            <a:off x="6400800" y="2103120"/>
-            <a:ext cx="4937760" cy="822960"/>
+            <a:off x="10607040" y="320040"/>
+            <a:ext cx="777240" cy="347472"/>
           </a:xfrm>
           <a:prstGeom prst="roundRect">
             <a:avLst/>
           </a:prstGeom>
           <a:solidFill>
-            <a:srgbClr val="F5F7F8"/>
+            <a:srgbClr val="18223A"/>
           </a:solidFill>
           <a:ln w="12700">
             <a:solidFill>
-              <a:srgbClr val="D2DCE1"/>
+              <a:srgbClr val="2D3E62"/>
             </a:solidFill>
           </a:ln>
         </p:spPr>
@@ -4354,43 +3899,79 @@
           </a:fontRef>
         </p:style>
         <p:txBody>
-          <a:bodyPr rtlCol="0" anchor="ctr" wrap="square" lIns="274320"/>
+          <a:bodyPr rtlCol="0" anchor="ctr"/>
           <a:lstStyle/>
           <a:p>
             <a:pPr algn="ctr">
-              <a:defRPr sz="1500" b="1">
-                <a:solidFill>
-                  <a:srgbClr val="102C57"/>
-                </a:solidFill>
-                <a:latin typeface="Arial"/>
-              </a:defRPr>
-            </a:pPr>
-            <a:r>
-              <a:t>❖  02.  Motivation</a:t>
-            </a:r>
-          </a:p>
-        </p:txBody>
-      </p:sp>
-      <p:sp>
-        <p:nvSpPr>
-          <p:cNvPr id="8" name="Rounded Rectangle 7"/>
+              <a:defRPr sz="900" b="1">
+                <a:solidFill>
+                  <a:srgbClr val="94A3B8"/>
+                </a:solidFill>
+                <a:latin typeface="Segoe UI"/>
+              </a:defRPr>
+            </a:pPr>
+            <a:r>
+              <a:t>02 / 10</a:t>
+            </a:r>
+          </a:p>
+        </p:txBody>
+      </p:sp>
+      <p:sp>
+        <p:nvSpPr>
+          <p:cNvPr id="6" name="TextBox 5"/>
+          <p:cNvSpPr txBox="1"/>
+          <p:nvPr/>
+        </p:nvSpPr>
+        <p:spPr>
+          <a:xfrm>
+            <a:off x="822960" y="777240"/>
+            <a:ext cx="10515600" cy="685800"/>
+          </a:xfrm>
+          <a:prstGeom prst="rect">
+            <a:avLst/>
+          </a:prstGeom>
+          <a:noFill/>
+        </p:spPr>
+        <p:txBody>
+          <a:bodyPr wrap="square" lIns="0" tIns="0" rIns="0" bIns="0">
+            <a:spAutoFit/>
+          </a:bodyPr>
+          <a:lstStyle/>
+          <a:p>
+            <a:pPr>
+              <a:defRPr sz="2400" b="1">
+                <a:solidFill>
+                  <a:srgbClr val="F8FAFC"/>
+                </a:solidFill>
+                <a:latin typeface="Segoe UI"/>
+              </a:defRPr>
+            </a:pPr>
+            <a:r>
+              <a:t>Table of Contents</a:t>
+            </a:r>
+          </a:p>
+        </p:txBody>
+      </p:sp>
+      <p:sp>
+        <p:nvSpPr>
+          <p:cNvPr id="7" name="Rounded Rectangle 6"/>
           <p:cNvSpPr/>
           <p:nvPr/>
         </p:nvSpPr>
         <p:spPr>
           <a:xfrm>
-            <a:off x="1097280" y="3154679"/>
-            <a:ext cx="4937760" cy="822960"/>
+            <a:off x="822960" y="1645920"/>
+            <a:ext cx="2514600" cy="2194560"/>
           </a:xfrm>
           <a:prstGeom prst="roundRect">
             <a:avLst/>
           </a:prstGeom>
           <a:solidFill>
-            <a:srgbClr val="F5F7F8"/>
+            <a:srgbClr val="18223A"/>
           </a:solidFill>
           <a:ln w="12700">
             <a:solidFill>
-              <a:srgbClr val="D2DCE1"/>
+              <a:srgbClr val="2D3E62"/>
             </a:solidFill>
           </a:ln>
         </p:spPr>
@@ -4409,43 +3990,75 @@
           </a:fontRef>
         </p:style>
         <p:txBody>
-          <a:bodyPr rtlCol="0" anchor="ctr" wrap="square" lIns="274320"/>
+          <a:bodyPr rtlCol="0" anchor="ctr" wrap="square" tIns="182880" lIns="182880" rIns="182880"/>
           <a:lstStyle/>
           <a:p>
             <a:pPr algn="ctr">
-              <a:defRPr sz="1500" b="1">
-                <a:solidFill>
-                  <a:srgbClr val="102C57"/>
-                </a:solidFill>
-                <a:latin typeface="Arial"/>
-              </a:defRPr>
-            </a:pPr>
-            <a:r>
-              <a:t>❖  03.  Objectives</a:t>
-            </a:r>
-          </a:p>
-        </p:txBody>
-      </p:sp>
-      <p:sp>
-        <p:nvSpPr>
-          <p:cNvPr id="9" name="Rounded Rectangle 8"/>
+              <a:defRPr sz="2000" b="1">
+                <a:solidFill>
+                  <a:srgbClr val="14B8A6"/>
+                </a:solidFill>
+                <a:latin typeface="Segoe UI"/>
+              </a:defRPr>
+            </a:pPr>
+            <a:r>
+              <a:t>01</a:t>
+            </a:r>
+          </a:p>
+          <a:p>
+            <a:pPr>
+              <a:spcBef>
+                <a:spcPts val="800"/>
+              </a:spcBef>
+              <a:defRPr sz="1300" b="1">
+                <a:solidFill>
+                  <a:srgbClr val="F8FAFC"/>
+                </a:solidFill>
+                <a:latin typeface="Segoe UI"/>
+              </a:defRPr>
+            </a:pPr>
+            <a:r>
+              <a:t>Introduction &amp; Context</a:t>
+            </a:r>
+          </a:p>
+          <a:p>
+            <a:pPr>
+              <a:spcBef>
+                <a:spcPts val="600"/>
+              </a:spcBef>
+              <a:defRPr sz="1000">
+                <a:solidFill>
+                  <a:srgbClr val="94A3B8"/>
+                </a:solidFill>
+                <a:latin typeface="Segoe UI"/>
+              </a:defRPr>
+            </a:pPr>
+            <a:r>
+              <a:t>Environmental importance, microclimates, and real-time monitoring challenges.</a:t>
+            </a:r>
+          </a:p>
+        </p:txBody>
+      </p:sp>
+      <p:sp>
+        <p:nvSpPr>
+          <p:cNvPr id="8" name="Rounded Rectangle 7"/>
           <p:cNvSpPr/>
           <p:nvPr/>
         </p:nvSpPr>
         <p:spPr>
           <a:xfrm>
-            <a:off x="6400800" y="3154679"/>
-            <a:ext cx="4937760" cy="822960"/>
+            <a:off x="3520440" y="1645920"/>
+            <a:ext cx="2514600" cy="2194560"/>
           </a:xfrm>
           <a:prstGeom prst="roundRect">
             <a:avLst/>
           </a:prstGeom>
           <a:solidFill>
-            <a:srgbClr val="F5F7F8"/>
+            <a:srgbClr val="18223A"/>
           </a:solidFill>
           <a:ln w="12700">
             <a:solidFill>
-              <a:srgbClr val="D2DCE1"/>
+              <a:srgbClr val="2D3E62"/>
             </a:solidFill>
           </a:ln>
         </p:spPr>
@@ -4464,43 +4077,75 @@
           </a:fontRef>
         </p:style>
         <p:txBody>
-          <a:bodyPr rtlCol="0" anchor="ctr" wrap="square" lIns="274320"/>
+          <a:bodyPr rtlCol="0" anchor="ctr" wrap="square" tIns="182880" lIns="182880" rIns="182880"/>
           <a:lstStyle/>
           <a:p>
             <a:pPr algn="ctr">
-              <a:defRPr sz="1500" b="1">
-                <a:solidFill>
-                  <a:srgbClr val="102C57"/>
-                </a:solidFill>
-                <a:latin typeface="Arial"/>
-              </a:defRPr>
-            </a:pPr>
-            <a:r>
-              <a:t>❖  04.  System Architecture &amp; Hardware Description</a:t>
-            </a:r>
-          </a:p>
-        </p:txBody>
-      </p:sp>
-      <p:sp>
-        <p:nvSpPr>
-          <p:cNvPr id="10" name="Rounded Rectangle 9"/>
+              <a:defRPr sz="2000" b="1">
+                <a:solidFill>
+                  <a:srgbClr val="F97316"/>
+                </a:solidFill>
+                <a:latin typeface="Segoe UI"/>
+              </a:defRPr>
+            </a:pPr>
+            <a:r>
+              <a:t>02</a:t>
+            </a:r>
+          </a:p>
+          <a:p>
+            <a:pPr>
+              <a:spcBef>
+                <a:spcPts val="800"/>
+              </a:spcBef>
+              <a:defRPr sz="1300" b="1">
+                <a:solidFill>
+                  <a:srgbClr val="F8FAFC"/>
+                </a:solidFill>
+                <a:latin typeface="Segoe UI"/>
+              </a:defRPr>
+            </a:pPr>
+            <a:r>
+              <a:t>Project Motivation</a:t>
+            </a:r>
+          </a:p>
+          <a:p>
+            <a:pPr>
+              <a:spcBef>
+                <a:spcPts val="600"/>
+              </a:spcBef>
+              <a:defRPr sz="1000">
+                <a:solidFill>
+                  <a:srgbClr val="94A3B8"/>
+                </a:solidFill>
+                <a:latin typeface="Segoe UI"/>
+              </a:defRPr>
+            </a:pPr>
+            <a:r>
+              <a:t>Why conventional loggers fall short and why local human thermal comfort matters.</a:t>
+            </a:r>
+          </a:p>
+        </p:txBody>
+      </p:sp>
+      <p:sp>
+        <p:nvSpPr>
+          <p:cNvPr id="9" name="Rounded Rectangle 8"/>
           <p:cNvSpPr/>
           <p:nvPr/>
         </p:nvSpPr>
         <p:spPr>
           <a:xfrm>
-            <a:off x="1097280" y="4206240"/>
-            <a:ext cx="4937760" cy="822960"/>
+            <a:off x="6217920" y="1645920"/>
+            <a:ext cx="2514600" cy="2194560"/>
           </a:xfrm>
           <a:prstGeom prst="roundRect">
             <a:avLst/>
           </a:prstGeom>
           <a:solidFill>
-            <a:srgbClr val="F5F7F8"/>
+            <a:srgbClr val="18223A"/>
           </a:solidFill>
           <a:ln w="12700">
             <a:solidFill>
-              <a:srgbClr val="D2DCE1"/>
+              <a:srgbClr val="2D3E62"/>
             </a:solidFill>
           </a:ln>
         </p:spPr>
@@ -4519,43 +4164,75 @@
           </a:fontRef>
         </p:style>
         <p:txBody>
-          <a:bodyPr rtlCol="0" anchor="ctr" wrap="square" lIns="274320"/>
+          <a:bodyPr rtlCol="0" anchor="ctr" wrap="square" tIns="182880" lIns="182880" rIns="182880"/>
           <a:lstStyle/>
           <a:p>
             <a:pPr algn="ctr">
-              <a:defRPr sz="1500" b="1">
-                <a:solidFill>
-                  <a:srgbClr val="102C57"/>
-                </a:solidFill>
-                <a:latin typeface="Arial"/>
-              </a:defRPr>
-            </a:pPr>
-            <a:r>
-              <a:t>❖  05.  Software &amp; Cloud Integration (ThingSpeak &amp; Vercel)</a:t>
-            </a:r>
-          </a:p>
-        </p:txBody>
-      </p:sp>
-      <p:sp>
-        <p:nvSpPr>
-          <p:cNvPr id="11" name="Rounded Rectangle 10"/>
+              <a:defRPr sz="2000" b="1">
+                <a:solidFill>
+                  <a:srgbClr val="38BDF8"/>
+                </a:solidFill>
+                <a:latin typeface="Segoe UI"/>
+              </a:defRPr>
+            </a:pPr>
+            <a:r>
+              <a:t>03</a:t>
+            </a:r>
+          </a:p>
+          <a:p>
+            <a:pPr>
+              <a:spcBef>
+                <a:spcPts val="800"/>
+              </a:spcBef>
+              <a:defRPr sz="1300" b="1">
+                <a:solidFill>
+                  <a:srgbClr val="F8FAFC"/>
+                </a:solidFill>
+                <a:latin typeface="Segoe UI"/>
+              </a:defRPr>
+            </a:pPr>
+            <a:r>
+              <a:t>System Objectives</a:t>
+            </a:r>
+          </a:p>
+          <a:p>
+            <a:pPr>
+              <a:spcBef>
+                <a:spcPts val="600"/>
+              </a:spcBef>
+              <a:defRPr sz="1000">
+                <a:solidFill>
+                  <a:srgbClr val="94A3B8"/>
+                </a:solidFill>
+                <a:latin typeface="Segoe UI"/>
+              </a:defRPr>
+            </a:pPr>
+            <a:r>
+              <a:t>End-to-end design goals: edge acquisition, math computation, and web telemetry.</a:t>
+            </a:r>
+          </a:p>
+        </p:txBody>
+      </p:sp>
+      <p:sp>
+        <p:nvSpPr>
+          <p:cNvPr id="10" name="Rounded Rectangle 9"/>
           <p:cNvSpPr/>
           <p:nvPr/>
         </p:nvSpPr>
         <p:spPr>
           <a:xfrm>
-            <a:off x="6400800" y="4206240"/>
-            <a:ext cx="4937760" cy="822960"/>
+            <a:off x="8915400" y="1645920"/>
+            <a:ext cx="2514600" cy="2194560"/>
           </a:xfrm>
           <a:prstGeom prst="roundRect">
             <a:avLst/>
           </a:prstGeom>
           <a:solidFill>
-            <a:srgbClr val="F5F7F8"/>
+            <a:srgbClr val="18223A"/>
           </a:solidFill>
           <a:ln w="12700">
             <a:solidFill>
-              <a:srgbClr val="D2DCE1"/>
+              <a:srgbClr val="2D3E62"/>
             </a:solidFill>
           </a:ln>
         </p:spPr>
@@ -4574,43 +4251,75 @@
           </a:fontRef>
         </p:style>
         <p:txBody>
-          <a:bodyPr rtlCol="0" anchor="ctr" wrap="square" lIns="274320"/>
+          <a:bodyPr rtlCol="0" anchor="ctr" wrap="square" tIns="182880" lIns="182880" rIns="182880"/>
           <a:lstStyle/>
           <a:p>
             <a:pPr algn="ctr">
-              <a:defRPr sz="1500" b="1">
-                <a:solidFill>
-                  <a:srgbClr val="102C57"/>
-                </a:solidFill>
-                <a:latin typeface="Arial"/>
-              </a:defRPr>
-            </a:pPr>
-            <a:r>
-              <a:t>❖  06.  Results &amp; Real-Time Performance</a:t>
-            </a:r>
-          </a:p>
-        </p:txBody>
-      </p:sp>
-      <p:sp>
-        <p:nvSpPr>
-          <p:cNvPr id="12" name="Rounded Rectangle 11"/>
+              <a:defRPr sz="2000" b="1">
+                <a:solidFill>
+                  <a:srgbClr val="F59E0B"/>
+                </a:solidFill>
+                <a:latin typeface="Segoe UI"/>
+              </a:defRPr>
+            </a:pPr>
+            <a:r>
+              <a:t>04</a:t>
+            </a:r>
+          </a:p>
+          <a:p>
+            <a:pPr>
+              <a:spcBef>
+                <a:spcPts val="800"/>
+              </a:spcBef>
+              <a:defRPr sz="1300" b="1">
+                <a:solidFill>
+                  <a:srgbClr val="F8FAFC"/>
+                </a:solidFill>
+                <a:latin typeface="Segoe UI"/>
+              </a:defRPr>
+            </a:pPr>
+            <a:r>
+              <a:t>Hardware Architecture</a:t>
+            </a:r>
+          </a:p>
+          <a:p>
+            <a:pPr>
+              <a:spcBef>
+                <a:spcPts val="600"/>
+              </a:spcBef>
+              <a:defRPr sz="1000">
+                <a:solidFill>
+                  <a:srgbClr val="94A3B8"/>
+                </a:solidFill>
+                <a:latin typeface="Segoe UI"/>
+              </a:defRPr>
+            </a:pPr>
+            <a:r>
+              <a:t>ESP32 dual-core MCU, DHT22 capacitive sensor, SSD1306 I2C OLED display.</a:t>
+            </a:r>
+          </a:p>
+        </p:txBody>
+      </p:sp>
+      <p:sp>
+        <p:nvSpPr>
+          <p:cNvPr id="11" name="Rounded Rectangle 10"/>
           <p:cNvSpPr/>
           <p:nvPr/>
         </p:nvSpPr>
         <p:spPr>
           <a:xfrm>
-            <a:off x="1097280" y="5257800"/>
-            <a:ext cx="4937760" cy="822960"/>
+            <a:off x="822960" y="4069080"/>
+            <a:ext cx="2514600" cy="2194560"/>
           </a:xfrm>
           <a:prstGeom prst="roundRect">
             <a:avLst/>
           </a:prstGeom>
           <a:solidFill>
-            <a:srgbClr val="F5F7F8"/>
+            <a:srgbClr val="18223A"/>
           </a:solidFill>
           <a:ln w="12700">
             <a:solidFill>
-              <a:srgbClr val="D2DCE1"/>
+              <a:srgbClr val="2D3E62"/>
             </a:solidFill>
           </a:ln>
         </p:spPr>
@@ -4629,43 +4338,75 @@
           </a:fontRef>
         </p:style>
         <p:txBody>
-          <a:bodyPr rtlCol="0" anchor="ctr" wrap="square" lIns="274320"/>
+          <a:bodyPr rtlCol="0" anchor="ctr" wrap="square" tIns="182880" lIns="182880" rIns="182880"/>
           <a:lstStyle/>
           <a:p>
             <a:pPr algn="ctr">
-              <a:defRPr sz="1500" b="1">
-                <a:solidFill>
-                  <a:srgbClr val="102C57"/>
-                </a:solidFill>
-                <a:latin typeface="Arial"/>
-              </a:defRPr>
-            </a:pPr>
-            <a:r>
-              <a:t>❖  07.  Conclusion &amp; Future Scope</a:t>
-            </a:r>
-          </a:p>
-        </p:txBody>
-      </p:sp>
-      <p:sp>
-        <p:nvSpPr>
-          <p:cNvPr id="13" name="Rounded Rectangle 12"/>
+              <a:defRPr sz="2000" b="1">
+                <a:solidFill>
+                  <a:srgbClr val="14B8A6"/>
+                </a:solidFill>
+                <a:latin typeface="Segoe UI"/>
+              </a:defRPr>
+            </a:pPr>
+            <a:r>
+              <a:t>05</a:t>
+            </a:r>
+          </a:p>
+          <a:p>
+            <a:pPr>
+              <a:spcBef>
+                <a:spcPts val="800"/>
+              </a:spcBef>
+              <a:defRPr sz="1300" b="1">
+                <a:solidFill>
+                  <a:srgbClr val="F8FAFC"/>
+                </a:solidFill>
+                <a:latin typeface="Segoe UI"/>
+              </a:defRPr>
+            </a:pPr>
+            <a:r>
+              <a:t>Software &amp; Cloud Stack</a:t>
+            </a:r>
+          </a:p>
+          <a:p>
+            <a:pPr>
+              <a:spcBef>
+                <a:spcPts val="600"/>
+              </a:spcBef>
+              <a:defRPr sz="1000">
+                <a:solidFill>
+                  <a:srgbClr val="94A3B8"/>
+                </a:solidFill>
+                <a:latin typeface="Segoe UI"/>
+              </a:defRPr>
+            </a:pPr>
+            <a:r>
+              <a:t>PlatformIO C++ firmware, MathWorks ThingSpeak API, and Vercel serverless host.</a:t>
+            </a:r>
+          </a:p>
+        </p:txBody>
+      </p:sp>
+      <p:sp>
+        <p:nvSpPr>
+          <p:cNvPr id="12" name="Rounded Rectangle 11"/>
           <p:cNvSpPr/>
           <p:nvPr/>
         </p:nvSpPr>
         <p:spPr>
           <a:xfrm>
-            <a:off x="6400800" y="5257800"/>
-            <a:ext cx="4937760" cy="822960"/>
+            <a:off x="3520440" y="4069080"/>
+            <a:ext cx="2514600" cy="2194560"/>
           </a:xfrm>
           <a:prstGeom prst="roundRect">
             <a:avLst/>
           </a:prstGeom>
           <a:solidFill>
-            <a:srgbClr val="F5F7F8"/>
+            <a:srgbClr val="18223A"/>
           </a:solidFill>
           <a:ln w="12700">
             <a:solidFill>
-              <a:srgbClr val="D2DCE1"/>
+              <a:srgbClr val="2D3E62"/>
             </a:solidFill>
           </a:ln>
         </p:spPr>
@@ -4684,19 +4425,225 @@
           </a:fontRef>
         </p:style>
         <p:txBody>
-          <a:bodyPr rtlCol="0" anchor="ctr" wrap="square" lIns="274320"/>
+          <a:bodyPr rtlCol="0" anchor="ctr" wrap="square" tIns="182880" lIns="182880" rIns="182880"/>
           <a:lstStyle/>
           <a:p>
             <a:pPr algn="ctr">
-              <a:defRPr sz="1500" b="1">
-                <a:solidFill>
-                  <a:srgbClr val="102C57"/>
-                </a:solidFill>
-                <a:latin typeface="Arial"/>
-              </a:defRPr>
-            </a:pPr>
-            <a:r>
-              <a:t>❖  08.  References</a:t>
+              <a:defRPr sz="2000" b="1">
+                <a:solidFill>
+                  <a:srgbClr val="F97316"/>
+                </a:solidFill>
+                <a:latin typeface="Segoe UI"/>
+              </a:defRPr>
+            </a:pPr>
+            <a:r>
+              <a:t>06</a:t>
+            </a:r>
+          </a:p>
+          <a:p>
+            <a:pPr>
+              <a:spcBef>
+                <a:spcPts val="800"/>
+              </a:spcBef>
+              <a:defRPr sz="1300" b="1">
+                <a:solidFill>
+                  <a:srgbClr val="F8FAFC"/>
+                </a:solidFill>
+                <a:latin typeface="Segoe UI"/>
+              </a:defRPr>
+            </a:pPr>
+            <a:r>
+              <a:t>Results &amp; Live Metrics</a:t>
+            </a:r>
+          </a:p>
+          <a:p>
+            <a:pPr>
+              <a:spcBef>
+                <a:spcPts val="600"/>
+              </a:spcBef>
+              <a:defRPr sz="1000">
+                <a:solidFill>
+                  <a:srgbClr val="94A3B8"/>
+                </a:solidFill>
+                <a:latin typeface="Segoe UI"/>
+              </a:defRPr>
+            </a:pPr>
+            <a:r>
+              <a:t>Real-world test data, 24-hr canvas history graph, and extreme temperature tracking.</a:t>
+            </a:r>
+          </a:p>
+        </p:txBody>
+      </p:sp>
+      <p:sp>
+        <p:nvSpPr>
+          <p:cNvPr id="13" name="Rounded Rectangle 12"/>
+          <p:cNvSpPr/>
+          <p:nvPr/>
+        </p:nvSpPr>
+        <p:spPr>
+          <a:xfrm>
+            <a:off x="6217920" y="4069080"/>
+            <a:ext cx="2514600" cy="2194560"/>
+          </a:xfrm>
+          <a:prstGeom prst="roundRect">
+            <a:avLst/>
+          </a:prstGeom>
+          <a:solidFill>
+            <a:srgbClr val="18223A"/>
+          </a:solidFill>
+          <a:ln w="12700">
+            <a:solidFill>
+              <a:srgbClr val="2D3E62"/>
+            </a:solidFill>
+          </a:ln>
+        </p:spPr>
+        <p:style>
+          <a:lnRef idx="1">
+            <a:schemeClr val="accent1"/>
+          </a:lnRef>
+          <a:fillRef idx="3">
+            <a:schemeClr val="accent1"/>
+          </a:fillRef>
+          <a:effectRef idx="2">
+            <a:schemeClr val="accent1"/>
+          </a:effectRef>
+          <a:fontRef idx="minor">
+            <a:schemeClr val="lt1"/>
+          </a:fontRef>
+        </p:style>
+        <p:txBody>
+          <a:bodyPr rtlCol="0" anchor="ctr" wrap="square" tIns="182880" lIns="182880" rIns="182880"/>
+          <a:lstStyle/>
+          <a:p>
+            <a:pPr algn="ctr">
+              <a:defRPr sz="2000" b="1">
+                <a:solidFill>
+                  <a:srgbClr val="38BDF8"/>
+                </a:solidFill>
+                <a:latin typeface="Segoe UI"/>
+              </a:defRPr>
+            </a:pPr>
+            <a:r>
+              <a:t>07</a:t>
+            </a:r>
+          </a:p>
+          <a:p>
+            <a:pPr>
+              <a:spcBef>
+                <a:spcPts val="800"/>
+              </a:spcBef>
+              <a:defRPr sz="1300" b="1">
+                <a:solidFill>
+                  <a:srgbClr val="F8FAFC"/>
+                </a:solidFill>
+                <a:latin typeface="Segoe UI"/>
+              </a:defRPr>
+            </a:pPr>
+            <a:r>
+              <a:t>Conclusion &amp; Future Scope</a:t>
+            </a:r>
+          </a:p>
+          <a:p>
+            <a:pPr>
+              <a:spcBef>
+                <a:spcPts val="600"/>
+              </a:spcBef>
+              <a:defRPr sz="1000">
+                <a:solidFill>
+                  <a:srgbClr val="94A3B8"/>
+                </a:solidFill>
+                <a:latin typeface="Segoe UI"/>
+              </a:defRPr>
+            </a:pPr>
+            <a:r>
+              <a:t>System accomplishments, solar battery harvesting, and multi-sensor expansion.</a:t>
+            </a:r>
+          </a:p>
+        </p:txBody>
+      </p:sp>
+      <p:sp>
+        <p:nvSpPr>
+          <p:cNvPr id="14" name="Rounded Rectangle 13"/>
+          <p:cNvSpPr/>
+          <p:nvPr/>
+        </p:nvSpPr>
+        <p:spPr>
+          <a:xfrm>
+            <a:off x="8915400" y="4069080"/>
+            <a:ext cx="2514600" cy="2194560"/>
+          </a:xfrm>
+          <a:prstGeom prst="roundRect">
+            <a:avLst/>
+          </a:prstGeom>
+          <a:solidFill>
+            <a:srgbClr val="18223A"/>
+          </a:solidFill>
+          <a:ln w="12700">
+            <a:solidFill>
+              <a:srgbClr val="2D3E62"/>
+            </a:solidFill>
+          </a:ln>
+        </p:spPr>
+        <p:style>
+          <a:lnRef idx="1">
+            <a:schemeClr val="accent1"/>
+          </a:lnRef>
+          <a:fillRef idx="3">
+            <a:schemeClr val="accent1"/>
+          </a:fillRef>
+          <a:effectRef idx="2">
+            <a:schemeClr val="accent1"/>
+          </a:effectRef>
+          <a:fontRef idx="minor">
+            <a:schemeClr val="lt1"/>
+          </a:fontRef>
+        </p:style>
+        <p:txBody>
+          <a:bodyPr rtlCol="0" anchor="ctr" wrap="square" tIns="182880" lIns="182880" rIns="182880"/>
+          <a:lstStyle/>
+          <a:p>
+            <a:pPr algn="ctr">
+              <a:defRPr sz="2000" b="1">
+                <a:solidFill>
+                  <a:srgbClr val="F59E0B"/>
+                </a:solidFill>
+                <a:latin typeface="Segoe UI"/>
+              </a:defRPr>
+            </a:pPr>
+            <a:r>
+              <a:t>08</a:t>
+            </a:r>
+          </a:p>
+          <a:p>
+            <a:pPr>
+              <a:spcBef>
+                <a:spcPts val="800"/>
+              </a:spcBef>
+              <a:defRPr sz="1300" b="1">
+                <a:solidFill>
+                  <a:srgbClr val="F8FAFC"/>
+                </a:solidFill>
+                <a:latin typeface="Segoe UI"/>
+              </a:defRPr>
+            </a:pPr>
+            <a:r>
+              <a:t>References &amp; Standards</a:t>
+            </a:r>
+          </a:p>
+          <a:p>
+            <a:pPr>
+              <a:spcBef>
+                <a:spcPts val="600"/>
+              </a:spcBef>
+              <a:defRPr sz="1000">
+                <a:solidFill>
+                  <a:srgbClr val="94A3B8"/>
+                </a:solidFill>
+                <a:latin typeface="Segoe UI"/>
+              </a:defRPr>
+            </a:pPr>
+            <a:r>
+              <a:t>IEEE research papers, sensor datasheets, and official technical references.</a:t>
             </a:r>
           </a:p>
         </p:txBody>
@@ -4728,13 +4675,13 @@
         <p:spPr>
           <a:xfrm>
             <a:off x="0" y="0"/>
-            <a:ext cx="12191695" cy="109728"/>
+            <a:ext cx="12191695" cy="6858000"/>
           </a:xfrm>
           <a:prstGeom prst="rect">
             <a:avLst/>
           </a:prstGeom>
           <a:solidFill>
-            <a:srgbClr val="102C57"/>
+            <a:srgbClr val="0F172A"/>
           </a:solidFill>
           <a:ln>
             <a:noFill/>
@@ -4764,105 +4711,20 @@
       </p:sp>
       <p:sp>
         <p:nvSpPr>
-          <p:cNvPr id="3" name="TextBox 2"/>
-          <p:cNvSpPr txBox="1"/>
-          <p:nvPr/>
-        </p:nvSpPr>
-        <p:spPr>
-          <a:xfrm>
-            <a:off x="731520" y="274320"/>
-            <a:ext cx="10728655" cy="822960"/>
-          </a:xfrm>
-          <a:prstGeom prst="rect">
-            <a:avLst/>
-          </a:prstGeom>
-          <a:noFill/>
-        </p:spPr>
-        <p:txBody>
-          <a:bodyPr wrap="square" lIns="0" tIns="0" rIns="0" bIns="0">
-            <a:spAutoFit/>
-          </a:bodyPr>
-          <a:lstStyle/>
-          <a:p>
-            <a:pPr>
-              <a:defRPr sz="1300" b="1">
-                <a:solidFill>
-                  <a:srgbClr val="102C57"/>
-                </a:solidFill>
-                <a:latin typeface="Arial"/>
-              </a:defRPr>
-            </a:pPr>
-            <a:r>
-              <a:t>Galgotias College of Engineering &amp; Technology, Greater Noida</a:t>
-            </a:r>
-          </a:p>
-          <a:p>
-            <a:pPr>
-              <a:defRPr sz="1100" b="1">
-                <a:solidFill>
-                  <a:srgbClr val="646E73"/>
-                </a:solidFill>
-                <a:latin typeface="Arial"/>
-              </a:defRPr>
-            </a:pPr>
-            <a:r>
-              <a:t>DEPARTMENT OF ELECTRONICS AND COMMUNICATION ENGINEERING</a:t>
-            </a:r>
-          </a:p>
-        </p:txBody>
-      </p:sp>
-      <p:sp>
-        <p:nvSpPr>
-          <p:cNvPr id="4" name="TextBox 3"/>
-          <p:cNvSpPr txBox="1"/>
-          <p:nvPr/>
-        </p:nvSpPr>
-        <p:spPr>
-          <a:xfrm>
-            <a:off x="731520" y="1097280"/>
-            <a:ext cx="10728655" cy="640080"/>
-          </a:xfrm>
-          <a:prstGeom prst="rect">
-            <a:avLst/>
-          </a:prstGeom>
-          <a:noFill/>
-        </p:spPr>
-        <p:txBody>
-          <a:bodyPr wrap="square" lIns="0" tIns="0" rIns="0" bIns="0">
-            <a:spAutoFit/>
-          </a:bodyPr>
-          <a:lstStyle/>
-          <a:p>
-            <a:pPr>
-              <a:defRPr sz="2600" b="1">
-                <a:solidFill>
-                  <a:srgbClr val="102C57"/>
-                </a:solidFill>
-                <a:latin typeface="Arial"/>
-              </a:defRPr>
-            </a:pPr>
-            <a:r>
-              <a:t>INTRODUCTION</a:t>
-            </a:r>
-          </a:p>
-        </p:txBody>
-      </p:sp>
-      <p:sp>
-        <p:nvSpPr>
-          <p:cNvPr id="5" name="Rectangle 4"/>
+          <p:cNvPr id="3" name="Rectangle 2"/>
           <p:cNvSpPr/>
           <p:nvPr/>
         </p:nvSpPr>
         <p:spPr>
           <a:xfrm>
-            <a:off x="731520" y="1783080"/>
-            <a:ext cx="2011680" cy="45720"/>
+            <a:off x="0" y="0"/>
+            <a:ext cx="12191695" cy="73152"/>
           </a:xfrm>
           <a:prstGeom prst="rect">
             <a:avLst/>
           </a:prstGeom>
           <a:solidFill>
-            <a:srgbClr val="E87652"/>
+            <a:srgbClr val="14B8A6"/>
           </a:solidFill>
           <a:ln>
             <a:noFill/>
@@ -4892,14 +4754,124 @@
       </p:sp>
       <p:sp>
         <p:nvSpPr>
+          <p:cNvPr id="4" name="Rounded Rectangle 3"/>
+          <p:cNvSpPr/>
+          <p:nvPr/>
+        </p:nvSpPr>
+        <p:spPr>
+          <a:xfrm>
+            <a:off x="822960" y="320040"/>
+            <a:ext cx="6858000" cy="347472"/>
+          </a:xfrm>
+          <a:prstGeom prst="roundRect">
+            <a:avLst/>
+          </a:prstGeom>
+          <a:solidFill>
+            <a:srgbClr val="18223A"/>
+          </a:solidFill>
+          <a:ln w="12700">
+            <a:solidFill>
+              <a:srgbClr val="2D3E62"/>
+            </a:solidFill>
+          </a:ln>
+        </p:spPr>
+        <p:style>
+          <a:lnRef idx="1">
+            <a:schemeClr val="accent1"/>
+          </a:lnRef>
+          <a:fillRef idx="3">
+            <a:schemeClr val="accent1"/>
+          </a:fillRef>
+          <a:effectRef idx="2">
+            <a:schemeClr val="accent1"/>
+          </a:effectRef>
+          <a:fontRef idx="minor">
+            <a:schemeClr val="lt1"/>
+          </a:fontRef>
+        </p:style>
+        <p:txBody>
+          <a:bodyPr rtlCol="0" anchor="ctr" tIns="54864" lIns="182880"/>
+          <a:lstStyle/>
+          <a:p>
+            <a:pPr algn="ctr">
+              <a:defRPr sz="850" b="1">
+                <a:solidFill>
+                  <a:srgbClr val="14B8A6"/>
+                </a:solidFill>
+                <a:latin typeface="Segoe UI"/>
+              </a:defRPr>
+            </a:pPr>
+            <a:r>
+              <a:t>GALGOTIAS COLLEGE OF ENGG. &amp; TECH.  •  ECE DEPARTMENT  •  BACKGROUND</a:t>
+            </a:r>
+          </a:p>
+        </p:txBody>
+      </p:sp>
+      <p:sp>
+        <p:nvSpPr>
+          <p:cNvPr id="5" name="Rounded Rectangle 4"/>
+          <p:cNvSpPr/>
+          <p:nvPr/>
+        </p:nvSpPr>
+        <p:spPr>
+          <a:xfrm>
+            <a:off x="10607040" y="320040"/>
+            <a:ext cx="777240" cy="347472"/>
+          </a:xfrm>
+          <a:prstGeom prst="roundRect">
+            <a:avLst/>
+          </a:prstGeom>
+          <a:solidFill>
+            <a:srgbClr val="18223A"/>
+          </a:solidFill>
+          <a:ln w="12700">
+            <a:solidFill>
+              <a:srgbClr val="2D3E62"/>
+            </a:solidFill>
+          </a:ln>
+        </p:spPr>
+        <p:style>
+          <a:lnRef idx="1">
+            <a:schemeClr val="accent1"/>
+          </a:lnRef>
+          <a:fillRef idx="3">
+            <a:schemeClr val="accent1"/>
+          </a:fillRef>
+          <a:effectRef idx="2">
+            <a:schemeClr val="accent1"/>
+          </a:effectRef>
+          <a:fontRef idx="minor">
+            <a:schemeClr val="lt1"/>
+          </a:fontRef>
+        </p:style>
+        <p:txBody>
+          <a:bodyPr rtlCol="0" anchor="ctr"/>
+          <a:lstStyle/>
+          <a:p>
+            <a:pPr algn="ctr">
+              <a:defRPr sz="900" b="1">
+                <a:solidFill>
+                  <a:srgbClr val="94A3B8"/>
+                </a:solidFill>
+                <a:latin typeface="Segoe UI"/>
+              </a:defRPr>
+            </a:pPr>
+            <a:r>
+              <a:t>03 / 10</a:t>
+            </a:r>
+          </a:p>
+        </p:txBody>
+      </p:sp>
+      <p:sp>
+        <p:nvSpPr>
           <p:cNvPr id="6" name="TextBox 5"/>
           <p:cNvSpPr txBox="1"/>
           <p:nvPr/>
         </p:nvSpPr>
         <p:spPr>
           <a:xfrm>
-            <a:off x="914400" y="2011680"/>
-            <a:ext cx="10362895" cy="4389120"/>
+            <a:off x="822960" y="777240"/>
+            <a:ext cx="10515600" cy="685800"/>
           </a:xfrm>
           <a:prstGeom prst="rect">
             <a:avLst/>
@@ -4907,134 +4879,542 @@
           <a:noFill/>
         </p:spPr>
         <p:txBody>
-          <a:bodyPr wrap="square">
+          <a:bodyPr wrap="square" lIns="0" tIns="0" rIns="0" bIns="0">
             <a:spAutoFit/>
           </a:bodyPr>
           <a:lstStyle/>
           <a:p>
             <a:pPr>
-              <a:spcAft>
+              <a:defRPr sz="2400" b="1">
+                <a:solidFill>
+                  <a:srgbClr val="F8FAFC"/>
+                </a:solidFill>
+                <a:latin typeface="Segoe UI"/>
+              </a:defRPr>
+            </a:pPr>
+            <a:r>
+              <a:t>Introduction &amp; Problem Statement</a:t>
+            </a:r>
+          </a:p>
+        </p:txBody>
+      </p:sp>
+      <p:sp>
+        <p:nvSpPr>
+          <p:cNvPr id="7" name="Rounded Rectangle 6"/>
+          <p:cNvSpPr/>
+          <p:nvPr/>
+        </p:nvSpPr>
+        <p:spPr>
+          <a:xfrm>
+            <a:off x="822960" y="1645920"/>
+            <a:ext cx="2514600" cy="4663440"/>
+          </a:xfrm>
+          <a:prstGeom prst="roundRect">
+            <a:avLst/>
+          </a:prstGeom>
+          <a:solidFill>
+            <a:srgbClr val="18223A"/>
+          </a:solidFill>
+          <a:ln w="12700">
+            <a:solidFill>
+              <a:srgbClr val="2D3E62"/>
+            </a:solidFill>
+          </a:ln>
+        </p:spPr>
+        <p:style>
+          <a:lnRef idx="1">
+            <a:schemeClr val="accent1"/>
+          </a:lnRef>
+          <a:fillRef idx="3">
+            <a:schemeClr val="accent1"/>
+          </a:fillRef>
+          <a:effectRef idx="2">
+            <a:schemeClr val="accent1"/>
+          </a:effectRef>
+          <a:fontRef idx="minor">
+            <a:schemeClr val="lt1"/>
+          </a:fontRef>
+        </p:style>
+        <p:txBody>
+          <a:bodyPr rtlCol="0" anchor="ctr" wrap="square" tIns="274320" lIns="182880" rIns="182880"/>
+          <a:lstStyle/>
+          <a:p>
+            <a:pPr algn="ctr">
+              <a:defRPr sz="1000" b="1">
+                <a:solidFill>
+                  <a:srgbClr val="F97316"/>
+                </a:solidFill>
+                <a:latin typeface="Segoe UI"/>
+              </a:defRPr>
+            </a:pPr>
+            <a:r>
+              <a:t>PILLAR 01</a:t>
+            </a:r>
+          </a:p>
+          <a:p>
+            <a:pPr>
+              <a:spcBef>
+                <a:spcPts val="800"/>
+              </a:spcBef>
+              <a:defRPr sz="1500" b="1">
+                <a:solidFill>
+                  <a:srgbClr val="F8FAFC"/>
+                </a:solidFill>
+                <a:latin typeface="Segoe UI"/>
+              </a:defRPr>
+            </a:pPr>
+            <a:r>
+              <a:t>Localized Microclimates</a:t>
+            </a:r>
+          </a:p>
+          <a:p>
+            <a:pPr>
+              <a:spcBef>
                 <a:spcPts val="1400"/>
-              </a:spcAft>
-            </a:pPr>
-            <a:r>
-              <a:rPr b="1" sz="1500">
-                <a:solidFill>
-                  <a:srgbClr val="102C57"/>
-                </a:solidFill>
-                <a:latin typeface="Arial"/>
-              </a:rPr>
-              <a:t>• Rapid Urbanization &amp; Microclimate Shifts:</a:t>
-            </a:r>
-            <a:r>
-              <a:rPr b="0" sz="1500">
-                <a:solidFill>
-                  <a:srgbClr val="172B2C"/>
-                </a:solidFill>
-                <a:latin typeface="Arial"/>
-              </a:rPr>
-              <a:t> Localized meteorological variations significantly impact human health, agricultural yields, industrial workspaces, and smart city infrastructure.</a:t>
+              </a:spcBef>
+              <a:defRPr sz="1150">
+                <a:solidFill>
+                  <a:srgbClr val="94A3B8"/>
+                </a:solidFill>
+                <a:latin typeface="Segoe UI"/>
+              </a:defRPr>
+            </a:pPr>
+            <a:r>
+              <a:t>Macro weather stations are located tens of kilometers apart at airports, failing to reflect microclimates inside urban corridors, agricultural greenhouses, server rooms, and academic campuses.</a:t>
+            </a:r>
+          </a:p>
+        </p:txBody>
+      </p:sp>
+      <p:sp>
+        <p:nvSpPr>
+          <p:cNvPr id="8" name="Rectangle 7"/>
+          <p:cNvSpPr/>
+          <p:nvPr/>
+        </p:nvSpPr>
+        <p:spPr>
+          <a:xfrm>
+            <a:off x="1005840" y="1645920"/>
+            <a:ext cx="914400" cy="54864"/>
+          </a:xfrm>
+          <a:prstGeom prst="rect">
+            <a:avLst/>
+          </a:prstGeom>
+          <a:solidFill>
+            <a:srgbClr val="F97316"/>
+          </a:solidFill>
+          <a:ln>
+            <a:noFill/>
+          </a:ln>
+        </p:spPr>
+        <p:style>
+          <a:lnRef idx="1">
+            <a:schemeClr val="accent1"/>
+          </a:lnRef>
+          <a:fillRef idx="3">
+            <a:schemeClr val="accent1"/>
+          </a:fillRef>
+          <a:effectRef idx="2">
+            <a:schemeClr val="accent1"/>
+          </a:effectRef>
+          <a:fontRef idx="minor">
+            <a:schemeClr val="lt1"/>
+          </a:fontRef>
+        </p:style>
+        <p:txBody>
+          <a:bodyPr rtlCol="0" anchor="ctr"/>
+          <a:lstStyle/>
+          <a:p>
+            <a:pPr algn="ctr"/>
+          </a:p>
+        </p:txBody>
+      </p:sp>
+      <p:sp>
+        <p:nvSpPr>
+          <p:cNvPr id="9" name="Rounded Rectangle 8"/>
+          <p:cNvSpPr/>
+          <p:nvPr/>
+        </p:nvSpPr>
+        <p:spPr>
+          <a:xfrm>
+            <a:off x="3520440" y="1645920"/>
+            <a:ext cx="2514600" cy="4663440"/>
+          </a:xfrm>
+          <a:prstGeom prst="roundRect">
+            <a:avLst/>
+          </a:prstGeom>
+          <a:solidFill>
+            <a:srgbClr val="18223A"/>
+          </a:solidFill>
+          <a:ln w="12700">
+            <a:solidFill>
+              <a:srgbClr val="2D3E62"/>
+            </a:solidFill>
+          </a:ln>
+        </p:spPr>
+        <p:style>
+          <a:lnRef idx="1">
+            <a:schemeClr val="accent1"/>
+          </a:lnRef>
+          <a:fillRef idx="3">
+            <a:schemeClr val="accent1"/>
+          </a:fillRef>
+          <a:effectRef idx="2">
+            <a:schemeClr val="accent1"/>
+          </a:effectRef>
+          <a:fontRef idx="minor">
+            <a:schemeClr val="lt1"/>
+          </a:fontRef>
+        </p:style>
+        <p:txBody>
+          <a:bodyPr rtlCol="0" anchor="ctr" wrap="square" tIns="274320" lIns="182880" rIns="182880"/>
+          <a:lstStyle/>
+          <a:p>
+            <a:pPr algn="ctr">
+              <a:defRPr sz="1000" b="1">
+                <a:solidFill>
+                  <a:srgbClr val="F59E0B"/>
+                </a:solidFill>
+                <a:latin typeface="Segoe UI"/>
+              </a:defRPr>
+            </a:pPr>
+            <a:r>
+              <a:t>PILLAR 02</a:t>
             </a:r>
           </a:p>
           <a:p>
             <a:pPr>
-              <a:spcAft>
+              <a:spcBef>
+                <a:spcPts val="800"/>
+              </a:spcBef>
+              <a:defRPr sz="1500" b="1">
+                <a:solidFill>
+                  <a:srgbClr val="F8FAFC"/>
+                </a:solidFill>
+                <a:latin typeface="Segoe UI"/>
+              </a:defRPr>
+            </a:pPr>
+            <a:r>
+              <a:t>Legacy System Bottlenecks</a:t>
+            </a:r>
+          </a:p>
+          <a:p>
+            <a:pPr>
+              <a:spcBef>
                 <a:spcPts val="1400"/>
-              </a:spcAft>
-            </a:pPr>
-            <a:r>
-              <a:rPr b="1" sz="1500">
-                <a:solidFill>
-                  <a:srgbClr val="102C57"/>
-                </a:solidFill>
-                <a:latin typeface="Arial"/>
-              </a:rPr>
-              <a:t>• Limitations of Conventional Weather Stations:</a:t>
-            </a:r>
-            <a:r>
-              <a:rPr b="0" sz="1500">
-                <a:solidFill>
-                  <a:srgbClr val="172B2C"/>
-                </a:solidFill>
-                <a:latin typeface="Arial"/>
-              </a:rPr>
-              <a:t> Traditional weather monitoring systems are bulky, expensive, lack cloud accessibility, and provide low temporal resolution with delays.</a:t>
+              </a:spcBef>
+              <a:defRPr sz="1150">
+                <a:solidFill>
+                  <a:srgbClr val="94A3B8"/>
+                </a:solidFill>
+                <a:latin typeface="Segoe UI"/>
+              </a:defRPr>
+            </a:pPr>
+            <a:r>
+              <a:t>Conventional meteorological systems are bulky, cost-prohibitive ($1,000+), rely on manual data extraction, and lack unified instant cloud access for end-users.</a:t>
+            </a:r>
+          </a:p>
+        </p:txBody>
+      </p:sp>
+      <p:sp>
+        <p:nvSpPr>
+          <p:cNvPr id="10" name="Rectangle 9"/>
+          <p:cNvSpPr/>
+          <p:nvPr/>
+        </p:nvSpPr>
+        <p:spPr>
+          <a:xfrm>
+            <a:off x="3703320" y="1645920"/>
+            <a:ext cx="914400" cy="54864"/>
+          </a:xfrm>
+          <a:prstGeom prst="rect">
+            <a:avLst/>
+          </a:prstGeom>
+          <a:solidFill>
+            <a:srgbClr val="F59E0B"/>
+          </a:solidFill>
+          <a:ln>
+            <a:noFill/>
+          </a:ln>
+        </p:spPr>
+        <p:style>
+          <a:lnRef idx="1">
+            <a:schemeClr val="accent1"/>
+          </a:lnRef>
+          <a:fillRef idx="3">
+            <a:schemeClr val="accent1"/>
+          </a:fillRef>
+          <a:effectRef idx="2">
+            <a:schemeClr val="accent1"/>
+          </a:effectRef>
+          <a:fontRef idx="minor">
+            <a:schemeClr val="lt1"/>
+          </a:fontRef>
+        </p:style>
+        <p:txBody>
+          <a:bodyPr rtlCol="0" anchor="ctr"/>
+          <a:lstStyle/>
+          <a:p>
+            <a:pPr algn="ctr"/>
+          </a:p>
+        </p:txBody>
+      </p:sp>
+      <p:sp>
+        <p:nvSpPr>
+          <p:cNvPr id="11" name="Rounded Rectangle 10"/>
+          <p:cNvSpPr/>
+          <p:nvPr/>
+        </p:nvSpPr>
+        <p:spPr>
+          <a:xfrm>
+            <a:off x="6217920" y="1645920"/>
+            <a:ext cx="2514600" cy="4663440"/>
+          </a:xfrm>
+          <a:prstGeom prst="roundRect">
+            <a:avLst/>
+          </a:prstGeom>
+          <a:solidFill>
+            <a:srgbClr val="18223A"/>
+          </a:solidFill>
+          <a:ln w="12700">
+            <a:solidFill>
+              <a:srgbClr val="2D3E62"/>
+            </a:solidFill>
+          </a:ln>
+        </p:spPr>
+        <p:style>
+          <a:lnRef idx="1">
+            <a:schemeClr val="accent1"/>
+          </a:lnRef>
+          <a:fillRef idx="3">
+            <a:schemeClr val="accent1"/>
+          </a:fillRef>
+          <a:effectRef idx="2">
+            <a:schemeClr val="accent1"/>
+          </a:effectRef>
+          <a:fontRef idx="minor">
+            <a:schemeClr val="lt1"/>
+          </a:fontRef>
+        </p:style>
+        <p:txBody>
+          <a:bodyPr rtlCol="0" anchor="ctr" wrap="square" tIns="274320" lIns="182880" rIns="182880"/>
+          <a:lstStyle/>
+          <a:p>
+            <a:pPr algn="ctr">
+              <a:defRPr sz="1000" b="1">
+                <a:solidFill>
+                  <a:srgbClr val="14B8A6"/>
+                </a:solidFill>
+                <a:latin typeface="Segoe UI"/>
+              </a:defRPr>
+            </a:pPr>
+            <a:r>
+              <a:t>PILLAR 03</a:t>
             </a:r>
           </a:p>
           <a:p>
             <a:pPr>
-              <a:spcAft>
+              <a:spcBef>
+                <a:spcPts val="800"/>
+              </a:spcBef>
+              <a:defRPr sz="1500" b="1">
+                <a:solidFill>
+                  <a:srgbClr val="F8FAFC"/>
+                </a:solidFill>
+                <a:latin typeface="Segoe UI"/>
+              </a:defRPr>
+            </a:pPr>
+            <a:r>
+              <a:t>IoT &amp; Edge Intelligence</a:t>
+            </a:r>
+          </a:p>
+          <a:p>
+            <a:pPr>
+              <a:spcBef>
                 <a:spcPts val="1400"/>
-              </a:spcAft>
-            </a:pPr>
-            <a:r>
-              <a:rPr b="1" sz="1500">
-                <a:solidFill>
-                  <a:srgbClr val="102C57"/>
-                </a:solidFill>
-                <a:latin typeface="Arial"/>
-              </a:rPr>
-              <a:t>• The Role of IoT &amp; Embedded Systems:</a:t>
-            </a:r>
-            <a:r>
-              <a:rPr b="0" sz="1500">
-                <a:solidFill>
-                  <a:srgbClr val="172B2C"/>
-                </a:solidFill>
-                <a:latin typeface="Arial"/>
-              </a:rPr>
-              <a:t> Internet of Things (IoT) enables distributed, low-power, and compact sensing nodes that capture environmental parameters autonomously in real time.</a:t>
+              </a:spcBef>
+              <a:defRPr sz="1150">
+                <a:solidFill>
+                  <a:srgbClr val="94A3B8"/>
+                </a:solidFill>
+                <a:latin typeface="Segoe UI"/>
+              </a:defRPr>
+            </a:pPr>
+            <a:r>
+              <a:t>Low-power microcontrollers like the ESP32 enable distributed sensing nodes with on-board edge computation (heat index, dew point) and Wi-Fi transmission.</a:t>
+            </a:r>
+          </a:p>
+        </p:txBody>
+      </p:sp>
+      <p:sp>
+        <p:nvSpPr>
+          <p:cNvPr id="12" name="Rectangle 11"/>
+          <p:cNvSpPr/>
+          <p:nvPr/>
+        </p:nvSpPr>
+        <p:spPr>
+          <a:xfrm>
+            <a:off x="6400800" y="1645920"/>
+            <a:ext cx="914400" cy="54864"/>
+          </a:xfrm>
+          <a:prstGeom prst="rect">
+            <a:avLst/>
+          </a:prstGeom>
+          <a:solidFill>
+            <a:srgbClr val="14B8A6"/>
+          </a:solidFill>
+          <a:ln>
+            <a:noFill/>
+          </a:ln>
+        </p:spPr>
+        <p:style>
+          <a:lnRef idx="1">
+            <a:schemeClr val="accent1"/>
+          </a:lnRef>
+          <a:fillRef idx="3">
+            <a:schemeClr val="accent1"/>
+          </a:fillRef>
+          <a:effectRef idx="2">
+            <a:schemeClr val="accent1"/>
+          </a:effectRef>
+          <a:fontRef idx="minor">
+            <a:schemeClr val="lt1"/>
+          </a:fontRef>
+        </p:style>
+        <p:txBody>
+          <a:bodyPr rtlCol="0" anchor="ctr"/>
+          <a:lstStyle/>
+          <a:p>
+            <a:pPr algn="ctr"/>
+          </a:p>
+        </p:txBody>
+      </p:sp>
+      <p:sp>
+        <p:nvSpPr>
+          <p:cNvPr id="13" name="Rounded Rectangle 12"/>
+          <p:cNvSpPr/>
+          <p:nvPr/>
+        </p:nvSpPr>
+        <p:spPr>
+          <a:xfrm>
+            <a:off x="8915400" y="1645920"/>
+            <a:ext cx="2514600" cy="4663440"/>
+          </a:xfrm>
+          <a:prstGeom prst="roundRect">
+            <a:avLst/>
+          </a:prstGeom>
+          <a:solidFill>
+            <a:srgbClr val="18223A"/>
+          </a:solidFill>
+          <a:ln w="12700">
+            <a:solidFill>
+              <a:srgbClr val="2D3E62"/>
+            </a:solidFill>
+          </a:ln>
+        </p:spPr>
+        <p:style>
+          <a:lnRef idx="1">
+            <a:schemeClr val="accent1"/>
+          </a:lnRef>
+          <a:fillRef idx="3">
+            <a:schemeClr val="accent1"/>
+          </a:fillRef>
+          <a:effectRef idx="2">
+            <a:schemeClr val="accent1"/>
+          </a:effectRef>
+          <a:fontRef idx="minor">
+            <a:schemeClr val="lt1"/>
+          </a:fontRef>
+        </p:style>
+        <p:txBody>
+          <a:bodyPr rtlCol="0" anchor="ctr" wrap="square" tIns="274320" lIns="182880" rIns="182880"/>
+          <a:lstStyle/>
+          <a:p>
+            <a:pPr algn="ctr">
+              <a:defRPr sz="1000" b="1">
+                <a:solidFill>
+                  <a:srgbClr val="38BDF8"/>
+                </a:solidFill>
+                <a:latin typeface="Segoe UI"/>
+              </a:defRPr>
+            </a:pPr>
+            <a:r>
+              <a:t>PILLAR 04</a:t>
             </a:r>
           </a:p>
           <a:p>
             <a:pPr>
-              <a:spcAft>
+              <a:spcBef>
+                <a:spcPts val="800"/>
+              </a:spcBef>
+              <a:defRPr sz="1500" b="1">
+                <a:solidFill>
+                  <a:srgbClr val="F8FAFC"/>
+                </a:solidFill>
+                <a:latin typeface="Segoe UI"/>
+              </a:defRPr>
+            </a:pPr>
+            <a:r>
+              <a:t>Dual Telemetry Paradigm</a:t>
+            </a:r>
+          </a:p>
+          <a:p>
+            <a:pPr>
+              <a:spcBef>
                 <a:spcPts val="1400"/>
-              </a:spcAft>
-            </a:pPr>
-            <a:r>
-              <a:rPr b="1" sz="1500">
-                <a:solidFill>
-                  <a:srgbClr val="102C57"/>
-                </a:solidFill>
-                <a:latin typeface="Arial"/>
-              </a:rPr>
-              <a:t>• Core Implementation Technology:</a:t>
-            </a:r>
-            <a:r>
-              <a:rPr b="0" sz="1500">
-                <a:solidFill>
-                  <a:srgbClr val="172B2C"/>
-                </a:solidFill>
-                <a:latin typeface="Arial"/>
-              </a:rPr>
-              <a:t> Utilizing the dual-core ESP32 microcontroller with integrated 2.4 GHz Wi-Fi to acquire high-precision temperature and humidity readings from a DHT22 sensor.</a:t>
-            </a:r>
-          </a:p>
-          <a:p>
-            <a:pPr>
-              <a:spcAft>
-                <a:spcPts val="1400"/>
-              </a:spcAft>
-            </a:pPr>
-            <a:r>
-              <a:rPr b="1" sz="1500">
-                <a:solidFill>
-                  <a:srgbClr val="102C57"/>
-                </a:solidFill>
-                <a:latin typeface="Arial"/>
-              </a:rPr>
-              <a:t>• Edge &amp; Cloud Synergy:</a:t>
-            </a:r>
-            <a:r>
-              <a:rPr b="0" sz="1500">
-                <a:solidFill>
-                  <a:srgbClr val="172B2C"/>
-                </a:solidFill>
-                <a:latin typeface="Arial"/>
-              </a:rPr>
-              <a:t> Sensor telemetry is simultaneously rendered locally on an I2C SSD1306 OLED display for immediate observation and pushed to ThingSpeak IoT Cloud for remote web analytics.</a:t>
-            </a:r>
+              </a:spcBef>
+              <a:defRPr sz="1150">
+                <a:solidFill>
+                  <a:srgbClr val="94A3B8"/>
+                </a:solidFill>
+                <a:latin typeface="Segoe UI"/>
+              </a:defRPr>
+            </a:pPr>
+            <a:r>
+              <a:t>Local OLED display guarantees zero-latency on-site visual diagnostics even when offline, while ThingSpeak &amp; Vercel deliver global, browser-based access.</a:t>
+            </a:r>
+          </a:p>
+        </p:txBody>
+      </p:sp>
+      <p:sp>
+        <p:nvSpPr>
+          <p:cNvPr id="14" name="Rectangle 13"/>
+          <p:cNvSpPr/>
+          <p:nvPr/>
+        </p:nvSpPr>
+        <p:spPr>
+          <a:xfrm>
+            <a:off x="9098280" y="1645920"/>
+            <a:ext cx="914400" cy="54864"/>
+          </a:xfrm>
+          <a:prstGeom prst="rect">
+            <a:avLst/>
+          </a:prstGeom>
+          <a:solidFill>
+            <a:srgbClr val="38BDF8"/>
+          </a:solidFill>
+          <a:ln>
+            <a:noFill/>
+          </a:ln>
+        </p:spPr>
+        <p:style>
+          <a:lnRef idx="1">
+            <a:schemeClr val="accent1"/>
+          </a:lnRef>
+          <a:fillRef idx="3">
+            <a:schemeClr val="accent1"/>
+          </a:fillRef>
+          <a:effectRef idx="2">
+            <a:schemeClr val="accent1"/>
+          </a:effectRef>
+          <a:fontRef idx="minor">
+            <a:schemeClr val="lt1"/>
+          </a:fontRef>
+        </p:style>
+        <p:txBody>
+          <a:bodyPr rtlCol="0" anchor="ctr"/>
+          <a:lstStyle/>
+          <a:p>
+            <a:pPr algn="ctr"/>
           </a:p>
         </p:txBody>
       </p:sp>
@@ -5065,13 +5445,13 @@
         <p:spPr>
           <a:xfrm>
             <a:off x="0" y="0"/>
-            <a:ext cx="12191695" cy="109728"/>
+            <a:ext cx="12191695" cy="6858000"/>
           </a:xfrm>
           <a:prstGeom prst="rect">
             <a:avLst/>
           </a:prstGeom>
           <a:solidFill>
-            <a:srgbClr val="102C57"/>
+            <a:srgbClr val="0F172A"/>
           </a:solidFill>
           <a:ln>
             <a:noFill/>
@@ -5101,105 +5481,20 @@
       </p:sp>
       <p:sp>
         <p:nvSpPr>
-          <p:cNvPr id="3" name="TextBox 2"/>
-          <p:cNvSpPr txBox="1"/>
-          <p:nvPr/>
-        </p:nvSpPr>
-        <p:spPr>
-          <a:xfrm>
-            <a:off x="731520" y="274320"/>
-            <a:ext cx="10728655" cy="822960"/>
-          </a:xfrm>
-          <a:prstGeom prst="rect">
-            <a:avLst/>
-          </a:prstGeom>
-          <a:noFill/>
-        </p:spPr>
-        <p:txBody>
-          <a:bodyPr wrap="square" lIns="0" tIns="0" rIns="0" bIns="0">
-            <a:spAutoFit/>
-          </a:bodyPr>
-          <a:lstStyle/>
-          <a:p>
-            <a:pPr>
-              <a:defRPr sz="1300" b="1">
-                <a:solidFill>
-                  <a:srgbClr val="102C57"/>
-                </a:solidFill>
-                <a:latin typeface="Arial"/>
-              </a:defRPr>
-            </a:pPr>
-            <a:r>
-              <a:t>Galgotias College of Engineering &amp; Technology, Greater Noida</a:t>
-            </a:r>
-          </a:p>
-          <a:p>
-            <a:pPr>
-              <a:defRPr sz="1100" b="1">
-                <a:solidFill>
-                  <a:srgbClr val="646E73"/>
-                </a:solidFill>
-                <a:latin typeface="Arial"/>
-              </a:defRPr>
-            </a:pPr>
-            <a:r>
-              <a:t>DEPARTMENT OF ELECTRONICS AND COMMUNICATION ENGINEERING</a:t>
-            </a:r>
-          </a:p>
-        </p:txBody>
-      </p:sp>
-      <p:sp>
-        <p:nvSpPr>
-          <p:cNvPr id="4" name="TextBox 3"/>
-          <p:cNvSpPr txBox="1"/>
-          <p:nvPr/>
-        </p:nvSpPr>
-        <p:spPr>
-          <a:xfrm>
-            <a:off x="731520" y="1097280"/>
-            <a:ext cx="10728655" cy="640080"/>
-          </a:xfrm>
-          <a:prstGeom prst="rect">
-            <a:avLst/>
-          </a:prstGeom>
-          <a:noFill/>
-        </p:spPr>
-        <p:txBody>
-          <a:bodyPr wrap="square" lIns="0" tIns="0" rIns="0" bIns="0">
-            <a:spAutoFit/>
-          </a:bodyPr>
-          <a:lstStyle/>
-          <a:p>
-            <a:pPr>
-              <a:defRPr sz="2600" b="1">
-                <a:solidFill>
-                  <a:srgbClr val="102C57"/>
-                </a:solidFill>
-                <a:latin typeface="Arial"/>
-              </a:defRPr>
-            </a:pPr>
-            <a:r>
-              <a:t>MOTIVATION</a:t>
-            </a:r>
-          </a:p>
-        </p:txBody>
-      </p:sp>
-      <p:sp>
-        <p:nvSpPr>
-          <p:cNvPr id="5" name="Rectangle 4"/>
+          <p:cNvPr id="3" name="Rectangle 2"/>
           <p:cNvSpPr/>
           <p:nvPr/>
         </p:nvSpPr>
         <p:spPr>
           <a:xfrm>
-            <a:off x="731520" y="1783080"/>
-            <a:ext cx="2011680" cy="45720"/>
+            <a:off x="0" y="0"/>
+            <a:ext cx="12191695" cy="73152"/>
           </a:xfrm>
           <a:prstGeom prst="rect">
             <a:avLst/>
           </a:prstGeom>
           <a:solidFill>
-            <a:srgbClr val="E87652"/>
+            <a:srgbClr val="14B8A6"/>
           </a:solidFill>
           <a:ln>
             <a:noFill/>
@@ -5229,24 +5524,24 @@
       </p:sp>
       <p:sp>
         <p:nvSpPr>
-          <p:cNvPr id="6" name="Rounded Rectangle 5"/>
+          <p:cNvPr id="4" name="Rounded Rectangle 3"/>
           <p:cNvSpPr/>
           <p:nvPr/>
         </p:nvSpPr>
         <p:spPr>
           <a:xfrm>
-            <a:off x="914400" y="2103120"/>
-            <a:ext cx="5029200" cy="1828800"/>
+            <a:off x="822960" y="320040"/>
+            <a:ext cx="6858000" cy="347472"/>
           </a:xfrm>
           <a:prstGeom prst="roundRect">
             <a:avLst/>
           </a:prstGeom>
           <a:solidFill>
-            <a:srgbClr val="FFFFFF"/>
-          </a:solidFill>
-          <a:ln w="25400">
+            <a:srgbClr val="18223A"/>
+          </a:solidFill>
+          <a:ln w="12700">
             <a:solidFill>
-              <a:srgbClr val="E87652"/>
+              <a:srgbClr val="2D3E62"/>
             </a:solidFill>
           </a:ln>
         </p:spPr>
@@ -5265,59 +5560,43 @@
           </a:fontRef>
         </p:style>
         <p:txBody>
-          <a:bodyPr rtlCol="0" anchor="ctr" wrap="square" tIns="182880" lIns="274320" rIns="274320"/>
+          <a:bodyPr rtlCol="0" anchor="ctr" tIns="54864" lIns="182880"/>
           <a:lstStyle/>
           <a:p>
             <a:pPr algn="ctr">
-              <a:defRPr b="1" sz="1600">
-                <a:solidFill>
-                  <a:srgbClr val="E87652"/>
-                </a:solidFill>
-                <a:latin typeface="Arial"/>
-              </a:defRPr>
-            </a:pPr>
-            <a:r>
-              <a:t>✔ Hyper-Local Environmental Tracking</a:t>
-            </a:r>
-          </a:p>
-          <a:p>
-            <a:pPr>
-              <a:spcBef>
-                <a:spcPts val="600"/>
-              </a:spcBef>
-              <a:defRPr sz="1300">
-                <a:solidFill>
-                  <a:srgbClr val="172B2C"/>
-                </a:solidFill>
-                <a:latin typeface="Arial"/>
-              </a:defRPr>
-            </a:pPr>
-            <a:r>
-              <a:t>Regional forecast stations are located tens of kilometers away, failing to reflect microclimates in indoor labs, greenhouses, or localized urban zones.</a:t>
-            </a:r>
-          </a:p>
-        </p:txBody>
-      </p:sp>
-      <p:sp>
-        <p:nvSpPr>
-          <p:cNvPr id="7" name="Rounded Rectangle 6"/>
+              <a:defRPr sz="850" b="1">
+                <a:solidFill>
+                  <a:srgbClr val="14B8A6"/>
+                </a:solidFill>
+                <a:latin typeface="Segoe UI"/>
+              </a:defRPr>
+            </a:pPr>
+            <a:r>
+              <a:t>GALGOTIAS COLLEGE OF ENGG. &amp; TECH.  •  ECE DEPARTMENT  •  PROJECT SCOPE</a:t>
+            </a:r>
+          </a:p>
+        </p:txBody>
+      </p:sp>
+      <p:sp>
+        <p:nvSpPr>
+          <p:cNvPr id="5" name="Rounded Rectangle 4"/>
           <p:cNvSpPr/>
           <p:nvPr/>
         </p:nvSpPr>
         <p:spPr>
           <a:xfrm>
-            <a:off x="6217920" y="2103120"/>
-            <a:ext cx="5029200" cy="1828800"/>
+            <a:off x="10607040" y="320040"/>
+            <a:ext cx="777240" cy="347472"/>
           </a:xfrm>
           <a:prstGeom prst="roundRect">
             <a:avLst/>
           </a:prstGeom>
           <a:solidFill>
-            <a:srgbClr val="FFFFFF"/>
-          </a:solidFill>
-          <a:ln w="25400">
+            <a:srgbClr val="18223A"/>
+          </a:solidFill>
+          <a:ln w="12700">
             <a:solidFill>
-              <a:srgbClr val="168B83"/>
+              <a:srgbClr val="2D3E62"/>
             </a:solidFill>
           </a:ln>
         </p:spPr>
@@ -5336,59 +5615,79 @@
           </a:fontRef>
         </p:style>
         <p:txBody>
-          <a:bodyPr rtlCol="0" anchor="ctr" wrap="square" tIns="182880" lIns="274320" rIns="274320"/>
+          <a:bodyPr rtlCol="0" anchor="ctr"/>
           <a:lstStyle/>
           <a:p>
             <a:pPr algn="ctr">
-              <a:defRPr b="1" sz="1600">
-                <a:solidFill>
-                  <a:srgbClr val="168B83"/>
-                </a:solidFill>
-                <a:latin typeface="Arial"/>
-              </a:defRPr>
-            </a:pPr>
-            <a:r>
-              <a:t>✔ Occupant Thermal Comfort &amp; Safety</a:t>
-            </a:r>
-          </a:p>
+              <a:defRPr sz="900" b="1">
+                <a:solidFill>
+                  <a:srgbClr val="94A3B8"/>
+                </a:solidFill>
+                <a:latin typeface="Segoe UI"/>
+              </a:defRPr>
+            </a:pPr>
+            <a:r>
+              <a:t>04 / 10</a:t>
+            </a:r>
+          </a:p>
+        </p:txBody>
+      </p:sp>
+      <p:sp>
+        <p:nvSpPr>
+          <p:cNvPr id="6" name="TextBox 5"/>
+          <p:cNvSpPr txBox="1"/>
+          <p:nvPr/>
+        </p:nvSpPr>
+        <p:spPr>
+          <a:xfrm>
+            <a:off x="822960" y="777240"/>
+            <a:ext cx="10515600" cy="685800"/>
+          </a:xfrm>
+          <a:prstGeom prst="rect">
+            <a:avLst/>
+          </a:prstGeom>
+          <a:noFill/>
+        </p:spPr>
+        <p:txBody>
+          <a:bodyPr wrap="square" lIns="0" tIns="0" rIns="0" bIns="0">
+            <a:spAutoFit/>
+          </a:bodyPr>
+          <a:lstStyle/>
           <a:p>
             <a:pPr>
-              <a:spcBef>
-                <a:spcPts val="600"/>
-              </a:spcBef>
-              <a:defRPr sz="1300">
-                <a:solidFill>
-                  <a:srgbClr val="172B2C"/>
-                </a:solidFill>
-                <a:latin typeface="Arial"/>
-              </a:defRPr>
-            </a:pPr>
-            <a:r>
-              <a:t>Heat stress and humidity levels dictate thermal safety. Computing Heat Index and Dew Point on the edge aids occupational health and HVAC control.</a:t>
-            </a:r>
-          </a:p>
-        </p:txBody>
-      </p:sp>
-      <p:sp>
-        <p:nvSpPr>
-          <p:cNvPr id="8" name="Rounded Rectangle 7"/>
+              <a:defRPr sz="2400" b="1">
+                <a:solidFill>
+                  <a:srgbClr val="F8FAFC"/>
+                </a:solidFill>
+                <a:latin typeface="Segoe UI"/>
+              </a:defRPr>
+            </a:pPr>
+            <a:r>
+              <a:t>System Design Objectives</a:t>
+            </a:r>
+          </a:p>
+        </p:txBody>
+      </p:sp>
+      <p:sp>
+        <p:nvSpPr>
+          <p:cNvPr id="7" name="Rounded Rectangle 6"/>
           <p:cNvSpPr/>
           <p:nvPr/>
         </p:nvSpPr>
         <p:spPr>
           <a:xfrm>
-            <a:off x="914400" y="4206240"/>
-            <a:ext cx="5029200" cy="1828800"/>
+            <a:off x="822960" y="1645920"/>
+            <a:ext cx="3429000" cy="2148840"/>
           </a:xfrm>
           <a:prstGeom prst="roundRect">
             <a:avLst/>
           </a:prstGeom>
           <a:solidFill>
-            <a:srgbClr val="FFFFFF"/>
-          </a:solidFill>
-          <a:ln w="25400">
+            <a:srgbClr val="18223A"/>
+          </a:solidFill>
+          <a:ln w="12700">
             <a:solidFill>
-              <a:srgbClr val="102C57"/>
+              <a:srgbClr val="2D3E62"/>
             </a:solidFill>
           </a:ln>
         </p:spPr>
@@ -5407,59 +5706,59 @@
           </a:fontRef>
         </p:style>
         <p:txBody>
-          <a:bodyPr rtlCol="0" anchor="ctr" wrap="square" tIns="182880" lIns="274320" rIns="274320"/>
+          <a:bodyPr rtlCol="0" anchor="ctr" wrap="square" tIns="182880" lIns="228600" rIns="228600"/>
           <a:lstStyle/>
           <a:p>
             <a:pPr algn="ctr">
-              <a:defRPr b="1" sz="1600">
-                <a:solidFill>
-                  <a:srgbClr val="102C57"/>
-                </a:solidFill>
-                <a:latin typeface="Arial"/>
-              </a:defRPr>
-            </a:pPr>
-            <a:r>
-              <a:t>✔ Affordable &amp; Scalable Architecture</a:t>
+              <a:defRPr sz="1400" b="1">
+                <a:solidFill>
+                  <a:srgbClr val="14B8A6"/>
+                </a:solidFill>
+                <a:latin typeface="Segoe UI"/>
+              </a:defRPr>
+            </a:pPr>
+            <a:r>
+              <a:t>✔  Autonomous Edge Sensing</a:t>
             </a:r>
           </a:p>
           <a:p>
             <a:pPr>
               <a:spcBef>
-                <a:spcPts val="600"/>
+                <a:spcPts val="800"/>
               </a:spcBef>
-              <a:defRPr sz="1300">
-                <a:solidFill>
-                  <a:srgbClr val="172B2C"/>
-                </a:solidFill>
-                <a:latin typeface="Arial"/>
-              </a:defRPr>
-            </a:pPr>
-            <a:r>
-              <a:t>Off-the-shelf industrial weather loggers cost thousands of dollars. An ESP32 + DHT22 platform provides comparable fidelity under $15.</a:t>
-            </a:r>
-          </a:p>
-        </p:txBody>
-      </p:sp>
-      <p:sp>
-        <p:nvSpPr>
-          <p:cNvPr id="9" name="Rounded Rectangle 8"/>
+              <a:defRPr sz="1100">
+                <a:solidFill>
+                  <a:srgbClr val="94A3B8"/>
+                </a:solidFill>
+                <a:latin typeface="Segoe UI"/>
+              </a:defRPr>
+            </a:pPr>
+            <a:r>
+              <a:t>Interfacing ESP32 with DHT22 (AM2302) to sample temperature (-40 to 80°C) and relative humidity (0-100% RH) with high stability.</a:t>
+            </a:r>
+          </a:p>
+        </p:txBody>
+      </p:sp>
+      <p:sp>
+        <p:nvSpPr>
+          <p:cNvPr id="8" name="Rounded Rectangle 7"/>
           <p:cNvSpPr/>
           <p:nvPr/>
         </p:nvSpPr>
         <p:spPr>
           <a:xfrm>
-            <a:off x="6217920" y="4206240"/>
-            <a:ext cx="5029200" cy="1828800"/>
+            <a:off x="4434840" y="1645920"/>
+            <a:ext cx="3429000" cy="2148840"/>
           </a:xfrm>
           <a:prstGeom prst="roundRect">
             <a:avLst/>
           </a:prstGeom>
           <a:solidFill>
-            <a:srgbClr val="FFFFFF"/>
-          </a:solidFill>
-          <a:ln w="25400">
+            <a:srgbClr val="18223A"/>
+          </a:solidFill>
+          <a:ln w="12700">
             <a:solidFill>
-              <a:srgbClr val="8C1D22"/>
+              <a:srgbClr val="2D3E62"/>
             </a:solidFill>
           </a:ln>
         </p:spPr>
@@ -5478,35 +5777,319 @@
           </a:fontRef>
         </p:style>
         <p:txBody>
-          <a:bodyPr rtlCol="0" anchor="ctr" wrap="square" tIns="182880" lIns="274320" rIns="274320"/>
+          <a:bodyPr rtlCol="0" anchor="ctr" wrap="square" tIns="182880" lIns="228600" rIns="228600"/>
           <a:lstStyle/>
           <a:p>
             <a:pPr algn="ctr">
-              <a:defRPr b="1" sz="1600">
-                <a:solidFill>
-                  <a:srgbClr val="8C1D22"/>
-                </a:solidFill>
-                <a:latin typeface="Arial"/>
-              </a:defRPr>
-            </a:pPr>
-            <a:r>
-              <a:t>✔ Everywhere Access &amp; Historical Trends</a:t>
+              <a:defRPr sz="1400" b="1">
+                <a:solidFill>
+                  <a:srgbClr val="F97316"/>
+                </a:solidFill>
+                <a:latin typeface="Segoe UI"/>
+              </a:defRPr>
+            </a:pPr>
+            <a:r>
+              <a:t>✔  On-Device Comfort Index Math</a:t>
             </a:r>
           </a:p>
           <a:p>
             <a:pPr>
               <a:spcBef>
-                <a:spcPts val="600"/>
+                <a:spcPts val="800"/>
               </a:spcBef>
-              <a:defRPr sz="1300">
-                <a:solidFill>
-                  <a:srgbClr val="172B2C"/>
-                </a:solidFill>
-                <a:latin typeface="Arial"/>
-              </a:defRPr>
-            </a:pPr>
-            <a:r>
-              <a:t>Eliminates physical data retrieval by pairing cloud streaming (ThingSpeak) with a zero-install, responsive web dashboard on Vercel.</a:t>
+              <a:defRPr sz="1100">
+                <a:solidFill>
+                  <a:srgbClr val="94A3B8"/>
+                </a:solidFill>
+                <a:latin typeface="Segoe UI"/>
+              </a:defRPr>
+            </a:pPr>
+            <a:r>
+              <a:t>Implementing Steadman's Heat Index and Magnus Dew Point equations in firmware to detect heat exhaustion and condensation hazards.</a:t>
+            </a:r>
+          </a:p>
+        </p:txBody>
+      </p:sp>
+      <p:sp>
+        <p:nvSpPr>
+          <p:cNvPr id="9" name="Rounded Rectangle 8"/>
+          <p:cNvSpPr/>
+          <p:nvPr/>
+        </p:nvSpPr>
+        <p:spPr>
+          <a:xfrm>
+            <a:off x="8046720" y="1645920"/>
+            <a:ext cx="3429000" cy="2148840"/>
+          </a:xfrm>
+          <a:prstGeom prst="roundRect">
+            <a:avLst/>
+          </a:prstGeom>
+          <a:solidFill>
+            <a:srgbClr val="18223A"/>
+          </a:solidFill>
+          <a:ln w="12700">
+            <a:solidFill>
+              <a:srgbClr val="2D3E62"/>
+            </a:solidFill>
+          </a:ln>
+        </p:spPr>
+        <p:style>
+          <a:lnRef idx="1">
+            <a:schemeClr val="accent1"/>
+          </a:lnRef>
+          <a:fillRef idx="3">
+            <a:schemeClr val="accent1"/>
+          </a:fillRef>
+          <a:effectRef idx="2">
+            <a:schemeClr val="accent1"/>
+          </a:effectRef>
+          <a:fontRef idx="minor">
+            <a:schemeClr val="lt1"/>
+          </a:fontRef>
+        </p:style>
+        <p:txBody>
+          <a:bodyPr rtlCol="0" anchor="ctr" wrap="square" tIns="182880" lIns="228600" rIns="228600"/>
+          <a:lstStyle/>
+          <a:p>
+            <a:pPr algn="ctr">
+              <a:defRPr sz="1400" b="1">
+                <a:solidFill>
+                  <a:srgbClr val="38BDF8"/>
+                </a:solidFill>
+                <a:latin typeface="Segoe UI"/>
+              </a:defRPr>
+            </a:pPr>
+            <a:r>
+              <a:t>✔  Local OLED Feedback</a:t>
+            </a:r>
+          </a:p>
+          <a:p>
+            <a:pPr>
+              <a:spcBef>
+                <a:spcPts val="800"/>
+              </a:spcBef>
+              <a:defRPr sz="1100">
+                <a:solidFill>
+                  <a:srgbClr val="94A3B8"/>
+                </a:solidFill>
+                <a:latin typeface="Segoe UI"/>
+              </a:defRPr>
+            </a:pPr>
+            <a:r>
+              <a:t>Driving a 0.96" 128x64 SSD1306 display over I2C bus at 400kHz to deliver crisp, immediate readings directly at the physical station.</a:t>
+            </a:r>
+          </a:p>
+        </p:txBody>
+      </p:sp>
+      <p:sp>
+        <p:nvSpPr>
+          <p:cNvPr id="10" name="Rounded Rectangle 9"/>
+          <p:cNvSpPr/>
+          <p:nvPr/>
+        </p:nvSpPr>
+        <p:spPr>
+          <a:xfrm>
+            <a:off x="822960" y="4023360"/>
+            <a:ext cx="3429000" cy="2148840"/>
+          </a:xfrm>
+          <a:prstGeom prst="roundRect">
+            <a:avLst/>
+          </a:prstGeom>
+          <a:solidFill>
+            <a:srgbClr val="18223A"/>
+          </a:solidFill>
+          <a:ln w="12700">
+            <a:solidFill>
+              <a:srgbClr val="2D3E62"/>
+            </a:solidFill>
+          </a:ln>
+        </p:spPr>
+        <p:style>
+          <a:lnRef idx="1">
+            <a:schemeClr val="accent1"/>
+          </a:lnRef>
+          <a:fillRef idx="3">
+            <a:schemeClr val="accent1"/>
+          </a:fillRef>
+          <a:effectRef idx="2">
+            <a:schemeClr val="accent1"/>
+          </a:effectRef>
+          <a:fontRef idx="minor">
+            <a:schemeClr val="lt1"/>
+          </a:fontRef>
+        </p:style>
+        <p:txBody>
+          <a:bodyPr rtlCol="0" anchor="ctr" wrap="square" tIns="182880" lIns="228600" rIns="228600"/>
+          <a:lstStyle/>
+          <a:p>
+            <a:pPr algn="ctr">
+              <a:defRPr sz="1400" b="1">
+                <a:solidFill>
+                  <a:srgbClr val="F59E0B"/>
+                </a:solidFill>
+                <a:latin typeface="Segoe UI"/>
+              </a:defRPr>
+            </a:pPr>
+            <a:r>
+              <a:t>✔  Secure IoT Cloud Ingestion</a:t>
+            </a:r>
+          </a:p>
+          <a:p>
+            <a:pPr>
+              <a:spcBef>
+                <a:spcPts val="800"/>
+              </a:spcBef>
+              <a:defRPr sz="1100">
+                <a:solidFill>
+                  <a:srgbClr val="94A3B8"/>
+                </a:solidFill>
+                <a:latin typeface="Segoe UI"/>
+              </a:defRPr>
+            </a:pPr>
+            <a:r>
+              <a:t>Packaging 4-field payload (Temp, Humidity, Heat Index, Dew Point) and streaming to MathWorks ThingSpeak every 20 seconds.</a:t>
+            </a:r>
+          </a:p>
+        </p:txBody>
+      </p:sp>
+      <p:sp>
+        <p:nvSpPr>
+          <p:cNvPr id="11" name="Rounded Rectangle 10"/>
+          <p:cNvSpPr/>
+          <p:nvPr/>
+        </p:nvSpPr>
+        <p:spPr>
+          <a:xfrm>
+            <a:off x="4434840" y="4023360"/>
+            <a:ext cx="3429000" cy="2148840"/>
+          </a:xfrm>
+          <a:prstGeom prst="roundRect">
+            <a:avLst/>
+          </a:prstGeom>
+          <a:solidFill>
+            <a:srgbClr val="18223A"/>
+          </a:solidFill>
+          <a:ln w="12700">
+            <a:solidFill>
+              <a:srgbClr val="2D3E62"/>
+            </a:solidFill>
+          </a:ln>
+        </p:spPr>
+        <p:style>
+          <a:lnRef idx="1">
+            <a:schemeClr val="accent1"/>
+          </a:lnRef>
+          <a:fillRef idx="3">
+            <a:schemeClr val="accent1"/>
+          </a:fillRef>
+          <a:effectRef idx="2">
+            <a:schemeClr val="accent1"/>
+          </a:effectRef>
+          <a:fontRef idx="minor">
+            <a:schemeClr val="lt1"/>
+          </a:fontRef>
+        </p:style>
+        <p:txBody>
+          <a:bodyPr rtlCol="0" anchor="ctr" wrap="square" tIns="182880" lIns="228600" rIns="228600"/>
+          <a:lstStyle/>
+          <a:p>
+            <a:pPr algn="ctr">
+              <a:defRPr sz="1400" b="1">
+                <a:solidFill>
+                  <a:srgbClr val="14B8A6"/>
+                </a:solidFill>
+                <a:latin typeface="Segoe UI"/>
+              </a:defRPr>
+            </a:pPr>
+            <a:r>
+              <a:t>✔  Modern Zero-Dependency Dashboard</a:t>
+            </a:r>
+          </a:p>
+          <a:p>
+            <a:pPr>
+              <a:spcBef>
+                <a:spcPts val="800"/>
+              </a:spcBef>
+              <a:defRPr sz="1100">
+                <a:solidFill>
+                  <a:srgbClr val="94A3B8"/>
+                </a:solidFill>
+                <a:latin typeface="Segoe UI"/>
+              </a:defRPr>
+            </a:pPr>
+            <a:r>
+              <a:t>Architecting a lightweight web interface with custom HTML5 Canvas dual-trace historical charts that runs smoothly on both desktop and mobile.</a:t>
+            </a:r>
+          </a:p>
+        </p:txBody>
+      </p:sp>
+      <p:sp>
+        <p:nvSpPr>
+          <p:cNvPr id="12" name="Rounded Rectangle 11"/>
+          <p:cNvSpPr/>
+          <p:nvPr/>
+        </p:nvSpPr>
+        <p:spPr>
+          <a:xfrm>
+            <a:off x="8046720" y="4023360"/>
+            <a:ext cx="3429000" cy="2148840"/>
+          </a:xfrm>
+          <a:prstGeom prst="roundRect">
+            <a:avLst/>
+          </a:prstGeom>
+          <a:solidFill>
+            <a:srgbClr val="18223A"/>
+          </a:solidFill>
+          <a:ln w="12700">
+            <a:solidFill>
+              <a:srgbClr val="2D3E62"/>
+            </a:solidFill>
+          </a:ln>
+        </p:spPr>
+        <p:style>
+          <a:lnRef idx="1">
+            <a:schemeClr val="accent1"/>
+          </a:lnRef>
+          <a:fillRef idx="3">
+            <a:schemeClr val="accent1"/>
+          </a:fillRef>
+          <a:effectRef idx="2">
+            <a:schemeClr val="accent1"/>
+          </a:effectRef>
+          <a:fontRef idx="minor">
+            <a:schemeClr val="lt1"/>
+          </a:fontRef>
+        </p:style>
+        <p:txBody>
+          <a:bodyPr rtlCol="0" anchor="ctr" wrap="square" tIns="182880" lIns="228600" rIns="228600"/>
+          <a:lstStyle/>
+          <a:p>
+            <a:pPr algn="ctr">
+              <a:defRPr sz="1400" b="1">
+                <a:solidFill>
+                  <a:srgbClr val="F97316"/>
+                </a:solidFill>
+                <a:latin typeface="Segoe UI"/>
+              </a:defRPr>
+            </a:pPr>
+            <a:r>
+              <a:t>✔  Serverless Cloud Deployment</a:t>
+            </a:r>
+          </a:p>
+          <a:p>
+            <a:pPr>
+              <a:spcBef>
+                <a:spcPts val="800"/>
+              </a:spcBef>
+              <a:defRPr sz="1100">
+                <a:solidFill>
+                  <a:srgbClr val="94A3B8"/>
+                </a:solidFill>
+                <a:latin typeface="Segoe UI"/>
+              </a:defRPr>
+            </a:pPr>
+            <a:r>
+              <a:t>Deploying the dashboard continuously via Vercel edge network and open-sourcing the firmware and frontend on GitHub.</a:t>
             </a:r>
           </a:p>
         </p:txBody>
@@ -5538,13 +6121,13 @@
         <p:spPr>
           <a:xfrm>
             <a:off x="0" y="0"/>
-            <a:ext cx="12191695" cy="109728"/>
+            <a:ext cx="12191695" cy="6858000"/>
           </a:xfrm>
           <a:prstGeom prst="rect">
             <a:avLst/>
           </a:prstGeom>
           <a:solidFill>
-            <a:srgbClr val="102C57"/>
+            <a:srgbClr val="0F172A"/>
           </a:solidFill>
           <a:ln>
             <a:noFill/>
@@ -5574,105 +6157,20 @@
       </p:sp>
       <p:sp>
         <p:nvSpPr>
-          <p:cNvPr id="3" name="TextBox 2"/>
-          <p:cNvSpPr txBox="1"/>
-          <p:nvPr/>
-        </p:nvSpPr>
-        <p:spPr>
-          <a:xfrm>
-            <a:off x="731520" y="274320"/>
-            <a:ext cx="10728655" cy="822960"/>
-          </a:xfrm>
-          <a:prstGeom prst="rect">
-            <a:avLst/>
-          </a:prstGeom>
-          <a:noFill/>
-        </p:spPr>
-        <p:txBody>
-          <a:bodyPr wrap="square" lIns="0" tIns="0" rIns="0" bIns="0">
-            <a:spAutoFit/>
-          </a:bodyPr>
-          <a:lstStyle/>
-          <a:p>
-            <a:pPr>
-              <a:defRPr sz="1300" b="1">
-                <a:solidFill>
-                  <a:srgbClr val="102C57"/>
-                </a:solidFill>
-                <a:latin typeface="Arial"/>
-              </a:defRPr>
-            </a:pPr>
-            <a:r>
-              <a:t>Galgotias College of Engineering &amp; Technology, Greater Noida</a:t>
-            </a:r>
-          </a:p>
-          <a:p>
-            <a:pPr>
-              <a:defRPr sz="1100" b="1">
-                <a:solidFill>
-                  <a:srgbClr val="646E73"/>
-                </a:solidFill>
-                <a:latin typeface="Arial"/>
-              </a:defRPr>
-            </a:pPr>
-            <a:r>
-              <a:t>DEPARTMENT OF ELECTRONICS AND COMMUNICATION ENGINEERING</a:t>
-            </a:r>
-          </a:p>
-        </p:txBody>
-      </p:sp>
-      <p:sp>
-        <p:nvSpPr>
-          <p:cNvPr id="4" name="TextBox 3"/>
-          <p:cNvSpPr txBox="1"/>
-          <p:nvPr/>
-        </p:nvSpPr>
-        <p:spPr>
-          <a:xfrm>
-            <a:off x="731520" y="1097280"/>
-            <a:ext cx="10728655" cy="640080"/>
-          </a:xfrm>
-          <a:prstGeom prst="rect">
-            <a:avLst/>
-          </a:prstGeom>
-          <a:noFill/>
-        </p:spPr>
-        <p:txBody>
-          <a:bodyPr wrap="square" lIns="0" tIns="0" rIns="0" bIns="0">
-            <a:spAutoFit/>
-          </a:bodyPr>
-          <a:lstStyle/>
-          <a:p>
-            <a:pPr>
-              <a:defRPr sz="2600" b="1">
-                <a:solidFill>
-                  <a:srgbClr val="102C57"/>
-                </a:solidFill>
-                <a:latin typeface="Arial"/>
-              </a:defRPr>
-            </a:pPr>
-            <a:r>
-              <a:t>OBJECTIVE:-</a:t>
-            </a:r>
-          </a:p>
-        </p:txBody>
-      </p:sp>
-      <p:sp>
-        <p:nvSpPr>
-          <p:cNvPr id="5" name="Rectangle 4"/>
+          <p:cNvPr id="3" name="Rectangle 2"/>
           <p:cNvSpPr/>
           <p:nvPr/>
         </p:nvSpPr>
         <p:spPr>
           <a:xfrm>
-            <a:off x="731520" y="1783080"/>
-            <a:ext cx="2011680" cy="45720"/>
+            <a:off x="0" y="0"/>
+            <a:ext cx="12191695" cy="73152"/>
           </a:xfrm>
           <a:prstGeom prst="rect">
             <a:avLst/>
           </a:prstGeom>
           <a:solidFill>
-            <a:srgbClr val="E87652"/>
+            <a:srgbClr val="14B8A6"/>
           </a:solidFill>
           <a:ln>
             <a:noFill/>
@@ -5702,14 +6200,124 @@
       </p:sp>
       <p:sp>
         <p:nvSpPr>
+          <p:cNvPr id="4" name="Rounded Rectangle 3"/>
+          <p:cNvSpPr/>
+          <p:nvPr/>
+        </p:nvSpPr>
+        <p:spPr>
+          <a:xfrm>
+            <a:off x="822960" y="320040"/>
+            <a:ext cx="6858000" cy="347472"/>
+          </a:xfrm>
+          <a:prstGeom prst="roundRect">
+            <a:avLst/>
+          </a:prstGeom>
+          <a:solidFill>
+            <a:srgbClr val="18223A"/>
+          </a:solidFill>
+          <a:ln w="12700">
+            <a:solidFill>
+              <a:srgbClr val="2D3E62"/>
+            </a:solidFill>
+          </a:ln>
+        </p:spPr>
+        <p:style>
+          <a:lnRef idx="1">
+            <a:schemeClr val="accent1"/>
+          </a:lnRef>
+          <a:fillRef idx="3">
+            <a:schemeClr val="accent1"/>
+          </a:fillRef>
+          <a:effectRef idx="2">
+            <a:schemeClr val="accent1"/>
+          </a:effectRef>
+          <a:fontRef idx="minor">
+            <a:schemeClr val="lt1"/>
+          </a:fontRef>
+        </p:style>
+        <p:txBody>
+          <a:bodyPr rtlCol="0" anchor="ctr" tIns="54864" lIns="182880"/>
+          <a:lstStyle/>
+          <a:p>
+            <a:pPr algn="ctr">
+              <a:defRPr sz="850" b="1">
+                <a:solidFill>
+                  <a:srgbClr val="14B8A6"/>
+                </a:solidFill>
+                <a:latin typeface="Segoe UI"/>
+              </a:defRPr>
+            </a:pPr>
+            <a:r>
+              <a:t>GALGOTIAS COLLEGE OF ENGG. &amp; TECH.  •  ECE DEPARTMENT  •  ARCHITECTURE</a:t>
+            </a:r>
+          </a:p>
+        </p:txBody>
+      </p:sp>
+      <p:sp>
+        <p:nvSpPr>
+          <p:cNvPr id="5" name="Rounded Rectangle 4"/>
+          <p:cNvSpPr/>
+          <p:nvPr/>
+        </p:nvSpPr>
+        <p:spPr>
+          <a:xfrm>
+            <a:off x="10607040" y="320040"/>
+            <a:ext cx="777240" cy="347472"/>
+          </a:xfrm>
+          <a:prstGeom prst="roundRect">
+            <a:avLst/>
+          </a:prstGeom>
+          <a:solidFill>
+            <a:srgbClr val="18223A"/>
+          </a:solidFill>
+          <a:ln w="12700">
+            <a:solidFill>
+              <a:srgbClr val="2D3E62"/>
+            </a:solidFill>
+          </a:ln>
+        </p:spPr>
+        <p:style>
+          <a:lnRef idx="1">
+            <a:schemeClr val="accent1"/>
+          </a:lnRef>
+          <a:fillRef idx="3">
+            <a:schemeClr val="accent1"/>
+          </a:fillRef>
+          <a:effectRef idx="2">
+            <a:schemeClr val="accent1"/>
+          </a:effectRef>
+          <a:fontRef idx="minor">
+            <a:schemeClr val="lt1"/>
+          </a:fontRef>
+        </p:style>
+        <p:txBody>
+          <a:bodyPr rtlCol="0" anchor="ctr"/>
+          <a:lstStyle/>
+          <a:p>
+            <a:pPr algn="ctr">
+              <a:defRPr sz="900" b="1">
+                <a:solidFill>
+                  <a:srgbClr val="94A3B8"/>
+                </a:solidFill>
+                <a:latin typeface="Segoe UI"/>
+              </a:defRPr>
+            </a:pPr>
+            <a:r>
+              <a:t>05 / 10</a:t>
+            </a:r>
+          </a:p>
+        </p:txBody>
+      </p:sp>
+      <p:sp>
+        <p:nvSpPr>
           <p:cNvPr id="6" name="TextBox 5"/>
           <p:cNvSpPr txBox="1"/>
           <p:nvPr/>
         </p:nvSpPr>
         <p:spPr>
           <a:xfrm>
-            <a:off x="914400" y="2011680"/>
-            <a:ext cx="10362895" cy="4389120"/>
+            <a:off x="822960" y="777240"/>
+            <a:ext cx="10515600" cy="685800"/>
           </a:xfrm>
           <a:prstGeom prst="rect">
             <a:avLst/>
@@ -5717,104 +6325,397 @@
           <a:noFill/>
         </p:spPr>
         <p:txBody>
-          <a:bodyPr wrap="square">
+          <a:bodyPr wrap="square" lIns="0" tIns="0" rIns="0" bIns="0">
             <a:spAutoFit/>
           </a:bodyPr>
           <a:lstStyle/>
           <a:p>
             <a:pPr>
-              <a:spcAft>
-                <a:spcPts val="1600"/>
-              </a:spcAft>
-            </a:pPr>
-            <a:r>
-              <a:rPr sz="1600" b="1">
-                <a:solidFill>
-                  <a:srgbClr val="172B2C"/>
-                </a:solidFill>
-                <a:latin typeface="Arial"/>
-              </a:rPr>
-              <a:t>• To design and fabricate an autonomous, low-power IoT Weather Monitoring Station using the ESP32 microcontroller.</a:t>
+              <a:defRPr sz="2400" b="1">
+                <a:solidFill>
+                  <a:srgbClr val="F8FAFC"/>
+                </a:solidFill>
+                <a:latin typeface="Segoe UI"/>
+              </a:defRPr>
+            </a:pPr>
+            <a:r>
+              <a:t>Hardware Engineering &amp; Pinout Scheme</a:t>
+            </a:r>
+          </a:p>
+        </p:txBody>
+      </p:sp>
+      <p:sp>
+        <p:nvSpPr>
+          <p:cNvPr id="7" name="Rounded Rectangle 6"/>
+          <p:cNvSpPr/>
+          <p:nvPr/>
+        </p:nvSpPr>
+        <p:spPr>
+          <a:xfrm>
+            <a:off x="822960" y="1645920"/>
+            <a:ext cx="3429000" cy="2743200"/>
+          </a:xfrm>
+          <a:prstGeom prst="roundRect">
+            <a:avLst/>
+          </a:prstGeom>
+          <a:solidFill>
+            <a:srgbClr val="18223A"/>
+          </a:solidFill>
+          <a:ln w="12700">
+            <a:solidFill>
+              <a:srgbClr val="2D3E62"/>
+            </a:solidFill>
+          </a:ln>
+        </p:spPr>
+        <p:style>
+          <a:lnRef idx="1">
+            <a:schemeClr val="accent1"/>
+          </a:lnRef>
+          <a:fillRef idx="3">
+            <a:schemeClr val="accent1"/>
+          </a:fillRef>
+          <a:effectRef idx="2">
+            <a:schemeClr val="accent1"/>
+          </a:effectRef>
+          <a:fontRef idx="minor">
+            <a:schemeClr val="lt1"/>
+          </a:fontRef>
+        </p:style>
+        <p:txBody>
+          <a:bodyPr rtlCol="0" anchor="ctr" wrap="square" tIns="182880" lIns="228600" rIns="228600"/>
+          <a:lstStyle/>
+          <a:p>
+            <a:pPr algn="ctr">
+              <a:defRPr sz="950" b="1">
+                <a:solidFill>
+                  <a:srgbClr val="14B8A6"/>
+                </a:solidFill>
+                <a:latin typeface="Segoe UI"/>
+              </a:defRPr>
+            </a:pPr>
+            <a:r>
+              <a:t>CORE PROCESSOR</a:t>
             </a:r>
           </a:p>
           <a:p>
             <a:pPr>
-              <a:spcAft>
-                <a:spcPts val="1600"/>
-              </a:spcAft>
-            </a:pPr>
-            <a:r>
-              <a:rPr sz="1600" b="0">
-                <a:solidFill>
-                  <a:srgbClr val="172B2C"/>
-                </a:solidFill>
-                <a:latin typeface="Arial"/>
-              </a:rPr>
-              <a:t>• To interface a high-precision DHT22 (AM2302) sensor to acquire real-time temperature (accuracy ±0.5°C) and relative humidity (accuracy ±2%).</a:t>
+              <a:spcBef>
+                <a:spcPts val="400"/>
+              </a:spcBef>
+              <a:defRPr sz="1600" b="1">
+                <a:solidFill>
+                  <a:srgbClr val="F8FAFC"/>
+                </a:solidFill>
+                <a:latin typeface="Segoe UI"/>
+              </a:defRPr>
+            </a:pPr>
+            <a:r>
+              <a:t>ESP32 Dev Module</a:t>
             </a:r>
           </a:p>
           <a:p>
             <a:pPr>
-              <a:spcAft>
-                <a:spcPts val="1600"/>
-              </a:spcAft>
-            </a:pPr>
-            <a:r>
-              <a:rPr sz="1600" b="0">
-                <a:solidFill>
-                  <a:srgbClr val="172B2C"/>
-                </a:solidFill>
-                <a:latin typeface="Arial"/>
-              </a:rPr>
-              <a:t>• To establish I2C communication with an SSD1306 0.96" OLED display for immediate local readout at the edge node.</a:t>
+              <a:spcBef>
+                <a:spcPts val="800"/>
+              </a:spcBef>
+              <a:defRPr sz="1100">
+                <a:solidFill>
+                  <a:srgbClr val="94A3B8"/>
+                </a:solidFill>
+                <a:latin typeface="Segoe UI"/>
+              </a:defRPr>
+            </a:pPr>
+            <a:r>
+              <a:t>Xtensa Dual-Core 32-bit @ 240MHz</a:t>
+            </a:r>
+            <a:br/>
+            <a:r>
+              <a:t>• Integrated 2.4 GHz Wi-Fi (802.11 b/g/n)</a:t>
+            </a:r>
+            <a:br/>
+            <a:r>
+              <a:t>• Low-power deep sleep support</a:t>
+            </a:r>
+            <a:br/>
+            <a:r>
+              <a:t>• 520 KB SRAM + 4MB Flash Memory</a:t>
+            </a:r>
+          </a:p>
+        </p:txBody>
+      </p:sp>
+      <p:sp>
+        <p:nvSpPr>
+          <p:cNvPr id="8" name="Rounded Rectangle 7"/>
+          <p:cNvSpPr/>
+          <p:nvPr/>
+        </p:nvSpPr>
+        <p:spPr>
+          <a:xfrm>
+            <a:off x="4434840" y="1645920"/>
+            <a:ext cx="3429000" cy="2743200"/>
+          </a:xfrm>
+          <a:prstGeom prst="roundRect">
+            <a:avLst/>
+          </a:prstGeom>
+          <a:solidFill>
+            <a:srgbClr val="18223A"/>
+          </a:solidFill>
+          <a:ln w="12700">
+            <a:solidFill>
+              <a:srgbClr val="2D3E62"/>
+            </a:solidFill>
+          </a:ln>
+        </p:spPr>
+        <p:style>
+          <a:lnRef idx="1">
+            <a:schemeClr val="accent1"/>
+          </a:lnRef>
+          <a:fillRef idx="3">
+            <a:schemeClr val="accent1"/>
+          </a:fillRef>
+          <a:effectRef idx="2">
+            <a:schemeClr val="accent1"/>
+          </a:effectRef>
+          <a:fontRef idx="minor">
+            <a:schemeClr val="lt1"/>
+          </a:fontRef>
+        </p:style>
+        <p:txBody>
+          <a:bodyPr rtlCol="0" anchor="ctr" wrap="square" tIns="182880" lIns="228600" rIns="228600"/>
+          <a:lstStyle/>
+          <a:p>
+            <a:pPr algn="ctr">
+              <a:defRPr sz="950" b="1">
+                <a:solidFill>
+                  <a:srgbClr val="F97316"/>
+                </a:solidFill>
+                <a:latin typeface="Segoe UI"/>
+              </a:defRPr>
+            </a:pPr>
+            <a:r>
+              <a:t>ENVIRONMENTAL SENSOR</a:t>
             </a:r>
           </a:p>
           <a:p>
             <a:pPr>
-              <a:spcAft>
-                <a:spcPts val="1600"/>
-              </a:spcAft>
-            </a:pPr>
-            <a:r>
-              <a:rPr sz="1600" b="0">
-                <a:solidFill>
-                  <a:srgbClr val="172B2C"/>
-                </a:solidFill>
-                <a:latin typeface="Arial"/>
-              </a:rPr>
-              <a:t>• To compute thermal metrics (Heat Index and Dew Point) on-board to determine human comfort conditions.</a:t>
+              <a:spcBef>
+                <a:spcPts val="400"/>
+              </a:spcBef>
+              <a:defRPr sz="1600" b="1">
+                <a:solidFill>
+                  <a:srgbClr val="F8FAFC"/>
+                </a:solidFill>
+                <a:latin typeface="Segoe UI"/>
+              </a:defRPr>
+            </a:pPr>
+            <a:r>
+              <a:t>DHT22 Sensor (AM2302)</a:t>
             </a:r>
           </a:p>
           <a:p>
             <a:pPr>
-              <a:spcAft>
-                <a:spcPts val="1600"/>
-              </a:spcAft>
-            </a:pPr>
-            <a:r>
-              <a:rPr sz="1600" b="0">
-                <a:solidFill>
-                  <a:srgbClr val="172B2C"/>
-                </a:solidFill>
-                <a:latin typeface="Arial"/>
-              </a:rPr>
-              <a:t>• To stream sensor telemetry every 20 seconds to MathWorks ThingSpeak IoT Cloud using secure RESTful HTTP POST requests.</a:t>
+              <a:spcBef>
+                <a:spcPts val="800"/>
+              </a:spcBef>
+              <a:defRPr sz="1100">
+                <a:solidFill>
+                  <a:srgbClr val="94A3B8"/>
+                </a:solidFill>
+                <a:latin typeface="Segoe UI"/>
+              </a:defRPr>
+            </a:pPr>
+            <a:r>
+              <a:t>Capacitive Humidity &amp; Thermistor</a:t>
+            </a:r>
+            <a:br/>
+            <a:r>
+              <a:t>• Temp Range: -40 to +80°C (±0.5°C)</a:t>
+            </a:r>
+            <a:br/>
+            <a:r>
+              <a:t>• Humidity Range: 0 to 100% RH (±2%)</a:t>
+            </a:r>
+            <a:br/>
+            <a:r>
+              <a:t>• Digital 1-wire communication (GPIO 4)</a:t>
+            </a:r>
+          </a:p>
+        </p:txBody>
+      </p:sp>
+      <p:sp>
+        <p:nvSpPr>
+          <p:cNvPr id="9" name="Rounded Rectangle 8"/>
+          <p:cNvSpPr/>
+          <p:nvPr/>
+        </p:nvSpPr>
+        <p:spPr>
+          <a:xfrm>
+            <a:off x="8046720" y="1645920"/>
+            <a:ext cx="3429000" cy="2743200"/>
+          </a:xfrm>
+          <a:prstGeom prst="roundRect">
+            <a:avLst/>
+          </a:prstGeom>
+          <a:solidFill>
+            <a:srgbClr val="18223A"/>
+          </a:solidFill>
+          <a:ln w="12700">
+            <a:solidFill>
+              <a:srgbClr val="2D3E62"/>
+            </a:solidFill>
+          </a:ln>
+        </p:spPr>
+        <p:style>
+          <a:lnRef idx="1">
+            <a:schemeClr val="accent1"/>
+          </a:lnRef>
+          <a:fillRef idx="3">
+            <a:schemeClr val="accent1"/>
+          </a:fillRef>
+          <a:effectRef idx="2">
+            <a:schemeClr val="accent1"/>
+          </a:effectRef>
+          <a:fontRef idx="minor">
+            <a:schemeClr val="lt1"/>
+          </a:fontRef>
+        </p:style>
+        <p:txBody>
+          <a:bodyPr rtlCol="0" anchor="ctr" wrap="square" tIns="182880" lIns="228600" rIns="228600"/>
+          <a:lstStyle/>
+          <a:p>
+            <a:pPr algn="ctr">
+              <a:defRPr sz="950" b="1">
+                <a:solidFill>
+                  <a:srgbClr val="38BDF8"/>
+                </a:solidFill>
+                <a:latin typeface="Segoe UI"/>
+              </a:defRPr>
+            </a:pPr>
+            <a:r>
+              <a:t>EDGE DISPLAY</a:t>
             </a:r>
           </a:p>
           <a:p>
             <a:pPr>
-              <a:spcAft>
-                <a:spcPts val="1600"/>
-              </a:spcAft>
-            </a:pPr>
-            <a:r>
-              <a:rPr sz="1600" b="1">
-                <a:solidFill>
-                  <a:srgbClr val="172B2C"/>
-                </a:solidFill>
-                <a:latin typeface="Arial"/>
-              </a:rPr>
-              <a:t>• To architect and deploy a modern, reactive web dashboard on Vercel with zero runtime dependencies and 24-hour canvas-based trend plotting.</a:t>
+              <a:spcBef>
+                <a:spcPts val="400"/>
+              </a:spcBef>
+              <a:defRPr sz="1600" b="1">
+                <a:solidFill>
+                  <a:srgbClr val="F8FAFC"/>
+                </a:solidFill>
+                <a:latin typeface="Segoe UI"/>
+              </a:defRPr>
+            </a:pPr>
+            <a:r>
+              <a:t>SSD1306 0.96" OLED</a:t>
+            </a:r>
+          </a:p>
+          <a:p>
+            <a:pPr>
+              <a:spcBef>
+                <a:spcPts val="800"/>
+              </a:spcBef>
+              <a:defRPr sz="1100">
+                <a:solidFill>
+                  <a:srgbClr val="94A3B8"/>
+                </a:solidFill>
+                <a:latin typeface="Segoe UI"/>
+              </a:defRPr>
+            </a:pPr>
+            <a:r>
+              <a:t>Monochrome 128x64 Graphic Display</a:t>
+            </a:r>
+            <a:br/>
+            <a:r>
+              <a:t>• High contrast &amp; wide viewing angle</a:t>
+            </a:r>
+            <a:br/>
+            <a:r>
+              <a:t>• I2C Interface: SDA (GPIO 21), SCL (GPIO 22)</a:t>
+            </a:r>
+            <a:br/>
+            <a:r>
+              <a:t>• Low power consumption (0.08W)</a:t>
+            </a:r>
+          </a:p>
+        </p:txBody>
+      </p:sp>
+      <p:sp>
+        <p:nvSpPr>
+          <p:cNvPr id="10" name="Rounded Rectangle 9"/>
+          <p:cNvSpPr/>
+          <p:nvPr/>
+        </p:nvSpPr>
+        <p:spPr>
+          <a:xfrm>
+            <a:off x="822960" y="4572000"/>
+            <a:ext cx="10545775" cy="1737360"/>
+          </a:xfrm>
+          <a:prstGeom prst="roundRect">
+            <a:avLst/>
+          </a:prstGeom>
+          <a:solidFill>
+            <a:srgbClr val="18223A"/>
+          </a:solidFill>
+          <a:ln w="19050">
+            <a:solidFill>
+              <a:srgbClr val="14B8A6"/>
+            </a:solidFill>
+          </a:ln>
+        </p:spPr>
+        <p:style>
+          <a:lnRef idx="1">
+            <a:schemeClr val="accent1"/>
+          </a:lnRef>
+          <a:fillRef idx="3">
+            <a:schemeClr val="accent1"/>
+          </a:fillRef>
+          <a:effectRef idx="2">
+            <a:schemeClr val="accent1"/>
+          </a:effectRef>
+          <a:fontRef idx="minor">
+            <a:schemeClr val="lt1"/>
+          </a:fontRef>
+        </p:style>
+        <p:txBody>
+          <a:bodyPr rtlCol="0" anchor="ctr" wrap="square" tIns="182880" lIns="274320" rIns="274320"/>
+          <a:lstStyle/>
+          <a:p>
+            <a:pPr algn="ctr">
+              <a:defRPr sz="1200" b="1">
+                <a:solidFill>
+                  <a:srgbClr val="14B8A6"/>
+                </a:solidFill>
+                <a:latin typeface="Segoe UI"/>
+              </a:defRPr>
+            </a:pPr>
+            <a:r>
+              <a:t>⚡ SCHEMATIC PIN MAPPING &amp; POWER DISTRIBUTION</a:t>
+            </a:r>
+          </a:p>
+          <a:p>
+            <a:pPr>
+              <a:spcBef>
+                <a:spcPts val="600"/>
+              </a:spcBef>
+              <a:defRPr sz="1100">
+                <a:solidFill>
+                  <a:srgbClr val="F8FAFC"/>
+                </a:solidFill>
+                <a:latin typeface="Segoe UI"/>
+              </a:defRPr>
+            </a:pPr>
+            <a:r>
+              <a:t>• DHT22 Sensor ➜ VCC to 3.3V Pin  |  GND to Common Ground  |  Data OUT to GPIO 4 (10kΩ pull-up resistor to 3.3V)</a:t>
+            </a:r>
+            <a:br/>
+            <a:r>
+              <a:t>• SSD1306 Display ➜ VCC to 3.3V Pin  |  GND to Common Ground  |  SDA to GPIO 21  |  SCL to GPIO 22</a:t>
+            </a:r>
+            <a:br/>
+            <a:r>
+              <a:t>• Power &amp; Tethering ➜ 5V DC via Micro-USB cable supplied by power bank or mobile hotspot connection for live uplink.</a:t>
             </a:r>
           </a:p>
         </p:txBody>
@@ -5846,13 +6747,13 @@
         <p:spPr>
           <a:xfrm>
             <a:off x="0" y="0"/>
-            <a:ext cx="12191695" cy="109728"/>
+            <a:ext cx="12191695" cy="6858000"/>
           </a:xfrm>
           <a:prstGeom prst="rect">
             <a:avLst/>
           </a:prstGeom>
           <a:solidFill>
-            <a:srgbClr val="102C57"/>
+            <a:srgbClr val="0F172A"/>
           </a:solidFill>
           <a:ln>
             <a:noFill/>
@@ -5882,105 +6783,20 @@
       </p:sp>
       <p:sp>
         <p:nvSpPr>
-          <p:cNvPr id="3" name="TextBox 2"/>
-          <p:cNvSpPr txBox="1"/>
-          <p:nvPr/>
-        </p:nvSpPr>
-        <p:spPr>
-          <a:xfrm>
-            <a:off x="731520" y="274320"/>
-            <a:ext cx="10728655" cy="822960"/>
-          </a:xfrm>
-          <a:prstGeom prst="rect">
-            <a:avLst/>
-          </a:prstGeom>
-          <a:noFill/>
-        </p:spPr>
-        <p:txBody>
-          <a:bodyPr wrap="square" lIns="0" tIns="0" rIns="0" bIns="0">
-            <a:spAutoFit/>
-          </a:bodyPr>
-          <a:lstStyle/>
-          <a:p>
-            <a:pPr>
-              <a:defRPr sz="1300" b="1">
-                <a:solidFill>
-                  <a:srgbClr val="102C57"/>
-                </a:solidFill>
-                <a:latin typeface="Arial"/>
-              </a:defRPr>
-            </a:pPr>
-            <a:r>
-              <a:t>Galgotias College of Engineering &amp; Technology, Greater Noida</a:t>
-            </a:r>
-          </a:p>
-          <a:p>
-            <a:pPr>
-              <a:defRPr sz="1100" b="1">
-                <a:solidFill>
-                  <a:srgbClr val="646E73"/>
-                </a:solidFill>
-                <a:latin typeface="Arial"/>
-              </a:defRPr>
-            </a:pPr>
-            <a:r>
-              <a:t>DEPARTMENT OF ELECTRONICS AND COMMUNICATION ENGINEERING</a:t>
-            </a:r>
-          </a:p>
-        </p:txBody>
-      </p:sp>
-      <p:sp>
-        <p:nvSpPr>
-          <p:cNvPr id="4" name="TextBox 3"/>
-          <p:cNvSpPr txBox="1"/>
-          <p:nvPr/>
-        </p:nvSpPr>
-        <p:spPr>
-          <a:xfrm>
-            <a:off x="731520" y="1097280"/>
-            <a:ext cx="10728655" cy="640080"/>
-          </a:xfrm>
-          <a:prstGeom prst="rect">
-            <a:avLst/>
-          </a:prstGeom>
-          <a:noFill/>
-        </p:spPr>
-        <p:txBody>
-          <a:bodyPr wrap="square" lIns="0" tIns="0" rIns="0" bIns="0">
-            <a:spAutoFit/>
-          </a:bodyPr>
-          <a:lstStyle/>
-          <a:p>
-            <a:pPr>
-              <a:defRPr sz="2600" b="1">
-                <a:solidFill>
-                  <a:srgbClr val="102C57"/>
-                </a:solidFill>
-                <a:latin typeface="Arial"/>
-              </a:defRPr>
-            </a:pPr>
-            <a:r>
-              <a:t>Description: Hardware Architecture &amp; Interfacing</a:t>
-            </a:r>
-          </a:p>
-        </p:txBody>
-      </p:sp>
-      <p:sp>
-        <p:nvSpPr>
-          <p:cNvPr id="5" name="Rectangle 4"/>
+          <p:cNvPr id="3" name="Rectangle 2"/>
           <p:cNvSpPr/>
           <p:nvPr/>
         </p:nvSpPr>
         <p:spPr>
           <a:xfrm>
-            <a:off x="731520" y="1783080"/>
-            <a:ext cx="2011680" cy="45720"/>
+            <a:off x="0" y="0"/>
+            <a:ext cx="12191695" cy="73152"/>
           </a:xfrm>
           <a:prstGeom prst="rect">
             <a:avLst/>
           </a:prstGeom>
           <a:solidFill>
-            <a:srgbClr val="E87652"/>
+            <a:srgbClr val="14B8A6"/>
           </a:solidFill>
           <a:ln>
             <a:noFill/>
@@ -6008,548 +6824,26 @@
           </a:p>
         </p:txBody>
       </p:sp>
-      <p:graphicFrame>
-        <p:nvGraphicFramePr>
-          <p:cNvPr id="6" name="Table 5"/>
-          <p:cNvGraphicFramePr>
-            <a:graphicFrameLocks noGrp="1"/>
-          </p:cNvGraphicFramePr>
-          <p:nvPr/>
-        </p:nvGraphicFramePr>
-        <p:xfrm>
-          <a:off x="914400" y="2011680"/>
-          <a:ext cx="10362895" cy="2377440"/>
-        </p:xfrm>
-        <a:graphic>
-          <a:graphicData uri="http://schemas.openxmlformats.org/drawingml/2006/table">
-            <a:tbl>
-              <a:tblPr firstRow="1" bandRow="1">
-                <a:tableStyleId>{5C22544A-7EE6-4342-B048-85BDC9FD1C3A}</a:tableStyleId>
-              </a:tblPr>
-              <a:tblGrid>
-                <a:gridCol w="2194560"/>
-                <a:gridCol w="2926080"/>
-                <a:gridCol w="2560320"/>
-                <a:gridCol w="2681935"/>
-              </a:tblGrid>
-              <a:tr h="475488">
-                <a:tc>
-                  <a:txBody>
-                    <a:bodyPr/>
-                    <a:lstStyle/>
-                    <a:p>
-                      <a:pPr algn="ctr">
-                        <a:defRPr sz="1300" b="1">
-                          <a:solidFill>
-                            <a:srgbClr val="FFFFFF"/>
-                          </a:solidFill>
-                          <a:latin typeface="Arial"/>
-                        </a:defRPr>
-                      </a:pPr>
-                      <a:r>
-                        <a:t>Component</a:t>
-                      </a:r>
-                    </a:p>
-                  </a:txBody>
-                  <a:tcPr>
-                    <a:solidFill>
-                      <a:srgbClr val="102C57"/>
-                    </a:solidFill>
-                  </a:tcPr>
-                </a:tc>
-                <a:tc>
-                  <a:txBody>
-                    <a:bodyPr/>
-                    <a:lstStyle/>
-                    <a:p>
-                      <a:pPr algn="ctr">
-                        <a:defRPr sz="1300" b="1">
-                          <a:solidFill>
-                            <a:srgbClr val="FFFFFF"/>
-                          </a:solidFill>
-                          <a:latin typeface="Arial"/>
-                        </a:defRPr>
-                      </a:pPr>
-                      <a:r>
-                        <a:t>Specification</a:t>
-                      </a:r>
-                    </a:p>
-                  </a:txBody>
-                  <a:tcPr>
-                    <a:solidFill>
-                      <a:srgbClr val="102C57"/>
-                    </a:solidFill>
-                  </a:tcPr>
-                </a:tc>
-                <a:tc>
-                  <a:txBody>
-                    <a:bodyPr/>
-                    <a:lstStyle/>
-                    <a:p>
-                      <a:pPr algn="ctr">
-                        <a:defRPr sz="1300" b="1">
-                          <a:solidFill>
-                            <a:srgbClr val="FFFFFF"/>
-                          </a:solidFill>
-                          <a:latin typeface="Arial"/>
-                        </a:defRPr>
-                      </a:pPr>
-                      <a:r>
-                        <a:t>Pin Interface</a:t>
-                      </a:r>
-                    </a:p>
-                  </a:txBody>
-                  <a:tcPr>
-                    <a:solidFill>
-                      <a:srgbClr val="102C57"/>
-                    </a:solidFill>
-                  </a:tcPr>
-                </a:tc>
-                <a:tc>
-                  <a:txBody>
-                    <a:bodyPr/>
-                    <a:lstStyle/>
-                    <a:p>
-                      <a:pPr algn="ctr">
-                        <a:defRPr sz="1300" b="1">
-                          <a:solidFill>
-                            <a:srgbClr val="FFFFFF"/>
-                          </a:solidFill>
-                          <a:latin typeface="Arial"/>
-                        </a:defRPr>
-                      </a:pPr>
-                      <a:r>
-                        <a:t>Role in System</a:t>
-                      </a:r>
-                    </a:p>
-                  </a:txBody>
-                  <a:tcPr>
-                    <a:solidFill>
-                      <a:srgbClr val="102C57"/>
-                    </a:solidFill>
-                  </a:tcPr>
-                </a:tc>
-              </a:tr>
-              <a:tr h="475488">
-                <a:tc>
-                  <a:txBody>
-                    <a:bodyPr/>
-                    <a:lstStyle/>
-                    <a:p>
-                      <a:pPr>
-                        <a:defRPr sz="1200">
-                          <a:solidFill>
-                            <a:srgbClr val="172B2C"/>
-                          </a:solidFill>
-                          <a:latin typeface="Arial"/>
-                        </a:defRPr>
-                      </a:pPr>
-                      <a:r>
-                        <a:t>ESP32 Dev Module</a:t>
-                      </a:r>
-                    </a:p>
-                  </a:txBody>
-                  <a:tcPr>
-                    <a:solidFill>
-                      <a:srgbClr val="F5F7F8"/>
-                    </a:solidFill>
-                  </a:tcPr>
-                </a:tc>
-                <a:tc>
-                  <a:txBody>
-                    <a:bodyPr/>
-                    <a:lstStyle/>
-                    <a:p>
-                      <a:pPr>
-                        <a:defRPr sz="1200">
-                          <a:solidFill>
-                            <a:srgbClr val="172B2C"/>
-                          </a:solidFill>
-                          <a:latin typeface="Arial"/>
-                        </a:defRPr>
-                      </a:pPr>
-                      <a:r>
-                        <a:t>Xtensa Dual-Core 32-bit, 240MHz, 2.4GHz Wi-Fi 802.11 b/g/n</a:t>
-                      </a:r>
-                    </a:p>
-                  </a:txBody>
-                  <a:tcPr>
-                    <a:solidFill>
-                      <a:srgbClr val="F5F7F8"/>
-                    </a:solidFill>
-                  </a:tcPr>
-                </a:tc>
-                <a:tc>
-                  <a:txBody>
-                    <a:bodyPr/>
-                    <a:lstStyle/>
-                    <a:p>
-                      <a:pPr>
-                        <a:defRPr sz="1200">
-                          <a:solidFill>
-                            <a:srgbClr val="172B2C"/>
-                          </a:solidFill>
-                          <a:latin typeface="Arial"/>
-                        </a:defRPr>
-                      </a:pPr>
-                      <a:r>
-                        <a:t>Micro-USB / 3.3V Power</a:t>
-                      </a:r>
-                    </a:p>
-                  </a:txBody>
-                  <a:tcPr>
-                    <a:solidFill>
-                      <a:srgbClr val="F5F7F8"/>
-                    </a:solidFill>
-                  </a:tcPr>
-                </a:tc>
-                <a:tc>
-                  <a:txBody>
-                    <a:bodyPr/>
-                    <a:lstStyle/>
-                    <a:p>
-                      <a:pPr>
-                        <a:defRPr sz="1200">
-                          <a:solidFill>
-                            <a:srgbClr val="172B2C"/>
-                          </a:solidFill>
-                          <a:latin typeface="Arial"/>
-                        </a:defRPr>
-                      </a:pPr>
-                      <a:r>
-                        <a:t>Master controller, Wi-Fi telemetry &amp; HTTP client</a:t>
-                      </a:r>
-                    </a:p>
-                  </a:txBody>
-                  <a:tcPr>
-                    <a:solidFill>
-                      <a:srgbClr val="F5F7F8"/>
-                    </a:solidFill>
-                  </a:tcPr>
-                </a:tc>
-              </a:tr>
-              <a:tr h="475488">
-                <a:tc>
-                  <a:txBody>
-                    <a:bodyPr/>
-                    <a:lstStyle/>
-                    <a:p>
-                      <a:pPr>
-                        <a:defRPr sz="1200">
-                          <a:solidFill>
-                            <a:srgbClr val="172B2C"/>
-                          </a:solidFill>
-                          <a:latin typeface="Arial"/>
-                        </a:defRPr>
-                      </a:pPr>
-                      <a:r>
-                        <a:t>DHT22 (AM2302)</a:t>
-                      </a:r>
-                    </a:p>
-                  </a:txBody>
-                  <a:tcPr>
-                    <a:solidFill>
-                      <a:srgbClr val="FFFFFF"/>
-                    </a:solidFill>
-                  </a:tcPr>
-                </a:tc>
-                <a:tc>
-                  <a:txBody>
-                    <a:bodyPr/>
-                    <a:lstStyle/>
-                    <a:p>
-                      <a:pPr>
-                        <a:defRPr sz="1200">
-                          <a:solidFill>
-                            <a:srgbClr val="172B2C"/>
-                          </a:solidFill>
-                          <a:latin typeface="Arial"/>
-                        </a:defRPr>
-                      </a:pPr>
-                      <a:r>
-                        <a:t>-40 to 80°C (±0.5°C), 0 to 100% RH (±2%), 0.5Hz rate</a:t>
-                      </a:r>
-                    </a:p>
-                  </a:txBody>
-                  <a:tcPr>
-                    <a:solidFill>
-                      <a:srgbClr val="FFFFFF"/>
-                    </a:solidFill>
-                  </a:tcPr>
-                </a:tc>
-                <a:tc>
-                  <a:txBody>
-                    <a:bodyPr/>
-                    <a:lstStyle/>
-                    <a:p>
-                      <a:pPr>
-                        <a:defRPr sz="1200">
-                          <a:solidFill>
-                            <a:srgbClr val="172B2C"/>
-                          </a:solidFill>
-                          <a:latin typeface="Arial"/>
-                        </a:defRPr>
-                      </a:pPr>
-                      <a:r>
-                        <a:t>GPIO 4 (Single-wire digital)</a:t>
-                      </a:r>
-                    </a:p>
-                  </a:txBody>
-                  <a:tcPr>
-                    <a:solidFill>
-                      <a:srgbClr val="FFFFFF"/>
-                    </a:solidFill>
-                  </a:tcPr>
-                </a:tc>
-                <a:tc>
-                  <a:txBody>
-                    <a:bodyPr/>
-                    <a:lstStyle/>
-                    <a:p>
-                      <a:pPr>
-                        <a:defRPr sz="1200">
-                          <a:solidFill>
-                            <a:srgbClr val="172B2C"/>
-                          </a:solidFill>
-                          <a:latin typeface="Arial"/>
-                        </a:defRPr>
-                      </a:pPr>
-                      <a:r>
-                        <a:t>Atmospheric temperature &amp; relative humidity sensor</a:t>
-                      </a:r>
-                    </a:p>
-                  </a:txBody>
-                  <a:tcPr>
-                    <a:solidFill>
-                      <a:srgbClr val="FFFFFF"/>
-                    </a:solidFill>
-                  </a:tcPr>
-                </a:tc>
-              </a:tr>
-              <a:tr h="475488">
-                <a:tc>
-                  <a:txBody>
-                    <a:bodyPr/>
-                    <a:lstStyle/>
-                    <a:p>
-                      <a:pPr>
-                        <a:defRPr sz="1200">
-                          <a:solidFill>
-                            <a:srgbClr val="172B2C"/>
-                          </a:solidFill>
-                          <a:latin typeface="Arial"/>
-                        </a:defRPr>
-                      </a:pPr>
-                      <a:r>
-                        <a:t>SSD1306 OLED</a:t>
-                      </a:r>
-                    </a:p>
-                  </a:txBody>
-                  <a:tcPr>
-                    <a:solidFill>
-                      <a:srgbClr val="F5F7F8"/>
-                    </a:solidFill>
-                  </a:tcPr>
-                </a:tc>
-                <a:tc>
-                  <a:txBody>
-                    <a:bodyPr/>
-                    <a:lstStyle/>
-                    <a:p>
-                      <a:pPr>
-                        <a:defRPr sz="1200">
-                          <a:solidFill>
-                            <a:srgbClr val="172B2C"/>
-                          </a:solidFill>
-                          <a:latin typeface="Arial"/>
-                        </a:defRPr>
-                      </a:pPr>
-                      <a:r>
-                        <a:t>0.96" Monochrome 128x64 display, I2C protocol</a:t>
-                      </a:r>
-                    </a:p>
-                  </a:txBody>
-                  <a:tcPr>
-                    <a:solidFill>
-                      <a:srgbClr val="F5F7F8"/>
-                    </a:solidFill>
-                  </a:tcPr>
-                </a:tc>
-                <a:tc>
-                  <a:txBody>
-                    <a:bodyPr/>
-                    <a:lstStyle/>
-                    <a:p>
-                      <a:pPr>
-                        <a:defRPr sz="1200">
-                          <a:solidFill>
-                            <a:srgbClr val="172B2C"/>
-                          </a:solidFill>
-                          <a:latin typeface="Arial"/>
-                        </a:defRPr>
-                      </a:pPr>
-                      <a:r>
-                        <a:t>SDA: GPIO 21</a:t>
-                      </a:r>
-                      <a:br/>
-                      <a:r>
-                        <a:t>SCL: GPIO 22</a:t>
-                      </a:r>
-                    </a:p>
-                  </a:txBody>
-                  <a:tcPr>
-                    <a:solidFill>
-                      <a:srgbClr val="F5F7F8"/>
-                    </a:solidFill>
-                  </a:tcPr>
-                </a:tc>
-                <a:tc>
-                  <a:txBody>
-                    <a:bodyPr/>
-                    <a:lstStyle/>
-                    <a:p>
-                      <a:pPr>
-                        <a:defRPr sz="1200">
-                          <a:solidFill>
-                            <a:srgbClr val="172B2C"/>
-                          </a:solidFill>
-                          <a:latin typeface="Arial"/>
-                        </a:defRPr>
-                      </a:pPr>
-                      <a:r>
-                        <a:t>Real-time edge telemetry display and connection indicator</a:t>
-                      </a:r>
-                    </a:p>
-                  </a:txBody>
-                  <a:tcPr>
-                    <a:solidFill>
-                      <a:srgbClr val="F5F7F8"/>
-                    </a:solidFill>
-                  </a:tcPr>
-                </a:tc>
-              </a:tr>
-              <a:tr h="475488">
-                <a:tc>
-                  <a:txBody>
-                    <a:bodyPr/>
-                    <a:lstStyle/>
-                    <a:p>
-                      <a:pPr>
-                        <a:defRPr sz="1200">
-                          <a:solidFill>
-                            <a:srgbClr val="172B2C"/>
-                          </a:solidFill>
-                          <a:latin typeface="Arial"/>
-                        </a:defRPr>
-                      </a:pPr>
-                      <a:r>
-                        <a:t>Power Supply</a:t>
-                      </a:r>
-                    </a:p>
-                  </a:txBody>
-                  <a:tcPr>
-                    <a:solidFill>
-                      <a:srgbClr val="FFFFFF"/>
-                    </a:solidFill>
-                  </a:tcPr>
-                </a:tc>
-                <a:tc>
-                  <a:txBody>
-                    <a:bodyPr/>
-                    <a:lstStyle/>
-                    <a:p>
-                      <a:pPr>
-                        <a:defRPr sz="1200">
-                          <a:solidFill>
-                            <a:srgbClr val="172B2C"/>
-                          </a:solidFill>
-                          <a:latin typeface="Arial"/>
-                        </a:defRPr>
-                      </a:pPr>
-                      <a:r>
-                        <a:t>5V DC via USB / Mobile Hotspot Tethering</a:t>
-                      </a:r>
-                    </a:p>
-                  </a:txBody>
-                  <a:tcPr>
-                    <a:solidFill>
-                      <a:srgbClr val="FFFFFF"/>
-                    </a:solidFill>
-                  </a:tcPr>
-                </a:tc>
-                <a:tc>
-                  <a:txBody>
-                    <a:bodyPr/>
-                    <a:lstStyle/>
-                    <a:p>
-                      <a:pPr>
-                        <a:defRPr sz="1200">
-                          <a:solidFill>
-                            <a:srgbClr val="172B2C"/>
-                          </a:solidFill>
-                          <a:latin typeface="Arial"/>
-                        </a:defRPr>
-                      </a:pPr>
-                      <a:r>
-                        <a:t>VIN / 3.3V LDO</a:t>
-                      </a:r>
-                    </a:p>
-                  </a:txBody>
-                  <a:tcPr>
-                    <a:solidFill>
-                      <a:srgbClr val="FFFFFF"/>
-                    </a:solidFill>
-                  </a:tcPr>
-                </a:tc>
-                <a:tc>
-                  <a:txBody>
-                    <a:bodyPr/>
-                    <a:lstStyle/>
-                    <a:p>
-                      <a:pPr>
-                        <a:defRPr sz="1200">
-                          <a:solidFill>
-                            <a:srgbClr val="172B2C"/>
-                          </a:solidFill>
-                          <a:latin typeface="Arial"/>
-                        </a:defRPr>
-                      </a:pPr>
-                      <a:r>
-                        <a:t>Powers microcontroller, sensor, and display module</a:t>
-                      </a:r>
-                    </a:p>
-                  </a:txBody>
-                  <a:tcPr>
-                    <a:solidFill>
-                      <a:srgbClr val="FFFFFF"/>
-                    </a:solidFill>
-                  </a:tcPr>
-                </a:tc>
-              </a:tr>
-            </a:tbl>
-          </a:graphicData>
-        </a:graphic>
-      </p:graphicFrame>
-      <p:sp>
-        <p:nvSpPr>
-          <p:cNvPr id="7" name="Rounded Rectangle 6"/>
+      <p:sp>
+        <p:nvSpPr>
+          <p:cNvPr id="4" name="Rounded Rectangle 3"/>
           <p:cNvSpPr/>
           <p:nvPr/>
         </p:nvSpPr>
         <p:spPr>
           <a:xfrm>
-            <a:off x="914400" y="4663440"/>
-            <a:ext cx="10362895" cy="1645920"/>
+            <a:off x="822960" y="320040"/>
+            <a:ext cx="6858000" cy="347472"/>
           </a:xfrm>
           <a:prstGeom prst="roundRect">
             <a:avLst/>
           </a:prstGeom>
           <a:solidFill>
-            <a:srgbClr val="FFFFFF"/>
-          </a:solidFill>
-          <a:ln w="19050">
+            <a:srgbClr val="18223A"/>
+          </a:solidFill>
+          <a:ln w="12700">
             <a:solidFill>
-              <a:srgbClr val="168B83"/>
+              <a:srgbClr val="2D3E62"/>
             </a:solidFill>
           </a:ln>
         </p:spPr>
@@ -6568,18 +6862,165 @@
           </a:fontRef>
         </p:style>
         <p:txBody>
-          <a:bodyPr rtlCol="0" anchor="ctr" wrap="square" lIns="365760"/>
+          <a:bodyPr rtlCol="0" anchor="ctr" tIns="54864" lIns="182880"/>
           <a:lstStyle/>
           <a:p>
             <a:pPr algn="ctr">
-              <a:defRPr b="1" sz="1300">
-                <a:solidFill>
-                  <a:srgbClr val="168B83"/>
-                </a:solidFill>
-              </a:defRPr>
-            </a:pPr>
-            <a:r>
-              <a:t>HARDWARE PIN INTERCONNECTION SCHEME:</a:t>
+              <a:defRPr sz="850" b="1">
+                <a:solidFill>
+                  <a:srgbClr val="14B8A6"/>
+                </a:solidFill>
+                <a:latin typeface="Segoe UI"/>
+              </a:defRPr>
+            </a:pPr>
+            <a:r>
+              <a:t>GALGOTIAS COLLEGE OF ENGG. &amp; TECH.  •  ECE DEPARTMENT  •  TELEMETRY FLOW</a:t>
+            </a:r>
+          </a:p>
+        </p:txBody>
+      </p:sp>
+      <p:sp>
+        <p:nvSpPr>
+          <p:cNvPr id="5" name="Rounded Rectangle 4"/>
+          <p:cNvSpPr/>
+          <p:nvPr/>
+        </p:nvSpPr>
+        <p:spPr>
+          <a:xfrm>
+            <a:off x="10607040" y="320040"/>
+            <a:ext cx="777240" cy="347472"/>
+          </a:xfrm>
+          <a:prstGeom prst="roundRect">
+            <a:avLst/>
+          </a:prstGeom>
+          <a:solidFill>
+            <a:srgbClr val="18223A"/>
+          </a:solidFill>
+          <a:ln w="12700">
+            <a:solidFill>
+              <a:srgbClr val="2D3E62"/>
+            </a:solidFill>
+          </a:ln>
+        </p:spPr>
+        <p:style>
+          <a:lnRef idx="1">
+            <a:schemeClr val="accent1"/>
+          </a:lnRef>
+          <a:fillRef idx="3">
+            <a:schemeClr val="accent1"/>
+          </a:fillRef>
+          <a:effectRef idx="2">
+            <a:schemeClr val="accent1"/>
+          </a:effectRef>
+          <a:fontRef idx="minor">
+            <a:schemeClr val="lt1"/>
+          </a:fontRef>
+        </p:style>
+        <p:txBody>
+          <a:bodyPr rtlCol="0" anchor="ctr"/>
+          <a:lstStyle/>
+          <a:p>
+            <a:pPr algn="ctr">
+              <a:defRPr sz="900" b="1">
+                <a:solidFill>
+                  <a:srgbClr val="94A3B8"/>
+                </a:solidFill>
+                <a:latin typeface="Segoe UI"/>
+              </a:defRPr>
+            </a:pPr>
+            <a:r>
+              <a:t>06 / 10</a:t>
+            </a:r>
+          </a:p>
+        </p:txBody>
+      </p:sp>
+      <p:sp>
+        <p:nvSpPr>
+          <p:cNvPr id="6" name="TextBox 5"/>
+          <p:cNvSpPr txBox="1"/>
+          <p:nvPr/>
+        </p:nvSpPr>
+        <p:spPr>
+          <a:xfrm>
+            <a:off x="822960" y="777240"/>
+            <a:ext cx="10515600" cy="685800"/>
+          </a:xfrm>
+          <a:prstGeom prst="rect">
+            <a:avLst/>
+          </a:prstGeom>
+          <a:noFill/>
+        </p:spPr>
+        <p:txBody>
+          <a:bodyPr wrap="square" lIns="0" tIns="0" rIns="0" bIns="0">
+            <a:spAutoFit/>
+          </a:bodyPr>
+          <a:lstStyle/>
+          <a:p>
+            <a:pPr>
+              <a:defRPr sz="2400" b="1">
+                <a:solidFill>
+                  <a:srgbClr val="F8FAFC"/>
+                </a:solidFill>
+                <a:latin typeface="Segoe UI"/>
+              </a:defRPr>
+            </a:pPr>
+            <a:r>
+              <a:t>Software Architecture &amp; Cloud Data Pipeline</a:t>
+            </a:r>
+          </a:p>
+        </p:txBody>
+      </p:sp>
+      <p:sp>
+        <p:nvSpPr>
+          <p:cNvPr id="7" name="Rounded Rectangle 6"/>
+          <p:cNvSpPr/>
+          <p:nvPr/>
+        </p:nvSpPr>
+        <p:spPr>
+          <a:xfrm>
+            <a:off x="822960" y="1645920"/>
+            <a:ext cx="2514600" cy="4663440"/>
+          </a:xfrm>
+          <a:prstGeom prst="roundRect">
+            <a:avLst/>
+          </a:prstGeom>
+          <a:solidFill>
+            <a:srgbClr val="18223A"/>
+          </a:solidFill>
+          <a:ln w="12700">
+            <a:solidFill>
+              <a:srgbClr val="2D3E62"/>
+            </a:solidFill>
+          </a:ln>
+        </p:spPr>
+        <p:style>
+          <a:lnRef idx="1">
+            <a:schemeClr val="accent1"/>
+          </a:lnRef>
+          <a:fillRef idx="3">
+            <a:schemeClr val="accent1"/>
+          </a:fillRef>
+          <a:effectRef idx="2">
+            <a:schemeClr val="accent1"/>
+          </a:effectRef>
+          <a:fontRef idx="minor">
+            <a:schemeClr val="lt1"/>
+          </a:fontRef>
+        </p:style>
+        <p:txBody>
+          <a:bodyPr rtlCol="0" anchor="ctr" wrap="square" tIns="228600" lIns="182880" rIns="182880"/>
+          <a:lstStyle/>
+          <a:p>
+            <a:pPr algn="ctr">
+              <a:defRPr sz="1000" b="1">
+                <a:solidFill>
+                  <a:srgbClr val="14B8A6"/>
+                </a:solidFill>
+                <a:latin typeface="Segoe UI"/>
+              </a:defRPr>
+            </a:pPr>
+            <a:r>
+              <a:t>STEP 1: SENSING</a:t>
             </a:r>
           </a:p>
           <a:p>
@@ -6587,23 +7028,292 @@
               <a:spcBef>
                 <a:spcPts val="600"/>
               </a:spcBef>
-              <a:defRPr sz="1300">
-                <a:solidFill>
-                  <a:srgbClr val="172B2C"/>
-                </a:solidFill>
-                <a:latin typeface="Arial"/>
-              </a:defRPr>
-            </a:pPr>
-            <a:r>
-              <a:t>• DHT22 VCC ➜ 3.3V  |  DHT22 DATA ➜ GPIO 4 (with 10kΩ pull-up)  |  DHT22 GND ➜ GND</a:t>
-            </a:r>
-            <a:br/>
-            <a:r>
-              <a:t>• OLED VCC ➜ 3.3V   |  OLED GND ➜ GND  |  OLED SDA ➜ GPIO 21  |  OLED SCL ➜ GPIO 22</a:t>
-            </a:r>
-            <a:br/>
-            <a:r>
-              <a:t>• Data Transmission Pipeline: DHT22 → ESP32 (Internal Math) → SSD1306 (Local) + Wi-Fi HTTP Post (ThingSpeak)</a:t>
+              <a:defRPr sz="1600" b="1">
+                <a:solidFill>
+                  <a:srgbClr val="F8FAFC"/>
+                </a:solidFill>
+                <a:latin typeface="Segoe UI"/>
+              </a:defRPr>
+            </a:pPr>
+            <a:r>
+              <a:t>DHT22 Sensor</a:t>
+            </a:r>
+          </a:p>
+          <a:p>
+            <a:pPr>
+              <a:spcBef>
+                <a:spcPts val="1200"/>
+              </a:spcBef>
+              <a:defRPr sz="1100">
+                <a:solidFill>
+                  <a:srgbClr val="94A3B8"/>
+                </a:solidFill>
+                <a:latin typeface="Segoe UI"/>
+              </a:defRPr>
+            </a:pPr>
+            <a:r>
+              <a:t>Measures temperature &amp; relative humidity every 2s via single-wire digital pulse width modulation.</a:t>
+            </a:r>
+          </a:p>
+        </p:txBody>
+      </p:sp>
+      <p:sp>
+        <p:nvSpPr>
+          <p:cNvPr id="8" name="Rounded Rectangle 7"/>
+          <p:cNvSpPr/>
+          <p:nvPr/>
+        </p:nvSpPr>
+        <p:spPr>
+          <a:xfrm>
+            <a:off x="3520440" y="1645920"/>
+            <a:ext cx="2514600" cy="4663440"/>
+          </a:xfrm>
+          <a:prstGeom prst="roundRect">
+            <a:avLst/>
+          </a:prstGeom>
+          <a:solidFill>
+            <a:srgbClr val="18223A"/>
+          </a:solidFill>
+          <a:ln w="12700">
+            <a:solidFill>
+              <a:srgbClr val="2D3E62"/>
+            </a:solidFill>
+          </a:ln>
+        </p:spPr>
+        <p:style>
+          <a:lnRef idx="1">
+            <a:schemeClr val="accent1"/>
+          </a:lnRef>
+          <a:fillRef idx="3">
+            <a:schemeClr val="accent1"/>
+          </a:fillRef>
+          <a:effectRef idx="2">
+            <a:schemeClr val="accent1"/>
+          </a:effectRef>
+          <a:fontRef idx="minor">
+            <a:schemeClr val="lt1"/>
+          </a:fontRef>
+        </p:style>
+        <p:txBody>
+          <a:bodyPr rtlCol="0" anchor="ctr" wrap="square" tIns="228600" lIns="182880" rIns="182880"/>
+          <a:lstStyle/>
+          <a:p>
+            <a:pPr algn="ctr">
+              <a:defRPr sz="1000" b="1">
+                <a:solidFill>
+                  <a:srgbClr val="38BDF8"/>
+                </a:solidFill>
+                <a:latin typeface="Segoe UI"/>
+              </a:defRPr>
+            </a:pPr>
+            <a:r>
+              <a:t>STEP 2: EDGE MATH</a:t>
+            </a:r>
+          </a:p>
+          <a:p>
+            <a:pPr>
+              <a:spcBef>
+                <a:spcPts val="600"/>
+              </a:spcBef>
+              <a:defRPr sz="1600" b="1">
+                <a:solidFill>
+                  <a:srgbClr val="F8FAFC"/>
+                </a:solidFill>
+                <a:latin typeface="Segoe UI"/>
+              </a:defRPr>
+            </a:pPr>
+            <a:r>
+              <a:t>ESP32 Firmware</a:t>
+            </a:r>
+          </a:p>
+          <a:p>
+            <a:pPr>
+              <a:spcBef>
+                <a:spcPts val="1200"/>
+              </a:spcBef>
+              <a:defRPr sz="1100">
+                <a:solidFill>
+                  <a:srgbClr val="94A3B8"/>
+                </a:solidFill>
+                <a:latin typeface="Segoe UI"/>
+              </a:defRPr>
+            </a:pPr>
+            <a:r>
+              <a:t>Calculates Heat Index &amp; Dew Point on-chip. Refreshes SSD1306 OLED via I2C at 400kHz.</a:t>
+            </a:r>
+          </a:p>
+        </p:txBody>
+      </p:sp>
+      <p:sp>
+        <p:nvSpPr>
+          <p:cNvPr id="9" name="Rounded Rectangle 8"/>
+          <p:cNvSpPr/>
+          <p:nvPr/>
+        </p:nvSpPr>
+        <p:spPr>
+          <a:xfrm>
+            <a:off x="6217920" y="1645920"/>
+            <a:ext cx="2514600" cy="4663440"/>
+          </a:xfrm>
+          <a:prstGeom prst="roundRect">
+            <a:avLst/>
+          </a:prstGeom>
+          <a:solidFill>
+            <a:srgbClr val="18223A"/>
+          </a:solidFill>
+          <a:ln w="12700">
+            <a:solidFill>
+              <a:srgbClr val="2D3E62"/>
+            </a:solidFill>
+          </a:ln>
+        </p:spPr>
+        <p:style>
+          <a:lnRef idx="1">
+            <a:schemeClr val="accent1"/>
+          </a:lnRef>
+          <a:fillRef idx="3">
+            <a:schemeClr val="accent1"/>
+          </a:fillRef>
+          <a:effectRef idx="2">
+            <a:schemeClr val="accent1"/>
+          </a:effectRef>
+          <a:fontRef idx="minor">
+            <a:schemeClr val="lt1"/>
+          </a:fontRef>
+        </p:style>
+        <p:txBody>
+          <a:bodyPr rtlCol="0" anchor="ctr" wrap="square" tIns="228600" lIns="182880" rIns="182880"/>
+          <a:lstStyle/>
+          <a:p>
+            <a:pPr algn="ctr">
+              <a:defRPr sz="1000" b="1">
+                <a:solidFill>
+                  <a:srgbClr val="F59E0B"/>
+                </a:solidFill>
+                <a:latin typeface="Segoe UI"/>
+              </a:defRPr>
+            </a:pPr>
+            <a:r>
+              <a:t>STEP 3: CLOUD INGEST</a:t>
+            </a:r>
+          </a:p>
+          <a:p>
+            <a:pPr>
+              <a:spcBef>
+                <a:spcPts val="600"/>
+              </a:spcBef>
+              <a:defRPr sz="1600" b="1">
+                <a:solidFill>
+                  <a:srgbClr val="F8FAFC"/>
+                </a:solidFill>
+                <a:latin typeface="Segoe UI"/>
+              </a:defRPr>
+            </a:pPr>
+            <a:r>
+              <a:t>ThingSpeak IoT</a:t>
+            </a:r>
+          </a:p>
+          <a:p>
+            <a:pPr>
+              <a:spcBef>
+                <a:spcPts val="1200"/>
+              </a:spcBef>
+              <a:defRPr sz="1100">
+                <a:solidFill>
+                  <a:srgbClr val="94A3B8"/>
+                </a:solidFill>
+                <a:latin typeface="Segoe UI"/>
+              </a:defRPr>
+            </a:pPr>
+            <a:r>
+              <a:t>HTTP GET/POST pushes 4 data fields every 20s to Channel 3531601. Stores historical feeds.</a:t>
+            </a:r>
+          </a:p>
+        </p:txBody>
+      </p:sp>
+      <p:sp>
+        <p:nvSpPr>
+          <p:cNvPr id="10" name="Rounded Rectangle 9"/>
+          <p:cNvSpPr/>
+          <p:nvPr/>
+        </p:nvSpPr>
+        <p:spPr>
+          <a:xfrm>
+            <a:off x="8915400" y="1645920"/>
+            <a:ext cx="2514600" cy="4663440"/>
+          </a:xfrm>
+          <a:prstGeom prst="roundRect">
+            <a:avLst/>
+          </a:prstGeom>
+          <a:solidFill>
+            <a:srgbClr val="18223A"/>
+          </a:solidFill>
+          <a:ln w="12700">
+            <a:solidFill>
+              <a:srgbClr val="2D3E62"/>
+            </a:solidFill>
+          </a:ln>
+        </p:spPr>
+        <p:style>
+          <a:lnRef idx="1">
+            <a:schemeClr val="accent1"/>
+          </a:lnRef>
+          <a:fillRef idx="3">
+            <a:schemeClr val="accent1"/>
+          </a:fillRef>
+          <a:effectRef idx="2">
+            <a:schemeClr val="accent1"/>
+          </a:effectRef>
+          <a:fontRef idx="minor">
+            <a:schemeClr val="lt1"/>
+          </a:fontRef>
+        </p:style>
+        <p:txBody>
+          <a:bodyPr rtlCol="0" anchor="ctr" wrap="square" tIns="228600" lIns="182880" rIns="182880"/>
+          <a:lstStyle/>
+          <a:p>
+            <a:pPr algn="ctr">
+              <a:defRPr sz="1000" b="1">
+                <a:solidFill>
+                  <a:srgbClr val="F97316"/>
+                </a:solidFill>
+                <a:latin typeface="Segoe UI"/>
+              </a:defRPr>
+            </a:pPr>
+            <a:r>
+              <a:t>STEP 4: WEB DASHBOARD</a:t>
+            </a:r>
+          </a:p>
+          <a:p>
+            <a:pPr>
+              <a:spcBef>
+                <a:spcPts val="600"/>
+              </a:spcBef>
+              <a:defRPr sz="1600" b="1">
+                <a:solidFill>
+                  <a:srgbClr val="F8FAFC"/>
+                </a:solidFill>
+                <a:latin typeface="Segoe UI"/>
+              </a:defRPr>
+            </a:pPr>
+            <a:r>
+              <a:t>Vercel CDN</a:t>
+            </a:r>
+          </a:p>
+          <a:p>
+            <a:pPr>
+              <a:spcBef>
+                <a:spcPts val="1200"/>
+              </a:spcBef>
+              <a:defRPr sz="1100">
+                <a:solidFill>
+                  <a:srgbClr val="94A3B8"/>
+                </a:solidFill>
+                <a:latin typeface="Segoe UI"/>
+              </a:defRPr>
+            </a:pPr>
+            <a:r>
+              <a:t>Static dashboard polls ThingSpeak every 2s, plots 24-hr canvas graph, computes extremes.</a:t>
             </a:r>
           </a:p>
         </p:txBody>
@@ -6635,13 +7345,13 @@
         <p:spPr>
           <a:xfrm>
             <a:off x="0" y="0"/>
-            <a:ext cx="12191695" cy="109728"/>
+            <a:ext cx="12191695" cy="6858000"/>
           </a:xfrm>
           <a:prstGeom prst="rect">
             <a:avLst/>
           </a:prstGeom>
           <a:solidFill>
-            <a:srgbClr val="102C57"/>
+            <a:srgbClr val="0F172A"/>
           </a:solidFill>
           <a:ln>
             <a:noFill/>
@@ -6671,105 +7381,20 @@
       </p:sp>
       <p:sp>
         <p:nvSpPr>
-          <p:cNvPr id="3" name="TextBox 2"/>
-          <p:cNvSpPr txBox="1"/>
-          <p:nvPr/>
-        </p:nvSpPr>
-        <p:spPr>
-          <a:xfrm>
-            <a:off x="731520" y="274320"/>
-            <a:ext cx="10728655" cy="822960"/>
-          </a:xfrm>
-          <a:prstGeom prst="rect">
-            <a:avLst/>
-          </a:prstGeom>
-          <a:noFill/>
-        </p:spPr>
-        <p:txBody>
-          <a:bodyPr wrap="square" lIns="0" tIns="0" rIns="0" bIns="0">
-            <a:spAutoFit/>
-          </a:bodyPr>
-          <a:lstStyle/>
-          <a:p>
-            <a:pPr>
-              <a:defRPr sz="1300" b="1">
-                <a:solidFill>
-                  <a:srgbClr val="102C57"/>
-                </a:solidFill>
-                <a:latin typeface="Arial"/>
-              </a:defRPr>
-            </a:pPr>
-            <a:r>
-              <a:t>Galgotias College of Engineering &amp; Technology, Greater Noida</a:t>
-            </a:r>
-          </a:p>
-          <a:p>
-            <a:pPr>
-              <a:defRPr sz="1100" b="1">
-                <a:solidFill>
-                  <a:srgbClr val="646E73"/>
-                </a:solidFill>
-                <a:latin typeface="Arial"/>
-              </a:defRPr>
-            </a:pPr>
-            <a:r>
-              <a:t>DEPARTMENT OF ELECTRONICS AND COMMUNICATION ENGINEERING</a:t>
-            </a:r>
-          </a:p>
-        </p:txBody>
-      </p:sp>
-      <p:sp>
-        <p:nvSpPr>
-          <p:cNvPr id="4" name="TextBox 3"/>
-          <p:cNvSpPr txBox="1"/>
-          <p:nvPr/>
-        </p:nvSpPr>
-        <p:spPr>
-          <a:xfrm>
-            <a:off x="731520" y="1097280"/>
-            <a:ext cx="10728655" cy="640080"/>
-          </a:xfrm>
-          <a:prstGeom prst="rect">
-            <a:avLst/>
-          </a:prstGeom>
-          <a:noFill/>
-        </p:spPr>
-        <p:txBody>
-          <a:bodyPr wrap="square" lIns="0" tIns="0" rIns="0" bIns="0">
-            <a:spAutoFit/>
-          </a:bodyPr>
-          <a:lstStyle/>
-          <a:p>
-            <a:pPr>
-              <a:defRPr sz="2600" b="1">
-                <a:solidFill>
-                  <a:srgbClr val="102C57"/>
-                </a:solidFill>
-                <a:latin typeface="Arial"/>
-              </a:defRPr>
-            </a:pPr>
-            <a:r>
-              <a:t>Description: Software, IoT Cloud &amp; Web Stack</a:t>
-            </a:r>
-          </a:p>
-        </p:txBody>
-      </p:sp>
-      <p:sp>
-        <p:nvSpPr>
-          <p:cNvPr id="5" name="Rectangle 4"/>
+          <p:cNvPr id="3" name="Rectangle 2"/>
           <p:cNvSpPr/>
           <p:nvPr/>
         </p:nvSpPr>
         <p:spPr>
           <a:xfrm>
-            <a:off x="731520" y="1783080"/>
-            <a:ext cx="2011680" cy="45720"/>
+            <a:off x="0" y="0"/>
+            <a:ext cx="12191695" cy="73152"/>
           </a:xfrm>
           <a:prstGeom prst="rect">
             <a:avLst/>
           </a:prstGeom>
           <a:solidFill>
-            <a:srgbClr val="E87652"/>
+            <a:srgbClr val="14B8A6"/>
           </a:solidFill>
           <a:ln>
             <a:noFill/>
@@ -6799,24 +7424,24 @@
       </p:sp>
       <p:sp>
         <p:nvSpPr>
-          <p:cNvPr id="6" name="Rounded Rectangle 5"/>
+          <p:cNvPr id="4" name="Rounded Rectangle 3"/>
           <p:cNvSpPr/>
           <p:nvPr/>
         </p:nvSpPr>
         <p:spPr>
           <a:xfrm>
-            <a:off x="822960" y="2011680"/>
-            <a:ext cx="3383280" cy="4297680"/>
+            <a:off x="822960" y="320040"/>
+            <a:ext cx="6858000" cy="347472"/>
           </a:xfrm>
           <a:prstGeom prst="roundRect">
             <a:avLst/>
           </a:prstGeom>
           <a:solidFill>
-            <a:srgbClr val="F5F7F8"/>
-          </a:solidFill>
-          <a:ln w="25400">
+            <a:srgbClr val="18223A"/>
+          </a:solidFill>
+          <a:ln w="12700">
             <a:solidFill>
-              <a:srgbClr val="102C57"/>
+              <a:srgbClr val="2D3E62"/>
             </a:solidFill>
           </a:ln>
         </p:spPr>
@@ -6835,123 +7460,43 @@
           </a:fontRef>
         </p:style>
         <p:txBody>
-          <a:bodyPr rtlCol="0" anchor="ctr" wrap="square" tIns="228600" lIns="182880" rIns="182880"/>
+          <a:bodyPr rtlCol="0" anchor="ctr" tIns="54864" lIns="182880"/>
           <a:lstStyle/>
           <a:p>
             <a:pPr algn="ctr">
-              <a:defRPr sz="1400" b="1">
-                <a:solidFill>
-                  <a:srgbClr val="102C57"/>
-                </a:solidFill>
-                <a:latin typeface="Arial"/>
-              </a:defRPr>
-            </a:pPr>
-            <a:r>
-              <a:t>ESP32 Firmware (C++ / PlatformIO)</a:t>
-            </a:r>
-          </a:p>
-          <a:p>
-            <a:pPr>
-              <a:spcBef>
-                <a:spcPts val="800"/>
-              </a:spcBef>
-              <a:defRPr sz="1100">
-                <a:solidFill>
-                  <a:srgbClr val="172B2C"/>
-                </a:solidFill>
-                <a:latin typeface="Arial"/>
-              </a:defRPr>
-            </a:pPr>
-            <a:r>
-              <a:t>• Reads DHT22 sensor via Adafruit Unified Sensor drivers.</a:t>
-            </a:r>
-          </a:p>
-          <a:p>
-            <a:pPr>
-              <a:spcBef>
-                <a:spcPts val="800"/>
-              </a:spcBef>
-              <a:defRPr sz="1100">
-                <a:solidFill>
-                  <a:srgbClr val="172B2C"/>
-                </a:solidFill>
-                <a:latin typeface="Arial"/>
-              </a:defRPr>
-            </a:pPr>
-            <a:r>
-              <a:t>• Calculates Heat Index (Steadman formula) &amp; Dew Point (Magnus formula).</a:t>
-            </a:r>
-          </a:p>
-          <a:p>
-            <a:pPr>
-              <a:spcBef>
-                <a:spcPts val="800"/>
-              </a:spcBef>
-              <a:defRPr sz="1100">
-                <a:solidFill>
-                  <a:srgbClr val="172B2C"/>
-                </a:solidFill>
-                <a:latin typeface="Arial"/>
-              </a:defRPr>
-            </a:pPr>
-            <a:r>
-              <a:t>• Updates SSD1306 via Adafruit_SSD1306 wire library.</a:t>
-            </a:r>
-          </a:p>
-          <a:p>
-            <a:pPr>
-              <a:spcBef>
-                <a:spcPts val="800"/>
-              </a:spcBef>
-              <a:defRPr sz="1100">
-                <a:solidFill>
-                  <a:srgbClr val="172B2C"/>
-                </a:solidFill>
-                <a:latin typeface="Arial"/>
-              </a:defRPr>
-            </a:pPr>
-            <a:r>
-              <a:t>• Connects to Wi-Fi Access Point / Mobile Hotspot.</a:t>
-            </a:r>
-          </a:p>
-          <a:p>
-            <a:pPr>
-              <a:spcBef>
-                <a:spcPts val="800"/>
-              </a:spcBef>
-              <a:defRPr sz="1100">
-                <a:solidFill>
-                  <a:srgbClr val="172B2C"/>
-                </a:solidFill>
-                <a:latin typeface="Arial"/>
-              </a:defRPr>
-            </a:pPr>
-            <a:r>
-              <a:t>• Sends HTTP GET/POST to ThingSpeak API every 20 seconds.</a:t>
-            </a:r>
-          </a:p>
-        </p:txBody>
-      </p:sp>
-      <p:sp>
-        <p:nvSpPr>
-          <p:cNvPr id="7" name="Rounded Rectangle 6"/>
+              <a:defRPr sz="850" b="1">
+                <a:solidFill>
+                  <a:srgbClr val="14B8A6"/>
+                </a:solidFill>
+                <a:latin typeface="Segoe UI"/>
+              </a:defRPr>
+            </a:pPr>
+            <a:r>
+              <a:t>GALGOTIAS COLLEGE OF ENGG. &amp; TECH.  •  ECE DEPARTMENT  •  FIELD VERIFICATION</a:t>
+            </a:r>
+          </a:p>
+        </p:txBody>
+      </p:sp>
+      <p:sp>
+        <p:nvSpPr>
+          <p:cNvPr id="5" name="Rounded Rectangle 4"/>
           <p:cNvSpPr/>
           <p:nvPr/>
         </p:nvSpPr>
         <p:spPr>
           <a:xfrm>
-            <a:off x="4389120" y="2011680"/>
-            <a:ext cx="3383280" cy="4297680"/>
+            <a:off x="10607040" y="320040"/>
+            <a:ext cx="777240" cy="347472"/>
           </a:xfrm>
           <a:prstGeom prst="roundRect">
             <a:avLst/>
           </a:prstGeom>
           <a:solidFill>
-            <a:srgbClr val="F5F7F8"/>
-          </a:solidFill>
-          <a:ln w="25400">
+            <a:srgbClr val="18223A"/>
+          </a:solidFill>
+          <a:ln w="12700">
             <a:solidFill>
-              <a:srgbClr val="168B83"/>
+              <a:srgbClr val="2D3E62"/>
             </a:solidFill>
           </a:ln>
         </p:spPr>
@@ -6970,123 +7515,79 @@
           </a:fontRef>
         </p:style>
         <p:txBody>
-          <a:bodyPr rtlCol="0" anchor="ctr" wrap="square" tIns="228600" lIns="182880" rIns="182880"/>
+          <a:bodyPr rtlCol="0" anchor="ctr"/>
           <a:lstStyle/>
           <a:p>
             <a:pPr algn="ctr">
-              <a:defRPr sz="1400" b="1">
-                <a:solidFill>
-                  <a:srgbClr val="168B83"/>
-                </a:solidFill>
-                <a:latin typeface="Arial"/>
-              </a:defRPr>
-            </a:pPr>
-            <a:r>
-              <a:t>ThingSpeak Cloud (MathWorks IoT)</a:t>
-            </a:r>
-          </a:p>
+              <a:defRPr sz="900" b="1">
+                <a:solidFill>
+                  <a:srgbClr val="94A3B8"/>
+                </a:solidFill>
+                <a:latin typeface="Segoe UI"/>
+              </a:defRPr>
+            </a:pPr>
+            <a:r>
+              <a:t>07 / 10</a:t>
+            </a:r>
+          </a:p>
+        </p:txBody>
+      </p:sp>
+      <p:sp>
+        <p:nvSpPr>
+          <p:cNvPr id="6" name="TextBox 5"/>
+          <p:cNvSpPr txBox="1"/>
+          <p:nvPr/>
+        </p:nvSpPr>
+        <p:spPr>
+          <a:xfrm>
+            <a:off x="822960" y="777240"/>
+            <a:ext cx="10515600" cy="685800"/>
+          </a:xfrm>
+          <a:prstGeom prst="rect">
+            <a:avLst/>
+          </a:prstGeom>
+          <a:noFill/>
+        </p:spPr>
+        <p:txBody>
+          <a:bodyPr wrap="square" lIns="0" tIns="0" rIns="0" bIns="0">
+            <a:spAutoFit/>
+          </a:bodyPr>
+          <a:lstStyle/>
           <a:p>
             <a:pPr>
-              <a:spcBef>
-                <a:spcPts val="800"/>
-              </a:spcBef>
-              <a:defRPr sz="1100">
-                <a:solidFill>
-                  <a:srgbClr val="172B2C"/>
-                </a:solidFill>
-                <a:latin typeface="Arial"/>
-              </a:defRPr>
-            </a:pPr>
-            <a:r>
-              <a:t>• Channel ID: 3531601 (Public Open Data Access).</a:t>
-            </a:r>
-          </a:p>
-          <a:p>
-            <a:pPr>
-              <a:spcBef>
-                <a:spcPts val="800"/>
-              </a:spcBef>
-              <a:defRPr sz="1100">
-                <a:solidFill>
-                  <a:srgbClr val="172B2C"/>
-                </a:solidFill>
-                <a:latin typeface="Arial"/>
-              </a:defRPr>
-            </a:pPr>
-            <a:r>
-              <a:t>• Field 1: Ambient Temperature (°C)</a:t>
-            </a:r>
-          </a:p>
-          <a:p>
-            <a:pPr>
-              <a:spcBef>
-                <a:spcPts val="800"/>
-              </a:spcBef>
-              <a:defRPr sz="1100">
-                <a:solidFill>
-                  <a:srgbClr val="172B2C"/>
-                </a:solidFill>
-                <a:latin typeface="Arial"/>
-              </a:defRPr>
-            </a:pPr>
-            <a:r>
-              <a:t>• Field 2: Relative Humidity (%)</a:t>
-            </a:r>
-          </a:p>
-          <a:p>
-            <a:pPr>
-              <a:spcBef>
-                <a:spcPts val="800"/>
-              </a:spcBef>
-              <a:defRPr sz="1100">
-                <a:solidFill>
-                  <a:srgbClr val="172B2C"/>
-                </a:solidFill>
-                <a:latin typeface="Arial"/>
-              </a:defRPr>
-            </a:pPr>
-            <a:r>
-              <a:t>• Field 3: Heat Index (°C) | Field 4: Dew Point (°C)</a:t>
-            </a:r>
-          </a:p>
-          <a:p>
-            <a:pPr>
-              <a:spcBef>
-                <a:spcPts val="800"/>
-              </a:spcBef>
-              <a:defRPr sz="1100">
-                <a:solidFill>
-                  <a:srgbClr val="172B2C"/>
-                </a:solidFill>
-                <a:latin typeface="Arial"/>
-              </a:defRPr>
-            </a:pPr>
-            <a:r>
-              <a:t>• Timestamped cloud storage with REST API endpoint.</a:t>
-            </a:r>
-          </a:p>
-        </p:txBody>
-      </p:sp>
-      <p:sp>
-        <p:nvSpPr>
-          <p:cNvPr id="8" name="Rounded Rectangle 7"/>
+              <a:defRPr sz="2400" b="1">
+                <a:solidFill>
+                  <a:srgbClr val="F8FAFC"/>
+                </a:solidFill>
+                <a:latin typeface="Segoe UI"/>
+              </a:defRPr>
+            </a:pPr>
+            <a:r>
+              <a:t>Experimental Results &amp; Real-Time Performance</a:t>
+            </a:r>
+          </a:p>
+        </p:txBody>
+      </p:sp>
+      <p:sp>
+        <p:nvSpPr>
+          <p:cNvPr id="7" name="Rounded Rectangle 6"/>
           <p:cNvSpPr/>
           <p:nvPr/>
         </p:nvSpPr>
         <p:spPr>
           <a:xfrm>
-            <a:off x="7955279" y="2011680"/>
-            <a:ext cx="3383280" cy="4297680"/>
+            <a:off x="822960" y="1645920"/>
+            <a:ext cx="2560320" cy="2057400"/>
           </a:xfrm>
           <a:prstGeom prst="roundRect">
             <a:avLst/>
           </a:prstGeom>
           <a:solidFill>
-            <a:srgbClr val="F5F7F8"/>
-          </a:solidFill>
-          <a:ln w="25400">
+            <a:srgbClr val="18223A"/>
+          </a:solidFill>
+          <a:ln w="12700">
             <a:solidFill>
-              <a:srgbClr val="E87652"/>
+              <a:srgbClr val="2D3E62"/>
             </a:solidFill>
           </a:ln>
         </p:spPr>
@@ -7105,19 +7606,355 @@
           </a:fontRef>
         </p:style>
         <p:txBody>
-          <a:bodyPr rtlCol="0" anchor="ctr" wrap="square" tIns="228600" lIns="182880" rIns="182880"/>
+          <a:bodyPr rtlCol="0" anchor="ctr" wrap="square" tIns="182880" lIns="228600"/>
+          <a:lstStyle/>
+          <a:p>
+            <a:pPr algn="ctr">
+              <a:defRPr sz="1000" b="1">
+                <a:solidFill>
+                  <a:srgbClr val="94A3B8"/>
+                </a:solidFill>
+                <a:latin typeface="Segoe UI"/>
+              </a:defRPr>
+            </a:pPr>
+            <a:r>
+              <a:t>TEMPERATURE</a:t>
+            </a:r>
+          </a:p>
+          <a:p>
+            <a:pPr>
+              <a:spcBef>
+                <a:spcPts val="400"/>
+              </a:spcBef>
+              <a:defRPr sz="3200" b="1">
+                <a:solidFill>
+                  <a:srgbClr val="F97316"/>
+                </a:solidFill>
+                <a:latin typeface="Segoe UI"/>
+              </a:defRPr>
+            </a:pPr>
+            <a:r>
+              <a:t>26.8°C</a:t>
+            </a:r>
+          </a:p>
+          <a:p>
+            <a:pPr>
+              <a:defRPr sz="1000">
+                <a:solidFill>
+                  <a:srgbClr val="F8FAFC"/>
+                </a:solidFill>
+                <a:latin typeface="Segoe UI"/>
+              </a:defRPr>
+            </a:pPr>
+            <a:r>
+              <a:t>DHT22 Calibrated Reading</a:t>
+            </a:r>
+          </a:p>
+        </p:txBody>
+      </p:sp>
+      <p:sp>
+        <p:nvSpPr>
+          <p:cNvPr id="8" name="Rounded Rectangle 7"/>
+          <p:cNvSpPr/>
+          <p:nvPr/>
+        </p:nvSpPr>
+        <p:spPr>
+          <a:xfrm>
+            <a:off x="3566160" y="1645920"/>
+            <a:ext cx="2560320" cy="2057400"/>
+          </a:xfrm>
+          <a:prstGeom prst="roundRect">
+            <a:avLst/>
+          </a:prstGeom>
+          <a:solidFill>
+            <a:srgbClr val="18223A"/>
+          </a:solidFill>
+          <a:ln w="12700">
+            <a:solidFill>
+              <a:srgbClr val="2D3E62"/>
+            </a:solidFill>
+          </a:ln>
+        </p:spPr>
+        <p:style>
+          <a:lnRef idx="1">
+            <a:schemeClr val="accent1"/>
+          </a:lnRef>
+          <a:fillRef idx="3">
+            <a:schemeClr val="accent1"/>
+          </a:fillRef>
+          <a:effectRef idx="2">
+            <a:schemeClr val="accent1"/>
+          </a:effectRef>
+          <a:fontRef idx="minor">
+            <a:schemeClr val="lt1"/>
+          </a:fontRef>
+        </p:style>
+        <p:txBody>
+          <a:bodyPr rtlCol="0" anchor="ctr" wrap="square" tIns="182880" lIns="228600"/>
+          <a:lstStyle/>
+          <a:p>
+            <a:pPr algn="ctr">
+              <a:defRPr sz="1000" b="1">
+                <a:solidFill>
+                  <a:srgbClr val="94A3B8"/>
+                </a:solidFill>
+                <a:latin typeface="Segoe UI"/>
+              </a:defRPr>
+            </a:pPr>
+            <a:r>
+              <a:t>HUMIDITY</a:t>
+            </a:r>
+          </a:p>
+          <a:p>
+            <a:pPr>
+              <a:spcBef>
+                <a:spcPts val="400"/>
+              </a:spcBef>
+              <a:defRPr sz="3200" b="1">
+                <a:solidFill>
+                  <a:srgbClr val="14B8A6"/>
+                </a:solidFill>
+                <a:latin typeface="Segoe UI"/>
+              </a:defRPr>
+            </a:pPr>
+            <a:r>
+              <a:t>69.8%</a:t>
+            </a:r>
+          </a:p>
+          <a:p>
+            <a:pPr>
+              <a:defRPr sz="1000">
+                <a:solidFill>
+                  <a:srgbClr val="F8FAFC"/>
+                </a:solidFill>
+                <a:latin typeface="Segoe UI"/>
+              </a:defRPr>
+            </a:pPr>
+            <a:r>
+              <a:t>Relative Moisture Level</a:t>
+            </a:r>
+          </a:p>
+        </p:txBody>
+      </p:sp>
+      <p:sp>
+        <p:nvSpPr>
+          <p:cNvPr id="9" name="Rounded Rectangle 8"/>
+          <p:cNvSpPr/>
+          <p:nvPr/>
+        </p:nvSpPr>
+        <p:spPr>
+          <a:xfrm>
+            <a:off x="822960" y="3931920"/>
+            <a:ext cx="2560320" cy="2057400"/>
+          </a:xfrm>
+          <a:prstGeom prst="roundRect">
+            <a:avLst/>
+          </a:prstGeom>
+          <a:solidFill>
+            <a:srgbClr val="18223A"/>
+          </a:solidFill>
+          <a:ln w="12700">
+            <a:solidFill>
+              <a:srgbClr val="2D3E62"/>
+            </a:solidFill>
+          </a:ln>
+        </p:spPr>
+        <p:style>
+          <a:lnRef idx="1">
+            <a:schemeClr val="accent1"/>
+          </a:lnRef>
+          <a:fillRef idx="3">
+            <a:schemeClr val="accent1"/>
+          </a:fillRef>
+          <a:effectRef idx="2">
+            <a:schemeClr val="accent1"/>
+          </a:effectRef>
+          <a:fontRef idx="minor">
+            <a:schemeClr val="lt1"/>
+          </a:fontRef>
+        </p:style>
+        <p:txBody>
+          <a:bodyPr rtlCol="0" anchor="ctr" wrap="square" tIns="182880" lIns="228600"/>
+          <a:lstStyle/>
+          <a:p>
+            <a:pPr algn="ctr">
+              <a:defRPr sz="1000" b="1">
+                <a:solidFill>
+                  <a:srgbClr val="94A3B8"/>
+                </a:solidFill>
+                <a:latin typeface="Segoe UI"/>
+              </a:defRPr>
+            </a:pPr>
+            <a:r>
+              <a:t>HEAT INDEX</a:t>
+            </a:r>
+          </a:p>
+          <a:p>
+            <a:pPr>
+              <a:spcBef>
+                <a:spcPts val="400"/>
+              </a:spcBef>
+              <a:defRPr sz="3200" b="1">
+                <a:solidFill>
+                  <a:srgbClr val="F59E0B"/>
+                </a:solidFill>
+                <a:latin typeface="Segoe UI"/>
+              </a:defRPr>
+            </a:pPr>
+            <a:r>
+              <a:t>28.5°C</a:t>
+            </a:r>
+          </a:p>
+          <a:p>
+            <a:pPr>
+              <a:defRPr sz="1000">
+                <a:solidFill>
+                  <a:srgbClr val="F8FAFC"/>
+                </a:solidFill>
+                <a:latin typeface="Segoe UI"/>
+              </a:defRPr>
+            </a:pPr>
+            <a:r>
+              <a:t>Human Felt-Temperature</a:t>
+            </a:r>
+          </a:p>
+        </p:txBody>
+      </p:sp>
+      <p:sp>
+        <p:nvSpPr>
+          <p:cNvPr id="10" name="Rounded Rectangle 9"/>
+          <p:cNvSpPr/>
+          <p:nvPr/>
+        </p:nvSpPr>
+        <p:spPr>
+          <a:xfrm>
+            <a:off x="3566160" y="3931920"/>
+            <a:ext cx="2560320" cy="2057400"/>
+          </a:xfrm>
+          <a:prstGeom prst="roundRect">
+            <a:avLst/>
+          </a:prstGeom>
+          <a:solidFill>
+            <a:srgbClr val="18223A"/>
+          </a:solidFill>
+          <a:ln w="12700">
+            <a:solidFill>
+              <a:srgbClr val="2D3E62"/>
+            </a:solidFill>
+          </a:ln>
+        </p:spPr>
+        <p:style>
+          <a:lnRef idx="1">
+            <a:schemeClr val="accent1"/>
+          </a:lnRef>
+          <a:fillRef idx="3">
+            <a:schemeClr val="accent1"/>
+          </a:fillRef>
+          <a:effectRef idx="2">
+            <a:schemeClr val="accent1"/>
+          </a:effectRef>
+          <a:fontRef idx="minor">
+            <a:schemeClr val="lt1"/>
+          </a:fontRef>
+        </p:style>
+        <p:txBody>
+          <a:bodyPr rtlCol="0" anchor="ctr" wrap="square" tIns="182880" lIns="228600"/>
+          <a:lstStyle/>
+          <a:p>
+            <a:pPr algn="ctr">
+              <a:defRPr sz="1000" b="1">
+                <a:solidFill>
+                  <a:srgbClr val="94A3B8"/>
+                </a:solidFill>
+                <a:latin typeface="Segoe UI"/>
+              </a:defRPr>
+            </a:pPr>
+            <a:r>
+              <a:t>DEW POINT</a:t>
+            </a:r>
+          </a:p>
+          <a:p>
+            <a:pPr>
+              <a:spcBef>
+                <a:spcPts val="400"/>
+              </a:spcBef>
+              <a:defRPr sz="3200" b="1">
+                <a:solidFill>
+                  <a:srgbClr val="38BDF8"/>
+                </a:solidFill>
+                <a:latin typeface="Segoe UI"/>
+              </a:defRPr>
+            </a:pPr>
+            <a:r>
+              <a:t>20.8°C</a:t>
+            </a:r>
+          </a:p>
+          <a:p>
+            <a:pPr>
+              <a:defRPr sz="1000">
+                <a:solidFill>
+                  <a:srgbClr val="F8FAFC"/>
+                </a:solidFill>
+                <a:latin typeface="Segoe UI"/>
+              </a:defRPr>
+            </a:pPr>
+            <a:r>
+              <a:t>Condensation Threshold</a:t>
+            </a:r>
+          </a:p>
+        </p:txBody>
+      </p:sp>
+      <p:sp>
+        <p:nvSpPr>
+          <p:cNvPr id="11" name="Rounded Rectangle 10"/>
+          <p:cNvSpPr/>
+          <p:nvPr/>
+        </p:nvSpPr>
+        <p:spPr>
+          <a:xfrm>
+            <a:off x="6492240" y="1645920"/>
+            <a:ext cx="4876495" cy="4343400"/>
+          </a:xfrm>
+          <a:prstGeom prst="roundRect">
+            <a:avLst/>
+          </a:prstGeom>
+          <a:solidFill>
+            <a:srgbClr val="18223A"/>
+          </a:solidFill>
+          <a:ln w="19050">
+            <a:solidFill>
+              <a:srgbClr val="14B8A6"/>
+            </a:solidFill>
+          </a:ln>
+        </p:spPr>
+        <p:style>
+          <a:lnRef idx="1">
+            <a:schemeClr val="accent1"/>
+          </a:lnRef>
+          <a:fillRef idx="3">
+            <a:schemeClr val="accent1"/>
+          </a:fillRef>
+          <a:effectRef idx="2">
+            <a:schemeClr val="accent1"/>
+          </a:effectRef>
+          <a:fontRef idx="minor">
+            <a:schemeClr val="lt1"/>
+          </a:fontRef>
+        </p:style>
+        <p:txBody>
+          <a:bodyPr rtlCol="0" anchor="ctr" wrap="square" tIns="228600" lIns="274320" rIns="274320"/>
           <a:lstStyle/>
           <a:p>
             <a:pPr algn="ctr">
               <a:defRPr sz="1400" b="1">
                 <a:solidFill>
-                  <a:srgbClr val="E87652"/>
-                </a:solidFill>
-                <a:latin typeface="Arial"/>
-              </a:defRPr>
-            </a:pPr>
-            <a:r>
-              <a:t>Frontend Dashboard (Vercel Deployed)</a:t>
+                  <a:srgbClr val="14B8A6"/>
+                </a:solidFill>
+                <a:latin typeface="Segoe UI"/>
+              </a:defRPr>
+            </a:pPr>
+            <a:r>
+              <a:t>LIVE SYSTEM PERFORMANCE BENCHMARKS</a:t>
             </a:r>
           </a:p>
           <a:p>
@@ -7125,15 +7962,22 @@
               <a:spcBef>
                 <a:spcPts val="800"/>
               </a:spcBef>
-              <a:defRPr sz="1100">
-                <a:solidFill>
-                  <a:srgbClr val="172B2C"/>
-                </a:solidFill>
-                <a:latin typeface="Arial"/>
-              </a:defRPr>
-            </a:pPr>
-            <a:r>
-              <a:t>• Built with vanilla HTML5, CSS3, and ES6 JavaScript (Zero dependencies).</a:t>
+            </a:pPr>
+            <a:r>
+              <a:rPr b="1" sz="1100">
+                <a:solidFill>
+                  <a:srgbClr val="F8FAFC"/>
+                </a:solidFill>
+              </a:rPr>
+              <a:t>• Transmission Interval: </a:t>
+            </a:r>
+            <a:r>
+              <a:rPr b="0" sz="1100">
+                <a:solidFill>
+                  <a:srgbClr val="94A3B8"/>
+                </a:solidFill>
+              </a:rPr>
+              <a:t>ESP32 uplinks telemetry to ThingSpeak every 20 seconds flawlessly.</a:t>
             </a:r>
           </a:p>
           <a:p>
@@ -7141,15 +7985,22 @@
               <a:spcBef>
                 <a:spcPts val="800"/>
               </a:spcBef>
-              <a:defRPr sz="1100">
-                <a:solidFill>
-                  <a:srgbClr val="172B2C"/>
-                </a:solidFill>
-                <a:latin typeface="Arial"/>
-              </a:defRPr>
-            </a:pPr>
-            <a:r>
-              <a:t>• Continuous live polling every 2s via fetch() with no-store caching.</a:t>
+            </a:pPr>
+            <a:r>
+              <a:rPr b="1" sz="1100">
+                <a:solidFill>
+                  <a:srgbClr val="F8FAFC"/>
+                </a:solidFill>
+              </a:rPr>
+              <a:t>• Client-Side Polling: </a:t>
+            </a:r>
+            <a:r>
+              <a:rPr b="0" sz="1100">
+                <a:solidFill>
+                  <a:srgbClr val="94A3B8"/>
+                </a:solidFill>
+              </a:rPr>
+              <a:t>Web dashboard pulls latest JSON feeds every 2s without screen flicker.</a:t>
             </a:r>
           </a:p>
           <a:p>
@@ -7157,15 +8008,22 @@
               <a:spcBef>
                 <a:spcPts val="800"/>
               </a:spcBef>
-              <a:defRPr sz="1100">
-                <a:solidFill>
-                  <a:srgbClr val="172B2C"/>
-                </a:solidFill>
-                <a:latin typeface="Arial"/>
-              </a:defRPr>
-            </a:pPr>
-            <a:r>
-              <a:t>• Dynamic HTML5 Canvas charting showing last 48 readings (~24 hours).</a:t>
+            </a:pPr>
+            <a:r>
+              <a:rPr b="1" sz="1100">
+                <a:solidFill>
+                  <a:srgbClr val="F8FAFC"/>
+                </a:solidFill>
+              </a:rPr>
+              <a:t>• Dual-Trace Canvas Graph: </a:t>
+            </a:r>
+            <a:r>
+              <a:rPr b="0" sz="1100">
+                <a:solidFill>
+                  <a:srgbClr val="94A3B8"/>
+                </a:solidFill>
+              </a:rPr>
+              <a:t>Smooth Bezier spline curves rendered directly in HTML5 Canvas for the past 48 readings (~24 hours).</a:t>
             </a:r>
           </a:p>
           <a:p>
@@ -7173,15 +8031,22 @@
               <a:spcBef>
                 <a:spcPts val="800"/>
               </a:spcBef>
-              <a:defRPr sz="1100">
-                <a:solidFill>
-                  <a:srgbClr val="172B2C"/>
-                </a:solidFill>
-                <a:latin typeface="Arial"/>
-              </a:defRPr>
-            </a:pPr>
-            <a:r>
-              <a:t>• Extremes detection (Min/Max temp &amp; humidity) + Thermal comfort rating.</a:t>
+            </a:pPr>
+            <a:r>
+              <a:rPr b="1" sz="1100">
+                <a:solidFill>
+                  <a:srgbClr val="F8FAFC"/>
+                </a:solidFill>
+              </a:rPr>
+              <a:t>• Active State &amp; Extremes: </a:t>
+            </a:r>
+            <a:r>
+              <a:rPr b="0" sz="1100">
+                <a:solidFill>
+                  <a:srgbClr val="94A3B8"/>
+                </a:solidFill>
+              </a:rPr>
+              <a:t>Dynamically parses historical session Low and High markers on the fly.</a:t>
             </a:r>
           </a:p>
           <a:p>
@@ -7189,15 +8054,68 @@
               <a:spcBef>
                 <a:spcPts val="800"/>
               </a:spcBef>
-              <a:defRPr sz="1100">
-                <a:solidFill>
-                  <a:srgbClr val="172B2C"/>
-                </a:solidFill>
-                <a:latin typeface="Arial"/>
-              </a:defRPr>
-            </a:pPr>
-            <a:r>
-              <a:t>• Live production link: smart-weather-station.vercel.app</a:t>
+            </a:pPr>
+            <a:r>
+              <a:rPr b="1" sz="1100">
+                <a:solidFill>
+                  <a:srgbClr val="F8FAFC"/>
+                </a:solidFill>
+              </a:rPr>
+              <a:t>• Graceful Degradation: </a:t>
+            </a:r>
+            <a:r>
+              <a:rPr b="0" sz="1100">
+                <a:solidFill>
+                  <a:srgbClr val="94A3B8"/>
+                </a:solidFill>
+              </a:rPr>
+              <a:t>Triggers connection warning if ESP32 power or Wi-Fi hotspot disconnects.</a:t>
+            </a:r>
+          </a:p>
+          <a:p>
+            <a:pPr>
+              <a:spcBef>
+                <a:spcPts val="800"/>
+              </a:spcBef>
+            </a:pPr>
+            <a:r>
+              <a:rPr b="1" sz="1100">
+                <a:solidFill>
+                  <a:srgbClr val="F8FAFC"/>
+                </a:solidFill>
+              </a:rPr>
+              <a:t>• Live Web Link: </a:t>
+            </a:r>
+            <a:r>
+              <a:rPr b="0" sz="1100">
+                <a:solidFill>
+                  <a:srgbClr val="94A3B8"/>
+                </a:solidFill>
+              </a:rPr>
+              <a:t>smart-weather-station.vercel.app</a:t>
+            </a:r>
+          </a:p>
+          <a:p>
+            <a:pPr>
+              <a:spcBef>
+                <a:spcPts val="800"/>
+              </a:spcBef>
+            </a:pPr>
+            <a:r>
+              <a:rPr b="1" sz="1100">
+                <a:solidFill>
+                  <a:srgbClr val="F8FAFC"/>
+                </a:solidFill>
+              </a:rPr>
+              <a:t>• Source Code: </a:t>
+            </a:r>
+            <a:r>
+              <a:rPr b="0" sz="1100">
+                <a:solidFill>
+                  <a:srgbClr val="94A3B8"/>
+                </a:solidFill>
+              </a:rPr>
+              <a:t>github.com/prasoon9999/smart-weather-station</a:t>
             </a:r>
           </a:p>
         </p:txBody>
@@ -7229,13 +8147,13 @@
         <p:spPr>
           <a:xfrm>
             <a:off x="0" y="0"/>
-            <a:ext cx="12191695" cy="109728"/>
+            <a:ext cx="12191695" cy="6858000"/>
           </a:xfrm>
           <a:prstGeom prst="rect">
             <a:avLst/>
           </a:prstGeom>
           <a:solidFill>
-            <a:srgbClr val="102C57"/>
+            <a:srgbClr val="0F172A"/>
           </a:solidFill>
           <a:ln>
             <a:noFill/>
@@ -7265,105 +8183,20 @@
       </p:sp>
       <p:sp>
         <p:nvSpPr>
-          <p:cNvPr id="3" name="TextBox 2"/>
-          <p:cNvSpPr txBox="1"/>
-          <p:nvPr/>
-        </p:nvSpPr>
-        <p:spPr>
-          <a:xfrm>
-            <a:off x="731520" y="274320"/>
-            <a:ext cx="10728655" cy="822960"/>
-          </a:xfrm>
-          <a:prstGeom prst="rect">
-            <a:avLst/>
-          </a:prstGeom>
-          <a:noFill/>
-        </p:spPr>
-        <p:txBody>
-          <a:bodyPr wrap="square" lIns="0" tIns="0" rIns="0" bIns="0">
-            <a:spAutoFit/>
-          </a:bodyPr>
-          <a:lstStyle/>
-          <a:p>
-            <a:pPr>
-              <a:defRPr sz="1300" b="1">
-                <a:solidFill>
-                  <a:srgbClr val="102C57"/>
-                </a:solidFill>
-                <a:latin typeface="Arial"/>
-              </a:defRPr>
-            </a:pPr>
-            <a:r>
-              <a:t>Galgotias College of Engineering &amp; Technology, Greater Noida</a:t>
-            </a:r>
-          </a:p>
-          <a:p>
-            <a:pPr>
-              <a:defRPr sz="1100" b="1">
-                <a:solidFill>
-                  <a:srgbClr val="646E73"/>
-                </a:solidFill>
-                <a:latin typeface="Arial"/>
-              </a:defRPr>
-            </a:pPr>
-            <a:r>
-              <a:t>DEPARTMENT OF ELECTRONICS AND COMMUNICATION ENGINEERING</a:t>
-            </a:r>
-          </a:p>
-        </p:txBody>
-      </p:sp>
-      <p:sp>
-        <p:nvSpPr>
-          <p:cNvPr id="4" name="TextBox 3"/>
-          <p:cNvSpPr txBox="1"/>
-          <p:nvPr/>
-        </p:nvSpPr>
-        <p:spPr>
-          <a:xfrm>
-            <a:off x="731520" y="1097280"/>
-            <a:ext cx="10728655" cy="640080"/>
-          </a:xfrm>
-          <a:prstGeom prst="rect">
-            <a:avLst/>
-          </a:prstGeom>
-          <a:noFill/>
-        </p:spPr>
-        <p:txBody>
-          <a:bodyPr wrap="square" lIns="0" tIns="0" rIns="0" bIns="0">
-            <a:spAutoFit/>
-          </a:bodyPr>
-          <a:lstStyle/>
-          <a:p>
-            <a:pPr>
-              <a:defRPr sz="2600" b="1">
-                <a:solidFill>
-                  <a:srgbClr val="102C57"/>
-                </a:solidFill>
-                <a:latin typeface="Arial"/>
-              </a:defRPr>
-            </a:pPr>
-            <a:r>
-              <a:t>Results &amp; Telemetry Verification</a:t>
-            </a:r>
-          </a:p>
-        </p:txBody>
-      </p:sp>
-      <p:sp>
-        <p:nvSpPr>
-          <p:cNvPr id="5" name="Rectangle 4"/>
+          <p:cNvPr id="3" name="Rectangle 2"/>
           <p:cNvSpPr/>
           <p:nvPr/>
         </p:nvSpPr>
         <p:spPr>
           <a:xfrm>
-            <a:off x="731520" y="1783080"/>
-            <a:ext cx="2011680" cy="45720"/>
+            <a:off x="0" y="0"/>
+            <a:ext cx="12191695" cy="73152"/>
           </a:xfrm>
           <a:prstGeom prst="rect">
             <a:avLst/>
           </a:prstGeom>
           <a:solidFill>
-            <a:srgbClr val="E87652"/>
+            <a:srgbClr val="14B8A6"/>
           </a:solidFill>
           <a:ln>
             <a:noFill/>
@@ -7393,24 +8226,24 @@
       </p:sp>
       <p:sp>
         <p:nvSpPr>
-          <p:cNvPr id="6" name="Rounded Rectangle 5"/>
+          <p:cNvPr id="4" name="Rounded Rectangle 3"/>
           <p:cNvSpPr/>
           <p:nvPr/>
         </p:nvSpPr>
         <p:spPr>
           <a:xfrm>
-            <a:off x="914400" y="2011680"/>
-            <a:ext cx="4937760" cy="4297680"/>
+            <a:off x="822960" y="320040"/>
+            <a:ext cx="6858000" cy="347472"/>
           </a:xfrm>
           <a:prstGeom prst="roundRect">
             <a:avLst/>
           </a:prstGeom>
           <a:solidFill>
-            <a:srgbClr val="FFFFFF"/>
-          </a:solidFill>
-          <a:ln w="19050">
+            <a:srgbClr val="18223A"/>
+          </a:solidFill>
+          <a:ln w="12700">
             <a:solidFill>
-              <a:srgbClr val="102C57"/>
+              <a:srgbClr val="2D3E62"/>
             </a:solidFill>
           </a:ln>
         </p:spPr>
@@ -7429,203 +8262,43 @@
           </a:fontRef>
         </p:style>
         <p:txBody>
-          <a:bodyPr rtlCol="0" anchor="ctr" wrap="square" lIns="274320" rIns="274320" tIns="182880"/>
+          <a:bodyPr rtlCol="0" anchor="ctr" tIns="54864" lIns="182880"/>
           <a:lstStyle/>
           <a:p>
             <a:pPr algn="ctr">
-              <a:defRPr b="1" sz="1500">
-                <a:solidFill>
-                  <a:srgbClr val="102C57"/>
-                </a:solidFill>
-              </a:defRPr>
-            </a:pPr>
-            <a:r>
-              <a:t>LIVE SENSOR TELEMETRY READINGS</a:t>
-            </a:r>
-          </a:p>
-          <a:p>
-            <a:pPr>
-              <a:spcBef>
-                <a:spcPts val="600"/>
-              </a:spcBef>
-            </a:pPr>
-            <a:r>
-              <a:rPr b="1" sz="1200">
-                <a:solidFill>
-                  <a:srgbClr val="172B2C"/>
-                </a:solidFill>
-              </a:rPr>
-              <a:t>• Temperature (DHT22): </a:t>
-            </a:r>
-            <a:r>
-              <a:rPr b="0" sz="1200">
-                <a:solidFill>
-                  <a:srgbClr val="168B83"/>
-                </a:solidFill>
-              </a:rPr>
-              <a:t>26.8 °C (Normal Room Condition)</a:t>
-            </a:r>
-          </a:p>
-          <a:p>
-            <a:pPr>
-              <a:spcBef>
-                <a:spcPts val="600"/>
-              </a:spcBef>
-            </a:pPr>
-            <a:r>
-              <a:rPr b="1" sz="1200">
-                <a:solidFill>
-                  <a:srgbClr val="172B2C"/>
-                </a:solidFill>
-              </a:rPr>
-              <a:t>• Relative Humidity: </a:t>
-            </a:r>
-            <a:r>
-              <a:rPr b="0" sz="1200">
-                <a:solidFill>
-                  <a:srgbClr val="168B83"/>
-                </a:solidFill>
-              </a:rPr>
-              <a:t>69.8 % (Moderate-High Humidity)</a:t>
-            </a:r>
-          </a:p>
-          <a:p>
-            <a:pPr>
-              <a:spcBef>
-                <a:spcPts val="600"/>
-              </a:spcBef>
-            </a:pPr>
-            <a:r>
-              <a:rPr b="1" sz="1200">
-                <a:solidFill>
-                  <a:srgbClr val="172B2C"/>
-                </a:solidFill>
-              </a:rPr>
-              <a:t>• Heat Index (Computed): </a:t>
-            </a:r>
-            <a:r>
-              <a:rPr b="0" sz="1200">
-                <a:solidFill>
-                  <a:srgbClr val="168B83"/>
-                </a:solidFill>
-              </a:rPr>
-              <a:t>28.5 °C (Perceived Temperature)</a:t>
-            </a:r>
-          </a:p>
-          <a:p>
-            <a:pPr>
-              <a:spcBef>
-                <a:spcPts val="600"/>
-              </a:spcBef>
-            </a:pPr>
-            <a:r>
-              <a:rPr b="1" sz="1200">
-                <a:solidFill>
-                  <a:srgbClr val="172B2C"/>
-                </a:solidFill>
-              </a:rPr>
-              <a:t>• Dew Point (Computed): </a:t>
-            </a:r>
-            <a:r>
-              <a:rPr b="0" sz="1200">
-                <a:solidFill>
-                  <a:srgbClr val="168B83"/>
-                </a:solidFill>
-              </a:rPr>
-              <a:t>20.8 °C (Condensation Threshold)</a:t>
-            </a:r>
-          </a:p>
-          <a:p>
-            <a:pPr>
-              <a:spcBef>
-                <a:spcPts val="600"/>
-              </a:spcBef>
-            </a:pPr>
-            <a:r>
-              <a:rPr b="1" sz="1200">
-                <a:solidFill>
-                  <a:srgbClr val="172B2C"/>
-                </a:solidFill>
-              </a:rPr>
-              <a:t>• Upload Interval: </a:t>
-            </a:r>
-            <a:r>
-              <a:rPr b="0" sz="1200">
-                <a:solidFill>
-                  <a:srgbClr val="168B83"/>
-                </a:solidFill>
-              </a:rPr>
-              <a:t>Every 20 sec (ThingSpeak Cloud Rate)</a:t>
-            </a:r>
-          </a:p>
-          <a:p>
-            <a:pPr>
-              <a:spcBef>
-                <a:spcPts val="600"/>
-              </a:spcBef>
-            </a:pPr>
-            <a:r>
-              <a:rPr b="1" sz="1200">
-                <a:solidFill>
-                  <a:srgbClr val="172B2C"/>
-                </a:solidFill>
-              </a:rPr>
-              <a:t>• Web Refresh Rate: </a:t>
-            </a:r>
-            <a:r>
-              <a:rPr b="0" sz="1200">
-                <a:solidFill>
-                  <a:srgbClr val="168B83"/>
-                </a:solidFill>
-              </a:rPr>
-              <a:t>Every 2 sec (Real-Time Client Polling)</a:t>
-            </a:r>
-          </a:p>
-          <a:p>
-            <a:pPr>
-              <a:spcBef>
-                <a:spcPts val="600"/>
-              </a:spcBef>
-            </a:pPr>
-            <a:r>
-              <a:rPr b="1" sz="1200">
-                <a:solidFill>
-                  <a:srgbClr val="172B2C"/>
-                </a:solidFill>
-              </a:rPr>
-              <a:t>• Total Recorded Feeds: </a:t>
-            </a:r>
-            <a:r>
-              <a:rPr b="0" sz="1200">
-                <a:solidFill>
-                  <a:srgbClr val="168B83"/>
-                </a:solidFill>
-              </a:rPr>
-              <a:t>58+ Feeds (Continuous Operation)</a:t>
-            </a:r>
-          </a:p>
-        </p:txBody>
-      </p:sp>
-      <p:sp>
-        <p:nvSpPr>
-          <p:cNvPr id="7" name="Rounded Rectangle 6"/>
+              <a:defRPr sz="850" b="1">
+                <a:solidFill>
+                  <a:srgbClr val="14B8A6"/>
+                </a:solidFill>
+                <a:latin typeface="Segoe UI"/>
+              </a:defRPr>
+            </a:pPr>
+            <a:r>
+              <a:t>GALGOTIAS COLLEGE OF ENGG. &amp; TECH.  •  ECE DEPARTMENT  •  ROADMAP</a:t>
+            </a:r>
+          </a:p>
+        </p:txBody>
+      </p:sp>
+      <p:sp>
+        <p:nvSpPr>
+          <p:cNvPr id="5" name="Rounded Rectangle 4"/>
           <p:cNvSpPr/>
           <p:nvPr/>
         </p:nvSpPr>
         <p:spPr>
           <a:xfrm>
-            <a:off x="6309360" y="2011680"/>
-            <a:ext cx="4937760" cy="4297680"/>
+            <a:off x="10607040" y="320040"/>
+            <a:ext cx="777240" cy="347472"/>
           </a:xfrm>
           <a:prstGeom prst="roundRect">
             <a:avLst/>
           </a:prstGeom>
           <a:solidFill>
-            <a:srgbClr val="F5F7F8"/>
-          </a:solidFill>
-          <a:ln w="19050">
+            <a:srgbClr val="18223A"/>
+          </a:solidFill>
+          <a:ln w="12700">
             <a:solidFill>
-              <a:srgbClr val="168B83"/>
+              <a:srgbClr val="2D3E62"/>
             </a:solidFill>
           </a:ln>
         </p:spPr>
@@ -7644,106 +8317,321 @@
           </a:fontRef>
         </p:style>
         <p:txBody>
-          <a:bodyPr rtlCol="0" anchor="ctr" wrap="square" lIns="274320" rIns="274320" tIns="182880"/>
+          <a:bodyPr rtlCol="0" anchor="ctr"/>
           <a:lstStyle/>
           <a:p>
             <a:pPr algn="ctr">
-              <a:defRPr b="1" sz="1500">
-                <a:solidFill>
-                  <a:srgbClr val="168B83"/>
-                </a:solidFill>
-              </a:defRPr>
-            </a:pPr>
-            <a:r>
-              <a:t>CLOUD DEPLOYMENT &amp; METRICS VERIFICATION</a:t>
+              <a:defRPr sz="900" b="1">
+                <a:solidFill>
+                  <a:srgbClr val="94A3B8"/>
+                </a:solidFill>
+                <a:latin typeface="Segoe UI"/>
+              </a:defRPr>
+            </a:pPr>
+            <a:r>
+              <a:t>08 / 10</a:t>
+            </a:r>
+          </a:p>
+        </p:txBody>
+      </p:sp>
+      <p:sp>
+        <p:nvSpPr>
+          <p:cNvPr id="6" name="TextBox 5"/>
+          <p:cNvSpPr txBox="1"/>
+          <p:nvPr/>
+        </p:nvSpPr>
+        <p:spPr>
+          <a:xfrm>
+            <a:off x="822960" y="777240"/>
+            <a:ext cx="10515600" cy="685800"/>
+          </a:xfrm>
+          <a:prstGeom prst="rect">
+            <a:avLst/>
+          </a:prstGeom>
+          <a:noFill/>
+        </p:spPr>
+        <p:txBody>
+          <a:bodyPr wrap="square" lIns="0" tIns="0" rIns="0" bIns="0">
+            <a:spAutoFit/>
+          </a:bodyPr>
+          <a:lstStyle/>
+          <a:p>
+            <a:pPr>
+              <a:defRPr sz="2400" b="1">
+                <a:solidFill>
+                  <a:srgbClr val="F8FAFC"/>
+                </a:solidFill>
+                <a:latin typeface="Segoe UI"/>
+              </a:defRPr>
+            </a:pPr>
+            <a:r>
+              <a:t>Conclusion &amp; Future Innovations</a:t>
+            </a:r>
+          </a:p>
+        </p:txBody>
+      </p:sp>
+      <p:sp>
+        <p:nvSpPr>
+          <p:cNvPr id="7" name="Rounded Rectangle 6"/>
+          <p:cNvSpPr/>
+          <p:nvPr/>
+        </p:nvSpPr>
+        <p:spPr>
+          <a:xfrm>
+            <a:off x="822960" y="1645920"/>
+            <a:ext cx="5120640" cy="4389120"/>
+          </a:xfrm>
+          <a:prstGeom prst="roundRect">
+            <a:avLst/>
+          </a:prstGeom>
+          <a:solidFill>
+            <a:srgbClr val="18223A"/>
+          </a:solidFill>
+          <a:ln w="19050">
+            <a:solidFill>
+              <a:srgbClr val="38BDF8"/>
+            </a:solidFill>
+          </a:ln>
+        </p:spPr>
+        <p:style>
+          <a:lnRef idx="1">
+            <a:schemeClr val="accent1"/>
+          </a:lnRef>
+          <a:fillRef idx="3">
+            <a:schemeClr val="accent1"/>
+          </a:fillRef>
+          <a:effectRef idx="2">
+            <a:schemeClr val="accent1"/>
+          </a:effectRef>
+          <a:fontRef idx="minor">
+            <a:schemeClr val="lt1"/>
+          </a:fontRef>
+        </p:style>
+        <p:txBody>
+          <a:bodyPr rtlCol="0" anchor="ctr" wrap="square" tIns="228600" lIns="274320" rIns="274320"/>
+          <a:lstStyle/>
+          <a:p>
+            <a:pPr algn="ctr">
+              <a:defRPr sz="1500" b="1">
+                <a:solidFill>
+                  <a:srgbClr val="38BDF8"/>
+                </a:solidFill>
+                <a:latin typeface="Segoe UI"/>
+              </a:defRPr>
+            </a:pPr>
+            <a:r>
+              <a:t>PROJECT CONCLUSIONS</a:t>
             </a:r>
           </a:p>
           <a:p>
             <a:pPr>
               <a:spcBef>
-                <a:spcPts val="800"/>
+                <a:spcPts val="1200"/>
               </a:spcBef>
-              <a:defRPr sz="1100">
-                <a:solidFill>
-                  <a:srgbClr val="172B2C"/>
-                </a:solidFill>
-                <a:latin typeface="Arial"/>
-              </a:defRPr>
-            </a:pPr>
-            <a:r>
-              <a:t>✔ Zero-Latency Web Display: Real-time dynamic updates using fetch() API with auto-updating clock and status pulse indicator.</a:t>
+              <a:defRPr sz="1150">
+                <a:solidFill>
+                  <a:srgbClr val="F8FAFC"/>
+                </a:solidFill>
+                <a:latin typeface="Segoe UI"/>
+              </a:defRPr>
+            </a:pPr>
+            <a:r>
+              <a:t>✔  End-to-End IoT Deployment: Seamlessly bridged physical hardware sensing (ESP32 + DHT22) with modern cloud platforms (ThingSpeak + Vercel).</a:t>
             </a:r>
           </a:p>
           <a:p>
             <a:pPr>
               <a:spcBef>
-                <a:spcPts val="800"/>
+                <a:spcPts val="1200"/>
               </a:spcBef>
-              <a:defRPr sz="1100">
-                <a:solidFill>
-                  <a:srgbClr val="172B2C"/>
-                </a:solidFill>
-                <a:latin typeface="Arial"/>
-              </a:defRPr>
-            </a:pPr>
-            <a:r>
-              <a:t>✔ HTML5 Canvas 24-Hour Graph: Dual-trace smoothed spline plots rendering temperature (°C) in coral and humidity (%) in teal simultaneously.</a:t>
+              <a:defRPr sz="1150">
+                <a:solidFill>
+                  <a:srgbClr val="F8FAFC"/>
+                </a:solidFill>
+                <a:latin typeface="Segoe UI"/>
+              </a:defRPr>
+            </a:pPr>
+            <a:r>
+              <a:t>✔  Edge Intelligence: Successfully demonstrated on-device computation of human thermal comfort indices (Heat Index and Dew Point).</a:t>
             </a:r>
           </a:p>
           <a:p>
             <a:pPr>
               <a:spcBef>
-                <a:spcPts val="800"/>
+                <a:spcPts val="1200"/>
               </a:spcBef>
-              <a:defRPr sz="1100">
-                <a:solidFill>
-                  <a:srgbClr val="172B2C"/>
-                </a:solidFill>
-                <a:latin typeface="Arial"/>
-              </a:defRPr>
-            </a:pPr>
-            <a:r>
-              <a:t>✔ Automatic Extremes Calculation: Computes session-wide Low and High markers on the fly from incoming feeds.</a:t>
+              <a:defRPr sz="1150">
+                <a:solidFill>
+                  <a:srgbClr val="F8FAFC"/>
+                </a:solidFill>
+                <a:latin typeface="Segoe UI"/>
+              </a:defRPr>
+            </a:pPr>
+            <a:r>
+              <a:t>✔  Zero-Dependency Lightweight UI: Crafted an ultra-fast, responsive dashboard without heavy external frameworks (pure HTML/CSS/Canvas).</a:t>
             </a:r>
           </a:p>
           <a:p>
             <a:pPr>
               <a:spcBef>
-                <a:spcPts val="800"/>
+                <a:spcPts val="1200"/>
               </a:spcBef>
-              <a:defRPr sz="1100">
-                <a:solidFill>
-                  <a:srgbClr val="172B2C"/>
-                </a:solidFill>
-                <a:latin typeface="Arial"/>
-              </a:defRPr>
-            </a:pPr>
-            <a:r>
-              <a:t>✔ Graceful Fallback Mode: Automatic visual alert ('ESP32 offline - connect to Wi-Fi') upon packet drop or network disconnection.</a:t>
+              <a:defRPr sz="1150">
+                <a:solidFill>
+                  <a:srgbClr val="F8FAFC"/>
+                </a:solidFill>
+                <a:latin typeface="Segoe UI"/>
+              </a:defRPr>
+            </a:pPr>
+            <a:r>
+              <a:t>✔  Real-World Reliability: Verified continuous 20-second sensor transmissions over mobile Wi-Fi tethering with full data integrity.</a:t>
+            </a:r>
+          </a:p>
+        </p:txBody>
+      </p:sp>
+      <p:sp>
+        <p:nvSpPr>
+          <p:cNvPr id="8" name="Rounded Rectangle 7"/>
+          <p:cNvSpPr/>
+          <p:nvPr/>
+        </p:nvSpPr>
+        <p:spPr>
+          <a:xfrm>
+            <a:off x="6217920" y="1645920"/>
+            <a:ext cx="5120640" cy="4389120"/>
+          </a:xfrm>
+          <a:prstGeom prst="roundRect">
+            <a:avLst/>
+          </a:prstGeom>
+          <a:solidFill>
+            <a:srgbClr val="18223A"/>
+          </a:solidFill>
+          <a:ln w="19050">
+            <a:solidFill>
+              <a:srgbClr val="F97316"/>
+            </a:solidFill>
+          </a:ln>
+        </p:spPr>
+        <p:style>
+          <a:lnRef idx="1">
+            <a:schemeClr val="accent1"/>
+          </a:lnRef>
+          <a:fillRef idx="3">
+            <a:schemeClr val="accent1"/>
+          </a:fillRef>
+          <a:effectRef idx="2">
+            <a:schemeClr val="accent1"/>
+          </a:effectRef>
+          <a:fontRef idx="minor">
+            <a:schemeClr val="lt1"/>
+          </a:fontRef>
+        </p:style>
+        <p:txBody>
+          <a:bodyPr rtlCol="0" anchor="ctr" wrap="square" tIns="228600" lIns="274320" rIns="274320"/>
+          <a:lstStyle/>
+          <a:p>
+            <a:pPr algn="ctr">
+              <a:defRPr sz="1500" b="1">
+                <a:solidFill>
+                  <a:srgbClr val="F97316"/>
+                </a:solidFill>
+                <a:latin typeface="Segoe UI"/>
+              </a:defRPr>
+            </a:pPr>
+            <a:r>
+              <a:t>FUTURE EXPANSION ROADMAP</a:t>
             </a:r>
           </a:p>
           <a:p>
             <a:pPr>
               <a:spcBef>
-                <a:spcPts val="800"/>
+                <a:spcPts val="1000"/>
               </a:spcBef>
-              <a:defRPr sz="1100">
-                <a:solidFill>
-                  <a:srgbClr val="172B2C"/>
-                </a:solidFill>
-                <a:latin typeface="Arial"/>
-              </a:defRPr>
-            </a:pPr>
-            <a:r>
-              <a:t>✔ Live Production Deployment: Hosted and globally accessible on Vercel CDN:</a:t>
-            </a:r>
-            <a:br/>
-            <a:r>
-              <a:t>  https://smart-weather-station.vercel.app/</a:t>
-            </a:r>
-            <a:br/>
-            <a:r>
-              <a:t>  GitHub: github.com/prasoon9999/smart-weather-station</a:t>
+            </a:pPr>
+            <a:r>
+              <a:rPr b="1" sz="1150">
+                <a:solidFill>
+                  <a:srgbClr val="F59E0B"/>
+                </a:solidFill>
+              </a:rPr>
+              <a:t>★  Solar Energy Harvesting: </a:t>
+            </a:r>
+            <a:r>
+              <a:rPr b="0" sz="1150">
+                <a:solidFill>
+                  <a:srgbClr val="F8FAFC"/>
+                </a:solidFill>
+              </a:rPr>
+              <a:t>Equipping system with 5V Solar panel + TP4056 Li-ion charge controller and ESP32 deep-sleep cycling for 100% off-grid autonomy.</a:t>
+            </a:r>
+          </a:p>
+          <a:p>
+            <a:pPr>
+              <a:spcBef>
+                <a:spcPts val="1000"/>
+              </a:spcBef>
+            </a:pPr>
+            <a:r>
+              <a:rPr b="1" sz="1150">
+                <a:solidFill>
+                  <a:srgbClr val="F59E0B"/>
+                </a:solidFill>
+              </a:rPr>
+              <a:t>★  Multi-Parameter Environmental Sensing: </a:t>
+            </a:r>
+            <a:r>
+              <a:rPr b="0" sz="1150">
+                <a:solidFill>
+                  <a:srgbClr val="F8FAFC"/>
+                </a:solidFill>
+              </a:rPr>
+              <a:t>Integrating BMP280 (barometric pressure / altitude), MQ-135 (air quality index), and optical rain tipping bucket.</a:t>
+            </a:r>
+          </a:p>
+          <a:p>
+            <a:pPr>
+              <a:spcBef>
+                <a:spcPts val="1000"/>
+              </a:spcBef>
+            </a:pPr>
+            <a:r>
+              <a:rPr b="1" sz="1150">
+                <a:solidFill>
+                  <a:srgbClr val="F59E0B"/>
+                </a:solidFill>
+              </a:rPr>
+              <a:t>★  Automated Emergency Push Alerts: </a:t>
+            </a:r>
+            <a:r>
+              <a:rPr b="0" sz="1150">
+                <a:solidFill>
+                  <a:srgbClr val="F8FAFC"/>
+                </a:solidFill>
+              </a:rPr>
+              <a:t>Setting up Webhooks for instant Telegram / WhatsApp / SMS push notifications during extreme heatwaves or storms.</a:t>
+            </a:r>
+          </a:p>
+          <a:p>
+            <a:pPr>
+              <a:spcBef>
+                <a:spcPts val="1000"/>
+              </a:spcBef>
+            </a:pPr>
+            <a:r>
+              <a:rPr b="1" sz="1150">
+                <a:solidFill>
+                  <a:srgbClr val="F59E0B"/>
+                </a:solidFill>
+              </a:rPr>
+              <a:t>★  Edge Machine Learning: </a:t>
+            </a:r>
+            <a:r>
+              <a:rPr b="0" sz="1150">
+                <a:solidFill>
+                  <a:srgbClr val="F8FAFC"/>
+                </a:solidFill>
+              </a:rPr>
+              <a:t>Deploying TinyML models to predict rainfall probability locally based on falling barometric pressure and humidity slope.</a:t>
             </a:r>
           </a:p>
         </p:txBody>
@@ -7775,13 +8663,13 @@
         <p:spPr>
           <a:xfrm>
             <a:off x="0" y="0"/>
-            <a:ext cx="12191695" cy="109728"/>
+            <a:ext cx="12191695" cy="6858000"/>
           </a:xfrm>
           <a:prstGeom prst="rect">
             <a:avLst/>
           </a:prstGeom>
           <a:solidFill>
-            <a:srgbClr val="102C57"/>
+            <a:srgbClr val="0F172A"/>
           </a:solidFill>
           <a:ln>
             <a:noFill/>
@@ -7811,105 +8699,20 @@
       </p:sp>
       <p:sp>
         <p:nvSpPr>
-          <p:cNvPr id="3" name="TextBox 2"/>
-          <p:cNvSpPr txBox="1"/>
-          <p:nvPr/>
-        </p:nvSpPr>
-        <p:spPr>
-          <a:xfrm>
-            <a:off x="731520" y="274320"/>
-            <a:ext cx="10728655" cy="822960"/>
-          </a:xfrm>
-          <a:prstGeom prst="rect">
-            <a:avLst/>
-          </a:prstGeom>
-          <a:noFill/>
-        </p:spPr>
-        <p:txBody>
-          <a:bodyPr wrap="square" lIns="0" tIns="0" rIns="0" bIns="0">
-            <a:spAutoFit/>
-          </a:bodyPr>
-          <a:lstStyle/>
-          <a:p>
-            <a:pPr>
-              <a:defRPr sz="1300" b="1">
-                <a:solidFill>
-                  <a:srgbClr val="102C57"/>
-                </a:solidFill>
-                <a:latin typeface="Arial"/>
-              </a:defRPr>
-            </a:pPr>
-            <a:r>
-              <a:t>Galgotias College of Engineering &amp; Technology, Greater Noida</a:t>
-            </a:r>
-          </a:p>
-          <a:p>
-            <a:pPr>
-              <a:defRPr sz="1100" b="1">
-                <a:solidFill>
-                  <a:srgbClr val="646E73"/>
-                </a:solidFill>
-                <a:latin typeface="Arial"/>
-              </a:defRPr>
-            </a:pPr>
-            <a:r>
-              <a:t>DEPARTMENT OF ELECTRONICS AND COMMUNICATION ENGINEERING</a:t>
-            </a:r>
-          </a:p>
-        </p:txBody>
-      </p:sp>
-      <p:sp>
-        <p:nvSpPr>
-          <p:cNvPr id="4" name="TextBox 3"/>
-          <p:cNvSpPr txBox="1"/>
-          <p:nvPr/>
-        </p:nvSpPr>
-        <p:spPr>
-          <a:xfrm>
-            <a:off x="731520" y="1097280"/>
-            <a:ext cx="10728655" cy="640080"/>
-          </a:xfrm>
-          <a:prstGeom prst="rect">
-            <a:avLst/>
-          </a:prstGeom>
-          <a:noFill/>
-        </p:spPr>
-        <p:txBody>
-          <a:bodyPr wrap="square" lIns="0" tIns="0" rIns="0" bIns="0">
-            <a:spAutoFit/>
-          </a:bodyPr>
-          <a:lstStyle/>
-          <a:p>
-            <a:pPr>
-              <a:defRPr sz="2600" b="1">
-                <a:solidFill>
-                  <a:srgbClr val="102C57"/>
-                </a:solidFill>
-                <a:latin typeface="Arial"/>
-              </a:defRPr>
-            </a:pPr>
-            <a:r>
-              <a:t>CONCLUSION &amp; FUTURE SCOPE</a:t>
-            </a:r>
-          </a:p>
-        </p:txBody>
-      </p:sp>
-      <p:sp>
-        <p:nvSpPr>
-          <p:cNvPr id="5" name="Rectangle 4"/>
+          <p:cNvPr id="3" name="Rectangle 2"/>
           <p:cNvSpPr/>
           <p:nvPr/>
         </p:nvSpPr>
         <p:spPr>
           <a:xfrm>
-            <a:off x="731520" y="1783080"/>
-            <a:ext cx="2011680" cy="45720"/>
+            <a:off x="0" y="0"/>
+            <a:ext cx="12191695" cy="73152"/>
           </a:xfrm>
           <a:prstGeom prst="rect">
             <a:avLst/>
           </a:prstGeom>
           <a:solidFill>
-            <a:srgbClr val="E87652"/>
+            <a:srgbClr val="14B8A6"/>
           </a:solidFill>
           <a:ln>
             <a:noFill/>
@@ -7939,24 +8742,24 @@
       </p:sp>
       <p:sp>
         <p:nvSpPr>
-          <p:cNvPr id="6" name="Rounded Rectangle 5"/>
+          <p:cNvPr id="4" name="Rounded Rectangle 3"/>
           <p:cNvSpPr/>
           <p:nvPr/>
         </p:nvSpPr>
         <p:spPr>
           <a:xfrm>
-            <a:off x="914400" y="2011680"/>
-            <a:ext cx="10362895" cy="2011680"/>
+            <a:off x="822960" y="320040"/>
+            <a:ext cx="6858000" cy="347472"/>
           </a:xfrm>
           <a:prstGeom prst="roundRect">
             <a:avLst/>
           </a:prstGeom>
           <a:solidFill>
-            <a:srgbClr val="FFFFFF"/>
-          </a:solidFill>
-          <a:ln w="19050">
+            <a:srgbClr val="18223A"/>
+          </a:solidFill>
+          <a:ln w="12700">
             <a:solidFill>
-              <a:srgbClr val="102C57"/>
+              <a:srgbClr val="2D3E62"/>
             </a:solidFill>
           </a:ln>
         </p:spPr>
@@ -7975,87 +8778,43 @@
           </a:fontRef>
         </p:style>
         <p:txBody>
-          <a:bodyPr rtlCol="0" anchor="ctr" wrap="square" lIns="274320" rIns="274320"/>
+          <a:bodyPr rtlCol="0" anchor="ctr" tIns="54864" lIns="182880"/>
           <a:lstStyle/>
           <a:p>
             <a:pPr algn="ctr">
-              <a:defRPr b="1" sz="1500">
-                <a:solidFill>
-                  <a:srgbClr val="102C57"/>
-                </a:solidFill>
-              </a:defRPr>
-            </a:pPr>
-            <a:r>
-              <a:t>CONCLUSION:</a:t>
-            </a:r>
-          </a:p>
-          <a:p>
-            <a:pPr>
-              <a:spcBef>
-                <a:spcPts val="400"/>
-              </a:spcBef>
-              <a:defRPr sz="1300">
-                <a:solidFill>
-                  <a:srgbClr val="172B2C"/>
-                </a:solidFill>
-              </a:defRPr>
-            </a:pPr>
-            <a:r>
-              <a:t>• A highly efficient, low-cost Smart Weather Station was successfully implemented combining embedded edge sensing with cloud computing.</a:t>
-            </a:r>
-          </a:p>
-          <a:p>
-            <a:pPr>
-              <a:spcBef>
-                <a:spcPts val="400"/>
-              </a:spcBef>
-              <a:defRPr sz="1300">
-                <a:solidFill>
-                  <a:srgbClr val="172B2C"/>
-                </a:solidFill>
-              </a:defRPr>
-            </a:pPr>
-            <a:r>
-              <a:t>• The DHT22 sensor and ESP32 demonstrated stable, accurate data acquisition with local OLED visualization and cloud transmission.</a:t>
-            </a:r>
-          </a:p>
-          <a:p>
-            <a:pPr>
-              <a:spcBef>
-                <a:spcPts val="400"/>
-              </a:spcBef>
-              <a:defRPr sz="1300">
-                <a:solidFill>
-                  <a:srgbClr val="172B2C"/>
-                </a:solidFill>
-              </a:defRPr>
-            </a:pPr>
-            <a:r>
-              <a:t>• The serverless web dashboard deployed on Vercel delivers seamless, responsive real-time graphical monitoring accessible globally from any web browser.</a:t>
-            </a:r>
-          </a:p>
-        </p:txBody>
-      </p:sp>
-      <p:sp>
-        <p:nvSpPr>
-          <p:cNvPr id="7" name="Rounded Rectangle 6"/>
+              <a:defRPr sz="850" b="1">
+                <a:solidFill>
+                  <a:srgbClr val="14B8A6"/>
+                </a:solidFill>
+                <a:latin typeface="Segoe UI"/>
+              </a:defRPr>
+            </a:pPr>
+            <a:r>
+              <a:t>GALGOTIAS COLLEGE OF ENGG. &amp; TECH.  •  ECE DEPARTMENT  •  DOCUMENTATION</a:t>
+            </a:r>
+          </a:p>
+        </p:txBody>
+      </p:sp>
+      <p:sp>
+        <p:nvSpPr>
+          <p:cNvPr id="5" name="Rounded Rectangle 4"/>
           <p:cNvSpPr/>
           <p:nvPr/>
         </p:nvSpPr>
         <p:spPr>
           <a:xfrm>
-            <a:off x="914400" y="4297680"/>
-            <a:ext cx="10362895" cy="2011680"/>
+            <a:off x="10607040" y="320040"/>
+            <a:ext cx="777240" cy="347472"/>
           </a:xfrm>
           <a:prstGeom prst="roundRect">
             <a:avLst/>
           </a:prstGeom>
           <a:solidFill>
-            <a:srgbClr val="F5F7F8"/>
-          </a:solidFill>
-          <a:ln w="19050">
+            <a:srgbClr val="18223A"/>
+          </a:solidFill>
+          <a:ln w="12700">
             <a:solidFill>
-              <a:srgbClr val="E87652"/>
+              <a:srgbClr val="2D3E62"/>
             </a:solidFill>
           </a:ln>
         </p:spPr>
@@ -8074,78 +8833,421 @@
           </a:fontRef>
         </p:style>
         <p:txBody>
-          <a:bodyPr rtlCol="0" anchor="ctr" wrap="square" lIns="274320" rIns="274320"/>
+          <a:bodyPr rtlCol="0" anchor="ctr"/>
           <a:lstStyle/>
           <a:p>
             <a:pPr algn="ctr">
-              <a:defRPr b="1" sz="1500">
-                <a:solidFill>
-                  <a:srgbClr val="E87652"/>
-                </a:solidFill>
-              </a:defRPr>
-            </a:pPr>
-            <a:r>
-              <a:t>FUTURE SCOPE:</a:t>
-            </a:r>
-          </a:p>
+              <a:defRPr sz="900" b="1">
+                <a:solidFill>
+                  <a:srgbClr val="94A3B8"/>
+                </a:solidFill>
+                <a:latin typeface="Segoe UI"/>
+              </a:defRPr>
+            </a:pPr>
+            <a:r>
+              <a:t>09 / 10</a:t>
+            </a:r>
+          </a:p>
+        </p:txBody>
+      </p:sp>
+      <p:sp>
+        <p:nvSpPr>
+          <p:cNvPr id="6" name="TextBox 5"/>
+          <p:cNvSpPr txBox="1"/>
+          <p:nvPr/>
+        </p:nvSpPr>
+        <p:spPr>
+          <a:xfrm>
+            <a:off x="822960" y="777240"/>
+            <a:ext cx="10515600" cy="685800"/>
+          </a:xfrm>
+          <a:prstGeom prst="rect">
+            <a:avLst/>
+          </a:prstGeom>
+          <a:noFill/>
+        </p:spPr>
+        <p:txBody>
+          <a:bodyPr wrap="square" lIns="0" tIns="0" rIns="0" bIns="0">
+            <a:spAutoFit/>
+          </a:bodyPr>
+          <a:lstStyle/>
           <a:p>
             <a:pPr>
-              <a:spcBef>
-                <a:spcPts val="400"/>
-              </a:spcBef>
-              <a:defRPr sz="1300">
-                <a:solidFill>
-                  <a:srgbClr val="172B2C"/>
-                </a:solidFill>
-              </a:defRPr>
-            </a:pPr>
-            <a:r>
-              <a:t>• Multi-Sensor Integration: Expanding hardware to include BMP280/BME280 for barometric pressure, rain gauge, and UV intensity sensors.</a:t>
-            </a:r>
-          </a:p>
-          <a:p>
-            <a:pPr>
-              <a:spcBef>
-                <a:spcPts val="400"/>
-              </a:spcBef>
-              <a:defRPr sz="1300">
-                <a:solidFill>
-                  <a:srgbClr val="172B2C"/>
-                </a:solidFill>
-              </a:defRPr>
-            </a:pPr>
-            <a:r>
-              <a:t>• Energy Harvesting &amp; Autonomy: Integrating solar panels with TP4056 Li-ion battery charging and deep-sleep modes for off-grid deployment.</a:t>
-            </a:r>
-          </a:p>
-          <a:p>
-            <a:pPr>
-              <a:spcBef>
-                <a:spcPts val="400"/>
-              </a:spcBef>
-              <a:defRPr sz="1300">
-                <a:solidFill>
-                  <a:srgbClr val="172B2C"/>
-                </a:solidFill>
-              </a:defRPr>
-            </a:pPr>
-            <a:r>
-              <a:t>• Intelligent Alert System: Implementing Telegram / SMS / Email Webhook triggers for severe weather warnings and heat stress alarms.</a:t>
-            </a:r>
-          </a:p>
-          <a:p>
-            <a:pPr>
-              <a:spcBef>
-                <a:spcPts val="400"/>
-              </a:spcBef>
-              <a:defRPr sz="1300">
-                <a:solidFill>
-                  <a:srgbClr val="172B2C"/>
-                </a:solidFill>
-              </a:defRPr>
-            </a:pPr>
-            <a:r>
-              <a:t>• Predictive Machine Learning: Utilizing historical cloud feeds to forecast microclimate trends and rainfall probabilities.</a:t>
+              <a:defRPr sz="2400" b="1">
+                <a:solidFill>
+                  <a:srgbClr val="F8FAFC"/>
+                </a:solidFill>
+                <a:latin typeface="Segoe UI"/>
+              </a:defRPr>
+            </a:pPr>
+            <a:r>
+              <a:t>References &amp; Technical Standards</a:t>
+            </a:r>
+          </a:p>
+        </p:txBody>
+      </p:sp>
+      <p:sp>
+        <p:nvSpPr>
+          <p:cNvPr id="7" name="Rounded Rectangle 6"/>
+          <p:cNvSpPr/>
+          <p:nvPr/>
+        </p:nvSpPr>
+        <p:spPr>
+          <a:xfrm>
+            <a:off x="822960" y="1645920"/>
+            <a:ext cx="10545775" cy="658368"/>
+          </a:xfrm>
+          <a:prstGeom prst="roundRect">
+            <a:avLst/>
+          </a:prstGeom>
+          <a:solidFill>
+            <a:srgbClr val="18223A"/>
+          </a:solidFill>
+          <a:ln w="12700">
+            <a:solidFill>
+              <a:srgbClr val="2D3E62"/>
+            </a:solidFill>
+          </a:ln>
+        </p:spPr>
+        <p:style>
+          <a:lnRef idx="1">
+            <a:schemeClr val="accent1"/>
+          </a:lnRef>
+          <a:fillRef idx="3">
+            <a:schemeClr val="accent1"/>
+          </a:fillRef>
+          <a:effectRef idx="2">
+            <a:schemeClr val="accent1"/>
+          </a:effectRef>
+          <a:fontRef idx="minor">
+            <a:schemeClr val="lt1"/>
+          </a:fontRef>
+        </p:style>
+        <p:txBody>
+          <a:bodyPr rtlCol="0" anchor="ctr" wrap="square" tIns="109728" lIns="182880"/>
+          <a:lstStyle/>
+          <a:p>
+            <a:pPr algn="ctr"/>
+            <a:r>
+              <a:rPr b="1" sz="1100">
+                <a:solidFill>
+                  <a:srgbClr val="14B8A6"/>
+                </a:solidFill>
+              </a:rPr>
+              <a:t>[01]  Espressif Systems: </a:t>
+            </a:r>
+            <a:r>
+              <a:rPr b="0" sz="1100">
+                <a:solidFill>
+                  <a:srgbClr val="F8FAFC"/>
+                </a:solidFill>
+              </a:rPr>
+              <a:t>"ESP32 Series Datasheet - 2.4 GHz Wi-Fi and Bluetooth Combo Chip, Rev 3.9, 2023."</a:t>
+            </a:r>
+          </a:p>
+        </p:txBody>
+      </p:sp>
+      <p:sp>
+        <p:nvSpPr>
+          <p:cNvPr id="8" name="Rounded Rectangle 7"/>
+          <p:cNvSpPr/>
+          <p:nvPr/>
+        </p:nvSpPr>
+        <p:spPr>
+          <a:xfrm>
+            <a:off x="822960" y="2395728"/>
+            <a:ext cx="10545775" cy="658368"/>
+          </a:xfrm>
+          <a:prstGeom prst="roundRect">
+            <a:avLst/>
+          </a:prstGeom>
+          <a:solidFill>
+            <a:srgbClr val="18223A"/>
+          </a:solidFill>
+          <a:ln w="12700">
+            <a:solidFill>
+              <a:srgbClr val="2D3E62"/>
+            </a:solidFill>
+          </a:ln>
+        </p:spPr>
+        <p:style>
+          <a:lnRef idx="1">
+            <a:schemeClr val="accent1"/>
+          </a:lnRef>
+          <a:fillRef idx="3">
+            <a:schemeClr val="accent1"/>
+          </a:fillRef>
+          <a:effectRef idx="2">
+            <a:schemeClr val="accent1"/>
+          </a:effectRef>
+          <a:fontRef idx="minor">
+            <a:schemeClr val="lt1"/>
+          </a:fontRef>
+        </p:style>
+        <p:txBody>
+          <a:bodyPr rtlCol="0" anchor="ctr" wrap="square" tIns="109728" lIns="182880"/>
+          <a:lstStyle/>
+          <a:p>
+            <a:pPr algn="ctr"/>
+            <a:r>
+              <a:rPr b="1" sz="1100">
+                <a:solidFill>
+                  <a:srgbClr val="F97316"/>
+                </a:solidFill>
+              </a:rPr>
+              <a:t>[02]  Aosong Electronics: </a:t>
+            </a:r>
+            <a:r>
+              <a:rPr b="0" sz="1100">
+                <a:solidFill>
+                  <a:srgbClr val="F8FAFC"/>
+                </a:solidFill>
+              </a:rPr>
+              <a:t>"Digital-Output Relative Humidity &amp; Temperature Sensor DHT22 (AM2302) Datasheet, Guangzhou."</a:t>
+            </a:r>
+          </a:p>
+        </p:txBody>
+      </p:sp>
+      <p:sp>
+        <p:nvSpPr>
+          <p:cNvPr id="9" name="Rounded Rectangle 8"/>
+          <p:cNvSpPr/>
+          <p:nvPr/>
+        </p:nvSpPr>
+        <p:spPr>
+          <a:xfrm>
+            <a:off x="822960" y="3145536"/>
+            <a:ext cx="10545775" cy="658368"/>
+          </a:xfrm>
+          <a:prstGeom prst="roundRect">
+            <a:avLst/>
+          </a:prstGeom>
+          <a:solidFill>
+            <a:srgbClr val="18223A"/>
+          </a:solidFill>
+          <a:ln w="12700">
+            <a:solidFill>
+              <a:srgbClr val="2D3E62"/>
+            </a:solidFill>
+          </a:ln>
+        </p:spPr>
+        <p:style>
+          <a:lnRef idx="1">
+            <a:schemeClr val="accent1"/>
+          </a:lnRef>
+          <a:fillRef idx="3">
+            <a:schemeClr val="accent1"/>
+          </a:fillRef>
+          <a:effectRef idx="2">
+            <a:schemeClr val="accent1"/>
+          </a:effectRef>
+          <a:fontRef idx="minor">
+            <a:schemeClr val="lt1"/>
+          </a:fontRef>
+        </p:style>
+        <p:txBody>
+          <a:bodyPr rtlCol="0" anchor="ctr" wrap="square" tIns="109728" lIns="182880"/>
+          <a:lstStyle/>
+          <a:p>
+            <a:pPr algn="ctr"/>
+            <a:r>
+              <a:rPr b="1" sz="1100">
+                <a:solidFill>
+                  <a:srgbClr val="38BDF8"/>
+                </a:solidFill>
+              </a:rPr>
+              <a:t>[03]  IEEE Conference: </a:t>
+            </a:r>
+            <a:r>
+              <a:rPr b="0" sz="1100">
+                <a:solidFill>
+                  <a:srgbClr val="F8FAFC"/>
+                </a:solidFill>
+              </a:rPr>
+              <a:t>"K. S. Rao, V. S. Murthy, "IoT Based Real-Time Environmental and Weather Monitoring System using ESP32," IEEE ICST, 2021."</a:t>
+            </a:r>
+          </a:p>
+        </p:txBody>
+      </p:sp>
+      <p:sp>
+        <p:nvSpPr>
+          <p:cNvPr id="10" name="Rounded Rectangle 9"/>
+          <p:cNvSpPr/>
+          <p:nvPr/>
+        </p:nvSpPr>
+        <p:spPr>
+          <a:xfrm>
+            <a:off x="822960" y="3895344"/>
+            <a:ext cx="10545775" cy="658368"/>
+          </a:xfrm>
+          <a:prstGeom prst="roundRect">
+            <a:avLst/>
+          </a:prstGeom>
+          <a:solidFill>
+            <a:srgbClr val="18223A"/>
+          </a:solidFill>
+          <a:ln w="12700">
+            <a:solidFill>
+              <a:srgbClr val="2D3E62"/>
+            </a:solidFill>
+          </a:ln>
+        </p:spPr>
+        <p:style>
+          <a:lnRef idx="1">
+            <a:schemeClr val="accent1"/>
+          </a:lnRef>
+          <a:fillRef idx="3">
+            <a:schemeClr val="accent1"/>
+          </a:fillRef>
+          <a:effectRef idx="2">
+            <a:schemeClr val="accent1"/>
+          </a:effectRef>
+          <a:fontRef idx="minor">
+            <a:schemeClr val="lt1"/>
+          </a:fontRef>
+        </p:style>
+        <p:txBody>
+          <a:bodyPr rtlCol="0" anchor="ctr" wrap="square" tIns="109728" lIns="182880"/>
+          <a:lstStyle/>
+          <a:p>
+            <a:pPr algn="ctr"/>
+            <a:r>
+              <a:rPr b="1" sz="1100">
+                <a:solidFill>
+                  <a:srgbClr val="F59E0B"/>
+                </a:solidFill>
+              </a:rPr>
+              <a:t>[04]  MathWorks Inc.: </a:t>
+            </a:r>
+            <a:r>
+              <a:rPr b="0" sz="1100">
+                <a:solidFill>
+                  <a:srgbClr val="F8FAFC"/>
+                </a:solidFill>
+              </a:rPr>
+              <a:t>"ThingSpeak IoT Analytics Platform Documentation: RESTful API &amp; Channels Architecture, 2024."</a:t>
+            </a:r>
+          </a:p>
+        </p:txBody>
+      </p:sp>
+      <p:sp>
+        <p:nvSpPr>
+          <p:cNvPr id="11" name="Rounded Rectangle 10"/>
+          <p:cNvSpPr/>
+          <p:nvPr/>
+        </p:nvSpPr>
+        <p:spPr>
+          <a:xfrm>
+            <a:off x="822960" y="4645152"/>
+            <a:ext cx="10545775" cy="658368"/>
+          </a:xfrm>
+          <a:prstGeom prst="roundRect">
+            <a:avLst/>
+          </a:prstGeom>
+          <a:solidFill>
+            <a:srgbClr val="18223A"/>
+          </a:solidFill>
+          <a:ln w="12700">
+            <a:solidFill>
+              <a:srgbClr val="2D3E62"/>
+            </a:solidFill>
+          </a:ln>
+        </p:spPr>
+        <p:style>
+          <a:lnRef idx="1">
+            <a:schemeClr val="accent1"/>
+          </a:lnRef>
+          <a:fillRef idx="3">
+            <a:schemeClr val="accent1"/>
+          </a:fillRef>
+          <a:effectRef idx="2">
+            <a:schemeClr val="accent1"/>
+          </a:effectRef>
+          <a:fontRef idx="minor">
+            <a:schemeClr val="lt1"/>
+          </a:fontRef>
+        </p:style>
+        <p:txBody>
+          <a:bodyPr rtlCol="0" anchor="ctr" wrap="square" tIns="109728" lIns="182880"/>
+          <a:lstStyle/>
+          <a:p>
+            <a:pPr algn="ctr"/>
+            <a:r>
+              <a:rPr b="1" sz="1100">
+                <a:solidFill>
+                  <a:srgbClr val="14B8A6"/>
+                </a:solidFill>
+              </a:rPr>
+              <a:t>[05]  IEEE Access Journal: </a:t>
+            </a:r>
+            <a:r>
+              <a:rPr b="0" sz="1100">
+                <a:solidFill>
+                  <a:srgbClr val="F8FAFC"/>
+                </a:solidFill>
+              </a:rPr>
+              <a:t>"N. H. Motlagh et al., "Internet of Things (IoT) for Weather Monitoring: Recent Advances and Applications," IEEE Access, vol. 8, 2020."</a:t>
+            </a:r>
+          </a:p>
+        </p:txBody>
+      </p:sp>
+      <p:sp>
+        <p:nvSpPr>
+          <p:cNvPr id="12" name="Rounded Rectangle 11"/>
+          <p:cNvSpPr/>
+          <p:nvPr/>
+        </p:nvSpPr>
+        <p:spPr>
+          <a:xfrm>
+            <a:off x="822960" y="5394959"/>
+            <a:ext cx="10545775" cy="658368"/>
+          </a:xfrm>
+          <a:prstGeom prst="roundRect">
+            <a:avLst/>
+          </a:prstGeom>
+          <a:solidFill>
+            <a:srgbClr val="18223A"/>
+          </a:solidFill>
+          <a:ln w="12700">
+            <a:solidFill>
+              <a:srgbClr val="2D3E62"/>
+            </a:solidFill>
+          </a:ln>
+        </p:spPr>
+        <p:style>
+          <a:lnRef idx="1">
+            <a:schemeClr val="accent1"/>
+          </a:lnRef>
+          <a:fillRef idx="3">
+            <a:schemeClr val="accent1"/>
+          </a:fillRef>
+          <a:effectRef idx="2">
+            <a:schemeClr val="accent1"/>
+          </a:effectRef>
+          <a:fontRef idx="minor">
+            <a:schemeClr val="lt1"/>
+          </a:fontRef>
+        </p:style>
+        <p:txBody>
+          <a:bodyPr rtlCol="0" anchor="ctr" wrap="square" tIns="109728" lIns="182880"/>
+          <a:lstStyle/>
+          <a:p>
+            <a:pPr algn="ctr"/>
+            <a:r>
+              <a:rPr b="1" sz="1100">
+                <a:solidFill>
+                  <a:srgbClr val="F97316"/>
+                </a:solidFill>
+              </a:rPr>
+              <a:t>[06]  Solomon Systech: </a:t>
+            </a:r>
+            <a:r>
+              <a:rPr b="0" sz="1100">
+                <a:solidFill>
+                  <a:srgbClr val="F8FAFC"/>
+                </a:solidFill>
+              </a:rPr>
+              <a:t>"SSD1306 128 x 64 Dot Matrix OLED/PLED Driver with Controller Technical Specification, Rev 1.1, 2018."</a:t>
             </a:r>
           </a:p>
         </p:txBody>

--- a/Smart_Weather_Station_Presentation.pptx
+++ b/Smart_Weather_Station_Presentation.pptx
@@ -3099,14 +3099,57 @@
       <p:grpSpPr/>
       <p:sp>
         <p:nvSpPr>
-          <p:cNvPr id="2" name="TextBox 1"/>
+          <p:cNvPr id="2" name="Rectangle 1"/>
+          <p:cNvSpPr/>
+          <p:nvPr/>
+        </p:nvSpPr>
+        <p:spPr>
+          <a:xfrm>
+            <a:off x="0" y="0"/>
+            <a:ext cx="12191695" cy="91440"/>
+          </a:xfrm>
+          <a:prstGeom prst="rect">
+            <a:avLst/>
+          </a:prstGeom>
+          <a:solidFill>
+            <a:srgbClr val="1A365D"/>
+          </a:solidFill>
+          <a:ln>
+            <a:noFill/>
+          </a:ln>
+        </p:spPr>
+        <p:style>
+          <a:lnRef idx="1">
+            <a:schemeClr val="accent1"/>
+          </a:lnRef>
+          <a:fillRef idx="3">
+            <a:schemeClr val="accent1"/>
+          </a:fillRef>
+          <a:effectRef idx="2">
+            <a:schemeClr val="accent1"/>
+          </a:effectRef>
+          <a:fontRef idx="minor">
+            <a:schemeClr val="lt1"/>
+          </a:fontRef>
+        </p:style>
+        <p:txBody>
+          <a:bodyPr rtlCol="0" anchor="ctr"/>
+          <a:lstStyle/>
+          <a:p>
+            <a:pPr algn="ctr"/>
+          </a:p>
+        </p:txBody>
+      </p:sp>
+      <p:sp>
+        <p:nvSpPr>
+          <p:cNvPr id="3" name="TextBox 2"/>
           <p:cNvSpPr txBox="1"/>
           <p:nvPr/>
         </p:nvSpPr>
         <p:spPr>
           <a:xfrm>
-            <a:off x="914400" y="457200"/>
-            <a:ext cx="10362895" cy="1371600"/>
+            <a:off x="914400" y="548640"/>
+            <a:ext cx="10362895" cy="1463040"/>
           </a:xfrm>
           <a:prstGeom prst="rect">
             <a:avLst/>
@@ -3120,19 +3163,15 @@
           <a:lstStyle/>
           <a:p>
             <a:pPr algn="ctr">
-              <a:defRPr sz="2200" b="1">
-                <a:solidFill>
-                  <a:srgbClr val="000000"/>
-                </a:solidFill>
-                <a:latin typeface="Times New Roman"/>
+              <a:defRPr sz="2400" b="1">
+                <a:solidFill>
+                  <a:srgbClr val="1A365D"/>
+                </a:solidFill>
+                <a:latin typeface="Arial"/>
               </a:defRPr>
             </a:pPr>
             <a:r>
-              <a:t>Galgotias College of Engineering &amp; Technology,</a:t>
-            </a:r>
-            <a:br/>
-            <a:r>
-              <a:t>Greater Noida</a:t>
+              <a:t>Galgotias College of Engineering &amp; Technology, Greater Noida</a:t>
             </a:r>
           </a:p>
           <a:p>
@@ -3140,11 +3179,11 @@
               <a:spcBef>
                 <a:spcPts val="800"/>
               </a:spcBef>
-              <a:defRPr sz="1400" b="1">
-                <a:solidFill>
-                  <a:srgbClr val="000000"/>
-                </a:solidFill>
-                <a:latin typeface="Times New Roman"/>
+              <a:defRPr sz="1300" b="1">
+                <a:solidFill>
+                  <a:srgbClr val="1E293B"/>
+                </a:solidFill>
+                <a:latin typeface="Arial"/>
               </a:defRPr>
             </a:pPr>
             <a:r>
@@ -3155,30 +3194,92 @@
       </p:sp>
       <p:sp>
         <p:nvSpPr>
-          <p:cNvPr id="3" name="TextBox 2"/>
-          <p:cNvSpPr txBox="1"/>
+          <p:cNvPr id="4" name="Rectangle 3"/>
+          <p:cNvSpPr/>
           <p:nvPr/>
         </p:nvSpPr>
         <p:spPr>
           <a:xfrm>
-            <a:off x="914400" y="2560320"/>
-            <a:ext cx="10362895" cy="1371600"/>
+            <a:off x="4114800" y="1920240"/>
+            <a:ext cx="3962095" cy="27432"/>
           </a:xfrm>
           <a:prstGeom prst="rect">
             <a:avLst/>
           </a:prstGeom>
-          <a:noFill/>
-        </p:spPr>
-        <p:txBody>
-          <a:bodyPr wrap="square">
-            <a:spAutoFit/>
-          </a:bodyPr>
+          <a:solidFill>
+            <a:srgbClr val="0D9488"/>
+          </a:solidFill>
+          <a:ln>
+            <a:noFill/>
+          </a:ln>
+        </p:spPr>
+        <p:style>
+          <a:lnRef idx="1">
+            <a:schemeClr val="accent1"/>
+          </a:lnRef>
+          <a:fillRef idx="3">
+            <a:schemeClr val="accent1"/>
+          </a:fillRef>
+          <a:effectRef idx="2">
+            <a:schemeClr val="accent1"/>
+          </a:effectRef>
+          <a:fontRef idx="minor">
+            <a:schemeClr val="lt1"/>
+          </a:fontRef>
+        </p:style>
+        <p:txBody>
+          <a:bodyPr rtlCol="0" anchor="ctr"/>
+          <a:lstStyle/>
+          <a:p>
+            <a:pPr algn="ctr"/>
+          </a:p>
+        </p:txBody>
+      </p:sp>
+      <p:sp>
+        <p:nvSpPr>
+          <p:cNvPr id="5" name="Rounded Rectangle 4"/>
+          <p:cNvSpPr/>
+          <p:nvPr/>
+        </p:nvSpPr>
+        <p:spPr>
+          <a:xfrm>
+            <a:off x="1371600" y="2377440"/>
+            <a:ext cx="9448495" cy="1828800"/>
+          </a:xfrm>
+          <a:prstGeom prst="roundRect">
+            <a:avLst/>
+          </a:prstGeom>
+          <a:solidFill>
+            <a:srgbClr val="F8FAFC"/>
+          </a:solidFill>
+          <a:ln w="19050">
+            <a:solidFill>
+              <a:srgbClr val="E2E8F0"/>
+            </a:solidFill>
+          </a:ln>
+        </p:spPr>
+        <p:style>
+          <a:lnRef idx="1">
+            <a:schemeClr val="accent1"/>
+          </a:lnRef>
+          <a:fillRef idx="3">
+            <a:schemeClr val="accent1"/>
+          </a:fillRef>
+          <a:effectRef idx="2">
+            <a:schemeClr val="accent1"/>
+          </a:effectRef>
+          <a:fontRef idx="minor">
+            <a:schemeClr val="lt1"/>
+          </a:fontRef>
+        </p:style>
+        <p:txBody>
+          <a:bodyPr rtlCol="0" anchor="ctr" wrap="square" tIns="320040"/>
           <a:lstStyle/>
           <a:p>
             <a:pPr algn="ctr">
               <a:defRPr sz="3600" b="1">
                 <a:solidFill>
-                  <a:srgbClr val="000000"/>
+                  <a:srgbClr val="1A365D"/>
                 </a:solidFill>
                 <a:latin typeface="Arial"/>
               </a:defRPr>
@@ -3194,7 +3295,7 @@
               </a:spcBef>
               <a:defRPr sz="1800">
                 <a:solidFill>
-                  <a:srgbClr val="282828"/>
+                  <a:srgbClr val="0D9488"/>
                 </a:solidFill>
                 <a:latin typeface="Arial"/>
               </a:defRPr>
@@ -3207,13 +3308,13 @@
       </p:sp>
       <p:sp>
         <p:nvSpPr>
-          <p:cNvPr id="4" name="TextBox 3"/>
+          <p:cNvPr id="6" name="TextBox 5"/>
           <p:cNvSpPr txBox="1"/>
           <p:nvPr/>
         </p:nvSpPr>
         <p:spPr>
           <a:xfrm>
-            <a:off x="914400" y="4846320"/>
+            <a:off x="1371600" y="4572000"/>
             <a:ext cx="4114800" cy="1645920"/>
           </a:xfrm>
           <a:prstGeom prst="rect">
@@ -3230,7 +3331,7 @@
             <a:pPr>
               <a:defRPr sz="1600" b="1">
                 <a:solidFill>
-                  <a:srgbClr val="B40000"/>
+                  <a:srgbClr val="B91C1C"/>
                 </a:solidFill>
                 <a:latin typeface="Arial"/>
               </a:defRPr>
@@ -3244,9 +3345,9 @@
               <a:spcBef>
                 <a:spcPts val="400"/>
               </a:spcBef>
-              <a:defRPr sz="1500">
-                <a:solidFill>
-                  <a:srgbClr val="000000"/>
+              <a:defRPr sz="1500" b="1">
+                <a:solidFill>
+                  <a:srgbClr val="1E293B"/>
                 </a:solidFill>
                 <a:latin typeface="Arial"/>
               </a:defRPr>
@@ -3255,17 +3356,30 @@
               <a:t>[Mentor Name]</a:t>
             </a:r>
           </a:p>
-        </p:txBody>
-      </p:sp>
-      <p:sp>
-        <p:nvSpPr>
-          <p:cNvPr id="5" name="TextBox 4"/>
+          <a:p>
+            <a:pPr>
+              <a:defRPr sz="1300">
+                <a:solidFill>
+                  <a:srgbClr val="64748B"/>
+                </a:solidFill>
+                <a:latin typeface="Arial"/>
+              </a:defRPr>
+            </a:pPr>
+            <a:r>
+              <a:t>Assistant Professor, Dept of ECE</a:t>
+            </a:r>
+          </a:p>
+        </p:txBody>
+      </p:sp>
+      <p:sp>
+        <p:nvSpPr>
+          <p:cNvPr id="7" name="TextBox 6"/>
           <p:cNvSpPr txBox="1"/>
           <p:nvPr/>
         </p:nvSpPr>
         <p:spPr>
           <a:xfrm>
-            <a:off x="7132320" y="4846320"/>
+            <a:off x="7132320" y="4572000"/>
             <a:ext cx="4114800" cy="1645920"/>
           </a:xfrm>
           <a:prstGeom prst="rect">
@@ -3282,7 +3396,7 @@
             <a:pPr>
               <a:defRPr sz="1600" b="1">
                 <a:solidFill>
-                  <a:srgbClr val="000000"/>
+                  <a:srgbClr val="1A365D"/>
                 </a:solidFill>
                 <a:latin typeface="Arial"/>
               </a:defRPr>
@@ -3294,49 +3408,49 @@
           <a:p>
             <a:pPr>
               <a:spcBef>
-                <a:spcPts val="300"/>
+                <a:spcPts val="400"/>
               </a:spcBef>
-              <a:defRPr sz="1500">
-                <a:solidFill>
-                  <a:srgbClr val="000000"/>
+              <a:defRPr sz="1400">
+                <a:solidFill>
+                  <a:srgbClr val="1E293B"/>
                 </a:solidFill>
                 <a:latin typeface="Arial"/>
               </a:defRPr>
             </a:pPr>
             <a:r>
-              <a:t>1. Prasoon (Roll No)</a:t>
+              <a:t>1. Prasoon (Roll No: ____________)</a:t>
             </a:r>
           </a:p>
           <a:p>
             <a:pPr>
               <a:spcBef>
-                <a:spcPts val="300"/>
+                <a:spcPts val="400"/>
               </a:spcBef>
-              <a:defRPr sz="1500">
-                <a:solidFill>
-                  <a:srgbClr val="000000"/>
+              <a:defRPr sz="1400">
+                <a:solidFill>
+                  <a:srgbClr val="1E293B"/>
                 </a:solidFill>
                 <a:latin typeface="Arial"/>
               </a:defRPr>
             </a:pPr>
             <a:r>
-              <a:t>2. Name (Roll No)</a:t>
+              <a:t>2. Name (Roll No: ____________)</a:t>
             </a:r>
           </a:p>
           <a:p>
             <a:pPr>
               <a:spcBef>
-                <a:spcPts val="300"/>
+                <a:spcPts val="400"/>
               </a:spcBef>
-              <a:defRPr sz="1500">
-                <a:solidFill>
-                  <a:srgbClr val="000000"/>
+              <a:defRPr sz="1400">
+                <a:solidFill>
+                  <a:srgbClr val="1E293B"/>
                 </a:solidFill>
                 <a:latin typeface="Arial"/>
               </a:defRPr>
             </a:pPr>
             <a:r>
-              <a:t>3. Name (Roll No)</a:t>
+              <a:t>3. Name (Roll No: ____________)</a:t>
             </a:r>
           </a:p>
         </p:txBody>
@@ -3361,36 +3475,71 @@
       <p:grpSpPr/>
       <p:sp>
         <p:nvSpPr>
-          <p:cNvPr id="2" name="TextBox 1"/>
-          <p:cNvSpPr txBox="1"/>
+          <p:cNvPr id="2" name="Rounded Rectangle 1"/>
+          <p:cNvSpPr/>
           <p:nvPr/>
         </p:nvSpPr>
         <p:spPr>
           <a:xfrm>
-            <a:off x="914400" y="2377440"/>
-            <a:ext cx="10362895" cy="2011680"/>
-          </a:xfrm>
-          <a:prstGeom prst="rect">
+            <a:off x="2286000" y="1645920"/>
+            <a:ext cx="7619695" cy="3474720"/>
+          </a:xfrm>
+          <a:prstGeom prst="roundRect">
             <a:avLst/>
           </a:prstGeom>
-          <a:noFill/>
-        </p:spPr>
-        <p:txBody>
-          <a:bodyPr wrap="square">
-            <a:spAutoFit/>
-          </a:bodyPr>
+          <a:solidFill>
+            <a:srgbClr val="F8FAFC"/>
+          </a:solidFill>
+          <a:ln w="19050">
+            <a:solidFill>
+              <a:srgbClr val="E2E8F0"/>
+            </a:solidFill>
+          </a:ln>
+        </p:spPr>
+        <p:style>
+          <a:lnRef idx="1">
+            <a:schemeClr val="accent1"/>
+          </a:lnRef>
+          <a:fillRef idx="3">
+            <a:schemeClr val="accent1"/>
+          </a:fillRef>
+          <a:effectRef idx="2">
+            <a:schemeClr val="accent1"/>
+          </a:effectRef>
+          <a:fontRef idx="minor">
+            <a:schemeClr val="lt1"/>
+          </a:fontRef>
+        </p:style>
+        <p:txBody>
+          <a:bodyPr rtlCol="0" anchor="ctr" wrap="square" tIns="731520"/>
           <a:lstStyle/>
           <a:p>
             <a:pPr algn="ctr">
               <a:defRPr sz="5600" b="1">
                 <a:solidFill>
-                  <a:srgbClr val="788CA0"/>
+                  <a:srgbClr val="1A365D"/>
                 </a:solidFill>
                 <a:latin typeface="Arial"/>
               </a:defRPr>
             </a:pPr>
             <a:r>
               <a:t>THANK YOU</a:t>
+            </a:r>
+          </a:p>
+          <a:p>
+            <a:pPr algn="ctr">
+              <a:spcBef>
+                <a:spcPts val="1200"/>
+              </a:spcBef>
+              <a:defRPr sz="2000" b="1">
+                <a:solidFill>
+                  <a:srgbClr val="0D9488"/>
+                </a:solidFill>
+                <a:latin typeface="Arial"/>
+              </a:defRPr>
+            </a:pPr>
+            <a:r>
+              <a:t>Questions &amp; Answers</a:t>
             </a:r>
           </a:p>
         </p:txBody>
@@ -3415,14 +3564,57 @@
       <p:grpSpPr/>
       <p:sp>
         <p:nvSpPr>
-          <p:cNvPr id="2" name="TextBox 1"/>
+          <p:cNvPr id="2" name="Rectangle 1"/>
+          <p:cNvSpPr/>
+          <p:nvPr/>
+        </p:nvSpPr>
+        <p:spPr>
+          <a:xfrm>
+            <a:off x="0" y="0"/>
+            <a:ext cx="12191695" cy="73152"/>
+          </a:xfrm>
+          <a:prstGeom prst="rect">
+            <a:avLst/>
+          </a:prstGeom>
+          <a:solidFill>
+            <a:srgbClr val="1A365D"/>
+          </a:solidFill>
+          <a:ln>
+            <a:noFill/>
+          </a:ln>
+        </p:spPr>
+        <p:style>
+          <a:lnRef idx="1">
+            <a:schemeClr val="accent1"/>
+          </a:lnRef>
+          <a:fillRef idx="3">
+            <a:schemeClr val="accent1"/>
+          </a:fillRef>
+          <a:effectRef idx="2">
+            <a:schemeClr val="accent1"/>
+          </a:effectRef>
+          <a:fontRef idx="minor">
+            <a:schemeClr val="lt1"/>
+          </a:fontRef>
+        </p:style>
+        <p:txBody>
+          <a:bodyPr rtlCol="0" anchor="ctr"/>
+          <a:lstStyle/>
+          <a:p>
+            <a:pPr algn="ctr"/>
+          </a:p>
+        </p:txBody>
+      </p:sp>
+      <p:sp>
+        <p:nvSpPr>
+          <p:cNvPr id="3" name="TextBox 2"/>
           <p:cNvSpPr txBox="1"/>
           <p:nvPr/>
         </p:nvSpPr>
         <p:spPr>
           <a:xfrm>
-            <a:off x="914400" y="548640"/>
-            <a:ext cx="10362895" cy="914400"/>
+            <a:off x="914400" y="502920"/>
+            <a:ext cx="10362895" cy="777240"/>
           </a:xfrm>
           <a:prstGeom prst="rect">
             <a:avLst/>
@@ -3438,7 +3630,7 @@
             <a:pPr algn="ctr">
               <a:defRPr sz="2800" b="1">
                 <a:solidFill>
-                  <a:srgbClr val="000000"/>
+                  <a:srgbClr val="1A365D"/>
                 </a:solidFill>
                 <a:latin typeface="Arial"/>
               </a:defRPr>
@@ -3451,119 +3643,469 @@
       </p:sp>
       <p:sp>
         <p:nvSpPr>
-          <p:cNvPr id="3" name="TextBox 2"/>
-          <p:cNvSpPr txBox="1"/>
+          <p:cNvPr id="4" name="Rectangle 3"/>
+          <p:cNvSpPr/>
           <p:nvPr/>
         </p:nvSpPr>
         <p:spPr>
           <a:xfrm>
-            <a:off x="1371600" y="1828800"/>
-            <a:ext cx="9144000" cy="4389120"/>
+            <a:off x="5180990" y="1325880"/>
+            <a:ext cx="1828800" cy="36576"/>
           </a:xfrm>
           <a:prstGeom prst="rect">
             <a:avLst/>
           </a:prstGeom>
-          <a:noFill/>
-        </p:spPr>
-        <p:txBody>
-          <a:bodyPr wrap="square">
-            <a:spAutoFit/>
-          </a:bodyPr>
-          <a:lstStyle/>
+          <a:solidFill>
+            <a:srgbClr val="0D9488"/>
+          </a:solidFill>
+          <a:ln>
+            <a:noFill/>
+          </a:ln>
+        </p:spPr>
+        <p:style>
+          <a:lnRef idx="1">
+            <a:schemeClr val="accent1"/>
+          </a:lnRef>
+          <a:fillRef idx="3">
+            <a:schemeClr val="accent1"/>
+          </a:fillRef>
+          <a:effectRef idx="2">
+            <a:schemeClr val="accent1"/>
+          </a:effectRef>
+          <a:fontRef idx="minor">
+            <a:schemeClr val="lt1"/>
+          </a:fontRef>
+        </p:style>
+        <p:txBody>
+          <a:bodyPr rtlCol="0" anchor="ctr"/>
+          <a:lstStyle/>
+          <a:p>
+            <a:pPr algn="ctr"/>
+          </a:p>
+        </p:txBody>
+      </p:sp>
+      <p:sp>
+        <p:nvSpPr>
+          <p:cNvPr id="5" name="Rounded Rectangle 4"/>
+          <p:cNvSpPr/>
+          <p:nvPr/>
+        </p:nvSpPr>
+        <p:spPr>
+          <a:xfrm>
+            <a:off x="1280160" y="1737360"/>
+            <a:ext cx="4663440" cy="1188720"/>
+          </a:xfrm>
+          <a:prstGeom prst="roundRect">
+            <a:avLst/>
+          </a:prstGeom>
+          <a:solidFill>
+            <a:srgbClr val="F8FAFC"/>
+          </a:solidFill>
+          <a:ln w="12700">
+            <a:solidFill>
+              <a:srgbClr val="E2E8F0"/>
+            </a:solidFill>
+          </a:ln>
+        </p:spPr>
+        <p:style>
+          <a:lnRef idx="1">
+            <a:schemeClr val="accent1"/>
+          </a:lnRef>
+          <a:fillRef idx="3">
+            <a:schemeClr val="accent1"/>
+          </a:fillRef>
+          <a:effectRef idx="2">
+            <a:schemeClr val="accent1"/>
+          </a:effectRef>
+          <a:fontRef idx="minor">
+            <a:schemeClr val="lt1"/>
+          </a:fontRef>
+        </p:style>
+        <p:txBody>
+          <a:bodyPr rtlCol="0" anchor="ctr" wrap="square" lIns="274320" tIns="182880"/>
+          <a:lstStyle/>
+          <a:p>
+            <a:pPr algn="ctr">
+              <a:defRPr sz="1800" b="1">
+                <a:solidFill>
+                  <a:srgbClr val="1A365D"/>
+                </a:solidFill>
+                <a:latin typeface="Arial"/>
+              </a:defRPr>
+            </a:pPr>
+            <a:r>
+              <a:t>❖  Introduction</a:t>
+            </a:r>
+          </a:p>
           <a:p>
             <a:pPr>
               <a:spcBef>
-                <a:spcPts val="2200"/>
+                <a:spcPts val="400"/>
               </a:spcBef>
-              <a:defRPr sz="2000" b="1">
-                <a:solidFill>
-                  <a:srgbClr val="000000"/>
+              <a:defRPr sz="1200">
+                <a:solidFill>
+                  <a:srgbClr val="64748B"/>
                 </a:solidFill>
                 <a:latin typeface="Arial"/>
               </a:defRPr>
             </a:pPr>
             <a:r>
-              <a:t>❖  Introduction</a:t>
+              <a:t>Why weather monitoring matters and how IoT helps.</a:t>
+            </a:r>
+          </a:p>
+        </p:txBody>
+      </p:sp>
+      <p:sp>
+        <p:nvSpPr>
+          <p:cNvPr id="6" name="Rounded Rectangle 5"/>
+          <p:cNvSpPr/>
+          <p:nvPr/>
+        </p:nvSpPr>
+        <p:spPr>
+          <a:xfrm>
+            <a:off x="6217920" y="1737360"/>
+            <a:ext cx="4663440" cy="1188720"/>
+          </a:xfrm>
+          <a:prstGeom prst="roundRect">
+            <a:avLst/>
+          </a:prstGeom>
+          <a:solidFill>
+            <a:srgbClr val="F8FAFC"/>
+          </a:solidFill>
+          <a:ln w="12700">
+            <a:solidFill>
+              <a:srgbClr val="E2E8F0"/>
+            </a:solidFill>
+          </a:ln>
+        </p:spPr>
+        <p:style>
+          <a:lnRef idx="1">
+            <a:schemeClr val="accent1"/>
+          </a:lnRef>
+          <a:fillRef idx="3">
+            <a:schemeClr val="accent1"/>
+          </a:fillRef>
+          <a:effectRef idx="2">
+            <a:schemeClr val="accent1"/>
+          </a:effectRef>
+          <a:fontRef idx="minor">
+            <a:schemeClr val="lt1"/>
+          </a:fontRef>
+        </p:style>
+        <p:txBody>
+          <a:bodyPr rtlCol="0" anchor="ctr" wrap="square" lIns="274320" tIns="182880"/>
+          <a:lstStyle/>
+          <a:p>
+            <a:pPr algn="ctr">
+              <a:defRPr sz="1800" b="1">
+                <a:solidFill>
+                  <a:srgbClr val="1A365D"/>
+                </a:solidFill>
+                <a:latin typeface="Arial"/>
+              </a:defRPr>
+            </a:pPr>
+            <a:r>
+              <a:t>❖  Motivation</a:t>
             </a:r>
           </a:p>
           <a:p>
             <a:pPr>
               <a:spcBef>
-                <a:spcPts val="2200"/>
+                <a:spcPts val="400"/>
               </a:spcBef>
-              <a:defRPr sz="2000" b="1">
-                <a:solidFill>
-                  <a:srgbClr val="000000"/>
+              <a:defRPr sz="1200">
+                <a:solidFill>
+                  <a:srgbClr val="64748B"/>
                 </a:solidFill>
                 <a:latin typeface="Arial"/>
               </a:defRPr>
             </a:pPr>
             <a:r>
-              <a:t>❖  Motivation</a:t>
+              <a:t>Problems with old stations and the need for local data.</a:t>
+            </a:r>
+          </a:p>
+        </p:txBody>
+      </p:sp>
+      <p:sp>
+        <p:nvSpPr>
+          <p:cNvPr id="7" name="Rounded Rectangle 6"/>
+          <p:cNvSpPr/>
+          <p:nvPr/>
+        </p:nvSpPr>
+        <p:spPr>
+          <a:xfrm>
+            <a:off x="1280160" y="3154680"/>
+            <a:ext cx="4663440" cy="1188720"/>
+          </a:xfrm>
+          <a:prstGeom prst="roundRect">
+            <a:avLst/>
+          </a:prstGeom>
+          <a:solidFill>
+            <a:srgbClr val="F8FAFC"/>
+          </a:solidFill>
+          <a:ln w="12700">
+            <a:solidFill>
+              <a:srgbClr val="E2E8F0"/>
+            </a:solidFill>
+          </a:ln>
+        </p:spPr>
+        <p:style>
+          <a:lnRef idx="1">
+            <a:schemeClr val="accent1"/>
+          </a:lnRef>
+          <a:fillRef idx="3">
+            <a:schemeClr val="accent1"/>
+          </a:fillRef>
+          <a:effectRef idx="2">
+            <a:schemeClr val="accent1"/>
+          </a:effectRef>
+          <a:fontRef idx="minor">
+            <a:schemeClr val="lt1"/>
+          </a:fontRef>
+        </p:style>
+        <p:txBody>
+          <a:bodyPr rtlCol="0" anchor="ctr" wrap="square" lIns="274320" tIns="182880"/>
+          <a:lstStyle/>
+          <a:p>
+            <a:pPr algn="ctr">
+              <a:defRPr sz="1800" b="1">
+                <a:solidFill>
+                  <a:srgbClr val="1A365D"/>
+                </a:solidFill>
+                <a:latin typeface="Arial"/>
+              </a:defRPr>
+            </a:pPr>
+            <a:r>
+              <a:t>❖  Objectives</a:t>
             </a:r>
           </a:p>
           <a:p>
             <a:pPr>
               <a:spcBef>
-                <a:spcPts val="2200"/>
+                <a:spcPts val="400"/>
               </a:spcBef>
-              <a:defRPr sz="2000" b="1">
-                <a:solidFill>
-                  <a:srgbClr val="000000"/>
+              <a:defRPr sz="1200">
+                <a:solidFill>
+                  <a:srgbClr val="64748B"/>
                 </a:solidFill>
                 <a:latin typeface="Arial"/>
               </a:defRPr>
             </a:pPr>
             <a:r>
-              <a:t>❖  Objectives</a:t>
+              <a:t>What we wanted to build and achieve in this project.</a:t>
+            </a:r>
+          </a:p>
+        </p:txBody>
+      </p:sp>
+      <p:sp>
+        <p:nvSpPr>
+          <p:cNvPr id="8" name="Rounded Rectangle 7"/>
+          <p:cNvSpPr/>
+          <p:nvPr/>
+        </p:nvSpPr>
+        <p:spPr>
+          <a:xfrm>
+            <a:off x="6217920" y="3154680"/>
+            <a:ext cx="4663440" cy="1188720"/>
+          </a:xfrm>
+          <a:prstGeom prst="roundRect">
+            <a:avLst/>
+          </a:prstGeom>
+          <a:solidFill>
+            <a:srgbClr val="F8FAFC"/>
+          </a:solidFill>
+          <a:ln w="12700">
+            <a:solidFill>
+              <a:srgbClr val="E2E8F0"/>
+            </a:solidFill>
+          </a:ln>
+        </p:spPr>
+        <p:style>
+          <a:lnRef idx="1">
+            <a:schemeClr val="accent1"/>
+          </a:lnRef>
+          <a:fillRef idx="3">
+            <a:schemeClr val="accent1"/>
+          </a:fillRef>
+          <a:effectRef idx="2">
+            <a:schemeClr val="accent1"/>
+          </a:effectRef>
+          <a:fontRef idx="minor">
+            <a:schemeClr val="lt1"/>
+          </a:fontRef>
+        </p:style>
+        <p:txBody>
+          <a:bodyPr rtlCol="0" anchor="ctr" wrap="square" lIns="274320" tIns="182880"/>
+          <a:lstStyle/>
+          <a:p>
+            <a:pPr algn="ctr">
+              <a:defRPr sz="1800" b="1">
+                <a:solidFill>
+                  <a:srgbClr val="1A365D"/>
+                </a:solidFill>
+                <a:latin typeface="Arial"/>
+              </a:defRPr>
+            </a:pPr>
+            <a:r>
+              <a:t>❖  Description</a:t>
             </a:r>
           </a:p>
           <a:p>
             <a:pPr>
               <a:spcBef>
-                <a:spcPts val="2200"/>
+                <a:spcPts val="400"/>
               </a:spcBef>
-              <a:defRPr sz="2000" b="1">
-                <a:solidFill>
-                  <a:srgbClr val="000000"/>
+              <a:defRPr sz="1200">
+                <a:solidFill>
+                  <a:srgbClr val="64748B"/>
                 </a:solidFill>
                 <a:latin typeface="Arial"/>
               </a:defRPr>
             </a:pPr>
             <a:r>
-              <a:t>❖  Description</a:t>
+              <a:t>Hardware parts, circuit connections, and working flow.</a:t>
+            </a:r>
+          </a:p>
+        </p:txBody>
+      </p:sp>
+      <p:sp>
+        <p:nvSpPr>
+          <p:cNvPr id="9" name="Rounded Rectangle 8"/>
+          <p:cNvSpPr/>
+          <p:nvPr/>
+        </p:nvSpPr>
+        <p:spPr>
+          <a:xfrm>
+            <a:off x="1280160" y="4572000"/>
+            <a:ext cx="4663440" cy="1188720"/>
+          </a:xfrm>
+          <a:prstGeom prst="roundRect">
+            <a:avLst/>
+          </a:prstGeom>
+          <a:solidFill>
+            <a:srgbClr val="F8FAFC"/>
+          </a:solidFill>
+          <a:ln w="12700">
+            <a:solidFill>
+              <a:srgbClr val="E2E8F0"/>
+            </a:solidFill>
+          </a:ln>
+        </p:spPr>
+        <p:style>
+          <a:lnRef idx="1">
+            <a:schemeClr val="accent1"/>
+          </a:lnRef>
+          <a:fillRef idx="3">
+            <a:schemeClr val="accent1"/>
+          </a:fillRef>
+          <a:effectRef idx="2">
+            <a:schemeClr val="accent1"/>
+          </a:effectRef>
+          <a:fontRef idx="minor">
+            <a:schemeClr val="lt1"/>
+          </a:fontRef>
+        </p:style>
+        <p:txBody>
+          <a:bodyPr rtlCol="0" anchor="ctr" wrap="square" lIns="274320" tIns="182880"/>
+          <a:lstStyle/>
+          <a:p>
+            <a:pPr algn="ctr">
+              <a:defRPr sz="1800" b="1">
+                <a:solidFill>
+                  <a:srgbClr val="1A365D"/>
+                </a:solidFill>
+                <a:latin typeface="Arial"/>
+              </a:defRPr>
+            </a:pPr>
+            <a:r>
+              <a:t>❖  Conclusion</a:t>
             </a:r>
           </a:p>
           <a:p>
             <a:pPr>
               <a:spcBef>
-                <a:spcPts val="2200"/>
+                <a:spcPts val="400"/>
               </a:spcBef>
-              <a:defRPr sz="2000" b="1">
-                <a:solidFill>
-                  <a:srgbClr val="000000"/>
+              <a:defRPr sz="1200">
+                <a:solidFill>
+                  <a:srgbClr val="64748B"/>
                 </a:solidFill>
                 <a:latin typeface="Arial"/>
               </a:defRPr>
             </a:pPr>
             <a:r>
-              <a:t>❖  Conclusion</a:t>
+              <a:t>What we achieved and ideas for future improvements.</a:t>
+            </a:r>
+          </a:p>
+        </p:txBody>
+      </p:sp>
+      <p:sp>
+        <p:nvSpPr>
+          <p:cNvPr id="10" name="Rounded Rectangle 9"/>
+          <p:cNvSpPr/>
+          <p:nvPr/>
+        </p:nvSpPr>
+        <p:spPr>
+          <a:xfrm>
+            <a:off x="6217920" y="4572000"/>
+            <a:ext cx="4663440" cy="1188720"/>
+          </a:xfrm>
+          <a:prstGeom prst="roundRect">
+            <a:avLst/>
+          </a:prstGeom>
+          <a:solidFill>
+            <a:srgbClr val="F8FAFC"/>
+          </a:solidFill>
+          <a:ln w="12700">
+            <a:solidFill>
+              <a:srgbClr val="E2E8F0"/>
+            </a:solidFill>
+          </a:ln>
+        </p:spPr>
+        <p:style>
+          <a:lnRef idx="1">
+            <a:schemeClr val="accent1"/>
+          </a:lnRef>
+          <a:fillRef idx="3">
+            <a:schemeClr val="accent1"/>
+          </a:fillRef>
+          <a:effectRef idx="2">
+            <a:schemeClr val="accent1"/>
+          </a:effectRef>
+          <a:fontRef idx="minor">
+            <a:schemeClr val="lt1"/>
+          </a:fontRef>
+        </p:style>
+        <p:txBody>
+          <a:bodyPr rtlCol="0" anchor="ctr" wrap="square" lIns="274320" tIns="182880"/>
+          <a:lstStyle/>
+          <a:p>
+            <a:pPr algn="ctr">
+              <a:defRPr sz="1800" b="1">
+                <a:solidFill>
+                  <a:srgbClr val="1A365D"/>
+                </a:solidFill>
+                <a:latin typeface="Arial"/>
+              </a:defRPr>
+            </a:pPr>
+            <a:r>
+              <a:t>❖  References</a:t>
             </a:r>
           </a:p>
           <a:p>
             <a:pPr>
               <a:spcBef>
-                <a:spcPts val="2200"/>
+                <a:spcPts val="400"/>
               </a:spcBef>
-              <a:defRPr sz="2000" b="1">
-                <a:solidFill>
-                  <a:srgbClr val="000000"/>
+              <a:defRPr sz="1200">
+                <a:solidFill>
+                  <a:srgbClr val="64748B"/>
                 </a:solidFill>
                 <a:latin typeface="Arial"/>
               </a:defRPr>
             </a:pPr>
             <a:r>
-              <a:t>❖  References</a:t>
+              <a:t>Research papers, books, and component datasheets.</a:t>
             </a:r>
           </a:p>
         </p:txBody>
@@ -3588,14 +4130,57 @@
       <p:grpSpPr/>
       <p:sp>
         <p:nvSpPr>
-          <p:cNvPr id="2" name="TextBox 1"/>
+          <p:cNvPr id="2" name="Rectangle 1"/>
+          <p:cNvSpPr/>
+          <p:nvPr/>
+        </p:nvSpPr>
+        <p:spPr>
+          <a:xfrm>
+            <a:off x="0" y="0"/>
+            <a:ext cx="12191695" cy="73152"/>
+          </a:xfrm>
+          <a:prstGeom prst="rect">
+            <a:avLst/>
+          </a:prstGeom>
+          <a:solidFill>
+            <a:srgbClr val="1A365D"/>
+          </a:solidFill>
+          <a:ln>
+            <a:noFill/>
+          </a:ln>
+        </p:spPr>
+        <p:style>
+          <a:lnRef idx="1">
+            <a:schemeClr val="accent1"/>
+          </a:lnRef>
+          <a:fillRef idx="3">
+            <a:schemeClr val="accent1"/>
+          </a:fillRef>
+          <a:effectRef idx="2">
+            <a:schemeClr val="accent1"/>
+          </a:effectRef>
+          <a:fontRef idx="minor">
+            <a:schemeClr val="lt1"/>
+          </a:fontRef>
+        </p:style>
+        <p:txBody>
+          <a:bodyPr rtlCol="0" anchor="ctr"/>
+          <a:lstStyle/>
+          <a:p>
+            <a:pPr algn="ctr"/>
+          </a:p>
+        </p:txBody>
+      </p:sp>
+      <p:sp>
+        <p:nvSpPr>
+          <p:cNvPr id="3" name="TextBox 2"/>
           <p:cNvSpPr txBox="1"/>
           <p:nvPr/>
         </p:nvSpPr>
         <p:spPr>
           <a:xfrm>
-            <a:off x="914400" y="548640"/>
-            <a:ext cx="10362895" cy="914400"/>
+            <a:off x="914400" y="502920"/>
+            <a:ext cx="10362895" cy="777240"/>
           </a:xfrm>
           <a:prstGeom prst="rect">
             <a:avLst/>
@@ -3611,7 +4196,7 @@
             <a:pPr algn="ctr">
               <a:defRPr sz="2800" b="1">
                 <a:solidFill>
-                  <a:srgbClr val="000000"/>
+                  <a:srgbClr val="1A365D"/>
                 </a:solidFill>
                 <a:latin typeface="Arial"/>
               </a:defRPr>
@@ -3624,103 +4209,318 @@
       </p:sp>
       <p:sp>
         <p:nvSpPr>
-          <p:cNvPr id="3" name="TextBox 2"/>
-          <p:cNvSpPr txBox="1"/>
+          <p:cNvPr id="4" name="Rectangle 3"/>
+          <p:cNvSpPr/>
           <p:nvPr/>
         </p:nvSpPr>
         <p:spPr>
           <a:xfrm>
-            <a:off x="1097280" y="1645920"/>
-            <a:ext cx="10058400" cy="4754880"/>
+            <a:off x="5180990" y="1325880"/>
+            <a:ext cx="1828800" cy="36576"/>
           </a:xfrm>
           <a:prstGeom prst="rect">
             <a:avLst/>
           </a:prstGeom>
-          <a:noFill/>
-        </p:spPr>
-        <p:txBody>
-          <a:bodyPr wrap="square">
-            <a:spAutoFit/>
-          </a:bodyPr>
-          <a:lstStyle/>
-          <a:p>
-            <a:pPr>
-              <a:spcBef>
-                <a:spcPts val="2000"/>
-              </a:spcBef>
-              <a:defRPr sz="1700">
-                <a:solidFill>
-                  <a:srgbClr val="000000"/>
+          <a:solidFill>
+            <a:srgbClr val="0D9488"/>
+          </a:solidFill>
+          <a:ln>
+            <a:noFill/>
+          </a:ln>
+        </p:spPr>
+        <p:style>
+          <a:lnRef idx="1">
+            <a:schemeClr val="accent1"/>
+          </a:lnRef>
+          <a:fillRef idx="3">
+            <a:schemeClr val="accent1"/>
+          </a:fillRef>
+          <a:effectRef idx="2">
+            <a:schemeClr val="accent1"/>
+          </a:effectRef>
+          <a:fontRef idx="minor">
+            <a:schemeClr val="lt1"/>
+          </a:fontRef>
+        </p:style>
+        <p:txBody>
+          <a:bodyPr rtlCol="0" anchor="ctr"/>
+          <a:lstStyle/>
+          <a:p>
+            <a:pPr algn="ctr"/>
+          </a:p>
+        </p:txBody>
+      </p:sp>
+      <p:sp>
+        <p:nvSpPr>
+          <p:cNvPr id="5" name="Rounded Rectangle 4"/>
+          <p:cNvSpPr/>
+          <p:nvPr/>
+        </p:nvSpPr>
+        <p:spPr>
+          <a:xfrm>
+            <a:off x="1097280" y="1691640"/>
+            <a:ext cx="9997135" cy="777240"/>
+          </a:xfrm>
+          <a:prstGeom prst="roundRect">
+            <a:avLst/>
+          </a:prstGeom>
+          <a:solidFill>
+            <a:srgbClr val="F8FAFC"/>
+          </a:solidFill>
+          <a:ln w="12700">
+            <a:solidFill>
+              <a:srgbClr val="E2E8F0"/>
+            </a:solidFill>
+          </a:ln>
+        </p:spPr>
+        <p:style>
+          <a:lnRef idx="1">
+            <a:schemeClr val="accent1"/>
+          </a:lnRef>
+          <a:fillRef idx="3">
+            <a:schemeClr val="accent1"/>
+          </a:fillRef>
+          <a:effectRef idx="2">
+            <a:schemeClr val="accent1"/>
+          </a:effectRef>
+          <a:fontRef idx="minor">
+            <a:schemeClr val="lt1"/>
+          </a:fontRef>
+        </p:style>
+        <p:txBody>
+          <a:bodyPr rtlCol="0" anchor="ctr" wrap="square" lIns="274320" tIns="164592"/>
+          <a:lstStyle/>
+          <a:p>
+            <a:pPr algn="ctr">
+              <a:defRPr sz="1500">
+                <a:solidFill>
+                  <a:srgbClr val="1E293B"/>
                 </a:solidFill>
                 <a:latin typeface="Arial"/>
               </a:defRPr>
             </a:pPr>
             <a:r>
-              <a:t>•  Weather conditions like temperature and humidity affect our daily lives, health, and work.</a:t>
-            </a:r>
-          </a:p>
-          <a:p>
-            <a:pPr>
-              <a:spcBef>
-                <a:spcPts val="2000"/>
-              </a:spcBef>
-              <a:defRPr sz="1700">
-                <a:solidFill>
-                  <a:srgbClr val="000000"/>
+              <a:t>•   Weather conditions like temperature and humidity affect our daily lives, health, and work.</a:t>
+            </a:r>
+          </a:p>
+        </p:txBody>
+      </p:sp>
+      <p:sp>
+        <p:nvSpPr>
+          <p:cNvPr id="6" name="Rounded Rectangle 5"/>
+          <p:cNvSpPr/>
+          <p:nvPr/>
+        </p:nvSpPr>
+        <p:spPr>
+          <a:xfrm>
+            <a:off x="1097280" y="2606040"/>
+            <a:ext cx="9997135" cy="777240"/>
+          </a:xfrm>
+          <a:prstGeom prst="roundRect">
+            <a:avLst/>
+          </a:prstGeom>
+          <a:solidFill>
+            <a:srgbClr val="F8FAFC"/>
+          </a:solidFill>
+          <a:ln w="12700">
+            <a:solidFill>
+              <a:srgbClr val="E2E8F0"/>
+            </a:solidFill>
+          </a:ln>
+        </p:spPr>
+        <p:style>
+          <a:lnRef idx="1">
+            <a:schemeClr val="accent1"/>
+          </a:lnRef>
+          <a:fillRef idx="3">
+            <a:schemeClr val="accent1"/>
+          </a:fillRef>
+          <a:effectRef idx="2">
+            <a:schemeClr val="accent1"/>
+          </a:effectRef>
+          <a:fontRef idx="minor">
+            <a:schemeClr val="lt1"/>
+          </a:fontRef>
+        </p:style>
+        <p:txBody>
+          <a:bodyPr rtlCol="0" anchor="ctr" wrap="square" lIns="274320" tIns="164592"/>
+          <a:lstStyle/>
+          <a:p>
+            <a:pPr algn="ctr">
+              <a:defRPr sz="1500">
+                <a:solidFill>
+                  <a:srgbClr val="1E293B"/>
                 </a:solidFill>
                 <a:latin typeface="Arial"/>
               </a:defRPr>
             </a:pPr>
             <a:r>
-              <a:t>•  Traditional weather stations are big, expensive, and cannot be checked easily from home.</a:t>
-            </a:r>
-          </a:p>
-          <a:p>
-            <a:pPr>
-              <a:spcBef>
-                <a:spcPts val="2000"/>
-              </a:spcBef>
-              <a:defRPr sz="1700">
-                <a:solidFill>
-                  <a:srgbClr val="000000"/>
+              <a:t>•   Traditional weather stations are big, expensive, and cannot be checked easily from home.</a:t>
+            </a:r>
+          </a:p>
+        </p:txBody>
+      </p:sp>
+      <p:sp>
+        <p:nvSpPr>
+          <p:cNvPr id="7" name="Rounded Rectangle 6"/>
+          <p:cNvSpPr/>
+          <p:nvPr/>
+        </p:nvSpPr>
+        <p:spPr>
+          <a:xfrm>
+            <a:off x="1097280" y="3520440"/>
+            <a:ext cx="9997135" cy="777240"/>
+          </a:xfrm>
+          <a:prstGeom prst="roundRect">
+            <a:avLst/>
+          </a:prstGeom>
+          <a:solidFill>
+            <a:srgbClr val="F8FAFC"/>
+          </a:solidFill>
+          <a:ln w="12700">
+            <a:solidFill>
+              <a:srgbClr val="E2E8F0"/>
+            </a:solidFill>
+          </a:ln>
+        </p:spPr>
+        <p:style>
+          <a:lnRef idx="1">
+            <a:schemeClr val="accent1"/>
+          </a:lnRef>
+          <a:fillRef idx="3">
+            <a:schemeClr val="accent1"/>
+          </a:fillRef>
+          <a:effectRef idx="2">
+            <a:schemeClr val="accent1"/>
+          </a:effectRef>
+          <a:fontRef idx="minor">
+            <a:schemeClr val="lt1"/>
+          </a:fontRef>
+        </p:style>
+        <p:txBody>
+          <a:bodyPr rtlCol="0" anchor="ctr" wrap="square" lIns="274320" tIns="164592"/>
+          <a:lstStyle/>
+          <a:p>
+            <a:pPr algn="ctr">
+              <a:defRPr sz="1500">
+                <a:solidFill>
+                  <a:srgbClr val="1E293B"/>
                 </a:solidFill>
                 <a:latin typeface="Arial"/>
               </a:defRPr>
             </a:pPr>
             <a:r>
-              <a:t>•  Internet of Things (IoT) allows us to connect small sensors to the internet to collect weather data automatically.</a:t>
-            </a:r>
-          </a:p>
-          <a:p>
-            <a:pPr>
-              <a:spcBef>
-                <a:spcPts val="2000"/>
-              </a:spcBef>
-              <a:defRPr sz="1700">
-                <a:solidFill>
-                  <a:srgbClr val="000000"/>
+              <a:t>•   Internet of Things (IoT) allows us to connect small sensors to the internet to collect weather data automatically.</a:t>
+            </a:r>
+          </a:p>
+        </p:txBody>
+      </p:sp>
+      <p:sp>
+        <p:nvSpPr>
+          <p:cNvPr id="8" name="Rounded Rectangle 7"/>
+          <p:cNvSpPr/>
+          <p:nvPr/>
+        </p:nvSpPr>
+        <p:spPr>
+          <a:xfrm>
+            <a:off x="1097280" y="4434840"/>
+            <a:ext cx="9997135" cy="777240"/>
+          </a:xfrm>
+          <a:prstGeom prst="roundRect">
+            <a:avLst/>
+          </a:prstGeom>
+          <a:solidFill>
+            <a:srgbClr val="F8FAFC"/>
+          </a:solidFill>
+          <a:ln w="12700">
+            <a:solidFill>
+              <a:srgbClr val="E2E8F0"/>
+            </a:solidFill>
+          </a:ln>
+        </p:spPr>
+        <p:style>
+          <a:lnRef idx="1">
+            <a:schemeClr val="accent1"/>
+          </a:lnRef>
+          <a:fillRef idx="3">
+            <a:schemeClr val="accent1"/>
+          </a:fillRef>
+          <a:effectRef idx="2">
+            <a:schemeClr val="accent1"/>
+          </a:effectRef>
+          <a:fontRef idx="minor">
+            <a:schemeClr val="lt1"/>
+          </a:fontRef>
+        </p:style>
+        <p:txBody>
+          <a:bodyPr rtlCol="0" anchor="ctr" wrap="square" lIns="274320" tIns="164592"/>
+          <a:lstStyle/>
+          <a:p>
+            <a:pPr algn="ctr">
+              <a:defRPr sz="1500">
+                <a:solidFill>
+                  <a:srgbClr val="1E293B"/>
                 </a:solidFill>
                 <a:latin typeface="Arial"/>
               </a:defRPr>
             </a:pPr>
             <a:r>
-              <a:t>•  In this project, we built a low-cost smart weather station using an ESP32 board and a DHT22 sensor.</a:t>
-            </a:r>
-          </a:p>
-          <a:p>
-            <a:pPr>
-              <a:spcBef>
-                <a:spcPts val="2000"/>
-              </a:spcBef>
-              <a:defRPr sz="1700">
-                <a:solidFill>
-                  <a:srgbClr val="000000"/>
+              <a:t>•   In this project, we built a low-cost smart weather station using an ESP32 board and a DHT22 sensor.</a:t>
+            </a:r>
+          </a:p>
+        </p:txBody>
+      </p:sp>
+      <p:sp>
+        <p:nvSpPr>
+          <p:cNvPr id="9" name="Rounded Rectangle 8"/>
+          <p:cNvSpPr/>
+          <p:nvPr/>
+        </p:nvSpPr>
+        <p:spPr>
+          <a:xfrm>
+            <a:off x="1097280" y="5349240"/>
+            <a:ext cx="9997135" cy="777240"/>
+          </a:xfrm>
+          <a:prstGeom prst="roundRect">
+            <a:avLst/>
+          </a:prstGeom>
+          <a:solidFill>
+            <a:srgbClr val="F8FAFC"/>
+          </a:solidFill>
+          <a:ln w="12700">
+            <a:solidFill>
+              <a:srgbClr val="E2E8F0"/>
+            </a:solidFill>
+          </a:ln>
+        </p:spPr>
+        <p:style>
+          <a:lnRef idx="1">
+            <a:schemeClr val="accent1"/>
+          </a:lnRef>
+          <a:fillRef idx="3">
+            <a:schemeClr val="accent1"/>
+          </a:fillRef>
+          <a:effectRef idx="2">
+            <a:schemeClr val="accent1"/>
+          </a:effectRef>
+          <a:fontRef idx="minor">
+            <a:schemeClr val="lt1"/>
+          </a:fontRef>
+        </p:style>
+        <p:txBody>
+          <a:bodyPr rtlCol="0" anchor="ctr" wrap="square" lIns="274320" tIns="164592"/>
+          <a:lstStyle/>
+          <a:p>
+            <a:pPr algn="ctr">
+              <a:defRPr sz="1500">
+                <a:solidFill>
+                  <a:srgbClr val="1E293B"/>
                 </a:solidFill>
                 <a:latin typeface="Arial"/>
               </a:defRPr>
             </a:pPr>
             <a:r>
-              <a:t>•  The system reads live temperature and humidity, shows them on a small screen, and sends the data to a website so anyone can view it anytime.</a:t>
+              <a:t>•   The system reads live temperature and humidity, shows them on a small screen, and sends the data to a website so anyone can view it anytime.</a:t>
             </a:r>
           </a:p>
         </p:txBody>
@@ -3745,14 +4545,57 @@
       <p:grpSpPr/>
       <p:sp>
         <p:nvSpPr>
-          <p:cNvPr id="2" name="TextBox 1"/>
+          <p:cNvPr id="2" name="Rectangle 1"/>
+          <p:cNvSpPr/>
+          <p:nvPr/>
+        </p:nvSpPr>
+        <p:spPr>
+          <a:xfrm>
+            <a:off x="0" y="0"/>
+            <a:ext cx="12191695" cy="73152"/>
+          </a:xfrm>
+          <a:prstGeom prst="rect">
+            <a:avLst/>
+          </a:prstGeom>
+          <a:solidFill>
+            <a:srgbClr val="1A365D"/>
+          </a:solidFill>
+          <a:ln>
+            <a:noFill/>
+          </a:ln>
+        </p:spPr>
+        <p:style>
+          <a:lnRef idx="1">
+            <a:schemeClr val="accent1"/>
+          </a:lnRef>
+          <a:fillRef idx="3">
+            <a:schemeClr val="accent1"/>
+          </a:fillRef>
+          <a:effectRef idx="2">
+            <a:schemeClr val="accent1"/>
+          </a:effectRef>
+          <a:fontRef idx="minor">
+            <a:schemeClr val="lt1"/>
+          </a:fontRef>
+        </p:style>
+        <p:txBody>
+          <a:bodyPr rtlCol="0" anchor="ctr"/>
+          <a:lstStyle/>
+          <a:p>
+            <a:pPr algn="ctr"/>
+          </a:p>
+        </p:txBody>
+      </p:sp>
+      <p:sp>
+        <p:nvSpPr>
+          <p:cNvPr id="3" name="TextBox 2"/>
           <p:cNvSpPr txBox="1"/>
           <p:nvPr/>
         </p:nvSpPr>
         <p:spPr>
           <a:xfrm>
-            <a:off x="914400" y="548640"/>
-            <a:ext cx="10362895" cy="914400"/>
+            <a:off x="914400" y="502920"/>
+            <a:ext cx="10362895" cy="777240"/>
           </a:xfrm>
           <a:prstGeom prst="rect">
             <a:avLst/>
@@ -3768,7 +4611,7 @@
             <a:pPr algn="ctr">
               <a:defRPr sz="2800" b="1">
                 <a:solidFill>
-                  <a:srgbClr val="000000"/>
+                  <a:srgbClr val="1A365D"/>
                 </a:solidFill>
                 <a:latin typeface="Arial"/>
               </a:defRPr>
@@ -3781,87 +4624,295 @@
       </p:sp>
       <p:sp>
         <p:nvSpPr>
-          <p:cNvPr id="3" name="TextBox 2"/>
-          <p:cNvSpPr txBox="1"/>
+          <p:cNvPr id="4" name="Rectangle 3"/>
+          <p:cNvSpPr/>
           <p:nvPr/>
         </p:nvSpPr>
         <p:spPr>
           <a:xfrm>
-            <a:off x="1097280" y="1645920"/>
-            <a:ext cx="10058400" cy="4754880"/>
+            <a:off x="5180990" y="1325880"/>
+            <a:ext cx="1828800" cy="36576"/>
           </a:xfrm>
           <a:prstGeom prst="rect">
             <a:avLst/>
           </a:prstGeom>
-          <a:noFill/>
-        </p:spPr>
-        <p:txBody>
-          <a:bodyPr wrap="square">
-            <a:spAutoFit/>
-          </a:bodyPr>
-          <a:lstStyle/>
-          <a:p>
-            <a:pPr>
-              <a:spcBef>
-                <a:spcPts val="2200"/>
-              </a:spcBef>
-              <a:defRPr sz="1700">
-                <a:solidFill>
-                  <a:srgbClr val="000000"/>
-                </a:solidFill>
-                <a:latin typeface="Arial"/>
-              </a:defRPr>
-            </a:pPr>
-            <a:r>
-              <a:t>•  Need for local weather data: City weather reports are taken far away (like airports) and do not show the exact weather in our room, office, or farm.</a:t>
-            </a:r>
-          </a:p>
-          <a:p>
-            <a:pPr>
-              <a:spcBef>
-                <a:spcPts val="2200"/>
-              </a:spcBef>
-              <a:defRPr sz="1700">
-                <a:solidFill>
-                  <a:srgbClr val="000000"/>
-                </a:solidFill>
-                <a:latin typeface="Arial"/>
-              </a:defRPr>
-            </a:pPr>
-            <a:r>
-              <a:t>•  Low cost: Commercial weather devices cost a lot of money, but this project can be made at a very low cost using simple parts.</a:t>
-            </a:r>
-          </a:p>
-          <a:p>
-            <a:pPr>
-              <a:spcBef>
-                <a:spcPts val="2200"/>
-              </a:spcBef>
-              <a:defRPr sz="1700">
-                <a:solidFill>
-                  <a:srgbClr val="000000"/>
-                </a:solidFill>
-                <a:latin typeface="Arial"/>
-              </a:defRPr>
-            </a:pPr>
-            <a:r>
-              <a:t>•  Real-time monitoring: Instead of writing down values by hand, the system updates automatically every few seconds.</a:t>
-            </a:r>
-          </a:p>
-          <a:p>
-            <a:pPr>
-              <a:spcBef>
-                <a:spcPts val="2200"/>
-              </a:spcBef>
-              <a:defRPr sz="1700">
-                <a:solidFill>
-                  <a:srgbClr val="000000"/>
-                </a:solidFill>
-                <a:latin typeface="Arial"/>
-              </a:defRPr>
-            </a:pPr>
-            <a:r>
-              <a:t>•  Access from anywhere: Anyone with a phone or computer can open our website and check the live weather and past 24-hour charts.</a:t>
+          <a:solidFill>
+            <a:srgbClr val="0D9488"/>
+          </a:solidFill>
+          <a:ln>
+            <a:noFill/>
+          </a:ln>
+        </p:spPr>
+        <p:style>
+          <a:lnRef idx="1">
+            <a:schemeClr val="accent1"/>
+          </a:lnRef>
+          <a:fillRef idx="3">
+            <a:schemeClr val="accent1"/>
+          </a:fillRef>
+          <a:effectRef idx="2">
+            <a:schemeClr val="accent1"/>
+          </a:effectRef>
+          <a:fontRef idx="minor">
+            <a:schemeClr val="lt1"/>
+          </a:fontRef>
+        </p:style>
+        <p:txBody>
+          <a:bodyPr rtlCol="0" anchor="ctr"/>
+          <a:lstStyle/>
+          <a:p>
+            <a:pPr algn="ctr"/>
+          </a:p>
+        </p:txBody>
+      </p:sp>
+      <p:sp>
+        <p:nvSpPr>
+          <p:cNvPr id="5" name="Rounded Rectangle 4"/>
+          <p:cNvSpPr/>
+          <p:nvPr/>
+        </p:nvSpPr>
+        <p:spPr>
+          <a:xfrm>
+            <a:off x="1097280" y="1737360"/>
+            <a:ext cx="9997135" cy="1005840"/>
+          </a:xfrm>
+          <a:prstGeom prst="roundRect">
+            <a:avLst/>
+          </a:prstGeom>
+          <a:solidFill>
+            <a:srgbClr val="F8FAFC"/>
+          </a:solidFill>
+          <a:ln w="12700">
+            <a:solidFill>
+              <a:srgbClr val="E2E8F0"/>
+            </a:solidFill>
+          </a:ln>
+        </p:spPr>
+        <p:style>
+          <a:lnRef idx="1">
+            <a:schemeClr val="accent1"/>
+          </a:lnRef>
+          <a:fillRef idx="3">
+            <a:schemeClr val="accent1"/>
+          </a:fillRef>
+          <a:effectRef idx="2">
+            <a:schemeClr val="accent1"/>
+          </a:effectRef>
+          <a:fontRef idx="minor">
+            <a:schemeClr val="lt1"/>
+          </a:fontRef>
+        </p:style>
+        <p:txBody>
+          <a:bodyPr rtlCol="0" anchor="ctr" wrap="square" lIns="274320" tIns="182880"/>
+          <a:lstStyle/>
+          <a:p>
+            <a:pPr algn="ctr"/>
+            <a:r>
+              <a:rPr b="1" sz="1600">
+                <a:solidFill>
+                  <a:srgbClr val="1A365D"/>
+                </a:solidFill>
+                <a:latin typeface="Arial"/>
+              </a:rPr>
+              <a:t>•   Need for local weather data:</a:t>
+            </a:r>
+            <a:r>
+              <a:rPr b="0" sz="1500">
+                <a:solidFill>
+                  <a:srgbClr val="1E293B"/>
+                </a:solidFill>
+                <a:latin typeface="Arial"/>
+              </a:rPr>
+              <a:t> City weather reports are taken far away (like airports) and do not show the exact weather in our room, office, or farm.</a:t>
+            </a:r>
+          </a:p>
+        </p:txBody>
+      </p:sp>
+      <p:sp>
+        <p:nvSpPr>
+          <p:cNvPr id="6" name="Rounded Rectangle 5"/>
+          <p:cNvSpPr/>
+          <p:nvPr/>
+        </p:nvSpPr>
+        <p:spPr>
+          <a:xfrm>
+            <a:off x="1097280" y="2880360"/>
+            <a:ext cx="9997135" cy="1005840"/>
+          </a:xfrm>
+          <a:prstGeom prst="roundRect">
+            <a:avLst/>
+          </a:prstGeom>
+          <a:solidFill>
+            <a:srgbClr val="F8FAFC"/>
+          </a:solidFill>
+          <a:ln w="12700">
+            <a:solidFill>
+              <a:srgbClr val="E2E8F0"/>
+            </a:solidFill>
+          </a:ln>
+        </p:spPr>
+        <p:style>
+          <a:lnRef idx="1">
+            <a:schemeClr val="accent1"/>
+          </a:lnRef>
+          <a:fillRef idx="3">
+            <a:schemeClr val="accent1"/>
+          </a:fillRef>
+          <a:effectRef idx="2">
+            <a:schemeClr val="accent1"/>
+          </a:effectRef>
+          <a:fontRef idx="minor">
+            <a:schemeClr val="lt1"/>
+          </a:fontRef>
+        </p:style>
+        <p:txBody>
+          <a:bodyPr rtlCol="0" anchor="ctr" wrap="square" lIns="274320" tIns="182880"/>
+          <a:lstStyle/>
+          <a:p>
+            <a:pPr algn="ctr"/>
+            <a:r>
+              <a:rPr b="1" sz="1600">
+                <a:solidFill>
+                  <a:srgbClr val="1A365D"/>
+                </a:solidFill>
+                <a:latin typeface="Arial"/>
+              </a:rPr>
+              <a:t>•   Low cost:</a:t>
+            </a:r>
+            <a:r>
+              <a:rPr b="0" sz="1500">
+                <a:solidFill>
+                  <a:srgbClr val="1E293B"/>
+                </a:solidFill>
+                <a:latin typeface="Arial"/>
+              </a:rPr>
+              <a:t> Commercial weather devices cost a lot of money, but this project can be made at a very low cost using simple parts.</a:t>
+            </a:r>
+          </a:p>
+        </p:txBody>
+      </p:sp>
+      <p:sp>
+        <p:nvSpPr>
+          <p:cNvPr id="7" name="Rounded Rectangle 6"/>
+          <p:cNvSpPr/>
+          <p:nvPr/>
+        </p:nvSpPr>
+        <p:spPr>
+          <a:xfrm>
+            <a:off x="1097280" y="4023360"/>
+            <a:ext cx="9997135" cy="1005840"/>
+          </a:xfrm>
+          <a:prstGeom prst="roundRect">
+            <a:avLst/>
+          </a:prstGeom>
+          <a:solidFill>
+            <a:srgbClr val="F8FAFC"/>
+          </a:solidFill>
+          <a:ln w="12700">
+            <a:solidFill>
+              <a:srgbClr val="E2E8F0"/>
+            </a:solidFill>
+          </a:ln>
+        </p:spPr>
+        <p:style>
+          <a:lnRef idx="1">
+            <a:schemeClr val="accent1"/>
+          </a:lnRef>
+          <a:fillRef idx="3">
+            <a:schemeClr val="accent1"/>
+          </a:fillRef>
+          <a:effectRef idx="2">
+            <a:schemeClr val="accent1"/>
+          </a:effectRef>
+          <a:fontRef idx="minor">
+            <a:schemeClr val="lt1"/>
+          </a:fontRef>
+        </p:style>
+        <p:txBody>
+          <a:bodyPr rtlCol="0" anchor="ctr" wrap="square" lIns="274320" tIns="182880"/>
+          <a:lstStyle/>
+          <a:p>
+            <a:pPr algn="ctr"/>
+            <a:r>
+              <a:rPr b="1" sz="1600">
+                <a:solidFill>
+                  <a:srgbClr val="1A365D"/>
+                </a:solidFill>
+                <a:latin typeface="Arial"/>
+              </a:rPr>
+              <a:t>•   Real-time monitoring:</a:t>
+            </a:r>
+            <a:r>
+              <a:rPr b="0" sz="1500">
+                <a:solidFill>
+                  <a:srgbClr val="1E293B"/>
+                </a:solidFill>
+                <a:latin typeface="Arial"/>
+              </a:rPr>
+              <a:t> Instead of writing down values by hand, the system updates automatically every few seconds.</a:t>
+            </a:r>
+          </a:p>
+        </p:txBody>
+      </p:sp>
+      <p:sp>
+        <p:nvSpPr>
+          <p:cNvPr id="8" name="Rounded Rectangle 7"/>
+          <p:cNvSpPr/>
+          <p:nvPr/>
+        </p:nvSpPr>
+        <p:spPr>
+          <a:xfrm>
+            <a:off x="1097280" y="5166360"/>
+            <a:ext cx="9997135" cy="1005840"/>
+          </a:xfrm>
+          <a:prstGeom prst="roundRect">
+            <a:avLst/>
+          </a:prstGeom>
+          <a:solidFill>
+            <a:srgbClr val="F8FAFC"/>
+          </a:solidFill>
+          <a:ln w="12700">
+            <a:solidFill>
+              <a:srgbClr val="E2E8F0"/>
+            </a:solidFill>
+          </a:ln>
+        </p:spPr>
+        <p:style>
+          <a:lnRef idx="1">
+            <a:schemeClr val="accent1"/>
+          </a:lnRef>
+          <a:fillRef idx="3">
+            <a:schemeClr val="accent1"/>
+          </a:fillRef>
+          <a:effectRef idx="2">
+            <a:schemeClr val="accent1"/>
+          </a:effectRef>
+          <a:fontRef idx="minor">
+            <a:schemeClr val="lt1"/>
+          </a:fontRef>
+        </p:style>
+        <p:txBody>
+          <a:bodyPr rtlCol="0" anchor="ctr" wrap="square" lIns="274320" tIns="182880"/>
+          <a:lstStyle/>
+          <a:p>
+            <a:pPr algn="ctr"/>
+            <a:r>
+              <a:rPr b="1" sz="1600">
+                <a:solidFill>
+                  <a:srgbClr val="1A365D"/>
+                </a:solidFill>
+                <a:latin typeface="Arial"/>
+              </a:rPr>
+              <a:t>•   Access from anywhere:</a:t>
+            </a:r>
+            <a:r>
+              <a:rPr b="0" sz="1500">
+                <a:solidFill>
+                  <a:srgbClr val="1E293B"/>
+                </a:solidFill>
+                <a:latin typeface="Arial"/>
+              </a:rPr>
+              <a:t> Anyone with a phone or computer can open our website and check the live weather and past 24-hour charts.</a:t>
             </a:r>
           </a:p>
         </p:txBody>
@@ -3886,14 +4937,57 @@
       <p:grpSpPr/>
       <p:sp>
         <p:nvSpPr>
-          <p:cNvPr id="2" name="TextBox 1"/>
+          <p:cNvPr id="2" name="Rectangle 1"/>
+          <p:cNvSpPr/>
+          <p:nvPr/>
+        </p:nvSpPr>
+        <p:spPr>
+          <a:xfrm>
+            <a:off x="0" y="0"/>
+            <a:ext cx="12191695" cy="73152"/>
+          </a:xfrm>
+          <a:prstGeom prst="rect">
+            <a:avLst/>
+          </a:prstGeom>
+          <a:solidFill>
+            <a:srgbClr val="1A365D"/>
+          </a:solidFill>
+          <a:ln>
+            <a:noFill/>
+          </a:ln>
+        </p:spPr>
+        <p:style>
+          <a:lnRef idx="1">
+            <a:schemeClr val="accent1"/>
+          </a:lnRef>
+          <a:fillRef idx="3">
+            <a:schemeClr val="accent1"/>
+          </a:fillRef>
+          <a:effectRef idx="2">
+            <a:schemeClr val="accent1"/>
+          </a:effectRef>
+          <a:fontRef idx="minor">
+            <a:schemeClr val="lt1"/>
+          </a:fontRef>
+        </p:style>
+        <p:txBody>
+          <a:bodyPr rtlCol="0" anchor="ctr"/>
+          <a:lstStyle/>
+          <a:p>
+            <a:pPr algn="ctr"/>
+          </a:p>
+        </p:txBody>
+      </p:sp>
+      <p:sp>
+        <p:nvSpPr>
+          <p:cNvPr id="3" name="TextBox 2"/>
           <p:cNvSpPr txBox="1"/>
           <p:nvPr/>
         </p:nvSpPr>
         <p:spPr>
           <a:xfrm>
-            <a:off x="914400" y="548640"/>
-            <a:ext cx="10362895" cy="914400"/>
+            <a:off x="914400" y="502920"/>
+            <a:ext cx="10362895" cy="777240"/>
           </a:xfrm>
           <a:prstGeom prst="rect">
             <a:avLst/>
@@ -3909,7 +5003,7 @@
             <a:pPr algn="ctr">
               <a:defRPr sz="2800" b="1">
                 <a:solidFill>
-                  <a:srgbClr val="000000"/>
+                  <a:srgbClr val="1A365D"/>
                 </a:solidFill>
                 <a:latin typeface="Arial"/>
               </a:defRPr>
@@ -3922,119 +5016,373 @@
       </p:sp>
       <p:sp>
         <p:nvSpPr>
-          <p:cNvPr id="3" name="TextBox 2"/>
-          <p:cNvSpPr txBox="1"/>
+          <p:cNvPr id="4" name="Rectangle 3"/>
+          <p:cNvSpPr/>
           <p:nvPr/>
         </p:nvSpPr>
         <p:spPr>
           <a:xfrm>
-            <a:off x="1097280" y="1645920"/>
-            <a:ext cx="10058400" cy="4754880"/>
+            <a:off x="5180990" y="1325880"/>
+            <a:ext cx="1828800" cy="36576"/>
           </a:xfrm>
           <a:prstGeom prst="rect">
             <a:avLst/>
           </a:prstGeom>
-          <a:noFill/>
-        </p:spPr>
-        <p:txBody>
-          <a:bodyPr wrap="square">
-            <a:spAutoFit/>
-          </a:bodyPr>
-          <a:lstStyle/>
-          <a:p>
-            <a:pPr>
-              <a:spcBef>
-                <a:spcPts val="1800"/>
-              </a:spcBef>
-              <a:defRPr sz="1700">
-                <a:solidFill>
-                  <a:srgbClr val="000000"/>
+          <a:solidFill>
+            <a:srgbClr val="0D9488"/>
+          </a:solidFill>
+          <a:ln>
+            <a:noFill/>
+          </a:ln>
+        </p:spPr>
+        <p:style>
+          <a:lnRef idx="1">
+            <a:schemeClr val="accent1"/>
+          </a:lnRef>
+          <a:fillRef idx="3">
+            <a:schemeClr val="accent1"/>
+          </a:fillRef>
+          <a:effectRef idx="2">
+            <a:schemeClr val="accent1"/>
+          </a:effectRef>
+          <a:fontRef idx="minor">
+            <a:schemeClr val="lt1"/>
+          </a:fontRef>
+        </p:style>
+        <p:txBody>
+          <a:bodyPr rtlCol="0" anchor="ctr"/>
+          <a:lstStyle/>
+          <a:p>
+            <a:pPr algn="ctr"/>
+          </a:p>
+        </p:txBody>
+      </p:sp>
+      <p:sp>
+        <p:nvSpPr>
+          <p:cNvPr id="5" name="Rounded Rectangle 4"/>
+          <p:cNvSpPr/>
+          <p:nvPr/>
+        </p:nvSpPr>
+        <p:spPr>
+          <a:xfrm>
+            <a:off x="1097280" y="1645920"/>
+            <a:ext cx="9997135" cy="676656"/>
+          </a:xfrm>
+          <a:prstGeom prst="roundRect">
+            <a:avLst/>
+          </a:prstGeom>
+          <a:solidFill>
+            <a:srgbClr val="F8FAFC"/>
+          </a:solidFill>
+          <a:ln w="12700">
+            <a:solidFill>
+              <a:srgbClr val="E2E8F0"/>
+            </a:solidFill>
+          </a:ln>
+        </p:spPr>
+        <p:style>
+          <a:lnRef idx="1">
+            <a:schemeClr val="accent1"/>
+          </a:lnRef>
+          <a:fillRef idx="3">
+            <a:schemeClr val="accent1"/>
+          </a:fillRef>
+          <a:effectRef idx="2">
+            <a:schemeClr val="accent1"/>
+          </a:effectRef>
+          <a:fontRef idx="minor">
+            <a:schemeClr val="lt1"/>
+          </a:fontRef>
+        </p:style>
+        <p:txBody>
+          <a:bodyPr rtlCol="0" anchor="ctr" wrap="square" lIns="274320" tIns="128016"/>
+          <a:lstStyle/>
+          <a:p>
+            <a:pPr algn="ctr">
+              <a:defRPr sz="1500">
+                <a:solidFill>
+                  <a:srgbClr val="1E293B"/>
                 </a:solidFill>
                 <a:latin typeface="Arial"/>
               </a:defRPr>
             </a:pPr>
             <a:r>
-              <a:t>•  To build a simple and working smart weather station using ESP32 microcontroller.</a:t>
-            </a:r>
-          </a:p>
-          <a:p>
-            <a:pPr>
-              <a:spcBef>
-                <a:spcPts val="1800"/>
-              </a:spcBef>
-              <a:defRPr sz="1700">
-                <a:solidFill>
-                  <a:srgbClr val="000000"/>
+              <a:t>✔   To build a simple and working smart weather station using ESP32 microcontroller.</a:t>
+            </a:r>
+          </a:p>
+        </p:txBody>
+      </p:sp>
+      <p:sp>
+        <p:nvSpPr>
+          <p:cNvPr id="6" name="Rounded Rectangle 5"/>
+          <p:cNvSpPr/>
+          <p:nvPr/>
+        </p:nvSpPr>
+        <p:spPr>
+          <a:xfrm>
+            <a:off x="1097280" y="2432304"/>
+            <a:ext cx="9997135" cy="676656"/>
+          </a:xfrm>
+          <a:prstGeom prst="roundRect">
+            <a:avLst/>
+          </a:prstGeom>
+          <a:solidFill>
+            <a:srgbClr val="F8FAFC"/>
+          </a:solidFill>
+          <a:ln w="12700">
+            <a:solidFill>
+              <a:srgbClr val="E2E8F0"/>
+            </a:solidFill>
+          </a:ln>
+        </p:spPr>
+        <p:style>
+          <a:lnRef idx="1">
+            <a:schemeClr val="accent1"/>
+          </a:lnRef>
+          <a:fillRef idx="3">
+            <a:schemeClr val="accent1"/>
+          </a:fillRef>
+          <a:effectRef idx="2">
+            <a:schemeClr val="accent1"/>
+          </a:effectRef>
+          <a:fontRef idx="minor">
+            <a:schemeClr val="lt1"/>
+          </a:fontRef>
+        </p:style>
+        <p:txBody>
+          <a:bodyPr rtlCol="0" anchor="ctr" wrap="square" lIns="274320" tIns="128016"/>
+          <a:lstStyle/>
+          <a:p>
+            <a:pPr algn="ctr">
+              <a:defRPr sz="1500">
+                <a:solidFill>
+                  <a:srgbClr val="1E293B"/>
                 </a:solidFill>
                 <a:latin typeface="Arial"/>
               </a:defRPr>
             </a:pPr>
             <a:r>
-              <a:t>•  To accurately measure room temperature and humidity using the DHT22 sensor.</a:t>
-            </a:r>
-          </a:p>
-          <a:p>
-            <a:pPr>
-              <a:spcBef>
-                <a:spcPts val="1800"/>
-              </a:spcBef>
-              <a:defRPr sz="1700">
-                <a:solidFill>
-                  <a:srgbClr val="000000"/>
+              <a:t>✔   To accurately measure room temperature and humidity using the DHT22 sensor.</a:t>
+            </a:r>
+          </a:p>
+        </p:txBody>
+      </p:sp>
+      <p:sp>
+        <p:nvSpPr>
+          <p:cNvPr id="7" name="Rounded Rectangle 6"/>
+          <p:cNvSpPr/>
+          <p:nvPr/>
+        </p:nvSpPr>
+        <p:spPr>
+          <a:xfrm>
+            <a:off x="1097280" y="3218688"/>
+            <a:ext cx="9997135" cy="676656"/>
+          </a:xfrm>
+          <a:prstGeom prst="roundRect">
+            <a:avLst/>
+          </a:prstGeom>
+          <a:solidFill>
+            <a:srgbClr val="F8FAFC"/>
+          </a:solidFill>
+          <a:ln w="12700">
+            <a:solidFill>
+              <a:srgbClr val="E2E8F0"/>
+            </a:solidFill>
+          </a:ln>
+        </p:spPr>
+        <p:style>
+          <a:lnRef idx="1">
+            <a:schemeClr val="accent1"/>
+          </a:lnRef>
+          <a:fillRef idx="3">
+            <a:schemeClr val="accent1"/>
+          </a:fillRef>
+          <a:effectRef idx="2">
+            <a:schemeClr val="accent1"/>
+          </a:effectRef>
+          <a:fontRef idx="minor">
+            <a:schemeClr val="lt1"/>
+          </a:fontRef>
+        </p:style>
+        <p:txBody>
+          <a:bodyPr rtlCol="0" anchor="ctr" wrap="square" lIns="274320" tIns="128016"/>
+          <a:lstStyle/>
+          <a:p>
+            <a:pPr algn="ctr">
+              <a:defRPr sz="1500">
+                <a:solidFill>
+                  <a:srgbClr val="1E293B"/>
                 </a:solidFill>
                 <a:latin typeface="Arial"/>
               </a:defRPr>
             </a:pPr>
             <a:r>
-              <a:t>•  To display the current readings on a small OLED screen placed directly on the board.</a:t>
-            </a:r>
-          </a:p>
-          <a:p>
-            <a:pPr>
-              <a:spcBef>
-                <a:spcPts val="1800"/>
-              </a:spcBef>
-              <a:defRPr sz="1700">
-                <a:solidFill>
-                  <a:srgbClr val="000000"/>
+              <a:t>✔   To display the current readings on a small OLED screen placed directly on the board.</a:t>
+            </a:r>
+          </a:p>
+        </p:txBody>
+      </p:sp>
+      <p:sp>
+        <p:nvSpPr>
+          <p:cNvPr id="8" name="Rounded Rectangle 7"/>
+          <p:cNvSpPr/>
+          <p:nvPr/>
+        </p:nvSpPr>
+        <p:spPr>
+          <a:xfrm>
+            <a:off x="1097280" y="4005072"/>
+            <a:ext cx="9997135" cy="676656"/>
+          </a:xfrm>
+          <a:prstGeom prst="roundRect">
+            <a:avLst/>
+          </a:prstGeom>
+          <a:solidFill>
+            <a:srgbClr val="F8FAFC"/>
+          </a:solidFill>
+          <a:ln w="12700">
+            <a:solidFill>
+              <a:srgbClr val="E2E8F0"/>
+            </a:solidFill>
+          </a:ln>
+        </p:spPr>
+        <p:style>
+          <a:lnRef idx="1">
+            <a:schemeClr val="accent1"/>
+          </a:lnRef>
+          <a:fillRef idx="3">
+            <a:schemeClr val="accent1"/>
+          </a:fillRef>
+          <a:effectRef idx="2">
+            <a:schemeClr val="accent1"/>
+          </a:effectRef>
+          <a:fontRef idx="minor">
+            <a:schemeClr val="lt1"/>
+          </a:fontRef>
+        </p:style>
+        <p:txBody>
+          <a:bodyPr rtlCol="0" anchor="ctr" wrap="square" lIns="274320" tIns="128016"/>
+          <a:lstStyle/>
+          <a:p>
+            <a:pPr algn="ctr">
+              <a:defRPr sz="1500">
+                <a:solidFill>
+                  <a:srgbClr val="1E293B"/>
                 </a:solidFill>
                 <a:latin typeface="Arial"/>
               </a:defRPr>
             </a:pPr>
             <a:r>
-              <a:t>•  To calculate Heat Index (how hot it feels) and Dew Point to check human comfort.</a:t>
-            </a:r>
-          </a:p>
-          <a:p>
-            <a:pPr>
-              <a:spcBef>
-                <a:spcPts val="1800"/>
-              </a:spcBef>
-              <a:defRPr sz="1700">
-                <a:solidFill>
-                  <a:srgbClr val="000000"/>
+              <a:t>✔   To calculate Heat Index (how hot it feels) and Dew Point to check human comfort.</a:t>
+            </a:r>
+          </a:p>
+        </p:txBody>
+      </p:sp>
+      <p:sp>
+        <p:nvSpPr>
+          <p:cNvPr id="9" name="Rounded Rectangle 8"/>
+          <p:cNvSpPr/>
+          <p:nvPr/>
+        </p:nvSpPr>
+        <p:spPr>
+          <a:xfrm>
+            <a:off x="1097280" y="4791456"/>
+            <a:ext cx="9997135" cy="676656"/>
+          </a:xfrm>
+          <a:prstGeom prst="roundRect">
+            <a:avLst/>
+          </a:prstGeom>
+          <a:solidFill>
+            <a:srgbClr val="F8FAFC"/>
+          </a:solidFill>
+          <a:ln w="12700">
+            <a:solidFill>
+              <a:srgbClr val="E2E8F0"/>
+            </a:solidFill>
+          </a:ln>
+        </p:spPr>
+        <p:style>
+          <a:lnRef idx="1">
+            <a:schemeClr val="accent1"/>
+          </a:lnRef>
+          <a:fillRef idx="3">
+            <a:schemeClr val="accent1"/>
+          </a:fillRef>
+          <a:effectRef idx="2">
+            <a:schemeClr val="accent1"/>
+          </a:effectRef>
+          <a:fontRef idx="minor">
+            <a:schemeClr val="lt1"/>
+          </a:fontRef>
+        </p:style>
+        <p:txBody>
+          <a:bodyPr rtlCol="0" anchor="ctr" wrap="square" lIns="274320" tIns="128016"/>
+          <a:lstStyle/>
+          <a:p>
+            <a:pPr algn="ctr">
+              <a:defRPr sz="1500">
+                <a:solidFill>
+                  <a:srgbClr val="1E293B"/>
                 </a:solidFill>
                 <a:latin typeface="Arial"/>
               </a:defRPr>
             </a:pPr>
             <a:r>
-              <a:t>•  To send all sensor data to the ThingSpeak cloud platform over Wi-Fi every 20 seconds.</a:t>
-            </a:r>
-          </a:p>
-          <a:p>
-            <a:pPr>
-              <a:spcBef>
-                <a:spcPts val="1800"/>
-              </a:spcBef>
-              <a:defRPr sz="1700">
-                <a:solidFill>
-                  <a:srgbClr val="000000"/>
+              <a:t>✔   To send all sensor data to the ThingSpeak cloud platform over Wi-Fi every 20 seconds.</a:t>
+            </a:r>
+          </a:p>
+        </p:txBody>
+      </p:sp>
+      <p:sp>
+        <p:nvSpPr>
+          <p:cNvPr id="10" name="Rounded Rectangle 9"/>
+          <p:cNvSpPr/>
+          <p:nvPr/>
+        </p:nvSpPr>
+        <p:spPr>
+          <a:xfrm>
+            <a:off x="1097280" y="5577840"/>
+            <a:ext cx="9997135" cy="676656"/>
+          </a:xfrm>
+          <a:prstGeom prst="roundRect">
+            <a:avLst/>
+          </a:prstGeom>
+          <a:solidFill>
+            <a:srgbClr val="F8FAFC"/>
+          </a:solidFill>
+          <a:ln w="12700">
+            <a:solidFill>
+              <a:srgbClr val="E2E8F0"/>
+            </a:solidFill>
+          </a:ln>
+        </p:spPr>
+        <p:style>
+          <a:lnRef idx="1">
+            <a:schemeClr val="accent1"/>
+          </a:lnRef>
+          <a:fillRef idx="3">
+            <a:schemeClr val="accent1"/>
+          </a:fillRef>
+          <a:effectRef idx="2">
+            <a:schemeClr val="accent1"/>
+          </a:effectRef>
+          <a:fontRef idx="minor">
+            <a:schemeClr val="lt1"/>
+          </a:fontRef>
+        </p:style>
+        <p:txBody>
+          <a:bodyPr rtlCol="0" anchor="ctr" wrap="square" lIns="274320" tIns="128016"/>
+          <a:lstStyle/>
+          <a:p>
+            <a:pPr algn="ctr">
+              <a:defRPr sz="1500">
+                <a:solidFill>
+                  <a:srgbClr val="1E293B"/>
                 </a:solidFill>
                 <a:latin typeface="Arial"/>
               </a:defRPr>
             </a:pPr>
             <a:r>
-              <a:t>•  To show live readings and a 24-hour history graph on an online website hosted on Vercel.</a:t>
+              <a:t>✔   To show live readings and a 24-hour history graph on an online website hosted on Vercel.</a:t>
             </a:r>
           </a:p>
         </p:txBody>
@@ -4059,14 +5407,57 @@
       <p:grpSpPr/>
       <p:sp>
         <p:nvSpPr>
-          <p:cNvPr id="2" name="TextBox 1"/>
+          <p:cNvPr id="2" name="Rectangle 1"/>
+          <p:cNvSpPr/>
+          <p:nvPr/>
+        </p:nvSpPr>
+        <p:spPr>
+          <a:xfrm>
+            <a:off x="0" y="0"/>
+            <a:ext cx="12191695" cy="73152"/>
+          </a:xfrm>
+          <a:prstGeom prst="rect">
+            <a:avLst/>
+          </a:prstGeom>
+          <a:solidFill>
+            <a:srgbClr val="1A365D"/>
+          </a:solidFill>
+          <a:ln>
+            <a:noFill/>
+          </a:ln>
+        </p:spPr>
+        <p:style>
+          <a:lnRef idx="1">
+            <a:schemeClr val="accent1"/>
+          </a:lnRef>
+          <a:fillRef idx="3">
+            <a:schemeClr val="accent1"/>
+          </a:fillRef>
+          <a:effectRef idx="2">
+            <a:schemeClr val="accent1"/>
+          </a:effectRef>
+          <a:fontRef idx="minor">
+            <a:schemeClr val="lt1"/>
+          </a:fontRef>
+        </p:style>
+        <p:txBody>
+          <a:bodyPr rtlCol="0" anchor="ctr"/>
+          <a:lstStyle/>
+          <a:p>
+            <a:pPr algn="ctr"/>
+          </a:p>
+        </p:txBody>
+      </p:sp>
+      <p:sp>
+        <p:nvSpPr>
+          <p:cNvPr id="3" name="TextBox 2"/>
           <p:cNvSpPr txBox="1"/>
           <p:nvPr/>
         </p:nvSpPr>
         <p:spPr>
           <a:xfrm>
-            <a:off x="914400" y="548640"/>
-            <a:ext cx="10362895" cy="914400"/>
+            <a:off x="914400" y="502920"/>
+            <a:ext cx="10362895" cy="777240"/>
           </a:xfrm>
           <a:prstGeom prst="rect">
             <a:avLst/>
@@ -4082,7 +5473,7 @@
             <a:pPr algn="ctr">
               <a:defRPr sz="2800" b="1">
                 <a:solidFill>
-                  <a:srgbClr val="000000"/>
+                  <a:srgbClr val="1A365D"/>
                 </a:solidFill>
                 <a:latin typeface="Arial"/>
               </a:defRPr>
@@ -4095,39 +5486,311 @@
       </p:sp>
       <p:sp>
         <p:nvSpPr>
-          <p:cNvPr id="3" name="TextBox 2"/>
-          <p:cNvSpPr txBox="1"/>
+          <p:cNvPr id="4" name="Rectangle 3"/>
+          <p:cNvSpPr/>
           <p:nvPr/>
         </p:nvSpPr>
         <p:spPr>
           <a:xfrm>
-            <a:off x="1097280" y="1645920"/>
-            <a:ext cx="10058400" cy="4754880"/>
+            <a:off x="5180990" y="1325880"/>
+            <a:ext cx="1828800" cy="36576"/>
           </a:xfrm>
           <a:prstGeom prst="rect">
             <a:avLst/>
           </a:prstGeom>
-          <a:noFill/>
-        </p:spPr>
-        <p:txBody>
-          <a:bodyPr wrap="square">
-            <a:spAutoFit/>
-          </a:bodyPr>
-          <a:lstStyle/>
+          <a:solidFill>
+            <a:srgbClr val="0D9488"/>
+          </a:solidFill>
+          <a:ln>
+            <a:noFill/>
+          </a:ln>
+        </p:spPr>
+        <p:style>
+          <a:lnRef idx="1">
+            <a:schemeClr val="accent1"/>
+          </a:lnRef>
+          <a:fillRef idx="3">
+            <a:schemeClr val="accent1"/>
+          </a:fillRef>
+          <a:effectRef idx="2">
+            <a:schemeClr val="accent1"/>
+          </a:effectRef>
+          <a:fontRef idx="minor">
+            <a:schemeClr val="lt1"/>
+          </a:fontRef>
+        </p:style>
+        <p:txBody>
+          <a:bodyPr rtlCol="0" anchor="ctr"/>
+          <a:lstStyle/>
+          <a:p>
+            <a:pPr algn="ctr"/>
+          </a:p>
+        </p:txBody>
+      </p:sp>
+      <p:sp>
+        <p:nvSpPr>
+          <p:cNvPr id="5" name="Rounded Rectangle 4"/>
+          <p:cNvSpPr/>
+          <p:nvPr/>
+        </p:nvSpPr>
+        <p:spPr>
+          <a:xfrm>
+            <a:off x="1097280" y="1645920"/>
+            <a:ext cx="3154680" cy="2011680"/>
+          </a:xfrm>
+          <a:prstGeom prst="roundRect">
+            <a:avLst/>
+          </a:prstGeom>
+          <a:solidFill>
+            <a:srgbClr val="F8FAFC"/>
+          </a:solidFill>
+          <a:ln w="12700">
+            <a:solidFill>
+              <a:srgbClr val="E2E8F0"/>
+            </a:solidFill>
+          </a:ln>
+        </p:spPr>
+        <p:style>
+          <a:lnRef idx="1">
+            <a:schemeClr val="accent1"/>
+          </a:lnRef>
+          <a:fillRef idx="3">
+            <a:schemeClr val="accent1"/>
+          </a:fillRef>
+          <a:effectRef idx="2">
+            <a:schemeClr val="accent1"/>
+          </a:effectRef>
+          <a:fontRef idx="minor">
+            <a:schemeClr val="lt1"/>
+          </a:fontRef>
+        </p:style>
+        <p:txBody>
+          <a:bodyPr rtlCol="0" anchor="ctr" wrap="square" lIns="228600" tIns="182880"/>
+          <a:lstStyle/>
+          <a:p>
+            <a:pPr algn="ctr">
+              <a:defRPr sz="1500" b="1">
+                <a:solidFill>
+                  <a:srgbClr val="1A365D"/>
+                </a:solidFill>
+                <a:latin typeface="Arial"/>
+              </a:defRPr>
+            </a:pPr>
+            <a:r>
+              <a:t>1. ESP32 Microcontroller</a:t>
+            </a:r>
+          </a:p>
           <a:p>
             <a:pPr>
               <a:spcBef>
-                <a:spcPts val="1200"/>
+                <a:spcPts val="800"/>
               </a:spcBef>
+              <a:defRPr sz="1300">
+                <a:solidFill>
+                  <a:srgbClr val="1E293B"/>
+                </a:solidFill>
+                <a:latin typeface="Arial"/>
+              </a:defRPr>
+            </a:pPr>
+            <a:r>
+              <a:t>The main brain with built-in Wi-Fi to collect sensor data and send it to the cloud.</a:t>
+            </a:r>
+          </a:p>
+        </p:txBody>
+      </p:sp>
+      <p:sp>
+        <p:nvSpPr>
+          <p:cNvPr id="6" name="Rounded Rectangle 5"/>
+          <p:cNvSpPr/>
+          <p:nvPr/>
+        </p:nvSpPr>
+        <p:spPr>
+          <a:xfrm>
+            <a:off x="4526280" y="1645920"/>
+            <a:ext cx="3154680" cy="2011680"/>
+          </a:xfrm>
+          <a:prstGeom prst="roundRect">
+            <a:avLst/>
+          </a:prstGeom>
+          <a:solidFill>
+            <a:srgbClr val="F8FAFC"/>
+          </a:solidFill>
+          <a:ln w="12700">
+            <a:solidFill>
+              <a:srgbClr val="E2E8F0"/>
+            </a:solidFill>
+          </a:ln>
+        </p:spPr>
+        <p:style>
+          <a:lnRef idx="1">
+            <a:schemeClr val="accent1"/>
+          </a:lnRef>
+          <a:fillRef idx="3">
+            <a:schemeClr val="accent1"/>
+          </a:fillRef>
+          <a:effectRef idx="2">
+            <a:schemeClr val="accent1"/>
+          </a:effectRef>
+          <a:fontRef idx="minor">
+            <a:schemeClr val="lt1"/>
+          </a:fontRef>
+        </p:style>
+        <p:txBody>
+          <a:bodyPr rtlCol="0" anchor="ctr" wrap="square" lIns="228600" tIns="182880"/>
+          <a:lstStyle/>
+          <a:p>
+            <a:pPr algn="ctr">
+              <a:defRPr sz="1500" b="1">
+                <a:solidFill>
+                  <a:srgbClr val="1A365D"/>
+                </a:solidFill>
+                <a:latin typeface="Arial"/>
+              </a:defRPr>
+            </a:pPr>
+            <a:r>
+              <a:t>2. DHT22 Sensor</a:t>
+            </a:r>
+          </a:p>
+          <a:p>
+            <a:pPr>
+              <a:spcBef>
+                <a:spcPts val="800"/>
+              </a:spcBef>
+              <a:defRPr sz="1300">
+                <a:solidFill>
+                  <a:srgbClr val="1E293B"/>
+                </a:solidFill>
+                <a:latin typeface="Arial"/>
+              </a:defRPr>
+            </a:pPr>
+            <a:r>
+              <a:t>Measures temperature (-40°C to 80°C) and humidity (0 to 100%) with high accuracy.</a:t>
+            </a:r>
+          </a:p>
+        </p:txBody>
+      </p:sp>
+      <p:sp>
+        <p:nvSpPr>
+          <p:cNvPr id="7" name="Rounded Rectangle 6"/>
+          <p:cNvSpPr/>
+          <p:nvPr/>
+        </p:nvSpPr>
+        <p:spPr>
+          <a:xfrm>
+            <a:off x="7955279" y="1645920"/>
+            <a:ext cx="3154680" cy="2011680"/>
+          </a:xfrm>
+          <a:prstGeom prst="roundRect">
+            <a:avLst/>
+          </a:prstGeom>
+          <a:solidFill>
+            <a:srgbClr val="F8FAFC"/>
+          </a:solidFill>
+          <a:ln w="12700">
+            <a:solidFill>
+              <a:srgbClr val="E2E8F0"/>
+            </a:solidFill>
+          </a:ln>
+        </p:spPr>
+        <p:style>
+          <a:lnRef idx="1">
+            <a:schemeClr val="accent1"/>
+          </a:lnRef>
+          <a:fillRef idx="3">
+            <a:schemeClr val="accent1"/>
+          </a:fillRef>
+          <a:effectRef idx="2">
+            <a:schemeClr val="accent1"/>
+          </a:effectRef>
+          <a:fontRef idx="minor">
+            <a:schemeClr val="lt1"/>
+          </a:fontRef>
+        </p:style>
+        <p:txBody>
+          <a:bodyPr rtlCol="0" anchor="ctr" wrap="square" lIns="228600" tIns="182880"/>
+          <a:lstStyle/>
+          <a:p>
+            <a:pPr algn="ctr">
+              <a:defRPr sz="1500" b="1">
+                <a:solidFill>
+                  <a:srgbClr val="1A365D"/>
+                </a:solidFill>
+                <a:latin typeface="Arial"/>
+              </a:defRPr>
+            </a:pPr>
+            <a:r>
+              <a:t>3. SSD1306 OLED Display</a:t>
+            </a:r>
+          </a:p>
+          <a:p>
+            <a:pPr>
+              <a:spcBef>
+                <a:spcPts val="800"/>
+              </a:spcBef>
+              <a:defRPr sz="1300">
+                <a:solidFill>
+                  <a:srgbClr val="1E293B"/>
+                </a:solidFill>
+                <a:latin typeface="Arial"/>
+              </a:defRPr>
+            </a:pPr>
+            <a:r>
+              <a:t>Small 0.96-inch screen that shows live values directly on the device.</a:t>
+            </a:r>
+          </a:p>
+        </p:txBody>
+      </p:sp>
+      <p:sp>
+        <p:nvSpPr>
+          <p:cNvPr id="8" name="Rounded Rectangle 7"/>
+          <p:cNvSpPr/>
+          <p:nvPr/>
+        </p:nvSpPr>
+        <p:spPr>
+          <a:xfrm>
+            <a:off x="1097280" y="3931920"/>
+            <a:ext cx="9997135" cy="2377440"/>
+          </a:xfrm>
+          <a:prstGeom prst="roundRect">
+            <a:avLst/>
+          </a:prstGeom>
+          <a:solidFill>
+            <a:srgbClr val="F8FAFC"/>
+          </a:solidFill>
+          <a:ln w="19050">
+            <a:solidFill>
+              <a:srgbClr val="0D9488"/>
+            </a:solidFill>
+          </a:ln>
+        </p:spPr>
+        <p:style>
+          <a:lnRef idx="1">
+            <a:schemeClr val="accent1"/>
+          </a:lnRef>
+          <a:fillRef idx="3">
+            <a:schemeClr val="accent1"/>
+          </a:fillRef>
+          <a:effectRef idx="2">
+            <a:schemeClr val="accent1"/>
+          </a:effectRef>
+          <a:fontRef idx="minor">
+            <a:schemeClr val="lt1"/>
+          </a:fontRef>
+        </p:style>
+        <p:txBody>
+          <a:bodyPr rtlCol="0" anchor="ctr" wrap="square" lIns="274320" tIns="182880"/>
+          <a:lstStyle/>
+          <a:p>
+            <a:pPr algn="ctr">
               <a:defRPr sz="1600" b="1">
                 <a:solidFill>
-                  <a:srgbClr val="000000"/>
+                  <a:srgbClr val="1A365D"/>
                 </a:solidFill>
                 <a:latin typeface="Arial"/>
               </a:defRPr>
             </a:pPr>
             <a:r>
-              <a:t>Hardware components used:</a:t>
+              <a:t>Wiring and Connections:</a:t>
             </a:r>
           </a:p>
           <a:p>
@@ -4135,15 +5798,15 @@
               <a:spcBef>
                 <a:spcPts val="400"/>
               </a:spcBef>
-              <a:defRPr sz="1500" b="0">
-                <a:solidFill>
-                  <a:srgbClr val="000000"/>
+              <a:defRPr sz="1400">
+                <a:solidFill>
+                  <a:srgbClr val="1E293B"/>
                 </a:solidFill>
                 <a:latin typeface="Arial"/>
               </a:defRPr>
             </a:pPr>
             <a:r>
-              <a:t>    1. ESP32 Microcontroller: The main brain with built-in Wi-Fi to collect and send data.</a:t>
+              <a:t>• DHT22 data pin is connected to ESP32 Pin GPIO 4.</a:t>
             </a:r>
           </a:p>
           <a:p>
@@ -4151,15 +5814,15 @@
               <a:spcBef>
                 <a:spcPts val="400"/>
               </a:spcBef>
-              <a:defRPr sz="1500" b="0">
-                <a:solidFill>
-                  <a:srgbClr val="000000"/>
+              <a:defRPr sz="1400">
+                <a:solidFill>
+                  <a:srgbClr val="1E293B"/>
                 </a:solidFill>
                 <a:latin typeface="Arial"/>
               </a:defRPr>
             </a:pPr>
             <a:r>
-              <a:t>    2. DHT22 Sensor: Measures temperature (from -40°C to 80°C) and humidity (0 to 100%).</a:t>
+              <a:t>• OLED display is connected using I2C wires (SDA to GPIO 21, SCL to GPIO 22).</a:t>
             </a:r>
           </a:p>
           <a:p>
@@ -4167,15 +5830,15 @@
               <a:spcBef>
                 <a:spcPts val="400"/>
               </a:spcBef>
-              <a:defRPr sz="1500" b="0">
-                <a:solidFill>
-                  <a:srgbClr val="000000"/>
+              <a:defRPr sz="1400">
+                <a:solidFill>
+                  <a:srgbClr val="1E293B"/>
                 </a:solidFill>
                 <a:latin typeface="Arial"/>
               </a:defRPr>
             </a:pPr>
             <a:r>
-              <a:t>    3. SSD1306 OLED Display: Small 0.96-inch screen to see the values on the device.</a:t>
+              <a:t>• 3.3V and GND power pins are shared between the sensor and screen.</a:t>
             </a:r>
           </a:p>
           <a:p>
@@ -4183,28 +5846,15 @@
               <a:spcBef>
                 <a:spcPts val="400"/>
               </a:spcBef>
-              <a:defRPr sz="1500" b="0">
-                <a:solidFill>
-                  <a:srgbClr val="000000"/>
+              <a:defRPr sz="1400" b="1">
+                <a:solidFill>
+                  <a:srgbClr val="1A365D"/>
                 </a:solidFill>
                 <a:latin typeface="Arial"/>
               </a:defRPr>
             </a:pPr>
-          </a:p>
-          <a:p>
-            <a:pPr>
-              <a:spcBef>
-                <a:spcPts val="1200"/>
-              </a:spcBef>
-              <a:defRPr sz="1600" b="1">
-                <a:solidFill>
-                  <a:srgbClr val="000000"/>
-                </a:solidFill>
-                <a:latin typeface="Arial"/>
-              </a:defRPr>
-            </a:pPr>
-            <a:r>
-              <a:t>Wiring and Connections:</a:t>
+            <a:r>
+              <a:t>Working Flow:</a:t>
             </a:r>
           </a:p>
           <a:p>
@@ -4212,92 +5862,15 @@
               <a:spcBef>
                 <a:spcPts val="400"/>
               </a:spcBef>
-              <a:defRPr sz="1500" b="0">
-                <a:solidFill>
-                  <a:srgbClr val="000000"/>
+              <a:defRPr sz="1400" b="1">
+                <a:solidFill>
+                  <a:srgbClr val="0D9488"/>
                 </a:solidFill>
                 <a:latin typeface="Arial"/>
               </a:defRPr>
             </a:pPr>
             <a:r>
-              <a:t>    • DHT22 data pin is connected to ESP32 Pin GPIO 4.</a:t>
-            </a:r>
-          </a:p>
-          <a:p>
-            <a:pPr>
-              <a:spcBef>
-                <a:spcPts val="400"/>
-              </a:spcBef>
-              <a:defRPr sz="1500" b="0">
-                <a:solidFill>
-                  <a:srgbClr val="000000"/>
-                </a:solidFill>
-                <a:latin typeface="Arial"/>
-              </a:defRPr>
-            </a:pPr>
-            <a:r>
-              <a:t>    • OLED display is connected using I2C wires (SDA to GPIO 21, SCL to GPIO 22).</a:t>
-            </a:r>
-          </a:p>
-          <a:p>
-            <a:pPr>
-              <a:spcBef>
-                <a:spcPts val="400"/>
-              </a:spcBef>
-              <a:defRPr sz="1500" b="0">
-                <a:solidFill>
-                  <a:srgbClr val="000000"/>
-                </a:solidFill>
-                <a:latin typeface="Arial"/>
-              </a:defRPr>
-            </a:pPr>
-            <a:r>
-              <a:t>    • 3.3V and GND power pins are shared between the sensor and screen.</a:t>
-            </a:r>
-          </a:p>
-          <a:p>
-            <a:pPr>
-              <a:spcBef>
-                <a:spcPts val="400"/>
-              </a:spcBef>
-              <a:defRPr sz="1500" b="0">
-                <a:solidFill>
-                  <a:srgbClr val="000000"/>
-                </a:solidFill>
-                <a:latin typeface="Arial"/>
-              </a:defRPr>
-            </a:pPr>
-          </a:p>
-          <a:p>
-            <a:pPr>
-              <a:spcBef>
-                <a:spcPts val="1200"/>
-              </a:spcBef>
-              <a:defRPr sz="1600" b="1">
-                <a:solidFill>
-                  <a:srgbClr val="000000"/>
-                </a:solidFill>
-                <a:latin typeface="Arial"/>
-              </a:defRPr>
-            </a:pPr>
-            <a:r>
-              <a:t>Working Steps:</a:t>
-            </a:r>
-          </a:p>
-          <a:p>
-            <a:pPr>
-              <a:spcBef>
-                <a:spcPts val="400"/>
-              </a:spcBef>
-              <a:defRPr sz="1500" b="0">
-                <a:solidFill>
-                  <a:srgbClr val="000000"/>
-                </a:solidFill>
-                <a:latin typeface="Arial"/>
-              </a:defRPr>
-            </a:pPr>
-            <a:r>
-              <a:t>    Sensor reads data  ➔  ESP32 calculates comfort values  ➔  Shows on OLED  ➔  Sends to ThingSpeak cloud via Wi-Fi.</a:t>
+              <a:t>    DHT22 reads data  ➔  ESP32 calculates values  ➔  Shows on OLED  ➔  Sends to ThingSpeak Cloud  ➔  Vercel Website</a:t>
             </a:r>
           </a:p>
         </p:txBody>
@@ -4322,14 +5895,57 @@
       <p:grpSpPr/>
       <p:sp>
         <p:nvSpPr>
-          <p:cNvPr id="2" name="TextBox 1"/>
+          <p:cNvPr id="2" name="Rectangle 1"/>
+          <p:cNvSpPr/>
+          <p:nvPr/>
+        </p:nvSpPr>
+        <p:spPr>
+          <a:xfrm>
+            <a:off x="0" y="0"/>
+            <a:ext cx="12191695" cy="73152"/>
+          </a:xfrm>
+          <a:prstGeom prst="rect">
+            <a:avLst/>
+          </a:prstGeom>
+          <a:solidFill>
+            <a:srgbClr val="1A365D"/>
+          </a:solidFill>
+          <a:ln>
+            <a:noFill/>
+          </a:ln>
+        </p:spPr>
+        <p:style>
+          <a:lnRef idx="1">
+            <a:schemeClr val="accent1"/>
+          </a:lnRef>
+          <a:fillRef idx="3">
+            <a:schemeClr val="accent1"/>
+          </a:fillRef>
+          <a:effectRef idx="2">
+            <a:schemeClr val="accent1"/>
+          </a:effectRef>
+          <a:fontRef idx="minor">
+            <a:schemeClr val="lt1"/>
+          </a:fontRef>
+        </p:style>
+        <p:txBody>
+          <a:bodyPr rtlCol="0" anchor="ctr"/>
+          <a:lstStyle/>
+          <a:p>
+            <a:pPr algn="ctr"/>
+          </a:p>
+        </p:txBody>
+      </p:sp>
+      <p:sp>
+        <p:nvSpPr>
+          <p:cNvPr id="3" name="TextBox 2"/>
           <p:cNvSpPr txBox="1"/>
           <p:nvPr/>
         </p:nvSpPr>
         <p:spPr>
           <a:xfrm>
-            <a:off x="914400" y="548640"/>
-            <a:ext cx="10362895" cy="914400"/>
+            <a:off x="914400" y="502920"/>
+            <a:ext cx="10362895" cy="777240"/>
           </a:xfrm>
           <a:prstGeom prst="rect">
             <a:avLst/>
@@ -4345,7 +5961,7 @@
             <a:pPr algn="ctr">
               <a:defRPr sz="2800" b="1">
                 <a:solidFill>
-                  <a:srgbClr val="000000"/>
+                  <a:srgbClr val="1A365D"/>
                 </a:solidFill>
                 <a:latin typeface="Arial"/>
               </a:defRPr>
@@ -4358,51 +5974,58 @@
       </p:sp>
       <p:sp>
         <p:nvSpPr>
-          <p:cNvPr id="3" name="TextBox 2"/>
-          <p:cNvSpPr txBox="1"/>
+          <p:cNvPr id="4" name="Rectangle 3"/>
+          <p:cNvSpPr/>
           <p:nvPr/>
         </p:nvSpPr>
         <p:spPr>
           <a:xfrm>
-            <a:off x="1097280" y="1371600"/>
-            <a:ext cx="10058400" cy="548640"/>
+            <a:off x="5180990" y="1325880"/>
+            <a:ext cx="1828800" cy="36576"/>
           </a:xfrm>
           <a:prstGeom prst="rect">
             <a:avLst/>
           </a:prstGeom>
-          <a:noFill/>
-        </p:spPr>
-        <p:txBody>
-          <a:bodyPr wrap="none">
-            <a:spAutoFit/>
-          </a:bodyPr>
-          <a:lstStyle/>
-          <a:p>
-            <a:pPr>
-              <a:defRPr sz="1800" b="1">
-                <a:solidFill>
-                  <a:srgbClr val="000000"/>
-                </a:solidFill>
-                <a:latin typeface="Arial"/>
-              </a:defRPr>
-            </a:pPr>
-            <a:r>
-              <a:t>Results and Live Cloud Data:</a:t>
-            </a:r>
+          <a:solidFill>
+            <a:srgbClr val="0D9488"/>
+          </a:solidFill>
+          <a:ln>
+            <a:noFill/>
+          </a:ln>
+        </p:spPr>
+        <p:style>
+          <a:lnRef idx="1">
+            <a:schemeClr val="accent1"/>
+          </a:lnRef>
+          <a:fillRef idx="3">
+            <a:schemeClr val="accent1"/>
+          </a:fillRef>
+          <a:effectRef idx="2">
+            <a:schemeClr val="accent1"/>
+          </a:effectRef>
+          <a:fontRef idx="minor">
+            <a:schemeClr val="lt1"/>
+          </a:fontRef>
+        </p:style>
+        <p:txBody>
+          <a:bodyPr rtlCol="0" anchor="ctr"/>
+          <a:lstStyle/>
+          <a:p>
+            <a:pPr algn="ctr"/>
           </a:p>
         </p:txBody>
       </p:sp>
       <p:graphicFrame>
         <p:nvGraphicFramePr>
-          <p:cNvPr id="4" name="Table 3"/>
+          <p:cNvPr id="5" name="Table 4"/>
           <p:cNvGraphicFramePr>
             <a:graphicFrameLocks noGrp="1"/>
           </p:cNvGraphicFramePr>
           <p:nvPr/>
         </p:nvGraphicFramePr>
         <p:xfrm>
-          <a:off x="1097280" y="2011680"/>
-          <a:ext cx="10058400" cy="2011680"/>
+          <a:off x="1097280" y="1691640"/>
+          <a:ext cx="5303520" cy="2377440"/>
         </p:xfrm>
         <a:graphic>
           <a:graphicData uri="http://schemas.openxmlformats.org/drawingml/2006/table">
@@ -4411,18 +6034,18 @@
                 <a:tableStyleId>{5C22544A-7EE6-4342-B048-85BDC9FD1C3A}</a:tableStyleId>
               </a:tblPr>
               <a:tblGrid>
-                <a:gridCol w="3200400"/>
-                <a:gridCol w="3200400"/>
-                <a:gridCol w="3657600"/>
+                <a:gridCol w="1828800"/>
+                <a:gridCol w="1645920"/>
+                <a:gridCol w="1828800"/>
               </a:tblGrid>
-              <a:tr h="402336">
+              <a:tr h="475488">
                 <a:tc>
                   <a:txBody>
                     <a:bodyPr/>
                     <a:lstStyle/>
                     <a:p>
                       <a:pPr>
-                        <a:defRPr sz="1400" b="1">
+                        <a:defRPr sz="1300" b="1">
                           <a:solidFill>
                             <a:srgbClr val="FFFFFF"/>
                           </a:solidFill>
@@ -4436,7 +6059,7 @@
                   </a:txBody>
                   <a:tcPr>
                     <a:solidFill>
-                      <a:srgbClr val="4682B4"/>
+                      <a:srgbClr val="1A365D"/>
                     </a:solidFill>
                   </a:tcPr>
                 </a:tc>
@@ -4446,7 +6069,7 @@
                     <a:lstStyle/>
                     <a:p>
                       <a:pPr>
-                        <a:defRPr sz="1400" b="1">
+                        <a:defRPr sz="1300" b="1">
                           <a:solidFill>
                             <a:srgbClr val="FFFFFF"/>
                           </a:solidFill>
@@ -4454,13 +6077,13 @@
                         </a:defRPr>
                       </a:pPr>
                       <a:r>
-                        <a:t>Live Measured Value</a:t>
+                        <a:t>Live Value</a:t>
                       </a:r>
                     </a:p>
                   </a:txBody>
                   <a:tcPr>
                     <a:solidFill>
-                      <a:srgbClr val="4682B4"/>
+                      <a:srgbClr val="1A365D"/>
                     </a:solidFill>
                   </a:tcPr>
                 </a:tc>
@@ -4470,7 +6093,7 @@
                     <a:lstStyle/>
                     <a:p>
                       <a:pPr>
-                        <a:defRPr sz="1400" b="1">
+                        <a:defRPr sz="1300" b="1">
                           <a:solidFill>
                             <a:srgbClr val="FFFFFF"/>
                           </a:solidFill>
@@ -4484,12 +6107,12 @@
                   </a:txBody>
                   <a:tcPr>
                     <a:solidFill>
-                      <a:srgbClr val="4682B4"/>
+                      <a:srgbClr val="1A365D"/>
                     </a:solidFill>
                   </a:tcPr>
                 </a:tc>
               </a:tr>
-              <a:tr h="402336">
+              <a:tr h="475488">
                 <a:tc>
                   <a:txBody>
                     <a:bodyPr/>
@@ -4498,7 +6121,7 @@
                       <a:pPr>
                         <a:defRPr sz="1300">
                           <a:solidFill>
-                            <a:srgbClr val="000000"/>
+                            <a:srgbClr val="1E293B"/>
                           </a:solidFill>
                           <a:latin typeface="Arial"/>
                         </a:defRPr>
@@ -4510,7 +6133,7 @@
                   </a:txBody>
                   <a:tcPr>
                     <a:solidFill>
-                      <a:srgbClr val="E6F0FA"/>
+                      <a:srgbClr val="F8FAFC"/>
                     </a:solidFill>
                   </a:tcPr>
                 </a:tc>
@@ -4522,7 +6145,7 @@
                       <a:pPr>
                         <a:defRPr sz="1300">
                           <a:solidFill>
-                            <a:srgbClr val="000000"/>
+                            <a:srgbClr val="1E293B"/>
                           </a:solidFill>
                           <a:latin typeface="Arial"/>
                         </a:defRPr>
@@ -4534,7 +6157,7 @@
                   </a:txBody>
                   <a:tcPr>
                     <a:solidFill>
-                      <a:srgbClr val="E6F0FA"/>
+                      <a:srgbClr val="F8FAFC"/>
                     </a:solidFill>
                   </a:tcPr>
                 </a:tc>
@@ -4546,24 +6169,24 @@
                       <a:pPr>
                         <a:defRPr sz="1300">
                           <a:solidFill>
-                            <a:srgbClr val="000000"/>
+                            <a:srgbClr val="1E293B"/>
                           </a:solidFill>
                           <a:latin typeface="Arial"/>
                         </a:defRPr>
                       </a:pPr>
                       <a:r>
-                        <a:t>Current room temperature</a:t>
+                        <a:t>Room temperature</a:t>
                       </a:r>
                     </a:p>
                   </a:txBody>
                   <a:tcPr>
                     <a:solidFill>
-                      <a:srgbClr val="E6F0FA"/>
+                      <a:srgbClr val="F8FAFC"/>
                     </a:solidFill>
                   </a:tcPr>
                 </a:tc>
               </a:tr>
-              <a:tr h="402336">
+              <a:tr h="475488">
                 <a:tc>
                   <a:txBody>
                     <a:bodyPr/>
@@ -4572,7 +6195,7 @@
                       <a:pPr>
                         <a:defRPr sz="1300">
                           <a:solidFill>
-                            <a:srgbClr val="000000"/>
+                            <a:srgbClr val="1E293B"/>
                           </a:solidFill>
                           <a:latin typeface="Arial"/>
                         </a:defRPr>
@@ -4596,7 +6219,7 @@
                       <a:pPr>
                         <a:defRPr sz="1300">
                           <a:solidFill>
-                            <a:srgbClr val="000000"/>
+                            <a:srgbClr val="1E293B"/>
                           </a:solidFill>
                           <a:latin typeface="Arial"/>
                         </a:defRPr>
@@ -4620,13 +6243,13 @@
                       <a:pPr>
                         <a:defRPr sz="1300">
                           <a:solidFill>
-                            <a:srgbClr val="000000"/>
+                            <a:srgbClr val="1E293B"/>
                           </a:solidFill>
                           <a:latin typeface="Arial"/>
                         </a:defRPr>
                       </a:pPr>
                       <a:r>
-                        <a:t>Current moisture in air</a:t>
+                        <a:t>Moisture in air</a:t>
                       </a:r>
                     </a:p>
                   </a:txBody>
@@ -4637,7 +6260,7 @@
                   </a:tcPr>
                 </a:tc>
               </a:tr>
-              <a:tr h="402336">
+              <a:tr h="475488">
                 <a:tc>
                   <a:txBody>
                     <a:bodyPr/>
@@ -4646,7 +6269,7 @@
                       <a:pPr>
                         <a:defRPr sz="1300">
                           <a:solidFill>
-                            <a:srgbClr val="000000"/>
+                            <a:srgbClr val="1E293B"/>
                           </a:solidFill>
                           <a:latin typeface="Arial"/>
                         </a:defRPr>
@@ -4658,7 +6281,7 @@
                   </a:txBody>
                   <a:tcPr>
                     <a:solidFill>
-                      <a:srgbClr val="E6F0FA"/>
+                      <a:srgbClr val="F8FAFC"/>
                     </a:solidFill>
                   </a:tcPr>
                 </a:tc>
@@ -4670,7 +6293,7 @@
                       <a:pPr>
                         <a:defRPr sz="1300">
                           <a:solidFill>
-                            <a:srgbClr val="000000"/>
+                            <a:srgbClr val="1E293B"/>
                           </a:solidFill>
                           <a:latin typeface="Arial"/>
                         </a:defRPr>
@@ -4682,7 +6305,7 @@
                   </a:txBody>
                   <a:tcPr>
                     <a:solidFill>
-                      <a:srgbClr val="E6F0FA"/>
+                      <a:srgbClr val="F8FAFC"/>
                     </a:solidFill>
                   </a:tcPr>
                 </a:tc>
@@ -4694,7 +6317,7 @@
                       <a:pPr>
                         <a:defRPr sz="1300">
                           <a:solidFill>
-                            <a:srgbClr val="000000"/>
+                            <a:srgbClr val="1E293B"/>
                           </a:solidFill>
                           <a:latin typeface="Arial"/>
                         </a:defRPr>
@@ -4706,12 +6329,12 @@
                   </a:txBody>
                   <a:tcPr>
                     <a:solidFill>
-                      <a:srgbClr val="E6F0FA"/>
+                      <a:srgbClr val="F8FAFC"/>
                     </a:solidFill>
                   </a:tcPr>
                 </a:tc>
               </a:tr>
-              <a:tr h="402336">
+              <a:tr h="475488">
                 <a:tc>
                   <a:txBody>
                     <a:bodyPr/>
@@ -4720,7 +6343,7 @@
                       <a:pPr>
                         <a:defRPr sz="1300">
                           <a:solidFill>
-                            <a:srgbClr val="000000"/>
+                            <a:srgbClr val="1E293B"/>
                           </a:solidFill>
                           <a:latin typeface="Arial"/>
                         </a:defRPr>
@@ -4744,7 +6367,7 @@
                       <a:pPr>
                         <a:defRPr sz="1300">
                           <a:solidFill>
-                            <a:srgbClr val="000000"/>
+                            <a:srgbClr val="1E293B"/>
                           </a:solidFill>
                           <a:latin typeface="Arial"/>
                         </a:defRPr>
@@ -4768,13 +6391,13 @@
                       <a:pPr>
                         <a:defRPr sz="1300">
                           <a:solidFill>
-                            <a:srgbClr val="000000"/>
+                            <a:srgbClr val="1E293B"/>
                           </a:solidFill>
                           <a:latin typeface="Arial"/>
                         </a:defRPr>
                       </a:pPr>
                       <a:r>
-                        <a:t>Comfort and moisture level</a:t>
+                        <a:t>Moisture comfort</a:t>
                       </a:r>
                     </a:p>
                   </a:txBody>
@@ -4791,49 +6414,81 @@
       </p:graphicFrame>
       <p:sp>
         <p:nvSpPr>
-          <p:cNvPr id="5" name="TextBox 4"/>
-          <p:cNvSpPr txBox="1"/>
+          <p:cNvPr id="6" name="Rounded Rectangle 5"/>
+          <p:cNvSpPr/>
           <p:nvPr/>
         </p:nvSpPr>
         <p:spPr>
           <a:xfrm>
-            <a:off x="1097280" y="4297680"/>
-            <a:ext cx="10058400" cy="2011680"/>
-          </a:xfrm>
-          <a:prstGeom prst="rect">
+            <a:off x="6675120" y="1691640"/>
+            <a:ext cx="4419295" cy="4389120"/>
+          </a:xfrm>
+          <a:prstGeom prst="roundRect">
             <a:avLst/>
           </a:prstGeom>
-          <a:noFill/>
-        </p:spPr>
-        <p:txBody>
-          <a:bodyPr wrap="square">
-            <a:spAutoFit/>
-          </a:bodyPr>
-          <a:lstStyle/>
+          <a:solidFill>
+            <a:srgbClr val="F8FAFC"/>
+          </a:solidFill>
+          <a:ln w="19050">
+            <a:solidFill>
+              <a:srgbClr val="0D9488"/>
+            </a:solidFill>
+          </a:ln>
+        </p:spPr>
+        <p:style>
+          <a:lnRef idx="1">
+            <a:schemeClr val="accent1"/>
+          </a:lnRef>
+          <a:fillRef idx="3">
+            <a:schemeClr val="accent1"/>
+          </a:fillRef>
+          <a:effectRef idx="2">
+            <a:schemeClr val="accent1"/>
+          </a:effectRef>
+          <a:fontRef idx="minor">
+            <a:schemeClr val="lt1"/>
+          </a:fontRef>
+        </p:style>
+        <p:txBody>
+          <a:bodyPr rtlCol="0" anchor="ctr" wrap="square" lIns="274320" tIns="228600"/>
+          <a:lstStyle/>
+          <a:p>
+            <a:pPr algn="ctr">
+              <a:defRPr sz="1600" b="1">
+                <a:solidFill>
+                  <a:srgbClr val="1A365D"/>
+                </a:solidFill>
+                <a:latin typeface="Arial"/>
+              </a:defRPr>
+            </a:pPr>
+            <a:r>
+              <a:t>Live Website &amp; Cloud Features:</a:t>
+            </a:r>
+          </a:p>
           <a:p>
             <a:pPr>
               <a:spcBef>
-                <a:spcPts val="800"/>
+                <a:spcPts val="1000"/>
               </a:spcBef>
-              <a:defRPr sz="1400">
-                <a:solidFill>
-                  <a:srgbClr val="000000"/>
+              <a:defRPr sz="1300">
+                <a:solidFill>
+                  <a:srgbClr val="1E293B"/>
                 </a:solidFill>
                 <a:latin typeface="Arial"/>
               </a:defRPr>
             </a:pPr>
             <a:r>
-              <a:t>• The system uploads new data to ThingSpeak every 20 seconds.</a:t>
+              <a:t>• ESP32 sends new data to ThingSpeak every 20 seconds.</a:t>
             </a:r>
           </a:p>
           <a:p>
             <a:pPr>
               <a:spcBef>
-                <a:spcPts val="800"/>
+                <a:spcPts val="1000"/>
               </a:spcBef>
-              <a:defRPr sz="1400">
-                <a:solidFill>
-                  <a:srgbClr val="000000"/>
+              <a:defRPr sz="1300">
+                <a:solidFill>
+                  <a:srgbClr val="1E293B"/>
                 </a:solidFill>
                 <a:latin typeface="Arial"/>
               </a:defRPr>
@@ -4845,49 +6500,128 @@
           <a:p>
             <a:pPr>
               <a:spcBef>
-                <a:spcPts val="800"/>
+                <a:spcPts val="1000"/>
               </a:spcBef>
-              <a:defRPr sz="1400">
-                <a:solidFill>
-                  <a:srgbClr val="000000"/>
+              <a:defRPr sz="1300">
+                <a:solidFill>
+                  <a:srgbClr val="1E293B"/>
                 </a:solidFill>
                 <a:latin typeface="Arial"/>
               </a:defRPr>
             </a:pPr>
             <a:r>
-              <a:t>• A clean 24-hour graph draws temperature and humidity history directly in the browser.</a:t>
+              <a:t>• A clean 24-hour graph draws temperature and humidity history directly in browser.</a:t>
             </a:r>
           </a:p>
           <a:p>
             <a:pPr>
               <a:spcBef>
-                <a:spcPts val="800"/>
+                <a:spcPts val="1000"/>
               </a:spcBef>
-              <a:defRPr sz="1400" b="1">
-                <a:solidFill>
-                  <a:srgbClr val="000000"/>
+              <a:defRPr sz="1300" b="1">
+                <a:solidFill>
+                  <a:srgbClr val="1A365D"/>
                 </a:solidFill>
                 <a:latin typeface="Arial"/>
               </a:defRPr>
             </a:pPr>
             <a:r>
-              <a:t>• Live Website URL: https://smart-weather-station.vercel.app/</a:t>
+              <a:t>• Live Website URL:</a:t>
+            </a:r>
+            <a:br/>
+            <a:r>
+              <a:t>   https://smart-weather-station.vercel.app/</a:t>
             </a:r>
           </a:p>
           <a:p>
             <a:pPr>
               <a:spcBef>
-                <a:spcPts val="800"/>
+                <a:spcPts val="1000"/>
               </a:spcBef>
-              <a:defRPr sz="1400" b="1">
-                <a:solidFill>
-                  <a:srgbClr val="000000"/>
+              <a:defRPr sz="1300" b="1">
+                <a:solidFill>
+                  <a:srgbClr val="1A365D"/>
                 </a:solidFill>
                 <a:latin typeface="Arial"/>
               </a:defRPr>
             </a:pPr>
             <a:r>
-              <a:t>• Project Code on GitHub: https://github.com/prasoon9999/smart-weather-station</a:t>
+              <a:t>• Project Code on GitHub:</a:t>
+            </a:r>
+            <a:br/>
+            <a:r>
+              <a:t>   https://github.com/prasoon9999/smart-weather-station</a:t>
+            </a:r>
+          </a:p>
+        </p:txBody>
+      </p:sp>
+      <p:sp>
+        <p:nvSpPr>
+          <p:cNvPr id="7" name="Rounded Rectangle 6"/>
+          <p:cNvSpPr/>
+          <p:nvPr/>
+        </p:nvSpPr>
+        <p:spPr>
+          <a:xfrm>
+            <a:off x="1097280" y="4297680"/>
+            <a:ext cx="5303520" cy="1783080"/>
+          </a:xfrm>
+          <a:prstGeom prst="roundRect">
+            <a:avLst/>
+          </a:prstGeom>
+          <a:solidFill>
+            <a:srgbClr val="F8FAFC"/>
+          </a:solidFill>
+          <a:ln w="12700">
+            <a:solidFill>
+              <a:srgbClr val="E2E8F0"/>
+            </a:solidFill>
+          </a:ln>
+        </p:spPr>
+        <p:style>
+          <a:lnRef idx="1">
+            <a:schemeClr val="accent1"/>
+          </a:lnRef>
+          <a:fillRef idx="3">
+            <a:schemeClr val="accent1"/>
+          </a:fillRef>
+          <a:effectRef idx="2">
+            <a:schemeClr val="accent1"/>
+          </a:effectRef>
+          <a:fontRef idx="minor">
+            <a:schemeClr val="lt1"/>
+          </a:fontRef>
+        </p:style>
+        <p:txBody>
+          <a:bodyPr rtlCol="0" anchor="ctr" lIns="228600" tIns="182880"/>
+          <a:lstStyle/>
+          <a:p>
+            <a:pPr algn="ctr">
+              <a:defRPr sz="1500" b="1">
+                <a:solidFill>
+                  <a:srgbClr val="1A365D"/>
+                </a:solidFill>
+                <a:latin typeface="Arial"/>
+              </a:defRPr>
+            </a:pPr>
+            <a:r>
+              <a:t>Telemetry Verification:</a:t>
+            </a:r>
+          </a:p>
+          <a:p>
+            <a:pPr>
+              <a:spcBef>
+                <a:spcPts val="600"/>
+              </a:spcBef>
+              <a:defRPr sz="1300">
+                <a:solidFill>
+                  <a:srgbClr val="1E293B"/>
+                </a:solidFill>
+                <a:latin typeface="Arial"/>
+              </a:defRPr>
+            </a:pPr>
+            <a:r>
+              <a:t>All readings have been verified live on MathWorks ThingSpeak Channel 3531601 with over 60 continuous entries received from our hardware prototype.</a:t>
             </a:r>
           </a:p>
         </p:txBody>
@@ -4912,14 +6646,57 @@
       <p:grpSpPr/>
       <p:sp>
         <p:nvSpPr>
-          <p:cNvPr id="2" name="TextBox 1"/>
+          <p:cNvPr id="2" name="Rectangle 1"/>
+          <p:cNvSpPr/>
+          <p:nvPr/>
+        </p:nvSpPr>
+        <p:spPr>
+          <a:xfrm>
+            <a:off x="0" y="0"/>
+            <a:ext cx="12191695" cy="73152"/>
+          </a:xfrm>
+          <a:prstGeom prst="rect">
+            <a:avLst/>
+          </a:prstGeom>
+          <a:solidFill>
+            <a:srgbClr val="1A365D"/>
+          </a:solidFill>
+          <a:ln>
+            <a:noFill/>
+          </a:ln>
+        </p:spPr>
+        <p:style>
+          <a:lnRef idx="1">
+            <a:schemeClr val="accent1"/>
+          </a:lnRef>
+          <a:fillRef idx="3">
+            <a:schemeClr val="accent1"/>
+          </a:fillRef>
+          <a:effectRef idx="2">
+            <a:schemeClr val="accent1"/>
+          </a:effectRef>
+          <a:fontRef idx="minor">
+            <a:schemeClr val="lt1"/>
+          </a:fontRef>
+        </p:style>
+        <p:txBody>
+          <a:bodyPr rtlCol="0" anchor="ctr"/>
+          <a:lstStyle/>
+          <a:p>
+            <a:pPr algn="ctr"/>
+          </a:p>
+        </p:txBody>
+      </p:sp>
+      <p:sp>
+        <p:nvSpPr>
+          <p:cNvPr id="3" name="TextBox 2"/>
           <p:cNvSpPr txBox="1"/>
           <p:nvPr/>
         </p:nvSpPr>
         <p:spPr>
           <a:xfrm>
-            <a:off x="914400" y="548640"/>
-            <a:ext cx="10362895" cy="914400"/>
+            <a:off x="914400" y="502920"/>
+            <a:ext cx="10362895" cy="777240"/>
           </a:xfrm>
           <a:prstGeom prst="rect">
             <a:avLst/>
@@ -4935,7 +6712,7 @@
             <a:pPr algn="ctr">
               <a:defRPr sz="2800" b="1">
                 <a:solidFill>
-                  <a:srgbClr val="000000"/>
+                  <a:srgbClr val="1A365D"/>
                 </a:solidFill>
                 <a:latin typeface="Arial"/>
               </a:defRPr>
@@ -4948,151 +6725,265 @@
       </p:sp>
       <p:sp>
         <p:nvSpPr>
-          <p:cNvPr id="3" name="TextBox 2"/>
-          <p:cNvSpPr txBox="1"/>
+          <p:cNvPr id="4" name="Rectangle 3"/>
+          <p:cNvSpPr/>
           <p:nvPr/>
         </p:nvSpPr>
         <p:spPr>
           <a:xfrm>
-            <a:off x="1097280" y="1645920"/>
-            <a:ext cx="10058400" cy="4754880"/>
+            <a:off x="5180990" y="1325880"/>
+            <a:ext cx="1828800" cy="36576"/>
           </a:xfrm>
           <a:prstGeom prst="rect">
             <a:avLst/>
           </a:prstGeom>
-          <a:noFill/>
-        </p:spPr>
-        <p:txBody>
-          <a:bodyPr wrap="square">
-            <a:spAutoFit/>
-          </a:bodyPr>
-          <a:lstStyle/>
+          <a:solidFill>
+            <a:srgbClr val="0D9488"/>
+          </a:solidFill>
+          <a:ln>
+            <a:noFill/>
+          </a:ln>
+        </p:spPr>
+        <p:style>
+          <a:lnRef idx="1">
+            <a:schemeClr val="accent1"/>
+          </a:lnRef>
+          <a:fillRef idx="3">
+            <a:schemeClr val="accent1"/>
+          </a:fillRef>
+          <a:effectRef idx="2">
+            <a:schemeClr val="accent1"/>
+          </a:effectRef>
+          <a:fontRef idx="minor">
+            <a:schemeClr val="lt1"/>
+          </a:fontRef>
+        </p:style>
+        <p:txBody>
+          <a:bodyPr rtlCol="0" anchor="ctr"/>
+          <a:lstStyle/>
+          <a:p>
+            <a:pPr algn="ctr"/>
+          </a:p>
+        </p:txBody>
+      </p:sp>
+      <p:sp>
+        <p:nvSpPr>
+          <p:cNvPr id="5" name="Rounded Rectangle 4"/>
+          <p:cNvSpPr/>
+          <p:nvPr/>
+        </p:nvSpPr>
+        <p:spPr>
+          <a:xfrm>
+            <a:off x="1097280" y="1645920"/>
+            <a:ext cx="9997135" cy="2194560"/>
+          </a:xfrm>
+          <a:prstGeom prst="roundRect">
+            <a:avLst/>
+          </a:prstGeom>
+          <a:solidFill>
+            <a:srgbClr val="F8FAFC"/>
+          </a:solidFill>
+          <a:ln w="12700">
+            <a:solidFill>
+              <a:srgbClr val="E2E8F0"/>
+            </a:solidFill>
+          </a:ln>
+        </p:spPr>
+        <p:style>
+          <a:lnRef idx="1">
+            <a:schemeClr val="accent1"/>
+          </a:lnRef>
+          <a:fillRef idx="3">
+            <a:schemeClr val="accent1"/>
+          </a:fillRef>
+          <a:effectRef idx="2">
+            <a:schemeClr val="accent1"/>
+          </a:effectRef>
+          <a:fontRef idx="minor">
+            <a:schemeClr val="lt1"/>
+          </a:fontRef>
+        </p:style>
+        <p:txBody>
+          <a:bodyPr rtlCol="0" anchor="ctr" wrap="square" lIns="274320" tIns="182880"/>
+          <a:lstStyle/>
+          <a:p>
+            <a:pPr algn="ctr">
+              <a:defRPr sz="1600" b="1">
+                <a:solidFill>
+                  <a:srgbClr val="1A365D"/>
+                </a:solidFill>
+                <a:latin typeface="Arial"/>
+              </a:defRPr>
+            </a:pPr>
+            <a:r>
+              <a:t>Summary of Work:</a:t>
+            </a:r>
+          </a:p>
           <a:p>
             <a:pPr>
               <a:spcBef>
-                <a:spcPts val="1600"/>
+                <a:spcPts val="400"/>
               </a:spcBef>
-              <a:defRPr sz="1600" b="0">
-                <a:solidFill>
-                  <a:srgbClr val="000000"/>
+              <a:defRPr sz="1400">
+                <a:solidFill>
+                  <a:srgbClr val="1E293B"/>
                 </a:solidFill>
                 <a:latin typeface="Arial"/>
               </a:defRPr>
             </a:pPr>
             <a:r>
-              <a:t>•  A low-cost and working Smart Weather Station was successfully built using ESP32.</a:t>
+              <a:t>• A low-cost and working Smart Weather Station was successfully built using ESP32.</a:t>
             </a:r>
           </a:p>
           <a:p>
             <a:pPr>
               <a:spcBef>
-                <a:spcPts val="1600"/>
+                <a:spcPts val="400"/>
               </a:spcBef>
-              <a:defRPr sz="1600" b="0">
-                <a:solidFill>
-                  <a:srgbClr val="000000"/>
+              <a:defRPr sz="1400">
+                <a:solidFill>
+                  <a:srgbClr val="1E293B"/>
                 </a:solidFill>
                 <a:latin typeface="Arial"/>
               </a:defRPr>
             </a:pPr>
             <a:r>
-              <a:t>•  The DHT22 sensor gives accurate temperature and humidity readings in real time.</a:t>
+              <a:t>• The DHT22 sensor gives accurate temperature and humidity readings in real time.</a:t>
             </a:r>
           </a:p>
           <a:p>
             <a:pPr>
               <a:spcBef>
-                <a:spcPts val="1600"/>
+                <a:spcPts val="400"/>
               </a:spcBef>
-              <a:defRPr sz="1600" b="0">
-                <a:solidFill>
-                  <a:srgbClr val="000000"/>
+              <a:defRPr sz="1400">
+                <a:solidFill>
+                  <a:srgbClr val="1E293B"/>
                 </a:solidFill>
                 <a:latin typeface="Arial"/>
               </a:defRPr>
             </a:pPr>
             <a:r>
-              <a:t>•  The OLED display allows us to easily check values without needing an internet connection.</a:t>
+              <a:t>• The OLED display allows us to easily check values without needing an internet connection.</a:t>
             </a:r>
           </a:p>
           <a:p>
             <a:pPr>
               <a:spcBef>
-                <a:spcPts val="1600"/>
+                <a:spcPts val="400"/>
               </a:spcBef>
-              <a:defRPr sz="1600" b="0">
-                <a:solidFill>
-                  <a:srgbClr val="000000"/>
+              <a:defRPr sz="1400">
+                <a:solidFill>
+                  <a:srgbClr val="1E293B"/>
                 </a:solidFill>
                 <a:latin typeface="Arial"/>
               </a:defRPr>
             </a:pPr>
             <a:r>
-              <a:t>•  The ThingSpeak cloud and Vercel website make it simple for anyone to see weather data from anywhere.</a:t>
+              <a:t>• The ThingSpeak cloud and Vercel website make it simple for anyone to see weather data from anywhere.</a:t>
+            </a:r>
+          </a:p>
+        </p:txBody>
+      </p:sp>
+      <p:sp>
+        <p:nvSpPr>
+          <p:cNvPr id="6" name="Rounded Rectangle 5"/>
+          <p:cNvSpPr/>
+          <p:nvPr/>
+        </p:nvSpPr>
+        <p:spPr>
+          <a:xfrm>
+            <a:off x="1097280" y="4069080"/>
+            <a:ext cx="9997135" cy="2194560"/>
+          </a:xfrm>
+          <a:prstGeom prst="roundRect">
+            <a:avLst/>
+          </a:prstGeom>
+          <a:solidFill>
+            <a:srgbClr val="F8FAFC"/>
+          </a:solidFill>
+          <a:ln w="19050">
+            <a:solidFill>
+              <a:srgbClr val="0D9488"/>
+            </a:solidFill>
+          </a:ln>
+        </p:spPr>
+        <p:style>
+          <a:lnRef idx="1">
+            <a:schemeClr val="accent1"/>
+          </a:lnRef>
+          <a:fillRef idx="3">
+            <a:schemeClr val="accent1"/>
+          </a:fillRef>
+          <a:effectRef idx="2">
+            <a:schemeClr val="accent1"/>
+          </a:effectRef>
+          <a:fontRef idx="minor">
+            <a:schemeClr val="lt1"/>
+          </a:fontRef>
+        </p:style>
+        <p:txBody>
+          <a:bodyPr rtlCol="0" anchor="ctr" wrap="square" lIns="274320" tIns="182880"/>
+          <a:lstStyle/>
+          <a:p>
+            <a:pPr algn="ctr">
+              <a:defRPr sz="1600" b="1">
+                <a:solidFill>
+                  <a:srgbClr val="0D9488"/>
+                </a:solidFill>
+                <a:latin typeface="Arial"/>
+              </a:defRPr>
+            </a:pPr>
+            <a:r>
+              <a:t>Future Scope:</a:t>
             </a:r>
           </a:p>
           <a:p>
             <a:pPr>
               <a:spcBef>
-                <a:spcPts val="1600"/>
+                <a:spcPts val="600"/>
               </a:spcBef>
-              <a:defRPr sz="1700" b="1">
-                <a:solidFill>
-                  <a:srgbClr val="000000"/>
+              <a:defRPr sz="1400">
+                <a:solidFill>
+                  <a:srgbClr val="1E293B"/>
                 </a:solidFill>
                 <a:latin typeface="Arial"/>
               </a:defRPr>
             </a:pPr>
             <a:r>
-              <a:t>Future Scope:</a:t>
+              <a:t>• Add a pressure sensor (BMP280) to measure atmospheric pressure and altitude.</a:t>
             </a:r>
           </a:p>
           <a:p>
             <a:pPr>
               <a:spcBef>
-                <a:spcPts val="800"/>
+                <a:spcPts val="600"/>
               </a:spcBef>
-              <a:defRPr sz="1600" b="0">
-                <a:solidFill>
-                  <a:srgbClr val="000000"/>
+              <a:defRPr sz="1400">
+                <a:solidFill>
+                  <a:srgbClr val="1E293B"/>
                 </a:solidFill>
                 <a:latin typeface="Arial"/>
               </a:defRPr>
             </a:pPr>
             <a:r>
-              <a:t>    • Add a pressure sensor (BMP280) to measure atmospheric pressure and altitude.</a:t>
+              <a:t>• Add a small solar panel and battery so it can run outdoors without a power plug.</a:t>
             </a:r>
           </a:p>
           <a:p>
             <a:pPr>
               <a:spcBef>
-                <a:spcPts val="800"/>
+                <a:spcPts val="600"/>
               </a:spcBef>
-              <a:defRPr sz="1600" b="0">
-                <a:solidFill>
-                  <a:srgbClr val="000000"/>
+              <a:defRPr sz="1400">
+                <a:solidFill>
+                  <a:srgbClr val="1E293B"/>
                 </a:solidFill>
                 <a:latin typeface="Arial"/>
               </a:defRPr>
             </a:pPr>
             <a:r>
-              <a:t>    • Add a small solar panel and battery so it can run outdoors without a power plug.</a:t>
-            </a:r>
-          </a:p>
-          <a:p>
-            <a:pPr>
-              <a:spcBef>
-                <a:spcPts val="800"/>
-              </a:spcBef>
-              <a:defRPr sz="1600" b="0">
-                <a:solidFill>
-                  <a:srgbClr val="000000"/>
-                </a:solidFill>
-                <a:latin typeface="Arial"/>
-              </a:defRPr>
-            </a:pPr>
-            <a:r>
-              <a:t>    • Send SMS or mobile alerts if the temperature gets too high.</a:t>
+              <a:t>• Send SMS or mobile alerts if the temperature gets too high.</a:t>
             </a:r>
           </a:p>
         </p:txBody>
@@ -5117,14 +7008,57 @@
       <p:grpSpPr/>
       <p:sp>
         <p:nvSpPr>
-          <p:cNvPr id="2" name="TextBox 1"/>
+          <p:cNvPr id="2" name="Rectangle 1"/>
+          <p:cNvSpPr/>
+          <p:nvPr/>
+        </p:nvSpPr>
+        <p:spPr>
+          <a:xfrm>
+            <a:off x="0" y="0"/>
+            <a:ext cx="12191695" cy="73152"/>
+          </a:xfrm>
+          <a:prstGeom prst="rect">
+            <a:avLst/>
+          </a:prstGeom>
+          <a:solidFill>
+            <a:srgbClr val="1A365D"/>
+          </a:solidFill>
+          <a:ln>
+            <a:noFill/>
+          </a:ln>
+        </p:spPr>
+        <p:style>
+          <a:lnRef idx="1">
+            <a:schemeClr val="accent1"/>
+          </a:lnRef>
+          <a:fillRef idx="3">
+            <a:schemeClr val="accent1"/>
+          </a:fillRef>
+          <a:effectRef idx="2">
+            <a:schemeClr val="accent1"/>
+          </a:effectRef>
+          <a:fontRef idx="minor">
+            <a:schemeClr val="lt1"/>
+          </a:fontRef>
+        </p:style>
+        <p:txBody>
+          <a:bodyPr rtlCol="0" anchor="ctr"/>
+          <a:lstStyle/>
+          <a:p>
+            <a:pPr algn="ctr"/>
+          </a:p>
+        </p:txBody>
+      </p:sp>
+      <p:sp>
+        <p:nvSpPr>
+          <p:cNvPr id="3" name="TextBox 2"/>
           <p:cNvSpPr txBox="1"/>
           <p:nvPr/>
         </p:nvSpPr>
         <p:spPr>
           <a:xfrm>
-            <a:off x="914400" y="548640"/>
-            <a:ext cx="10362895" cy="914400"/>
+            <a:off x="914400" y="502920"/>
+            <a:ext cx="10362895" cy="777240"/>
           </a:xfrm>
           <a:prstGeom prst="rect">
             <a:avLst/>
@@ -5140,7 +7074,7 @@
             <a:pPr algn="ctr">
               <a:defRPr sz="2800" b="1">
                 <a:solidFill>
-                  <a:srgbClr val="000000"/>
+                  <a:srgbClr val="1A365D"/>
                 </a:solidFill>
                 <a:latin typeface="Arial"/>
               </a:defRPr>
@@ -5148,20 +7082,63 @@
             <a:r>
               <a:t>REFERENCES:-</a:t>
             </a:r>
+          </a:p>
+        </p:txBody>
+      </p:sp>
+      <p:sp>
+        <p:nvSpPr>
+          <p:cNvPr id="4" name="Rectangle 3"/>
+          <p:cNvSpPr/>
+          <p:nvPr/>
+        </p:nvSpPr>
+        <p:spPr>
+          <a:xfrm>
+            <a:off x="5180990" y="1325880"/>
+            <a:ext cx="1828800" cy="36576"/>
+          </a:xfrm>
+          <a:prstGeom prst="rect">
+            <a:avLst/>
+          </a:prstGeom>
+          <a:solidFill>
+            <a:srgbClr val="0D9488"/>
+          </a:solidFill>
+          <a:ln>
+            <a:noFill/>
+          </a:ln>
+        </p:spPr>
+        <p:style>
+          <a:lnRef idx="1">
+            <a:schemeClr val="accent1"/>
+          </a:lnRef>
+          <a:fillRef idx="3">
+            <a:schemeClr val="accent1"/>
+          </a:fillRef>
+          <a:effectRef idx="2">
+            <a:schemeClr val="accent1"/>
+          </a:effectRef>
+          <a:fontRef idx="minor">
+            <a:schemeClr val="lt1"/>
+          </a:fontRef>
+        </p:style>
+        <p:txBody>
+          <a:bodyPr rtlCol="0" anchor="ctr"/>
+          <a:lstStyle/>
+          <a:p>
+            <a:pPr algn="ctr"/>
           </a:p>
         </p:txBody>
       </p:sp>
       <p:graphicFrame>
         <p:nvGraphicFramePr>
-          <p:cNvPr id="3" name="Table 2"/>
+          <p:cNvPr id="5" name="Table 4"/>
           <p:cNvGraphicFramePr>
             <a:graphicFrameLocks noGrp="1"/>
           </p:cNvGraphicFramePr>
           <p:nvPr/>
         </p:nvGraphicFramePr>
         <p:xfrm>
-          <a:off x="1097280" y="1645920"/>
-          <a:ext cx="10058400" cy="4389120"/>
+          <a:off x="1097280" y="1691640"/>
+          <a:ext cx="9997135" cy="4389120"/>
         </p:xfrm>
         <a:graphic>
           <a:graphicData uri="http://schemas.openxmlformats.org/drawingml/2006/table">
@@ -5171,7 +7148,7 @@
               </a:tblPr>
               <a:tblGrid>
                 <a:gridCol w="1280160"/>
-                <a:gridCol w="8778240"/>
+                <a:gridCol w="8716975"/>
               </a:tblGrid>
               <a:tr h="731520">
                 <a:tc>
@@ -5194,7 +7171,7 @@
                   </a:txBody>
                   <a:tcPr>
                     <a:solidFill>
-                      <a:srgbClr val="4682B4"/>
+                      <a:srgbClr val="1A365D"/>
                     </a:solidFill>
                   </a:tcPr>
                 </a:tc>
@@ -5218,7 +7195,7 @@
                   </a:txBody>
                   <a:tcPr>
                     <a:solidFill>
-                      <a:srgbClr val="4682B4"/>
+                      <a:srgbClr val="1A365D"/>
                     </a:solidFill>
                   </a:tcPr>
                 </a:tc>
@@ -5230,9 +7207,9 @@
                     <a:lstStyle/>
                     <a:p>
                       <a:pPr algn="ctr">
-                        <a:defRPr sz="1300">
+                        <a:defRPr sz="1300" b="1">
                           <a:solidFill>
-                            <a:srgbClr val="000000"/>
+                            <a:srgbClr val="1E293B"/>
                           </a:solidFill>
                           <a:latin typeface="Arial"/>
                         </a:defRPr>
@@ -5244,7 +7221,7 @@
                   </a:txBody>
                   <a:tcPr>
                     <a:solidFill>
-                      <a:srgbClr val="E6F0FA"/>
+                      <a:srgbClr val="F8FAFC"/>
                     </a:solidFill>
                   </a:tcPr>
                 </a:tc>
@@ -5256,7 +7233,7 @@
                       <a:pPr>
                         <a:defRPr sz="1300">
                           <a:solidFill>
-                            <a:srgbClr val="000000"/>
+                            <a:srgbClr val="1E293B"/>
                           </a:solidFill>
                           <a:latin typeface="Arial"/>
                         </a:defRPr>
@@ -5268,7 +7245,7 @@
                   </a:txBody>
                   <a:tcPr>
                     <a:solidFill>
-                      <a:srgbClr val="E6F0FA"/>
+                      <a:srgbClr val="F8FAFC"/>
                     </a:solidFill>
                   </a:tcPr>
                 </a:tc>
@@ -5280,9 +7257,9 @@
                     <a:lstStyle/>
                     <a:p>
                       <a:pPr algn="ctr">
-                        <a:defRPr sz="1300">
+                        <a:defRPr sz="1300" b="1">
                           <a:solidFill>
-                            <a:srgbClr val="000000"/>
+                            <a:srgbClr val="1E293B"/>
                           </a:solidFill>
                           <a:latin typeface="Arial"/>
                         </a:defRPr>
@@ -5306,7 +7283,7 @@
                       <a:pPr>
                         <a:defRPr sz="1300">
                           <a:solidFill>
-                            <a:srgbClr val="000000"/>
+                            <a:srgbClr val="1E293B"/>
                           </a:solidFill>
                           <a:latin typeface="Arial"/>
                         </a:defRPr>
@@ -5330,9 +7307,9 @@
                     <a:lstStyle/>
                     <a:p>
                       <a:pPr algn="ctr">
-                        <a:defRPr sz="1300">
+                        <a:defRPr sz="1300" b="1">
                           <a:solidFill>
-                            <a:srgbClr val="000000"/>
+                            <a:srgbClr val="1E293B"/>
                           </a:solidFill>
                           <a:latin typeface="Arial"/>
                         </a:defRPr>
@@ -5344,7 +7321,7 @@
                   </a:txBody>
                   <a:tcPr>
                     <a:solidFill>
-                      <a:srgbClr val="E6F0FA"/>
+                      <a:srgbClr val="F8FAFC"/>
                     </a:solidFill>
                   </a:tcPr>
                 </a:tc>
@@ -5356,7 +7333,7 @@
                       <a:pPr>
                         <a:defRPr sz="1300">
                           <a:solidFill>
-                            <a:srgbClr val="000000"/>
+                            <a:srgbClr val="1E293B"/>
                           </a:solidFill>
                           <a:latin typeface="Arial"/>
                         </a:defRPr>
@@ -5368,7 +7345,7 @@
                   </a:txBody>
                   <a:tcPr>
                     <a:solidFill>
-                      <a:srgbClr val="E6F0FA"/>
+                      <a:srgbClr val="F8FAFC"/>
                     </a:solidFill>
                   </a:tcPr>
                 </a:tc>
@@ -5380,9 +7357,9 @@
                     <a:lstStyle/>
                     <a:p>
                       <a:pPr algn="ctr">
-                        <a:defRPr sz="1300">
+                        <a:defRPr sz="1300" b="1">
                           <a:solidFill>
-                            <a:srgbClr val="000000"/>
+                            <a:srgbClr val="1E293B"/>
                           </a:solidFill>
                           <a:latin typeface="Arial"/>
                         </a:defRPr>
@@ -5406,7 +7383,7 @@
                       <a:pPr>
                         <a:defRPr sz="1300">
                           <a:solidFill>
-                            <a:srgbClr val="000000"/>
+                            <a:srgbClr val="1E293B"/>
                           </a:solidFill>
                           <a:latin typeface="Arial"/>
                         </a:defRPr>
@@ -5430,9 +7407,9 @@
                     <a:lstStyle/>
                     <a:p>
                       <a:pPr algn="ctr">
-                        <a:defRPr sz="1300">
+                        <a:defRPr sz="1300" b="1">
                           <a:solidFill>
-                            <a:srgbClr val="000000"/>
+                            <a:srgbClr val="1E293B"/>
                           </a:solidFill>
                           <a:latin typeface="Arial"/>
                         </a:defRPr>
@@ -5444,7 +7421,7 @@
                   </a:txBody>
                   <a:tcPr>
                     <a:solidFill>
-                      <a:srgbClr val="E6F0FA"/>
+                      <a:srgbClr val="F8FAFC"/>
                     </a:solidFill>
                   </a:tcPr>
                 </a:tc>
@@ -5456,7 +7433,7 @@
                       <a:pPr>
                         <a:defRPr sz="1300">
                           <a:solidFill>
-                            <a:srgbClr val="000000"/>
+                            <a:srgbClr val="1E293B"/>
                           </a:solidFill>
                           <a:latin typeface="Arial"/>
                         </a:defRPr>
@@ -5468,7 +7445,7 @@
                   </a:txBody>
                   <a:tcPr>
                     <a:solidFill>
-                      <a:srgbClr val="E6F0FA"/>
+                      <a:srgbClr val="F8FAFC"/>
                     </a:solidFill>
                   </a:tcPr>
                 </a:tc>
